--- a/renato perez - docusign_retention_case_slides.pptx
+++ b/renato perez - docusign_retention_case_slides.pptx
@@ -1,37 +1,37 @@
 
 <file path=ppt/presentation.xml><?xml version="1.0" encoding="utf-8"?>
-<p:presentation xmlns:a="http://schemas.openxmlformats.org/drawingml/2006/main" xmlns:r="http://schemas.openxmlformats.org/officeDocument/2006/relationships" xmlns:mc="http://schemas.openxmlformats.org/markup-compatibility/2006" xmlns:mv="urn:schemas-microsoft-com:mac:vml" xmlns:p="http://schemas.openxmlformats.org/presentationml/2006/main" xmlns:c="http://schemas.openxmlformats.org/drawingml/2006/chart" xmlns:dgm="http://schemas.openxmlformats.org/drawingml/2006/diagram" xmlns:o="urn:schemas-microsoft-com:office:office" xmlns:v="urn:schemas-microsoft-com:vml" xmlns:pvml="urn:schemas-microsoft-com:office:powerpoint" xmlns:com="http://schemas.openxmlformats.org/drawingml/2006/compatibility" xmlns:p14="http://schemas.microsoft.com/office/powerpoint/2010/main" xmlns:p15="http://schemas.microsoft.com/office/powerpoint/2012/main" xmlns:ahyp="http://schemas.microsoft.com/office/drawing/2018/hyperlinkcolor" autoCompressPictures="0" embedTrueTypeFonts="1" strictFirstAndLastChars="0" saveSubsetFonts="1">
+<p:presentation xmlns:a="http://schemas.openxmlformats.org/drawingml/2006/main" xmlns:r="http://schemas.openxmlformats.org/officeDocument/2006/relationships" xmlns:p="http://schemas.openxmlformats.org/presentationml/2006/main" strictFirstAndLastChars="0" embedTrueTypeFonts="1" saveSubsetFonts="1" autoCompressPictures="0">
   <p:sldMasterIdLst>
-    <p:sldMasterId id="2147483648" r:id="rId4"/>
+    <p:sldMasterId id="2147483648" r:id="rId1"/>
   </p:sldMasterIdLst>
   <p:notesMasterIdLst>
-    <p:notesMasterId r:id="rId5"/>
+    <p:notesMasterId r:id="rId9"/>
   </p:notesMasterIdLst>
   <p:sldIdLst>
-    <p:sldId id="256" r:id="rId6"/>
-    <p:sldId id="257" r:id="rId7"/>
-    <p:sldId id="258" r:id="rId8"/>
-    <p:sldId id="259" r:id="rId9"/>
-    <p:sldId id="260" r:id="rId10"/>
-    <p:sldId id="261" r:id="rId11"/>
-    <p:sldId id="262" r:id="rId12"/>
+    <p:sldId id="256" r:id="rId2"/>
+    <p:sldId id="257" r:id="rId3"/>
+    <p:sldId id="258" r:id="rId4"/>
+    <p:sldId id="259" r:id="rId5"/>
+    <p:sldId id="260" r:id="rId6"/>
+    <p:sldId id="261" r:id="rId7"/>
+    <p:sldId id="262" r:id="rId8"/>
   </p:sldIdLst>
-  <p:sldSz cy="6858000" cx="9144000"/>
+  <p:sldSz cx="9144000" cy="6858000" type="screen4x3"/>
   <p:notesSz cx="6858000" cy="9144000"/>
   <p:embeddedFontLst>
     <p:embeddedFont>
-      <p:font typeface="Syne"/>
-      <p:regular r:id="rId13"/>
-      <p:bold r:id="rId14"/>
+      <p:font typeface="Syne" panose="020B0604020202020204" charset="0"/>
+      <p:regular r:id="rId10"/>
+      <p:bold r:id="rId11"/>
     </p:embeddedFont>
     <p:embeddedFont>
-      <p:font typeface="Syne Medium"/>
-      <p:regular r:id="rId15"/>
-      <p:bold r:id="rId16"/>
+      <p:font typeface="Syne Medium" panose="020B0604020202020204" charset="0"/>
+      <p:regular r:id="rId12"/>
+      <p:bold r:id="rId13"/>
     </p:embeddedFont>
   </p:embeddedFontLst>
   <p:defaultTextStyle>
-    <a:defPPr lvl="0" marR="0" rtl="0" algn="l">
+    <a:defPPr marR="0" lvl="0" algn="l" rtl="0">
       <a:lnSpc>
         <a:spcPct val="100000"/>
       </a:lnSpc>
@@ -42,7 +42,7 @@
         <a:spcPts val="0"/>
       </a:spcAft>
     </a:defPPr>
-    <a:lvl1pPr lvl="0" marR="0" rtl="0" algn="l">
+    <a:lvl1pPr marR="0" lvl="0" algn="l" rtl="0">
       <a:lnSpc>
         <a:spcPct val="100000"/>
       </a:lnSpc>
@@ -56,7 +56,7 @@
         <a:srgbClr val="000000"/>
       </a:buClr>
       <a:buFont typeface="Arial"/>
-      <a:defRPr b="0" i="0" sz="1400" u="none" cap="none" strike="noStrike">
+      <a:defRPr sz="1400" b="0" i="0" u="none" strike="noStrike" cap="none">
         <a:solidFill>
           <a:srgbClr val="000000"/>
         </a:solidFill>
@@ -66,7 +66,7 @@
         <a:sym typeface="Arial"/>
       </a:defRPr>
     </a:lvl1pPr>
-    <a:lvl2pPr lvl="1" marR="0" rtl="0" algn="l">
+    <a:lvl2pPr marR="0" lvl="1" algn="l" rtl="0">
       <a:lnSpc>
         <a:spcPct val="100000"/>
       </a:lnSpc>
@@ -80,7 +80,7 @@
         <a:srgbClr val="000000"/>
       </a:buClr>
       <a:buFont typeface="Arial"/>
-      <a:defRPr b="0" i="0" sz="1400" u="none" cap="none" strike="noStrike">
+      <a:defRPr sz="1400" b="0" i="0" u="none" strike="noStrike" cap="none">
         <a:solidFill>
           <a:srgbClr val="000000"/>
         </a:solidFill>
@@ -90,7 +90,7 @@
         <a:sym typeface="Arial"/>
       </a:defRPr>
     </a:lvl2pPr>
-    <a:lvl3pPr lvl="2" marR="0" rtl="0" algn="l">
+    <a:lvl3pPr marR="0" lvl="2" algn="l" rtl="0">
       <a:lnSpc>
         <a:spcPct val="100000"/>
       </a:lnSpc>
@@ -104,7 +104,7 @@
         <a:srgbClr val="000000"/>
       </a:buClr>
       <a:buFont typeface="Arial"/>
-      <a:defRPr b="0" i="0" sz="1400" u="none" cap="none" strike="noStrike">
+      <a:defRPr sz="1400" b="0" i="0" u="none" strike="noStrike" cap="none">
         <a:solidFill>
           <a:srgbClr val="000000"/>
         </a:solidFill>
@@ -114,7 +114,7 @@
         <a:sym typeface="Arial"/>
       </a:defRPr>
     </a:lvl3pPr>
-    <a:lvl4pPr lvl="3" marR="0" rtl="0" algn="l">
+    <a:lvl4pPr marR="0" lvl="3" algn="l" rtl="0">
       <a:lnSpc>
         <a:spcPct val="100000"/>
       </a:lnSpc>
@@ -128,7 +128,7 @@
         <a:srgbClr val="000000"/>
       </a:buClr>
       <a:buFont typeface="Arial"/>
-      <a:defRPr b="0" i="0" sz="1400" u="none" cap="none" strike="noStrike">
+      <a:defRPr sz="1400" b="0" i="0" u="none" strike="noStrike" cap="none">
         <a:solidFill>
           <a:srgbClr val="000000"/>
         </a:solidFill>
@@ -138,7 +138,7 @@
         <a:sym typeface="Arial"/>
       </a:defRPr>
     </a:lvl4pPr>
-    <a:lvl5pPr lvl="4" marR="0" rtl="0" algn="l">
+    <a:lvl5pPr marR="0" lvl="4" algn="l" rtl="0">
       <a:lnSpc>
         <a:spcPct val="100000"/>
       </a:lnSpc>
@@ -152,7 +152,7 @@
         <a:srgbClr val="000000"/>
       </a:buClr>
       <a:buFont typeface="Arial"/>
-      <a:defRPr b="0" i="0" sz="1400" u="none" cap="none" strike="noStrike">
+      <a:defRPr sz="1400" b="0" i="0" u="none" strike="noStrike" cap="none">
         <a:solidFill>
           <a:srgbClr val="000000"/>
         </a:solidFill>
@@ -162,7 +162,7 @@
         <a:sym typeface="Arial"/>
       </a:defRPr>
     </a:lvl5pPr>
-    <a:lvl6pPr lvl="5" marR="0" rtl="0" algn="l">
+    <a:lvl6pPr marR="0" lvl="5" algn="l" rtl="0">
       <a:lnSpc>
         <a:spcPct val="100000"/>
       </a:lnSpc>
@@ -176,7 +176,7 @@
         <a:srgbClr val="000000"/>
       </a:buClr>
       <a:buFont typeface="Arial"/>
-      <a:defRPr b="0" i="0" sz="1400" u="none" cap="none" strike="noStrike">
+      <a:defRPr sz="1400" b="0" i="0" u="none" strike="noStrike" cap="none">
         <a:solidFill>
           <a:srgbClr val="000000"/>
         </a:solidFill>
@@ -186,7 +186,7 @@
         <a:sym typeface="Arial"/>
       </a:defRPr>
     </a:lvl6pPr>
-    <a:lvl7pPr lvl="6" marR="0" rtl="0" algn="l">
+    <a:lvl7pPr marR="0" lvl="6" algn="l" rtl="0">
       <a:lnSpc>
         <a:spcPct val="100000"/>
       </a:lnSpc>
@@ -200,7 +200,7 @@
         <a:srgbClr val="000000"/>
       </a:buClr>
       <a:buFont typeface="Arial"/>
-      <a:defRPr b="0" i="0" sz="1400" u="none" cap="none" strike="noStrike">
+      <a:defRPr sz="1400" b="0" i="0" u="none" strike="noStrike" cap="none">
         <a:solidFill>
           <a:srgbClr val="000000"/>
         </a:solidFill>
@@ -210,7 +210,7 @@
         <a:sym typeface="Arial"/>
       </a:defRPr>
     </a:lvl7pPr>
-    <a:lvl8pPr lvl="7" marR="0" rtl="0" algn="l">
+    <a:lvl8pPr marR="0" lvl="7" algn="l" rtl="0">
       <a:lnSpc>
         <a:spcPct val="100000"/>
       </a:lnSpc>
@@ -224,7 +224,7 @@
         <a:srgbClr val="000000"/>
       </a:buClr>
       <a:buFont typeface="Arial"/>
-      <a:defRPr b="0" i="0" sz="1400" u="none" cap="none" strike="noStrike">
+      <a:defRPr sz="1400" b="0" i="0" u="none" strike="noStrike" cap="none">
         <a:solidFill>
           <a:srgbClr val="000000"/>
         </a:solidFill>
@@ -234,7 +234,7 @@
         <a:sym typeface="Arial"/>
       </a:defRPr>
     </a:lvl8pPr>
-    <a:lvl9pPr lvl="8" marR="0" rtl="0" algn="l">
+    <a:lvl9pPr marR="0" lvl="8" algn="l" rtl="0">
       <a:lnSpc>
         <a:spcPct val="100000"/>
       </a:lnSpc>
@@ -248,7 +248,7 @@
         <a:srgbClr val="000000"/>
       </a:buClr>
       <a:buFont typeface="Arial"/>
-      <a:defRPr b="0" i="0" sz="1400" u="none" cap="none" strike="noStrike">
+      <a:defRPr sz="1400" b="0" i="0" u="none" strike="noStrike" cap="none">
         <a:solidFill>
           <a:srgbClr val="000000"/>
         </a:solidFill>
@@ -261,7 +261,7 @@
   </p:defaultTextStyle>
   <p:extLst>
     <p:ext uri="{EFAFB233-063F-42B5-8137-9DF3F51BA10A}">
-      <p15:sldGuideLst>
+      <p15:sldGuideLst xmlns:p15="http://schemas.microsoft.com/office/powerpoint/2012/main">
         <p15:guide id="1" orient="horz" pos="2160">
           <p15:clr>
             <a:srgbClr val="000000"/>
@@ -275,7 +275,7 @@
       </p15:sldGuideLst>
     </p:ext>
     <p:ext uri="GoogleSlidesCustomDataVersion2">
-      <go:slidesCustomData xmlns:go="http://customooxmlschemas.google.com/" r:id="rId17" roundtripDataSignature="AMtx7mg6L1ziu5HaPxo/CC2azYbXDZ1eag=="/>
+      <go:slidesCustomData xmlns:go="http://customooxmlschemas.google.com/" xmlns:ahyp="http://schemas.microsoft.com/office/drawing/2018/hyperlinkcolor" xmlns:p15="http://schemas.microsoft.com/office/powerpoint/2012/main" xmlns:p14="http://schemas.microsoft.com/office/powerpoint/2010/main" xmlns:com="http://schemas.openxmlformats.org/drawingml/2006/compatibility" xmlns:pvml="urn:schemas-microsoft-com:office:powerpoint" xmlns:v="urn:schemas-microsoft-com:vml" xmlns:o="urn:schemas-microsoft-com:office:office" xmlns:dgm="http://schemas.openxmlformats.org/drawingml/2006/diagram" xmlns:c="http://schemas.openxmlformats.org/drawingml/2006/chart" xmlns:mv="urn:schemas-microsoft-com:mac:vml" xmlns:mc="http://schemas.openxmlformats.org/markup-compatibility/2006" xmlns="" r:id="rId17" roundtripDataSignature="AMtx7mg6L1ziu5HaPxo/CC2azYbXDZ1eag=="/>
     </p:ext>
   </p:extLst>
 </p:presentation>
@@ -361,11 +361,6 @@
             <c:idx val="3"/>
             <c:invertIfNegative val="1"/>
             <c:bubble3D val="0"/>
-            <c:spPr>
-              <a:solidFill>
-                <a:srgbClr val="FF5252"/>
-              </a:solidFill>
-            </c:spPr>
             <c:extLst>
               <c:ext xmlns:c16="http://schemas.microsoft.com/office/drawing/2014/chart" uri="{C3380CC4-5D6E-409C-BE32-E72D297353CC}">
                 <c16:uniqueId val="{00000007-7A6F-894A-B4C8-C635CF22BBDB}"/>
@@ -569,11 +564,6 @@
             <c:idx val="1"/>
             <c:invertIfNegative val="1"/>
             <c:bubble3D val="0"/>
-            <c:spPr>
-              <a:solidFill>
-                <a:srgbClr val="4C00FF"/>
-              </a:solidFill>
-            </c:spPr>
             <c:extLst>
               <c:ext xmlns:c16="http://schemas.microsoft.com/office/drawing/2014/chart" uri="{C3380CC4-5D6E-409C-BE32-E72D297353CC}">
                 <c16:uniqueId val="{00000003-EEA5-CB4D-8CAD-45288E0ECE41}"/>
@@ -718,18 +708,19 @@
 </file>
 
 <file path=ppt/notesMasters/notesMaster1.xml><?xml version="1.0" encoding="utf-8"?>
-<p:notesMaster xmlns:a="http://schemas.openxmlformats.org/drawingml/2006/main" xmlns:r="http://schemas.openxmlformats.org/officeDocument/2006/relationships" xmlns:mc="http://schemas.openxmlformats.org/markup-compatibility/2006" xmlns:mv="urn:schemas-microsoft-com:mac:vml" xmlns:p="http://schemas.openxmlformats.org/presentationml/2006/main" xmlns:c="http://schemas.openxmlformats.org/drawingml/2006/chart" xmlns:dgm="http://schemas.openxmlformats.org/drawingml/2006/diagram" xmlns:o="urn:schemas-microsoft-com:office:office" xmlns:v="urn:schemas-microsoft-com:vml" xmlns:pvml="urn:schemas-microsoft-com:office:powerpoint" xmlns:com="http://schemas.openxmlformats.org/drawingml/2006/compatibility" xmlns:p14="http://schemas.microsoft.com/office/powerpoint/2010/main" xmlns:p15="http://schemas.microsoft.com/office/powerpoint/2012/main" xmlns:ahyp="http://schemas.microsoft.com/office/drawing/2018/hyperlinkcolor">
+<p:notesMaster xmlns:a="http://schemas.openxmlformats.org/drawingml/2006/main" xmlns:r="http://schemas.openxmlformats.org/officeDocument/2006/relationships" xmlns:p="http://schemas.openxmlformats.org/presentationml/2006/main">
   <p:cSld>
     <p:bg>
       <p:bgPr>
         <a:solidFill>
           <a:schemeClr val="lt1"/>
         </a:solidFill>
+        <a:effectLst/>
       </p:bgPr>
     </p:bg>
     <p:spTree>
       <p:nvGrpSpPr>
-        <p:cNvPr id="2" name="Shape 2"/>
+        <p:cNvPr id="1" name="Shape 2"/>
         <p:cNvGrpSpPr/>
         <p:nvPr/>
       </p:nvGrpSpPr>
@@ -744,9 +735,11 @@
       <p:sp>
         <p:nvSpPr>
           <p:cNvPr id="3" name="Google Shape;3;n"/>
-          <p:cNvSpPr/>
+          <p:cNvSpPr>
+            <a:spLocks noGrp="1" noRot="1" noChangeAspect="1"/>
+          </p:cNvSpPr>
           <p:nvPr>
-            <p:ph idx="2" type="sldImg"/>
+            <p:ph type="sldImg" idx="2"/>
           </p:nvPr>
         </p:nvSpPr>
         <p:spPr>
@@ -755,9 +748,13 @@
             <a:ext cx="4572225" cy="3429000"/>
           </a:xfrm>
           <a:custGeom>
-            <a:rect b="b" l="l" r="r" t="t"/>
+            <a:avLst/>
+            <a:gdLst/>
+            <a:ahLst/>
+            <a:cxnLst/>
+            <a:rect l="l" t="t" r="r" b="b"/>
             <a:pathLst>
-              <a:path extrusionOk="0" h="120000" w="120000">
+              <a:path w="120000" h="120000" extrusionOk="0">
                 <a:moveTo>
                   <a:pt x="0" y="0"/>
                 </a:moveTo>
@@ -775,23 +772,25 @@
             </a:pathLst>
           </a:custGeom>
           <a:noFill/>
-          <a:ln cap="flat" cmpd="sng" w="9525">
+          <a:ln w="9525" cap="flat" cmpd="sng">
             <a:solidFill>
               <a:srgbClr val="000000"/>
             </a:solidFill>
             <a:prstDash val="solid"/>
             <a:round/>
-            <a:headEnd len="sm" w="sm" type="none"/>
-            <a:tailEnd len="sm" w="sm" type="none"/>
+            <a:headEnd type="none" w="sm" len="sm"/>
+            <a:tailEnd type="none" w="sm" len="sm"/>
           </a:ln>
         </p:spPr>
       </p:sp>
       <p:sp>
         <p:nvSpPr>
           <p:cNvPr id="4" name="Google Shape;4;n"/>
-          <p:cNvSpPr txBox="1"/>
+          <p:cNvSpPr txBox="1">
+            <a:spLocks noGrp="1"/>
+          </p:cNvSpPr>
           <p:nvPr>
-            <p:ph idx="1" type="body"/>
+            <p:ph type="body" idx="1"/>
           </p:nvPr>
         </p:nvSpPr>
         <p:spPr>
@@ -808,11 +807,11 @@
           </a:ln>
         </p:spPr>
         <p:txBody>
-          <a:bodyPr anchorCtr="0" anchor="t" bIns="91425" lIns="91425" spcFirstLastPara="1" rIns="91425" wrap="square" tIns="91425">
+          <a:bodyPr spcFirstLastPara="1" wrap="square" lIns="91425" tIns="91425" rIns="91425" bIns="91425" anchor="t" anchorCtr="0">
             <a:noAutofit/>
           </a:bodyPr>
           <a:lstStyle>
-            <a:lvl1pPr indent="-298450" lvl="0" marL="457200" marR="0" rtl="0" algn="l">
+            <a:lvl1pPr marL="457200" marR="0" lvl="0" indent="-298450" algn="l" rtl="0">
               <a:lnSpc>
                 <a:spcPct val="100000"/>
               </a:lnSpc>
@@ -828,7 +827,7 @@
               <a:buSzPts val="1100"/>
               <a:buFont typeface="Arial"/>
               <a:buChar char="●"/>
-              <a:defRPr b="0" i="0" sz="1100" u="none" cap="none" strike="noStrike">
+              <a:defRPr sz="1100" b="0" i="0" u="none" strike="noStrike" cap="none">
                 <a:solidFill>
                   <a:srgbClr val="000000"/>
                 </a:solidFill>
@@ -838,7 +837,7 @@
                 <a:sym typeface="Arial"/>
               </a:defRPr>
             </a:lvl1pPr>
-            <a:lvl2pPr indent="-298450" lvl="1" marL="914400" marR="0" rtl="0" algn="l">
+            <a:lvl2pPr marL="914400" marR="0" lvl="1" indent="-298450" algn="l" rtl="0">
               <a:lnSpc>
                 <a:spcPct val="100000"/>
               </a:lnSpc>
@@ -854,7 +853,7 @@
               <a:buSzPts val="1100"/>
               <a:buFont typeface="Arial"/>
               <a:buChar char="○"/>
-              <a:defRPr b="0" i="0" sz="1100" u="none" cap="none" strike="noStrike">
+              <a:defRPr sz="1100" b="0" i="0" u="none" strike="noStrike" cap="none">
                 <a:solidFill>
                   <a:srgbClr val="000000"/>
                 </a:solidFill>
@@ -864,7 +863,7 @@
                 <a:sym typeface="Arial"/>
               </a:defRPr>
             </a:lvl2pPr>
-            <a:lvl3pPr indent="-298450" lvl="2" marL="1371600" marR="0" rtl="0" algn="l">
+            <a:lvl3pPr marL="1371600" marR="0" lvl="2" indent="-298450" algn="l" rtl="0">
               <a:lnSpc>
                 <a:spcPct val="100000"/>
               </a:lnSpc>
@@ -880,7 +879,7 @@
               <a:buSzPts val="1100"/>
               <a:buFont typeface="Arial"/>
               <a:buChar char="■"/>
-              <a:defRPr b="0" i="0" sz="1100" u="none" cap="none" strike="noStrike">
+              <a:defRPr sz="1100" b="0" i="0" u="none" strike="noStrike" cap="none">
                 <a:solidFill>
                   <a:srgbClr val="000000"/>
                 </a:solidFill>
@@ -890,7 +889,7 @@
                 <a:sym typeface="Arial"/>
               </a:defRPr>
             </a:lvl3pPr>
-            <a:lvl4pPr indent="-298450" lvl="3" marL="1828800" marR="0" rtl="0" algn="l">
+            <a:lvl4pPr marL="1828800" marR="0" lvl="3" indent="-298450" algn="l" rtl="0">
               <a:lnSpc>
                 <a:spcPct val="100000"/>
               </a:lnSpc>
@@ -906,7 +905,7 @@
               <a:buSzPts val="1100"/>
               <a:buFont typeface="Arial"/>
               <a:buChar char="●"/>
-              <a:defRPr b="0" i="0" sz="1100" u="none" cap="none" strike="noStrike">
+              <a:defRPr sz="1100" b="0" i="0" u="none" strike="noStrike" cap="none">
                 <a:solidFill>
                   <a:srgbClr val="000000"/>
                 </a:solidFill>
@@ -916,7 +915,7 @@
                 <a:sym typeface="Arial"/>
               </a:defRPr>
             </a:lvl4pPr>
-            <a:lvl5pPr indent="-298450" lvl="4" marL="2286000" marR="0" rtl="0" algn="l">
+            <a:lvl5pPr marL="2286000" marR="0" lvl="4" indent="-298450" algn="l" rtl="0">
               <a:lnSpc>
                 <a:spcPct val="100000"/>
               </a:lnSpc>
@@ -932,7 +931,7 @@
               <a:buSzPts val="1100"/>
               <a:buFont typeface="Arial"/>
               <a:buChar char="○"/>
-              <a:defRPr b="0" i="0" sz="1100" u="none" cap="none" strike="noStrike">
+              <a:defRPr sz="1100" b="0" i="0" u="none" strike="noStrike" cap="none">
                 <a:solidFill>
                   <a:srgbClr val="000000"/>
                 </a:solidFill>
@@ -942,7 +941,7 @@
                 <a:sym typeface="Arial"/>
               </a:defRPr>
             </a:lvl5pPr>
-            <a:lvl6pPr indent="-298450" lvl="5" marL="2743200" marR="0" rtl="0" algn="l">
+            <a:lvl6pPr marL="2743200" marR="0" lvl="5" indent="-298450" algn="l" rtl="0">
               <a:lnSpc>
                 <a:spcPct val="100000"/>
               </a:lnSpc>
@@ -958,7 +957,7 @@
               <a:buSzPts val="1100"/>
               <a:buFont typeface="Arial"/>
               <a:buChar char="■"/>
-              <a:defRPr b="0" i="0" sz="1100" u="none" cap="none" strike="noStrike">
+              <a:defRPr sz="1100" b="0" i="0" u="none" strike="noStrike" cap="none">
                 <a:solidFill>
                   <a:srgbClr val="000000"/>
                 </a:solidFill>
@@ -968,7 +967,7 @@
                 <a:sym typeface="Arial"/>
               </a:defRPr>
             </a:lvl6pPr>
-            <a:lvl7pPr indent="-298450" lvl="6" marL="3200400" marR="0" rtl="0" algn="l">
+            <a:lvl7pPr marL="3200400" marR="0" lvl="6" indent="-298450" algn="l" rtl="0">
               <a:lnSpc>
                 <a:spcPct val="100000"/>
               </a:lnSpc>
@@ -984,7 +983,7 @@
               <a:buSzPts val="1100"/>
               <a:buFont typeface="Arial"/>
               <a:buChar char="●"/>
-              <a:defRPr b="0" i="0" sz="1100" u="none" cap="none" strike="noStrike">
+              <a:defRPr sz="1100" b="0" i="0" u="none" strike="noStrike" cap="none">
                 <a:solidFill>
                   <a:srgbClr val="000000"/>
                 </a:solidFill>
@@ -994,7 +993,7 @@
                 <a:sym typeface="Arial"/>
               </a:defRPr>
             </a:lvl7pPr>
-            <a:lvl8pPr indent="-298450" lvl="7" marL="3657600" marR="0" rtl="0" algn="l">
+            <a:lvl8pPr marL="3657600" marR="0" lvl="7" indent="-298450" algn="l" rtl="0">
               <a:lnSpc>
                 <a:spcPct val="100000"/>
               </a:lnSpc>
@@ -1010,7 +1009,7 @@
               <a:buSzPts val="1100"/>
               <a:buFont typeface="Arial"/>
               <a:buChar char="○"/>
-              <a:defRPr b="0" i="0" sz="1100" u="none" cap="none" strike="noStrike">
+              <a:defRPr sz="1100" b="0" i="0" u="none" strike="noStrike" cap="none">
                 <a:solidFill>
                   <a:srgbClr val="000000"/>
                 </a:solidFill>
@@ -1020,7 +1019,7 @@
                 <a:sym typeface="Arial"/>
               </a:defRPr>
             </a:lvl8pPr>
-            <a:lvl9pPr indent="-298450" lvl="8" marL="4114800" marR="0" rtl="0" algn="l">
+            <a:lvl9pPr marL="4114800" marR="0" lvl="8" indent="-298450" algn="l" rtl="0">
               <a:lnSpc>
                 <a:spcPct val="100000"/>
               </a:lnSpc>
@@ -1036,7 +1035,7 @@
               <a:buSzPts val="1100"/>
               <a:buFont typeface="Arial"/>
               <a:buChar char="■"/>
-              <a:defRPr b="0" i="0" sz="1100" u="none" cap="none" strike="noStrike">
+              <a:defRPr sz="1100" b="0" i="0" u="none" strike="noStrike" cap="none">
                 <a:solidFill>
                   <a:srgbClr val="000000"/>
                 </a:solidFill>
@@ -1047,14 +1046,16 @@
               </a:defRPr>
             </a:lvl9pPr>
           </a:lstStyle>
-          <a:p/>
+          <a:p>
+            <a:endParaRPr/>
+          </a:p>
         </p:txBody>
       </p:sp>
     </p:spTree>
   </p:cSld>
-  <p:clrMap accent1="accent1" accent2="accent2" accent3="accent3" accent4="accent4" accent5="accent5" accent6="accent6" bg1="lt1" bg2="dk2" tx1="dk1" tx2="lt2" folHlink="folHlink" hlink="hlink"/>
+  <p:clrMap bg1="lt1" tx1="dk1" bg2="dk2" tx2="lt2" accent1="accent1" accent2="accent2" accent3="accent3" accent4="accent4" accent5="accent5" accent6="accent6" hlink="hlink" folHlink="folHlink"/>
   <p:notesStyle>
-    <a:defPPr lvl="0" marR="0" rtl="0" algn="l">
+    <a:defPPr marR="0" lvl="0" algn="l" rtl="0">
       <a:lnSpc>
         <a:spcPct val="100000"/>
       </a:lnSpc>
@@ -1065,7 +1066,7 @@
         <a:spcPts val="0"/>
       </a:spcAft>
     </a:defPPr>
-    <a:lvl1pPr lvl="0" marR="0" rtl="0" algn="l">
+    <a:lvl1pPr marR="0" lvl="0" algn="l" rtl="0">
       <a:lnSpc>
         <a:spcPct val="100000"/>
       </a:lnSpc>
@@ -1079,7 +1080,7 @@
         <a:srgbClr val="000000"/>
       </a:buClr>
       <a:buFont typeface="Arial"/>
-      <a:defRPr b="0" i="0" sz="1400" u="none" cap="none" strike="noStrike">
+      <a:defRPr sz="1400" b="0" i="0" u="none" strike="noStrike" cap="none">
         <a:solidFill>
           <a:srgbClr val="000000"/>
         </a:solidFill>
@@ -1089,7 +1090,7 @@
         <a:sym typeface="Arial"/>
       </a:defRPr>
     </a:lvl1pPr>
-    <a:lvl2pPr lvl="1" marR="0" rtl="0" algn="l">
+    <a:lvl2pPr marR="0" lvl="1" algn="l" rtl="0">
       <a:lnSpc>
         <a:spcPct val="100000"/>
       </a:lnSpc>
@@ -1103,7 +1104,7 @@
         <a:srgbClr val="000000"/>
       </a:buClr>
       <a:buFont typeface="Arial"/>
-      <a:defRPr b="0" i="0" sz="1400" u="none" cap="none" strike="noStrike">
+      <a:defRPr sz="1400" b="0" i="0" u="none" strike="noStrike" cap="none">
         <a:solidFill>
           <a:srgbClr val="000000"/>
         </a:solidFill>
@@ -1113,7 +1114,7 @@
         <a:sym typeface="Arial"/>
       </a:defRPr>
     </a:lvl2pPr>
-    <a:lvl3pPr lvl="2" marR="0" rtl="0" algn="l">
+    <a:lvl3pPr marR="0" lvl="2" algn="l" rtl="0">
       <a:lnSpc>
         <a:spcPct val="100000"/>
       </a:lnSpc>
@@ -1127,7 +1128,7 @@
         <a:srgbClr val="000000"/>
       </a:buClr>
       <a:buFont typeface="Arial"/>
-      <a:defRPr b="0" i="0" sz="1400" u="none" cap="none" strike="noStrike">
+      <a:defRPr sz="1400" b="0" i="0" u="none" strike="noStrike" cap="none">
         <a:solidFill>
           <a:srgbClr val="000000"/>
         </a:solidFill>
@@ -1137,7 +1138,7 @@
         <a:sym typeface="Arial"/>
       </a:defRPr>
     </a:lvl3pPr>
-    <a:lvl4pPr lvl="3" marR="0" rtl="0" algn="l">
+    <a:lvl4pPr marR="0" lvl="3" algn="l" rtl="0">
       <a:lnSpc>
         <a:spcPct val="100000"/>
       </a:lnSpc>
@@ -1151,7 +1152,7 @@
         <a:srgbClr val="000000"/>
       </a:buClr>
       <a:buFont typeface="Arial"/>
-      <a:defRPr b="0" i="0" sz="1400" u="none" cap="none" strike="noStrike">
+      <a:defRPr sz="1400" b="0" i="0" u="none" strike="noStrike" cap="none">
         <a:solidFill>
           <a:srgbClr val="000000"/>
         </a:solidFill>
@@ -1161,7 +1162,7 @@
         <a:sym typeface="Arial"/>
       </a:defRPr>
     </a:lvl4pPr>
-    <a:lvl5pPr lvl="4" marR="0" rtl="0" algn="l">
+    <a:lvl5pPr marR="0" lvl="4" algn="l" rtl="0">
       <a:lnSpc>
         <a:spcPct val="100000"/>
       </a:lnSpc>
@@ -1175,7 +1176,7 @@
         <a:srgbClr val="000000"/>
       </a:buClr>
       <a:buFont typeface="Arial"/>
-      <a:defRPr b="0" i="0" sz="1400" u="none" cap="none" strike="noStrike">
+      <a:defRPr sz="1400" b="0" i="0" u="none" strike="noStrike" cap="none">
         <a:solidFill>
           <a:srgbClr val="000000"/>
         </a:solidFill>
@@ -1185,7 +1186,7 @@
         <a:sym typeface="Arial"/>
       </a:defRPr>
     </a:lvl5pPr>
-    <a:lvl6pPr lvl="5" marR="0" rtl="0" algn="l">
+    <a:lvl6pPr marR="0" lvl="5" algn="l" rtl="0">
       <a:lnSpc>
         <a:spcPct val="100000"/>
       </a:lnSpc>
@@ -1199,7 +1200,7 @@
         <a:srgbClr val="000000"/>
       </a:buClr>
       <a:buFont typeface="Arial"/>
-      <a:defRPr b="0" i="0" sz="1400" u="none" cap="none" strike="noStrike">
+      <a:defRPr sz="1400" b="0" i="0" u="none" strike="noStrike" cap="none">
         <a:solidFill>
           <a:srgbClr val="000000"/>
         </a:solidFill>
@@ -1209,7 +1210,7 @@
         <a:sym typeface="Arial"/>
       </a:defRPr>
     </a:lvl6pPr>
-    <a:lvl7pPr lvl="6" marR="0" rtl="0" algn="l">
+    <a:lvl7pPr marR="0" lvl="6" algn="l" rtl="0">
       <a:lnSpc>
         <a:spcPct val="100000"/>
       </a:lnSpc>
@@ -1223,7 +1224,7 @@
         <a:srgbClr val="000000"/>
       </a:buClr>
       <a:buFont typeface="Arial"/>
-      <a:defRPr b="0" i="0" sz="1400" u="none" cap="none" strike="noStrike">
+      <a:defRPr sz="1400" b="0" i="0" u="none" strike="noStrike" cap="none">
         <a:solidFill>
           <a:srgbClr val="000000"/>
         </a:solidFill>
@@ -1233,7 +1234,7 @@
         <a:sym typeface="Arial"/>
       </a:defRPr>
     </a:lvl7pPr>
-    <a:lvl8pPr lvl="7" marR="0" rtl="0" algn="l">
+    <a:lvl8pPr marR="0" lvl="7" algn="l" rtl="0">
       <a:lnSpc>
         <a:spcPct val="100000"/>
       </a:lnSpc>
@@ -1247,7 +1248,7 @@
         <a:srgbClr val="000000"/>
       </a:buClr>
       <a:buFont typeface="Arial"/>
-      <a:defRPr b="0" i="0" sz="1400" u="none" cap="none" strike="noStrike">
+      <a:defRPr sz="1400" b="0" i="0" u="none" strike="noStrike" cap="none">
         <a:solidFill>
           <a:srgbClr val="000000"/>
         </a:solidFill>
@@ -1257,7 +1258,7 @@
         <a:sym typeface="Arial"/>
       </a:defRPr>
     </a:lvl8pPr>
-    <a:lvl9pPr lvl="8" marR="0" rtl="0" algn="l">
+    <a:lvl9pPr marR="0" lvl="8" algn="l" rtl="0">
       <a:lnSpc>
         <a:spcPct val="100000"/>
       </a:lnSpc>
@@ -1271,7 +1272,7 @@
         <a:srgbClr val="000000"/>
       </a:buClr>
       <a:buFont typeface="Arial"/>
-      <a:defRPr b="0" i="0" sz="1400" u="none" cap="none" strike="noStrike">
+      <a:defRPr sz="1400" b="0" i="0" u="none" strike="noStrike" cap="none">
         <a:solidFill>
           <a:srgbClr val="000000"/>
         </a:solidFill>
@@ -1286,11 +1287,11 @@
 </file>
 
 <file path=ppt/notesSlides/notesSlide1.xml><?xml version="1.0" encoding="utf-8"?>
-<p:notes xmlns:a="http://schemas.openxmlformats.org/drawingml/2006/main" xmlns:r="http://schemas.openxmlformats.org/officeDocument/2006/relationships" xmlns:mc="http://schemas.openxmlformats.org/markup-compatibility/2006" xmlns:mv="urn:schemas-microsoft-com:mac:vml" xmlns:p="http://schemas.openxmlformats.org/presentationml/2006/main" xmlns:c="http://schemas.openxmlformats.org/drawingml/2006/chart" xmlns:dgm="http://schemas.openxmlformats.org/drawingml/2006/diagram" xmlns:o="urn:schemas-microsoft-com:office:office" xmlns:v="urn:schemas-microsoft-com:vml" xmlns:pvml="urn:schemas-microsoft-com:office:powerpoint" xmlns:com="http://schemas.openxmlformats.org/drawingml/2006/compatibility" xmlns:p14="http://schemas.microsoft.com/office/powerpoint/2010/main" xmlns:p15="http://schemas.microsoft.com/office/powerpoint/2012/main" xmlns:ahyp="http://schemas.microsoft.com/office/drawing/2018/hyperlinkcolor" showMasterPhAnim="0" showMasterSp="0">
+<p:notes xmlns:a="http://schemas.openxmlformats.org/drawingml/2006/main" xmlns:r="http://schemas.openxmlformats.org/officeDocument/2006/relationships" xmlns:p="http://schemas.openxmlformats.org/presentationml/2006/main" showMasterSp="0" showMasterPhAnim="0">
   <p:cSld>
     <p:spTree>
       <p:nvGrpSpPr>
-        <p:cNvPr id="80" name="Shape 80"/>
+        <p:cNvPr id="1" name="Shape 80"/>
         <p:cNvGrpSpPr/>
         <p:nvPr/>
       </p:nvGrpSpPr>
@@ -1305,9 +1306,11 @@
       <p:sp>
         <p:nvSpPr>
           <p:cNvPr id="81" name="Google Shape;81;p1:notes"/>
-          <p:cNvSpPr txBox="1"/>
+          <p:cNvSpPr txBox="1">
+            <a:spLocks noGrp="1"/>
+          </p:cNvSpPr>
           <p:nvPr>
-            <p:ph idx="1" type="body"/>
+            <p:ph type="body" idx="1"/>
           </p:nvPr>
         </p:nvSpPr>
         <p:spPr>
@@ -1324,12 +1327,12 @@
           </a:ln>
         </p:spPr>
         <p:txBody>
-          <a:bodyPr anchorCtr="0" anchor="t" bIns="91425" lIns="91425" spcFirstLastPara="1" rIns="91425" wrap="square" tIns="91425">
+          <a:bodyPr spcFirstLastPara="1" wrap="square" lIns="91425" tIns="91425" rIns="91425" bIns="91425" anchor="t" anchorCtr="0">
             <a:noAutofit/>
           </a:bodyPr>
           <a:lstStyle/>
           <a:p>
-            <a:pPr indent="0" lvl="0" marL="0" rtl="0" algn="l">
+            <a:pPr marL="0" lvl="0" indent="0" algn="l" rtl="0">
               <a:lnSpc>
                 <a:spcPct val="100000"/>
               </a:lnSpc>
@@ -1342,9 +1345,6 @@
               <a:buSzPts val="1100"/>
               <a:buNone/>
             </a:pPr>
-            <a:r>
-              <a:t/>
-            </a:r>
             <a:endParaRPr/>
           </a:p>
         </p:txBody>
@@ -1352,9 +1352,11 @@
       <p:sp>
         <p:nvSpPr>
           <p:cNvPr id="82" name="Google Shape;82;p1:notes"/>
-          <p:cNvSpPr/>
+          <p:cNvSpPr>
+            <a:spLocks noGrp="1" noRot="1" noChangeAspect="1"/>
+          </p:cNvSpPr>
           <p:nvPr>
-            <p:ph idx="2" type="sldImg"/>
+            <p:ph type="sldImg" idx="2"/>
           </p:nvPr>
         </p:nvSpPr>
         <p:spPr>
@@ -1363,9 +1365,13 @@
             <a:ext cx="4572000" cy="3429000"/>
           </a:xfrm>
           <a:custGeom>
-            <a:rect b="b" l="l" r="r" t="t"/>
+            <a:avLst/>
+            <a:gdLst/>
+            <a:ahLst/>
+            <a:cxnLst/>
+            <a:rect l="l" t="t" r="r" b="b"/>
             <a:pathLst>
-              <a:path extrusionOk="0" h="120000" w="120000">
+              <a:path w="120000" h="120000" extrusionOk="0">
                 <a:moveTo>
                   <a:pt x="0" y="0"/>
                 </a:moveTo>
@@ -1383,14 +1389,14 @@
             </a:pathLst>
           </a:custGeom>
           <a:noFill/>
-          <a:ln cap="flat" cmpd="sng" w="9525">
+          <a:ln w="9525" cap="flat" cmpd="sng">
             <a:solidFill>
               <a:srgbClr val="000000"/>
             </a:solidFill>
             <a:prstDash val="solid"/>
             <a:round/>
-            <a:headEnd len="sm" w="sm" type="none"/>
-            <a:tailEnd len="sm" w="sm" type="none"/>
+            <a:headEnd type="none" w="sm" len="sm"/>
+            <a:tailEnd type="none" w="sm" len="sm"/>
           </a:ln>
         </p:spPr>
       </p:sp>
@@ -1403,11 +1409,11 @@
 </file>
 
 <file path=ppt/notesSlides/notesSlide2.xml><?xml version="1.0" encoding="utf-8"?>
-<p:notes xmlns:a="http://schemas.openxmlformats.org/drawingml/2006/main" xmlns:r="http://schemas.openxmlformats.org/officeDocument/2006/relationships" xmlns:mc="http://schemas.openxmlformats.org/markup-compatibility/2006" xmlns:mv="urn:schemas-microsoft-com:mac:vml" xmlns:p="http://schemas.openxmlformats.org/presentationml/2006/main" xmlns:c="http://schemas.openxmlformats.org/drawingml/2006/chart" xmlns:dgm="http://schemas.openxmlformats.org/drawingml/2006/diagram" xmlns:o="urn:schemas-microsoft-com:office:office" xmlns:v="urn:schemas-microsoft-com:vml" xmlns:pvml="urn:schemas-microsoft-com:office:powerpoint" xmlns:com="http://schemas.openxmlformats.org/drawingml/2006/compatibility" xmlns:p14="http://schemas.microsoft.com/office/powerpoint/2010/main" xmlns:p15="http://schemas.microsoft.com/office/powerpoint/2012/main" xmlns:ahyp="http://schemas.microsoft.com/office/drawing/2018/hyperlinkcolor" showMasterPhAnim="0" showMasterSp="0">
+<p:notes xmlns:a="http://schemas.openxmlformats.org/drawingml/2006/main" xmlns:r="http://schemas.openxmlformats.org/officeDocument/2006/relationships" xmlns:p="http://schemas.openxmlformats.org/presentationml/2006/main" showMasterSp="0" showMasterPhAnim="0">
   <p:cSld>
     <p:spTree>
       <p:nvGrpSpPr>
-        <p:cNvPr id="87" name="Shape 87"/>
+        <p:cNvPr id="1" name="Shape 87"/>
         <p:cNvGrpSpPr/>
         <p:nvPr/>
       </p:nvGrpSpPr>
@@ -1422,9 +1428,11 @@
       <p:sp>
         <p:nvSpPr>
           <p:cNvPr id="88" name="Google Shape;88;g3c549f4c286_1_0:notes"/>
-          <p:cNvSpPr/>
+          <p:cNvSpPr>
+            <a:spLocks noGrp="1" noRot="1" noChangeAspect="1"/>
+          </p:cNvSpPr>
           <p:nvPr>
-            <p:ph idx="2" type="sldImg"/>
+            <p:ph type="sldImg" idx="2"/>
           </p:nvPr>
         </p:nvSpPr>
         <p:spPr>
@@ -1433,9 +1441,13 @@
             <a:ext cx="4572000" cy="3429000"/>
           </a:xfrm>
           <a:custGeom>
-            <a:rect b="b" l="l" r="r" t="t"/>
+            <a:avLst/>
+            <a:gdLst/>
+            <a:ahLst/>
+            <a:cxnLst/>
+            <a:rect l="l" t="t" r="r" b="b"/>
             <a:pathLst>
-              <a:path extrusionOk="0" h="120000" w="120000">
+              <a:path w="120000" h="120000" extrusionOk="0">
                 <a:moveTo>
                   <a:pt x="0" y="0"/>
                 </a:moveTo>
@@ -1453,23 +1465,25 @@
             </a:pathLst>
           </a:custGeom>
           <a:noFill/>
-          <a:ln cap="flat" cmpd="sng" w="9525">
+          <a:ln w="9525" cap="flat" cmpd="sng">
             <a:solidFill>
               <a:srgbClr val="000000"/>
             </a:solidFill>
             <a:prstDash val="solid"/>
             <a:round/>
-            <a:headEnd len="sm" w="sm" type="none"/>
-            <a:tailEnd len="sm" w="sm" type="none"/>
+            <a:headEnd type="none" w="sm" len="sm"/>
+            <a:tailEnd type="none" w="sm" len="sm"/>
           </a:ln>
         </p:spPr>
       </p:sp>
       <p:sp>
         <p:nvSpPr>
           <p:cNvPr id="89" name="Google Shape;89;g3c549f4c286_1_0:notes"/>
-          <p:cNvSpPr txBox="1"/>
+          <p:cNvSpPr txBox="1">
+            <a:spLocks noGrp="1"/>
+          </p:cNvSpPr>
           <p:nvPr>
-            <p:ph idx="1" type="body"/>
+            <p:ph type="body" idx="1"/>
           </p:nvPr>
         </p:nvSpPr>
         <p:spPr>
@@ -1486,12 +1500,12 @@
           </a:ln>
         </p:spPr>
         <p:txBody>
-          <a:bodyPr anchorCtr="0" anchor="t" bIns="91425" lIns="91425" spcFirstLastPara="1" rIns="91425" wrap="square" tIns="91425">
+          <a:bodyPr spcFirstLastPara="1" wrap="square" lIns="91425" tIns="91425" rIns="91425" bIns="91425" anchor="t" anchorCtr="0">
             <a:noAutofit/>
           </a:bodyPr>
           <a:lstStyle/>
           <a:p>
-            <a:pPr indent="0" lvl="0" marL="0" rtl="0" algn="l">
+            <a:pPr marL="0" lvl="0" indent="0" algn="l" rtl="0">
               <a:lnSpc>
                 <a:spcPct val="100000"/>
               </a:lnSpc>
@@ -1504,9 +1518,6 @@
               <a:buSzPts val="1100"/>
               <a:buNone/>
             </a:pPr>
-            <a:r>
-              <a:t/>
-            </a:r>
             <a:endParaRPr/>
           </a:p>
         </p:txBody>
@@ -1520,11 +1531,11 @@
 </file>
 
 <file path=ppt/notesSlides/notesSlide3.xml><?xml version="1.0" encoding="utf-8"?>
-<p:notes xmlns:a="http://schemas.openxmlformats.org/drawingml/2006/main" xmlns:r="http://schemas.openxmlformats.org/officeDocument/2006/relationships" xmlns:mc="http://schemas.openxmlformats.org/markup-compatibility/2006" xmlns:mv="urn:schemas-microsoft-com:mac:vml" xmlns:p="http://schemas.openxmlformats.org/presentationml/2006/main" xmlns:c="http://schemas.openxmlformats.org/drawingml/2006/chart" xmlns:dgm="http://schemas.openxmlformats.org/drawingml/2006/diagram" xmlns:o="urn:schemas-microsoft-com:office:office" xmlns:v="urn:schemas-microsoft-com:vml" xmlns:pvml="urn:schemas-microsoft-com:office:powerpoint" xmlns:com="http://schemas.openxmlformats.org/drawingml/2006/compatibility" xmlns:p14="http://schemas.microsoft.com/office/powerpoint/2010/main" xmlns:p15="http://schemas.microsoft.com/office/powerpoint/2012/main" xmlns:ahyp="http://schemas.microsoft.com/office/drawing/2018/hyperlinkcolor" showMasterPhAnim="0" showMasterSp="0">
+<p:notes xmlns:a="http://schemas.openxmlformats.org/drawingml/2006/main" xmlns:r="http://schemas.openxmlformats.org/officeDocument/2006/relationships" xmlns:p="http://schemas.openxmlformats.org/presentationml/2006/main" showMasterSp="0" showMasterPhAnim="0">
   <p:cSld>
     <p:spTree>
       <p:nvGrpSpPr>
-        <p:cNvPr id="93" name="Shape 93"/>
+        <p:cNvPr id="1" name="Shape 93"/>
         <p:cNvGrpSpPr/>
         <p:nvPr/>
       </p:nvGrpSpPr>
@@ -1539,9 +1550,11 @@
       <p:sp>
         <p:nvSpPr>
           <p:cNvPr id="94" name="Google Shape;94;p2:notes"/>
-          <p:cNvSpPr txBox="1"/>
+          <p:cNvSpPr txBox="1">
+            <a:spLocks noGrp="1"/>
+          </p:cNvSpPr>
           <p:nvPr>
-            <p:ph idx="1" type="body"/>
+            <p:ph type="body" idx="1"/>
           </p:nvPr>
         </p:nvSpPr>
         <p:spPr>
@@ -1558,12 +1571,12 @@
           </a:ln>
         </p:spPr>
         <p:txBody>
-          <a:bodyPr anchorCtr="0" anchor="t" bIns="91425" lIns="91425" spcFirstLastPara="1" rIns="91425" wrap="square" tIns="91425">
+          <a:bodyPr spcFirstLastPara="1" wrap="square" lIns="91425" tIns="91425" rIns="91425" bIns="91425" anchor="t" anchorCtr="0">
             <a:noAutofit/>
           </a:bodyPr>
           <a:lstStyle/>
           <a:p>
-            <a:pPr indent="0" lvl="0" marL="0" rtl="0" algn="l">
+            <a:pPr marL="0" lvl="0" indent="0" algn="l" rtl="0">
               <a:lnSpc>
                 <a:spcPct val="100000"/>
               </a:lnSpc>
@@ -1576,9 +1589,6 @@
               <a:buSzPts val="1100"/>
               <a:buNone/>
             </a:pPr>
-            <a:r>
-              <a:t/>
-            </a:r>
             <a:endParaRPr/>
           </a:p>
         </p:txBody>
@@ -1586,9 +1596,11 @@
       <p:sp>
         <p:nvSpPr>
           <p:cNvPr id="95" name="Google Shape;95;p2:notes"/>
-          <p:cNvSpPr/>
+          <p:cNvSpPr>
+            <a:spLocks noGrp="1" noRot="1" noChangeAspect="1"/>
+          </p:cNvSpPr>
           <p:nvPr>
-            <p:ph idx="2" type="sldImg"/>
+            <p:ph type="sldImg" idx="2"/>
           </p:nvPr>
         </p:nvSpPr>
         <p:spPr>
@@ -1597,9 +1609,13 @@
             <a:ext cx="4572000" cy="3429000"/>
           </a:xfrm>
           <a:custGeom>
-            <a:rect b="b" l="l" r="r" t="t"/>
+            <a:avLst/>
+            <a:gdLst/>
+            <a:ahLst/>
+            <a:cxnLst/>
+            <a:rect l="l" t="t" r="r" b="b"/>
             <a:pathLst>
-              <a:path extrusionOk="0" h="120000" w="120000">
+              <a:path w="120000" h="120000" extrusionOk="0">
                 <a:moveTo>
                   <a:pt x="0" y="0"/>
                 </a:moveTo>
@@ -1617,14 +1633,14 @@
             </a:pathLst>
           </a:custGeom>
           <a:noFill/>
-          <a:ln cap="flat" cmpd="sng" w="9525">
+          <a:ln w="9525" cap="flat" cmpd="sng">
             <a:solidFill>
               <a:srgbClr val="000000"/>
             </a:solidFill>
             <a:prstDash val="solid"/>
             <a:round/>
-            <a:headEnd len="sm" w="sm" type="none"/>
-            <a:tailEnd len="sm" w="sm" type="none"/>
+            <a:headEnd type="none" w="sm" len="sm"/>
+            <a:tailEnd type="none" w="sm" len="sm"/>
           </a:ln>
         </p:spPr>
       </p:sp>
@@ -1637,11 +1653,11 @@
 </file>
 
 <file path=ppt/notesSlides/notesSlide4.xml><?xml version="1.0" encoding="utf-8"?>
-<p:notes xmlns:a="http://schemas.openxmlformats.org/drawingml/2006/main" xmlns:r="http://schemas.openxmlformats.org/officeDocument/2006/relationships" xmlns:mc="http://schemas.openxmlformats.org/markup-compatibility/2006" xmlns:mv="urn:schemas-microsoft-com:mac:vml" xmlns:p="http://schemas.openxmlformats.org/presentationml/2006/main" xmlns:c="http://schemas.openxmlformats.org/drawingml/2006/chart" xmlns:dgm="http://schemas.openxmlformats.org/drawingml/2006/diagram" xmlns:o="urn:schemas-microsoft-com:office:office" xmlns:v="urn:schemas-microsoft-com:vml" xmlns:pvml="urn:schemas-microsoft-com:office:powerpoint" xmlns:com="http://schemas.openxmlformats.org/drawingml/2006/compatibility" xmlns:p14="http://schemas.microsoft.com/office/powerpoint/2010/main" xmlns:p15="http://schemas.microsoft.com/office/powerpoint/2012/main" xmlns:ahyp="http://schemas.microsoft.com/office/drawing/2018/hyperlinkcolor" showMasterPhAnim="0" showMasterSp="0">
+<p:notes xmlns:a="http://schemas.openxmlformats.org/drawingml/2006/main" xmlns:r="http://schemas.openxmlformats.org/officeDocument/2006/relationships" xmlns:p="http://schemas.openxmlformats.org/presentationml/2006/main" showMasterSp="0" showMasterPhAnim="0">
   <p:cSld>
     <p:spTree>
       <p:nvGrpSpPr>
-        <p:cNvPr id="100" name="Shape 100"/>
+        <p:cNvPr id="1" name="Shape 100"/>
         <p:cNvGrpSpPr/>
         <p:nvPr/>
       </p:nvGrpSpPr>
@@ -1656,9 +1672,11 @@
       <p:sp>
         <p:nvSpPr>
           <p:cNvPr id="101" name="Google Shape;101;p3:notes"/>
-          <p:cNvSpPr txBox="1"/>
+          <p:cNvSpPr txBox="1">
+            <a:spLocks noGrp="1"/>
+          </p:cNvSpPr>
           <p:nvPr>
-            <p:ph idx="1" type="body"/>
+            <p:ph type="body" idx="1"/>
           </p:nvPr>
         </p:nvSpPr>
         <p:spPr>
@@ -1675,12 +1693,12 @@
           </a:ln>
         </p:spPr>
         <p:txBody>
-          <a:bodyPr anchorCtr="0" anchor="t" bIns="91425" lIns="91425" spcFirstLastPara="1" rIns="91425" wrap="square" tIns="91425">
+          <a:bodyPr spcFirstLastPara="1" wrap="square" lIns="91425" tIns="91425" rIns="91425" bIns="91425" anchor="t" anchorCtr="0">
             <a:noAutofit/>
           </a:bodyPr>
           <a:lstStyle/>
           <a:p>
-            <a:pPr indent="0" lvl="0" marL="0" rtl="0" algn="l">
+            <a:pPr marL="0" lvl="0" indent="0" algn="l" rtl="0">
               <a:lnSpc>
                 <a:spcPct val="100000"/>
               </a:lnSpc>
@@ -1693,9 +1711,6 @@
               <a:buSzPts val="1100"/>
               <a:buNone/>
             </a:pPr>
-            <a:r>
-              <a:t/>
-            </a:r>
             <a:endParaRPr/>
           </a:p>
         </p:txBody>
@@ -1703,9 +1718,11 @@
       <p:sp>
         <p:nvSpPr>
           <p:cNvPr id="102" name="Google Shape;102;p3:notes"/>
-          <p:cNvSpPr/>
+          <p:cNvSpPr>
+            <a:spLocks noGrp="1" noRot="1" noChangeAspect="1"/>
+          </p:cNvSpPr>
           <p:nvPr>
-            <p:ph idx="2" type="sldImg"/>
+            <p:ph type="sldImg" idx="2"/>
           </p:nvPr>
         </p:nvSpPr>
         <p:spPr>
@@ -1714,9 +1731,13 @@
             <a:ext cx="4572000" cy="3429000"/>
           </a:xfrm>
           <a:custGeom>
-            <a:rect b="b" l="l" r="r" t="t"/>
+            <a:avLst/>
+            <a:gdLst/>
+            <a:ahLst/>
+            <a:cxnLst/>
+            <a:rect l="l" t="t" r="r" b="b"/>
             <a:pathLst>
-              <a:path extrusionOk="0" h="120000" w="120000">
+              <a:path w="120000" h="120000" extrusionOk="0">
                 <a:moveTo>
                   <a:pt x="0" y="0"/>
                 </a:moveTo>
@@ -1734,14 +1755,14 @@
             </a:pathLst>
           </a:custGeom>
           <a:noFill/>
-          <a:ln cap="flat" cmpd="sng" w="9525">
+          <a:ln w="9525" cap="flat" cmpd="sng">
             <a:solidFill>
               <a:srgbClr val="000000"/>
             </a:solidFill>
             <a:prstDash val="solid"/>
             <a:round/>
-            <a:headEnd len="sm" w="sm" type="none"/>
-            <a:tailEnd len="sm" w="sm" type="none"/>
+            <a:headEnd type="none" w="sm" len="sm"/>
+            <a:tailEnd type="none" w="sm" len="sm"/>
           </a:ln>
         </p:spPr>
       </p:sp>
@@ -1754,11 +1775,11 @@
 </file>
 
 <file path=ppt/notesSlides/notesSlide5.xml><?xml version="1.0" encoding="utf-8"?>
-<p:notes xmlns:a="http://schemas.openxmlformats.org/drawingml/2006/main" xmlns:r="http://schemas.openxmlformats.org/officeDocument/2006/relationships" xmlns:mc="http://schemas.openxmlformats.org/markup-compatibility/2006" xmlns:mv="urn:schemas-microsoft-com:mac:vml" xmlns:p="http://schemas.openxmlformats.org/presentationml/2006/main" xmlns:c="http://schemas.openxmlformats.org/drawingml/2006/chart" xmlns:dgm="http://schemas.openxmlformats.org/drawingml/2006/diagram" xmlns:o="urn:schemas-microsoft-com:office:office" xmlns:v="urn:schemas-microsoft-com:vml" xmlns:pvml="urn:schemas-microsoft-com:office:powerpoint" xmlns:com="http://schemas.openxmlformats.org/drawingml/2006/compatibility" xmlns:p14="http://schemas.microsoft.com/office/powerpoint/2010/main" xmlns:p15="http://schemas.microsoft.com/office/powerpoint/2012/main" xmlns:ahyp="http://schemas.microsoft.com/office/drawing/2018/hyperlinkcolor" showMasterPhAnim="0" showMasterSp="0">
+<p:notes xmlns:a="http://schemas.openxmlformats.org/drawingml/2006/main" xmlns:r="http://schemas.openxmlformats.org/officeDocument/2006/relationships" xmlns:p="http://schemas.openxmlformats.org/presentationml/2006/main" showMasterSp="0" showMasterPhAnim="0">
   <p:cSld>
     <p:spTree>
       <p:nvGrpSpPr>
-        <p:cNvPr id="106" name="Shape 106"/>
+        <p:cNvPr id="1" name="Shape 106"/>
         <p:cNvGrpSpPr/>
         <p:nvPr/>
       </p:nvGrpSpPr>
@@ -1773,9 +1794,11 @@
       <p:sp>
         <p:nvSpPr>
           <p:cNvPr id="107" name="Google Shape;107;p4:notes"/>
-          <p:cNvSpPr txBox="1"/>
+          <p:cNvSpPr txBox="1">
+            <a:spLocks noGrp="1"/>
+          </p:cNvSpPr>
           <p:nvPr>
-            <p:ph idx="1" type="body"/>
+            <p:ph type="body" idx="1"/>
           </p:nvPr>
         </p:nvSpPr>
         <p:spPr>
@@ -1792,12 +1815,12 @@
           </a:ln>
         </p:spPr>
         <p:txBody>
-          <a:bodyPr anchorCtr="0" anchor="t" bIns="91425" lIns="91425" spcFirstLastPara="1" rIns="91425" wrap="square" tIns="91425">
+          <a:bodyPr spcFirstLastPara="1" wrap="square" lIns="91425" tIns="91425" rIns="91425" bIns="91425" anchor="t" anchorCtr="0">
             <a:noAutofit/>
           </a:bodyPr>
           <a:lstStyle/>
           <a:p>
-            <a:pPr indent="0" lvl="0" marL="0" rtl="0" algn="l">
+            <a:pPr marL="0" lvl="0" indent="0" algn="l" rtl="0">
               <a:lnSpc>
                 <a:spcPct val="100000"/>
               </a:lnSpc>
@@ -1810,9 +1833,6 @@
               <a:buSzPts val="1100"/>
               <a:buNone/>
             </a:pPr>
-            <a:r>
-              <a:t/>
-            </a:r>
             <a:endParaRPr/>
           </a:p>
         </p:txBody>
@@ -1820,9 +1840,11 @@
       <p:sp>
         <p:nvSpPr>
           <p:cNvPr id="108" name="Google Shape;108;p4:notes"/>
-          <p:cNvSpPr/>
+          <p:cNvSpPr>
+            <a:spLocks noGrp="1" noRot="1" noChangeAspect="1"/>
+          </p:cNvSpPr>
           <p:nvPr>
-            <p:ph idx="2" type="sldImg"/>
+            <p:ph type="sldImg" idx="2"/>
           </p:nvPr>
         </p:nvSpPr>
         <p:spPr>
@@ -1831,9 +1853,13 @@
             <a:ext cx="4572000" cy="3429000"/>
           </a:xfrm>
           <a:custGeom>
-            <a:rect b="b" l="l" r="r" t="t"/>
+            <a:avLst/>
+            <a:gdLst/>
+            <a:ahLst/>
+            <a:cxnLst/>
+            <a:rect l="l" t="t" r="r" b="b"/>
             <a:pathLst>
-              <a:path extrusionOk="0" h="120000" w="120000">
+              <a:path w="120000" h="120000" extrusionOk="0">
                 <a:moveTo>
                   <a:pt x="0" y="0"/>
                 </a:moveTo>
@@ -1851,14 +1877,14 @@
             </a:pathLst>
           </a:custGeom>
           <a:noFill/>
-          <a:ln cap="flat" cmpd="sng" w="9525">
+          <a:ln w="9525" cap="flat" cmpd="sng">
             <a:solidFill>
               <a:srgbClr val="000000"/>
             </a:solidFill>
             <a:prstDash val="solid"/>
             <a:round/>
-            <a:headEnd len="sm" w="sm" type="none"/>
-            <a:tailEnd len="sm" w="sm" type="none"/>
+            <a:headEnd type="none" w="sm" len="sm"/>
+            <a:tailEnd type="none" w="sm" len="sm"/>
           </a:ln>
         </p:spPr>
       </p:sp>
@@ -1871,11 +1897,11 @@
 </file>
 
 <file path=ppt/notesSlides/notesSlide6.xml><?xml version="1.0" encoding="utf-8"?>
-<p:notes xmlns:a="http://schemas.openxmlformats.org/drawingml/2006/main" xmlns:r="http://schemas.openxmlformats.org/officeDocument/2006/relationships" xmlns:mc="http://schemas.openxmlformats.org/markup-compatibility/2006" xmlns:mv="urn:schemas-microsoft-com:mac:vml" xmlns:p="http://schemas.openxmlformats.org/presentationml/2006/main" xmlns:c="http://schemas.openxmlformats.org/drawingml/2006/chart" xmlns:dgm="http://schemas.openxmlformats.org/drawingml/2006/diagram" xmlns:o="urn:schemas-microsoft-com:office:office" xmlns:v="urn:schemas-microsoft-com:vml" xmlns:pvml="urn:schemas-microsoft-com:office:powerpoint" xmlns:com="http://schemas.openxmlformats.org/drawingml/2006/compatibility" xmlns:p14="http://schemas.microsoft.com/office/powerpoint/2010/main" xmlns:p15="http://schemas.microsoft.com/office/powerpoint/2012/main" xmlns:ahyp="http://schemas.microsoft.com/office/drawing/2018/hyperlinkcolor" showMasterPhAnim="0" showMasterSp="0">
+<p:notes xmlns:a="http://schemas.openxmlformats.org/drawingml/2006/main" xmlns:r="http://schemas.openxmlformats.org/officeDocument/2006/relationships" xmlns:p="http://schemas.openxmlformats.org/presentationml/2006/main" showMasterSp="0" showMasterPhAnim="0">
   <p:cSld>
     <p:spTree>
       <p:nvGrpSpPr>
-        <p:cNvPr id="112" name="Shape 112"/>
+        <p:cNvPr id="1" name="Shape 112"/>
         <p:cNvGrpSpPr/>
         <p:nvPr/>
       </p:nvGrpSpPr>
@@ -1890,9 +1916,11 @@
       <p:sp>
         <p:nvSpPr>
           <p:cNvPr id="113" name="Google Shape;113;p5:notes"/>
-          <p:cNvSpPr txBox="1"/>
+          <p:cNvSpPr txBox="1">
+            <a:spLocks noGrp="1"/>
+          </p:cNvSpPr>
           <p:nvPr>
-            <p:ph idx="1" type="body"/>
+            <p:ph type="body" idx="1"/>
           </p:nvPr>
         </p:nvSpPr>
         <p:spPr>
@@ -1909,12 +1937,12 @@
           </a:ln>
         </p:spPr>
         <p:txBody>
-          <a:bodyPr anchorCtr="0" anchor="t" bIns="91425" lIns="91425" spcFirstLastPara="1" rIns="91425" wrap="square" tIns="91425">
+          <a:bodyPr spcFirstLastPara="1" wrap="square" lIns="91425" tIns="91425" rIns="91425" bIns="91425" anchor="t" anchorCtr="0">
             <a:noAutofit/>
           </a:bodyPr>
           <a:lstStyle/>
           <a:p>
-            <a:pPr indent="0" lvl="0" marL="0" rtl="0" algn="l">
+            <a:pPr marL="0" lvl="0" indent="0" algn="l" rtl="0">
               <a:lnSpc>
                 <a:spcPct val="100000"/>
               </a:lnSpc>
@@ -1927,9 +1955,6 @@
               <a:buSzPts val="1100"/>
               <a:buNone/>
             </a:pPr>
-            <a:r>
-              <a:t/>
-            </a:r>
             <a:endParaRPr/>
           </a:p>
         </p:txBody>
@@ -1937,9 +1962,11 @@
       <p:sp>
         <p:nvSpPr>
           <p:cNvPr id="114" name="Google Shape;114;p5:notes"/>
-          <p:cNvSpPr/>
+          <p:cNvSpPr>
+            <a:spLocks noGrp="1" noRot="1" noChangeAspect="1"/>
+          </p:cNvSpPr>
           <p:nvPr>
-            <p:ph idx="2" type="sldImg"/>
+            <p:ph type="sldImg" idx="2"/>
           </p:nvPr>
         </p:nvSpPr>
         <p:spPr>
@@ -1948,9 +1975,13 @@
             <a:ext cx="4572000" cy="3429000"/>
           </a:xfrm>
           <a:custGeom>
-            <a:rect b="b" l="l" r="r" t="t"/>
+            <a:avLst/>
+            <a:gdLst/>
+            <a:ahLst/>
+            <a:cxnLst/>
+            <a:rect l="l" t="t" r="r" b="b"/>
             <a:pathLst>
-              <a:path extrusionOk="0" h="120000" w="120000">
+              <a:path w="120000" h="120000" extrusionOk="0">
                 <a:moveTo>
                   <a:pt x="0" y="0"/>
                 </a:moveTo>
@@ -1968,14 +1999,14 @@
             </a:pathLst>
           </a:custGeom>
           <a:noFill/>
-          <a:ln cap="flat" cmpd="sng" w="9525">
+          <a:ln w="9525" cap="flat" cmpd="sng">
             <a:solidFill>
               <a:srgbClr val="000000"/>
             </a:solidFill>
             <a:prstDash val="solid"/>
             <a:round/>
-            <a:headEnd len="sm" w="sm" type="none"/>
-            <a:tailEnd len="sm" w="sm" type="none"/>
+            <a:headEnd type="none" w="sm" len="sm"/>
+            <a:tailEnd type="none" w="sm" len="sm"/>
           </a:ln>
         </p:spPr>
       </p:sp>
@@ -1988,11 +2019,11 @@
 </file>
 
 <file path=ppt/notesSlides/notesSlide7.xml><?xml version="1.0" encoding="utf-8"?>
-<p:notes xmlns:a="http://schemas.openxmlformats.org/drawingml/2006/main" xmlns:r="http://schemas.openxmlformats.org/officeDocument/2006/relationships" xmlns:mc="http://schemas.openxmlformats.org/markup-compatibility/2006" xmlns:mv="urn:schemas-microsoft-com:mac:vml" xmlns:p="http://schemas.openxmlformats.org/presentationml/2006/main" xmlns:c="http://schemas.openxmlformats.org/drawingml/2006/chart" xmlns:dgm="http://schemas.openxmlformats.org/drawingml/2006/diagram" xmlns:o="urn:schemas-microsoft-com:office:office" xmlns:v="urn:schemas-microsoft-com:vml" xmlns:pvml="urn:schemas-microsoft-com:office:powerpoint" xmlns:com="http://schemas.openxmlformats.org/drawingml/2006/compatibility" xmlns:p14="http://schemas.microsoft.com/office/powerpoint/2010/main" xmlns:p15="http://schemas.microsoft.com/office/powerpoint/2012/main" xmlns:ahyp="http://schemas.microsoft.com/office/drawing/2018/hyperlinkcolor" showMasterPhAnim="0" showMasterSp="0">
+<p:notes xmlns:a="http://schemas.openxmlformats.org/drawingml/2006/main" xmlns:r="http://schemas.openxmlformats.org/officeDocument/2006/relationships" xmlns:p="http://schemas.openxmlformats.org/presentationml/2006/main" showMasterSp="0" showMasterPhAnim="0">
   <p:cSld>
     <p:spTree>
       <p:nvGrpSpPr>
-        <p:cNvPr id="119" name="Shape 119"/>
+        <p:cNvPr id="1" name="Shape 119"/>
         <p:cNvGrpSpPr/>
         <p:nvPr/>
       </p:nvGrpSpPr>
@@ -2007,9 +2038,11 @@
       <p:sp>
         <p:nvSpPr>
           <p:cNvPr id="120" name="Google Shape;120;p6:notes"/>
-          <p:cNvSpPr txBox="1"/>
+          <p:cNvSpPr txBox="1">
+            <a:spLocks noGrp="1"/>
+          </p:cNvSpPr>
           <p:nvPr>
-            <p:ph idx="1" type="body"/>
+            <p:ph type="body" idx="1"/>
           </p:nvPr>
         </p:nvSpPr>
         <p:spPr>
@@ -2026,12 +2059,12 @@
           </a:ln>
         </p:spPr>
         <p:txBody>
-          <a:bodyPr anchorCtr="0" anchor="t" bIns="91425" lIns="91425" spcFirstLastPara="1" rIns="91425" wrap="square" tIns="91425">
+          <a:bodyPr spcFirstLastPara="1" wrap="square" lIns="91425" tIns="91425" rIns="91425" bIns="91425" anchor="t" anchorCtr="0">
             <a:noAutofit/>
           </a:bodyPr>
           <a:lstStyle/>
           <a:p>
-            <a:pPr indent="0" lvl="0" marL="0" rtl="0" algn="l">
+            <a:pPr marL="0" lvl="0" indent="0" algn="l" rtl="0">
               <a:lnSpc>
                 <a:spcPct val="100000"/>
               </a:lnSpc>
@@ -2044,9 +2077,6 @@
               <a:buSzPts val="1100"/>
               <a:buNone/>
             </a:pPr>
-            <a:r>
-              <a:t/>
-            </a:r>
             <a:endParaRPr/>
           </a:p>
         </p:txBody>
@@ -2054,9 +2084,11 @@
       <p:sp>
         <p:nvSpPr>
           <p:cNvPr id="121" name="Google Shape;121;p6:notes"/>
-          <p:cNvSpPr/>
+          <p:cNvSpPr>
+            <a:spLocks noGrp="1" noRot="1" noChangeAspect="1"/>
+          </p:cNvSpPr>
           <p:nvPr>
-            <p:ph idx="2" type="sldImg"/>
+            <p:ph type="sldImg" idx="2"/>
           </p:nvPr>
         </p:nvSpPr>
         <p:spPr>
@@ -2065,9 +2097,13 @@
             <a:ext cx="4572000" cy="3429000"/>
           </a:xfrm>
           <a:custGeom>
-            <a:rect b="b" l="l" r="r" t="t"/>
+            <a:avLst/>
+            <a:gdLst/>
+            <a:ahLst/>
+            <a:cxnLst/>
+            <a:rect l="l" t="t" r="r" b="b"/>
             <a:pathLst>
-              <a:path extrusionOk="0" h="120000" w="120000">
+              <a:path w="120000" h="120000" extrusionOk="0">
                 <a:moveTo>
                   <a:pt x="0" y="0"/>
                 </a:moveTo>
@@ -2085,14 +2121,14 @@
             </a:pathLst>
           </a:custGeom>
           <a:noFill/>
-          <a:ln cap="flat" cmpd="sng" w="9525">
+          <a:ln w="9525" cap="flat" cmpd="sng">
             <a:solidFill>
               <a:srgbClr val="000000"/>
             </a:solidFill>
             <a:prstDash val="solid"/>
             <a:round/>
-            <a:headEnd len="sm" w="sm" type="none"/>
-            <a:tailEnd len="sm" w="sm" type="none"/>
+            <a:headEnd type="none" w="sm" len="sm"/>
+            <a:tailEnd type="none" w="sm" len="sm"/>
           </a:ln>
         </p:spPr>
       </p:sp>
@@ -2105,11 +2141,11 @@
 </file>
 
 <file path=ppt/slideLayouts/slideLayout1.xml><?xml version="1.0" encoding="utf-8"?>
-<p:sldLayout xmlns:a="http://schemas.openxmlformats.org/drawingml/2006/main" xmlns:r="http://schemas.openxmlformats.org/officeDocument/2006/relationships" xmlns:mc="http://schemas.openxmlformats.org/markup-compatibility/2006" xmlns:mv="urn:schemas-microsoft-com:mac:vml" xmlns:p="http://schemas.openxmlformats.org/presentationml/2006/main" xmlns:c="http://schemas.openxmlformats.org/drawingml/2006/chart" xmlns:dgm="http://schemas.openxmlformats.org/drawingml/2006/diagram" xmlns:o="urn:schemas-microsoft-com:office:office" xmlns:v="urn:schemas-microsoft-com:vml" xmlns:pvml="urn:schemas-microsoft-com:office:powerpoint" xmlns:com="http://schemas.openxmlformats.org/drawingml/2006/compatibility" xmlns:p14="http://schemas.microsoft.com/office/powerpoint/2010/main" xmlns:p15="http://schemas.microsoft.com/office/powerpoint/2012/main" xmlns:ahyp="http://schemas.microsoft.com/office/drawing/2018/hyperlinkcolor" matchingName="Title and Content" type="obj">
+<p:sldLayout xmlns:a="http://schemas.openxmlformats.org/drawingml/2006/main" xmlns:r="http://schemas.openxmlformats.org/officeDocument/2006/relationships" xmlns:p="http://schemas.openxmlformats.org/presentationml/2006/main" matchingName="Title and Content" type="obj">
   <p:cSld name="OBJECT">
     <p:spTree>
       <p:nvGrpSpPr>
-        <p:cNvPr id="11" name="Shape 11"/>
+        <p:cNvPr id="1" name="Shape 11"/>
         <p:cNvGrpSpPr/>
         <p:nvPr/>
       </p:nvGrpSpPr>
@@ -2124,7 +2160,9 @@
       <p:sp>
         <p:nvSpPr>
           <p:cNvPr id="12" name="Google Shape;12;p8"/>
-          <p:cNvSpPr txBox="1"/>
+          <p:cNvSpPr txBox="1">
+            <a:spLocks noGrp="1"/>
+          </p:cNvSpPr>
           <p:nvPr>
             <p:ph type="title"/>
           </p:nvPr>
@@ -2143,7 +2181,7 @@
           </a:ln>
         </p:spPr>
         <p:txBody>
-          <a:bodyPr anchorCtr="0" anchor="ctr" bIns="45700" lIns="91425" spcFirstLastPara="1" rIns="91425" wrap="square" tIns="45700">
+          <a:bodyPr spcFirstLastPara="1" wrap="square" lIns="91425" tIns="45700" rIns="91425" bIns="45700" anchor="ctr" anchorCtr="0">
             <a:normAutofit/>
           </a:bodyPr>
           <a:lstStyle>
@@ -2331,15 +2369,19 @@
               </a:defRPr>
             </a:lvl9pPr>
           </a:lstStyle>
-          <a:p/>
+          <a:p>
+            <a:endParaRPr/>
+          </a:p>
         </p:txBody>
       </p:sp>
       <p:sp>
         <p:nvSpPr>
           <p:cNvPr id="13" name="Google Shape;13;p8"/>
-          <p:cNvSpPr txBox="1"/>
+          <p:cNvSpPr txBox="1">
+            <a:spLocks noGrp="1"/>
+          </p:cNvSpPr>
           <p:nvPr>
-            <p:ph idx="1" type="body"/>
+            <p:ph type="body" idx="1"/>
           </p:nvPr>
         </p:nvSpPr>
         <p:spPr>
@@ -2356,11 +2398,11 @@
           </a:ln>
         </p:spPr>
         <p:txBody>
-          <a:bodyPr anchorCtr="0" anchor="t" bIns="45700" lIns="91425" spcFirstLastPara="1" rIns="91425" wrap="square" tIns="45700">
+          <a:bodyPr spcFirstLastPara="1" wrap="square" lIns="91425" tIns="45700" rIns="91425" bIns="45700" anchor="t" anchorCtr="0">
             <a:normAutofit/>
           </a:bodyPr>
           <a:lstStyle>
-            <a:lvl1pPr indent="-342900" lvl="0" marL="457200" algn="l">
+            <a:lvl1pPr marL="457200" lvl="0" indent="-342900" algn="l">
               <a:lnSpc>
                 <a:spcPct val="100000"/>
               </a:lnSpc>
@@ -2383,7 +2425,7 @@
                 <a:sym typeface="Syne"/>
               </a:defRPr>
             </a:lvl1pPr>
-            <a:lvl2pPr indent="-342900" lvl="1" marL="914400" algn="l">
+            <a:lvl2pPr marL="914400" lvl="1" indent="-342900" algn="l">
               <a:lnSpc>
                 <a:spcPct val="100000"/>
               </a:lnSpc>
@@ -2406,7 +2448,7 @@
                 <a:sym typeface="Syne"/>
               </a:defRPr>
             </a:lvl2pPr>
-            <a:lvl3pPr indent="-342900" lvl="2" marL="1371600" algn="l">
+            <a:lvl3pPr marL="1371600" lvl="2" indent="-342900" algn="l">
               <a:lnSpc>
                 <a:spcPct val="100000"/>
               </a:lnSpc>
@@ -2429,7 +2471,7 @@
                 <a:sym typeface="Syne"/>
               </a:defRPr>
             </a:lvl3pPr>
-            <a:lvl4pPr indent="-342900" lvl="3" marL="1828800" algn="l">
+            <a:lvl4pPr marL="1828800" lvl="3" indent="-342900" algn="l">
               <a:lnSpc>
                 <a:spcPct val="100000"/>
               </a:lnSpc>
@@ -2452,7 +2494,7 @@
                 <a:sym typeface="Syne"/>
               </a:defRPr>
             </a:lvl4pPr>
-            <a:lvl5pPr indent="-342900" lvl="4" marL="2286000" algn="l">
+            <a:lvl5pPr marL="2286000" lvl="4" indent="-342900" algn="l">
               <a:lnSpc>
                 <a:spcPct val="100000"/>
               </a:lnSpc>
@@ -2475,7 +2517,7 @@
                 <a:sym typeface="Syne"/>
               </a:defRPr>
             </a:lvl5pPr>
-            <a:lvl6pPr indent="-342900" lvl="5" marL="2743200" algn="l">
+            <a:lvl6pPr marL="2743200" lvl="5" indent="-342900" algn="l">
               <a:lnSpc>
                 <a:spcPct val="100000"/>
               </a:lnSpc>
@@ -2498,7 +2540,7 @@
                 <a:sym typeface="Syne"/>
               </a:defRPr>
             </a:lvl6pPr>
-            <a:lvl7pPr indent="-342900" lvl="6" marL="3200400" algn="l">
+            <a:lvl7pPr marL="3200400" lvl="6" indent="-342900" algn="l">
               <a:lnSpc>
                 <a:spcPct val="100000"/>
               </a:lnSpc>
@@ -2521,7 +2563,7 @@
                 <a:sym typeface="Syne"/>
               </a:defRPr>
             </a:lvl7pPr>
-            <a:lvl8pPr indent="-342900" lvl="7" marL="3657600" algn="l">
+            <a:lvl8pPr marL="3657600" lvl="7" indent="-342900" algn="l">
               <a:lnSpc>
                 <a:spcPct val="100000"/>
               </a:lnSpc>
@@ -2544,7 +2586,7 @@
                 <a:sym typeface="Syne"/>
               </a:defRPr>
             </a:lvl8pPr>
-            <a:lvl9pPr indent="-342900" lvl="8" marL="4114800" algn="l">
+            <a:lvl9pPr marL="4114800" lvl="8" indent="-342900" algn="l">
               <a:lnSpc>
                 <a:spcPct val="100000"/>
               </a:lnSpc>
@@ -2568,15 +2610,19 @@
               </a:defRPr>
             </a:lvl9pPr>
           </a:lstStyle>
-          <a:p/>
+          <a:p>
+            <a:endParaRPr/>
+          </a:p>
         </p:txBody>
       </p:sp>
       <p:sp>
         <p:nvSpPr>
           <p:cNvPr id="14" name="Google Shape;14;p8"/>
-          <p:cNvSpPr txBox="1"/>
+          <p:cNvSpPr txBox="1">
+            <a:spLocks noGrp="1"/>
+          </p:cNvSpPr>
           <p:nvPr>
-            <p:ph idx="10" type="dt"/>
+            <p:ph type="dt" idx="10"/>
           </p:nvPr>
         </p:nvSpPr>
         <p:spPr>
@@ -2593,7 +2639,7 @@
           </a:ln>
         </p:spPr>
         <p:txBody>
-          <a:bodyPr anchorCtr="0" anchor="ctr" bIns="45700" lIns="91425" spcFirstLastPara="1" rIns="91425" wrap="square" tIns="45700">
+          <a:bodyPr spcFirstLastPara="1" wrap="square" lIns="91425" tIns="45700" rIns="91425" bIns="45700" anchor="ctr" anchorCtr="0">
             <a:noAutofit/>
           </a:bodyPr>
           <a:lstStyle>
@@ -2724,15 +2770,19 @@
               <a:defRPr/>
             </a:lvl9pPr>
           </a:lstStyle>
-          <a:p/>
+          <a:p>
+            <a:endParaRPr/>
+          </a:p>
         </p:txBody>
       </p:sp>
       <p:sp>
         <p:nvSpPr>
           <p:cNvPr id="15" name="Google Shape;15;p8"/>
-          <p:cNvSpPr txBox="1"/>
+          <p:cNvSpPr txBox="1">
+            <a:spLocks noGrp="1"/>
+          </p:cNvSpPr>
           <p:nvPr>
-            <p:ph idx="11" type="ftr"/>
+            <p:ph type="ftr" idx="11"/>
           </p:nvPr>
         </p:nvSpPr>
         <p:spPr>
@@ -2749,7 +2799,7 @@
           </a:ln>
         </p:spPr>
         <p:txBody>
-          <a:bodyPr anchorCtr="0" anchor="ctr" bIns="45700" lIns="91425" spcFirstLastPara="1" rIns="91425" wrap="square" tIns="45700">
+          <a:bodyPr spcFirstLastPara="1" wrap="square" lIns="91425" tIns="45700" rIns="91425" bIns="45700" anchor="ctr" anchorCtr="0">
             <a:noAutofit/>
           </a:bodyPr>
           <a:lstStyle>
@@ -2880,15 +2930,19 @@
               <a:defRPr/>
             </a:lvl9pPr>
           </a:lstStyle>
-          <a:p/>
+          <a:p>
+            <a:endParaRPr/>
+          </a:p>
         </p:txBody>
       </p:sp>
       <p:sp>
         <p:nvSpPr>
           <p:cNvPr id="16" name="Google Shape;16;p8"/>
-          <p:cNvSpPr txBox="1"/>
+          <p:cNvSpPr txBox="1">
+            <a:spLocks noGrp="1"/>
+          </p:cNvSpPr>
           <p:nvPr>
-            <p:ph idx="12" type="sldNum"/>
+            <p:ph type="sldNum" idx="12"/>
           </p:nvPr>
         </p:nvSpPr>
         <p:spPr>
@@ -2905,11 +2959,11 @@
           </a:ln>
         </p:spPr>
         <p:txBody>
-          <a:bodyPr anchorCtr="0" anchor="ctr" bIns="45700" lIns="91425" spcFirstLastPara="1" rIns="91425" wrap="square" tIns="45700">
+          <a:bodyPr spcFirstLastPara="1" wrap="square" lIns="91425" tIns="45700" rIns="91425" bIns="45700" anchor="ctr" anchorCtr="0">
             <a:noAutofit/>
           </a:bodyPr>
           <a:lstStyle>
-            <a:lvl1pPr indent="0" lvl="0" marL="0" marR="0" algn="r">
+            <a:lvl1pPr marL="0" marR="0" lvl="0" indent="0" algn="r">
               <a:lnSpc>
                 <a:spcPct val="100000"/>
               </a:lnSpc>
@@ -2925,7 +2979,7 @@
               <a:buSzPts val="1200"/>
               <a:buFont typeface="Arial"/>
               <a:buNone/>
-              <a:defRPr b="0" i="0" sz="1200" u="none" cap="none" strike="noStrike">
+              <a:defRPr sz="1200" b="0" i="0" u="none" strike="noStrike" cap="none">
                 <a:solidFill>
                   <a:srgbClr val="888888"/>
                 </a:solidFill>
@@ -2935,7 +2989,7 @@
                 <a:sym typeface="Calibri"/>
               </a:defRPr>
             </a:lvl1pPr>
-            <a:lvl2pPr indent="0" lvl="1" marL="0" marR="0" algn="r">
+            <a:lvl2pPr marL="0" marR="0" lvl="1" indent="0" algn="r">
               <a:lnSpc>
                 <a:spcPct val="100000"/>
               </a:lnSpc>
@@ -2951,7 +3005,7 @@
               <a:buSzPts val="1200"/>
               <a:buFont typeface="Arial"/>
               <a:buNone/>
-              <a:defRPr b="0" i="0" sz="1200" u="none" cap="none" strike="noStrike">
+              <a:defRPr sz="1200" b="0" i="0" u="none" strike="noStrike" cap="none">
                 <a:solidFill>
                   <a:srgbClr val="888888"/>
                 </a:solidFill>
@@ -2961,7 +3015,7 @@
                 <a:sym typeface="Calibri"/>
               </a:defRPr>
             </a:lvl2pPr>
-            <a:lvl3pPr indent="0" lvl="2" marL="0" marR="0" algn="r">
+            <a:lvl3pPr marL="0" marR="0" lvl="2" indent="0" algn="r">
               <a:lnSpc>
                 <a:spcPct val="100000"/>
               </a:lnSpc>
@@ -2977,7 +3031,7 @@
               <a:buSzPts val="1200"/>
               <a:buFont typeface="Arial"/>
               <a:buNone/>
-              <a:defRPr b="0" i="0" sz="1200" u="none" cap="none" strike="noStrike">
+              <a:defRPr sz="1200" b="0" i="0" u="none" strike="noStrike" cap="none">
                 <a:solidFill>
                   <a:srgbClr val="888888"/>
                 </a:solidFill>
@@ -2987,7 +3041,7 @@
                 <a:sym typeface="Calibri"/>
               </a:defRPr>
             </a:lvl3pPr>
-            <a:lvl4pPr indent="0" lvl="3" marL="0" marR="0" algn="r">
+            <a:lvl4pPr marL="0" marR="0" lvl="3" indent="0" algn="r">
               <a:lnSpc>
                 <a:spcPct val="100000"/>
               </a:lnSpc>
@@ -3003,7 +3057,7 @@
               <a:buSzPts val="1200"/>
               <a:buFont typeface="Arial"/>
               <a:buNone/>
-              <a:defRPr b="0" i="0" sz="1200" u="none" cap="none" strike="noStrike">
+              <a:defRPr sz="1200" b="0" i="0" u="none" strike="noStrike" cap="none">
                 <a:solidFill>
                   <a:srgbClr val="888888"/>
                 </a:solidFill>
@@ -3013,7 +3067,7 @@
                 <a:sym typeface="Calibri"/>
               </a:defRPr>
             </a:lvl4pPr>
-            <a:lvl5pPr indent="0" lvl="4" marL="0" marR="0" algn="r">
+            <a:lvl5pPr marL="0" marR="0" lvl="4" indent="0" algn="r">
               <a:lnSpc>
                 <a:spcPct val="100000"/>
               </a:lnSpc>
@@ -3029,7 +3083,7 @@
               <a:buSzPts val="1200"/>
               <a:buFont typeface="Arial"/>
               <a:buNone/>
-              <a:defRPr b="0" i="0" sz="1200" u="none" cap="none" strike="noStrike">
+              <a:defRPr sz="1200" b="0" i="0" u="none" strike="noStrike" cap="none">
                 <a:solidFill>
                   <a:srgbClr val="888888"/>
                 </a:solidFill>
@@ -3039,7 +3093,7 @@
                 <a:sym typeface="Calibri"/>
               </a:defRPr>
             </a:lvl5pPr>
-            <a:lvl6pPr indent="0" lvl="5" marL="0" marR="0" algn="r">
+            <a:lvl6pPr marL="0" marR="0" lvl="5" indent="0" algn="r">
               <a:lnSpc>
                 <a:spcPct val="100000"/>
               </a:lnSpc>
@@ -3055,7 +3109,7 @@
               <a:buSzPts val="1200"/>
               <a:buFont typeface="Arial"/>
               <a:buNone/>
-              <a:defRPr b="0" i="0" sz="1200" u="none" cap="none" strike="noStrike">
+              <a:defRPr sz="1200" b="0" i="0" u="none" strike="noStrike" cap="none">
                 <a:solidFill>
                   <a:srgbClr val="888888"/>
                 </a:solidFill>
@@ -3065,7 +3119,7 @@
                 <a:sym typeface="Calibri"/>
               </a:defRPr>
             </a:lvl6pPr>
-            <a:lvl7pPr indent="0" lvl="6" marL="0" marR="0" algn="r">
+            <a:lvl7pPr marL="0" marR="0" lvl="6" indent="0" algn="r">
               <a:lnSpc>
                 <a:spcPct val="100000"/>
               </a:lnSpc>
@@ -3081,7 +3135,7 @@
               <a:buSzPts val="1200"/>
               <a:buFont typeface="Arial"/>
               <a:buNone/>
-              <a:defRPr b="0" i="0" sz="1200" u="none" cap="none" strike="noStrike">
+              <a:defRPr sz="1200" b="0" i="0" u="none" strike="noStrike" cap="none">
                 <a:solidFill>
                   <a:srgbClr val="888888"/>
                 </a:solidFill>
@@ -3091,7 +3145,7 @@
                 <a:sym typeface="Calibri"/>
               </a:defRPr>
             </a:lvl7pPr>
-            <a:lvl8pPr indent="0" lvl="7" marL="0" marR="0" algn="r">
+            <a:lvl8pPr marL="0" marR="0" lvl="7" indent="0" algn="r">
               <a:lnSpc>
                 <a:spcPct val="100000"/>
               </a:lnSpc>
@@ -3107,7 +3161,7 @@
               <a:buSzPts val="1200"/>
               <a:buFont typeface="Arial"/>
               <a:buNone/>
-              <a:defRPr b="0" i="0" sz="1200" u="none" cap="none" strike="noStrike">
+              <a:defRPr sz="1200" b="0" i="0" u="none" strike="noStrike" cap="none">
                 <a:solidFill>
                   <a:srgbClr val="888888"/>
                 </a:solidFill>
@@ -3117,7 +3171,7 @@
                 <a:sym typeface="Calibri"/>
               </a:defRPr>
             </a:lvl8pPr>
-            <a:lvl9pPr indent="0" lvl="8" marL="0" marR="0" algn="r">
+            <a:lvl9pPr marL="0" marR="0" lvl="8" indent="0" algn="r">
               <a:lnSpc>
                 <a:spcPct val="100000"/>
               </a:lnSpc>
@@ -3133,7 +3187,7 @@
               <a:buSzPts val="1200"/>
               <a:buFont typeface="Arial"/>
               <a:buNone/>
-              <a:defRPr b="0" i="0" sz="1200" u="none" cap="none" strike="noStrike">
+              <a:defRPr sz="1200" b="0" i="0" u="none" strike="noStrike" cap="none">
                 <a:solidFill>
                   <a:srgbClr val="888888"/>
                 </a:solidFill>
@@ -3145,7 +3199,7 @@
             </a:lvl9pPr>
           </a:lstStyle>
           <a:p>
-            <a:pPr indent="0" lvl="0" marL="0" rtl="0" algn="r">
+            <a:pPr marL="0" lvl="0" indent="0" algn="r" rtl="0">
               <a:spcBef>
                 <a:spcPts val="0"/>
               </a:spcBef>
@@ -3171,11 +3225,11 @@
 </file>
 
 <file path=ppt/slideLayouts/slideLayout10.xml><?xml version="1.0" encoding="utf-8"?>
-<p:sldLayout xmlns:a="http://schemas.openxmlformats.org/drawingml/2006/main" xmlns:r="http://schemas.openxmlformats.org/officeDocument/2006/relationships" xmlns:mc="http://schemas.openxmlformats.org/markup-compatibility/2006" xmlns:mv="urn:schemas-microsoft-com:mac:vml" xmlns:p="http://schemas.openxmlformats.org/presentationml/2006/main" xmlns:c="http://schemas.openxmlformats.org/drawingml/2006/chart" xmlns:dgm="http://schemas.openxmlformats.org/drawingml/2006/diagram" xmlns:o="urn:schemas-microsoft-com:office:office" xmlns:v="urn:schemas-microsoft-com:vml" xmlns:pvml="urn:schemas-microsoft-com:office:powerpoint" xmlns:com="http://schemas.openxmlformats.org/drawingml/2006/compatibility" xmlns:p14="http://schemas.microsoft.com/office/powerpoint/2010/main" xmlns:p15="http://schemas.microsoft.com/office/powerpoint/2012/main" xmlns:ahyp="http://schemas.microsoft.com/office/drawing/2018/hyperlinkcolor" matchingName="Title and Vertical Text" type="vertTx">
+<p:sldLayout xmlns:a="http://schemas.openxmlformats.org/drawingml/2006/main" xmlns:r="http://schemas.openxmlformats.org/officeDocument/2006/relationships" xmlns:p="http://schemas.openxmlformats.org/presentationml/2006/main" matchingName="Title and Vertical Text" type="vertTx">
   <p:cSld name="VERTICAL_TEXT">
     <p:spTree>
       <p:nvGrpSpPr>
-        <p:cNvPr id="68" name="Shape 68"/>
+        <p:cNvPr id="1" name="Shape 68"/>
         <p:cNvGrpSpPr/>
         <p:nvPr/>
       </p:nvGrpSpPr>
@@ -3190,7 +3244,9 @@
       <p:sp>
         <p:nvSpPr>
           <p:cNvPr id="69" name="Google Shape;69;p17"/>
-          <p:cNvSpPr txBox="1"/>
+          <p:cNvSpPr txBox="1">
+            <a:spLocks noGrp="1"/>
+          </p:cNvSpPr>
           <p:nvPr>
             <p:ph type="title"/>
           </p:nvPr>
@@ -3209,7 +3265,7 @@
           </a:ln>
         </p:spPr>
         <p:txBody>
-          <a:bodyPr anchorCtr="0" anchor="ctr" bIns="45700" lIns="91425" spcFirstLastPara="1" rIns="91425" wrap="square" tIns="45700">
+          <a:bodyPr spcFirstLastPara="1" wrap="square" lIns="91425" tIns="45700" rIns="91425" bIns="45700" anchor="ctr" anchorCtr="0">
             <a:normAutofit/>
           </a:bodyPr>
           <a:lstStyle>
@@ -3343,15 +3399,19 @@
               <a:defRPr/>
             </a:lvl9pPr>
           </a:lstStyle>
-          <a:p/>
+          <a:p>
+            <a:endParaRPr/>
+          </a:p>
         </p:txBody>
       </p:sp>
       <p:sp>
         <p:nvSpPr>
           <p:cNvPr id="70" name="Google Shape;70;p17"/>
-          <p:cNvSpPr txBox="1"/>
+          <p:cNvSpPr txBox="1">
+            <a:spLocks noGrp="1"/>
+          </p:cNvSpPr>
           <p:nvPr>
-            <p:ph idx="1" type="body"/>
+            <p:ph type="body" idx="1"/>
           </p:nvPr>
         </p:nvSpPr>
         <p:spPr>
@@ -3368,11 +3428,11 @@
           </a:ln>
         </p:spPr>
         <p:txBody>
-          <a:bodyPr anchorCtr="0" anchor="t" bIns="45700" lIns="91425" spcFirstLastPara="1" rIns="91425" wrap="square" tIns="45700">
+          <a:bodyPr spcFirstLastPara="1" wrap="square" lIns="91425" tIns="45700" rIns="91425" bIns="45700" anchor="t" anchorCtr="0">
             <a:normAutofit/>
           </a:bodyPr>
           <a:lstStyle>
-            <a:lvl1pPr indent="-342900" lvl="0" marL="457200" algn="l">
+            <a:lvl1pPr marL="457200" lvl="0" indent="-342900" algn="l">
               <a:lnSpc>
                 <a:spcPct val="100000"/>
               </a:lnSpc>
@@ -3389,7 +3449,7 @@
               <a:buChar char="•"/>
               <a:defRPr/>
             </a:lvl1pPr>
-            <a:lvl2pPr indent="-342900" lvl="1" marL="914400" algn="l">
+            <a:lvl2pPr marL="914400" lvl="1" indent="-342900" algn="l">
               <a:lnSpc>
                 <a:spcPct val="100000"/>
               </a:lnSpc>
@@ -3406,7 +3466,7 @@
               <a:buChar char="–"/>
               <a:defRPr/>
             </a:lvl2pPr>
-            <a:lvl3pPr indent="-342900" lvl="2" marL="1371600" algn="l">
+            <a:lvl3pPr marL="1371600" lvl="2" indent="-342900" algn="l">
               <a:lnSpc>
                 <a:spcPct val="100000"/>
               </a:lnSpc>
@@ -3423,7 +3483,7 @@
               <a:buChar char="•"/>
               <a:defRPr/>
             </a:lvl3pPr>
-            <a:lvl4pPr indent="-342900" lvl="3" marL="1828800" algn="l">
+            <a:lvl4pPr marL="1828800" lvl="3" indent="-342900" algn="l">
               <a:lnSpc>
                 <a:spcPct val="100000"/>
               </a:lnSpc>
@@ -3440,7 +3500,7 @@
               <a:buChar char="–"/>
               <a:defRPr/>
             </a:lvl4pPr>
-            <a:lvl5pPr indent="-342900" lvl="4" marL="2286000" algn="l">
+            <a:lvl5pPr marL="2286000" lvl="4" indent="-342900" algn="l">
               <a:lnSpc>
                 <a:spcPct val="100000"/>
               </a:lnSpc>
@@ -3457,7 +3517,7 @@
               <a:buChar char="»"/>
               <a:defRPr/>
             </a:lvl5pPr>
-            <a:lvl6pPr indent="-342900" lvl="5" marL="2743200" algn="l">
+            <a:lvl6pPr marL="2743200" lvl="5" indent="-342900" algn="l">
               <a:lnSpc>
                 <a:spcPct val="100000"/>
               </a:lnSpc>
@@ -3474,7 +3534,7 @@
               <a:buChar char="•"/>
               <a:defRPr/>
             </a:lvl6pPr>
-            <a:lvl7pPr indent="-342900" lvl="6" marL="3200400" algn="l">
+            <a:lvl7pPr marL="3200400" lvl="6" indent="-342900" algn="l">
               <a:lnSpc>
                 <a:spcPct val="100000"/>
               </a:lnSpc>
@@ -3491,7 +3551,7 @@
               <a:buChar char="•"/>
               <a:defRPr/>
             </a:lvl7pPr>
-            <a:lvl8pPr indent="-342900" lvl="7" marL="3657600" algn="l">
+            <a:lvl8pPr marL="3657600" lvl="7" indent="-342900" algn="l">
               <a:lnSpc>
                 <a:spcPct val="100000"/>
               </a:lnSpc>
@@ -3508,7 +3568,7 @@
               <a:buChar char="•"/>
               <a:defRPr/>
             </a:lvl8pPr>
-            <a:lvl9pPr indent="-342900" lvl="8" marL="4114800" algn="l">
+            <a:lvl9pPr marL="4114800" lvl="8" indent="-342900" algn="l">
               <a:lnSpc>
                 <a:spcPct val="100000"/>
               </a:lnSpc>
@@ -3526,15 +3586,19 @@
               <a:defRPr/>
             </a:lvl9pPr>
           </a:lstStyle>
-          <a:p/>
+          <a:p>
+            <a:endParaRPr/>
+          </a:p>
         </p:txBody>
       </p:sp>
       <p:sp>
         <p:nvSpPr>
           <p:cNvPr id="71" name="Google Shape;71;p17"/>
-          <p:cNvSpPr txBox="1"/>
+          <p:cNvSpPr txBox="1">
+            <a:spLocks noGrp="1"/>
+          </p:cNvSpPr>
           <p:nvPr>
-            <p:ph idx="10" type="dt"/>
+            <p:ph type="dt" idx="10"/>
           </p:nvPr>
         </p:nvSpPr>
         <p:spPr>
@@ -3551,7 +3615,7 @@
           </a:ln>
         </p:spPr>
         <p:txBody>
-          <a:bodyPr anchorCtr="0" anchor="ctr" bIns="45700" lIns="91425" spcFirstLastPara="1" rIns="91425" wrap="square" tIns="45700">
+          <a:bodyPr spcFirstLastPara="1" wrap="square" lIns="91425" tIns="45700" rIns="91425" bIns="45700" anchor="ctr" anchorCtr="0">
             <a:noAutofit/>
           </a:bodyPr>
           <a:lstStyle>
@@ -3682,15 +3746,19 @@
               <a:defRPr/>
             </a:lvl9pPr>
           </a:lstStyle>
-          <a:p/>
+          <a:p>
+            <a:endParaRPr/>
+          </a:p>
         </p:txBody>
       </p:sp>
       <p:sp>
         <p:nvSpPr>
           <p:cNvPr id="72" name="Google Shape;72;p17"/>
-          <p:cNvSpPr txBox="1"/>
+          <p:cNvSpPr txBox="1">
+            <a:spLocks noGrp="1"/>
+          </p:cNvSpPr>
           <p:nvPr>
-            <p:ph idx="11" type="ftr"/>
+            <p:ph type="ftr" idx="11"/>
           </p:nvPr>
         </p:nvSpPr>
         <p:spPr>
@@ -3707,7 +3775,7 @@
           </a:ln>
         </p:spPr>
         <p:txBody>
-          <a:bodyPr anchorCtr="0" anchor="ctr" bIns="45700" lIns="91425" spcFirstLastPara="1" rIns="91425" wrap="square" tIns="45700">
+          <a:bodyPr spcFirstLastPara="1" wrap="square" lIns="91425" tIns="45700" rIns="91425" bIns="45700" anchor="ctr" anchorCtr="0">
             <a:noAutofit/>
           </a:bodyPr>
           <a:lstStyle>
@@ -3838,15 +3906,19 @@
               <a:defRPr/>
             </a:lvl9pPr>
           </a:lstStyle>
-          <a:p/>
+          <a:p>
+            <a:endParaRPr/>
+          </a:p>
         </p:txBody>
       </p:sp>
       <p:sp>
         <p:nvSpPr>
           <p:cNvPr id="73" name="Google Shape;73;p17"/>
-          <p:cNvSpPr txBox="1"/>
+          <p:cNvSpPr txBox="1">
+            <a:spLocks noGrp="1"/>
+          </p:cNvSpPr>
           <p:nvPr>
-            <p:ph idx="12" type="sldNum"/>
+            <p:ph type="sldNum" idx="12"/>
           </p:nvPr>
         </p:nvSpPr>
         <p:spPr>
@@ -3863,11 +3935,11 @@
           </a:ln>
         </p:spPr>
         <p:txBody>
-          <a:bodyPr anchorCtr="0" anchor="ctr" bIns="45700" lIns="91425" spcFirstLastPara="1" rIns="91425" wrap="square" tIns="45700">
+          <a:bodyPr spcFirstLastPara="1" wrap="square" lIns="91425" tIns="45700" rIns="91425" bIns="45700" anchor="ctr" anchorCtr="0">
             <a:noAutofit/>
           </a:bodyPr>
           <a:lstStyle>
-            <a:lvl1pPr indent="0" lvl="0" marL="0" marR="0" algn="r">
+            <a:lvl1pPr marL="0" marR="0" lvl="0" indent="0" algn="r">
               <a:lnSpc>
                 <a:spcPct val="100000"/>
               </a:lnSpc>
@@ -3883,7 +3955,7 @@
               <a:buSzPts val="1200"/>
               <a:buFont typeface="Arial"/>
               <a:buNone/>
-              <a:defRPr b="0" i="0" sz="1200" u="none" cap="none" strike="noStrike">
+              <a:defRPr sz="1200" b="0" i="0" u="none" strike="noStrike" cap="none">
                 <a:solidFill>
                   <a:srgbClr val="888888"/>
                 </a:solidFill>
@@ -3893,7 +3965,7 @@
                 <a:sym typeface="Calibri"/>
               </a:defRPr>
             </a:lvl1pPr>
-            <a:lvl2pPr indent="0" lvl="1" marL="0" marR="0" algn="r">
+            <a:lvl2pPr marL="0" marR="0" lvl="1" indent="0" algn="r">
               <a:lnSpc>
                 <a:spcPct val="100000"/>
               </a:lnSpc>
@@ -3909,7 +3981,7 @@
               <a:buSzPts val="1200"/>
               <a:buFont typeface="Arial"/>
               <a:buNone/>
-              <a:defRPr b="0" i="0" sz="1200" u="none" cap="none" strike="noStrike">
+              <a:defRPr sz="1200" b="0" i="0" u="none" strike="noStrike" cap="none">
                 <a:solidFill>
                   <a:srgbClr val="888888"/>
                 </a:solidFill>
@@ -3919,7 +3991,7 @@
                 <a:sym typeface="Calibri"/>
               </a:defRPr>
             </a:lvl2pPr>
-            <a:lvl3pPr indent="0" lvl="2" marL="0" marR="0" algn="r">
+            <a:lvl3pPr marL="0" marR="0" lvl="2" indent="0" algn="r">
               <a:lnSpc>
                 <a:spcPct val="100000"/>
               </a:lnSpc>
@@ -3935,7 +4007,7 @@
               <a:buSzPts val="1200"/>
               <a:buFont typeface="Arial"/>
               <a:buNone/>
-              <a:defRPr b="0" i="0" sz="1200" u="none" cap="none" strike="noStrike">
+              <a:defRPr sz="1200" b="0" i="0" u="none" strike="noStrike" cap="none">
                 <a:solidFill>
                   <a:srgbClr val="888888"/>
                 </a:solidFill>
@@ -3945,7 +4017,7 @@
                 <a:sym typeface="Calibri"/>
               </a:defRPr>
             </a:lvl3pPr>
-            <a:lvl4pPr indent="0" lvl="3" marL="0" marR="0" algn="r">
+            <a:lvl4pPr marL="0" marR="0" lvl="3" indent="0" algn="r">
               <a:lnSpc>
                 <a:spcPct val="100000"/>
               </a:lnSpc>
@@ -3961,7 +4033,7 @@
               <a:buSzPts val="1200"/>
               <a:buFont typeface="Arial"/>
               <a:buNone/>
-              <a:defRPr b="0" i="0" sz="1200" u="none" cap="none" strike="noStrike">
+              <a:defRPr sz="1200" b="0" i="0" u="none" strike="noStrike" cap="none">
                 <a:solidFill>
                   <a:srgbClr val="888888"/>
                 </a:solidFill>
@@ -3971,7 +4043,7 @@
                 <a:sym typeface="Calibri"/>
               </a:defRPr>
             </a:lvl4pPr>
-            <a:lvl5pPr indent="0" lvl="4" marL="0" marR="0" algn="r">
+            <a:lvl5pPr marL="0" marR="0" lvl="4" indent="0" algn="r">
               <a:lnSpc>
                 <a:spcPct val="100000"/>
               </a:lnSpc>
@@ -3987,7 +4059,7 @@
               <a:buSzPts val="1200"/>
               <a:buFont typeface="Arial"/>
               <a:buNone/>
-              <a:defRPr b="0" i="0" sz="1200" u="none" cap="none" strike="noStrike">
+              <a:defRPr sz="1200" b="0" i="0" u="none" strike="noStrike" cap="none">
                 <a:solidFill>
                   <a:srgbClr val="888888"/>
                 </a:solidFill>
@@ -3997,7 +4069,7 @@
                 <a:sym typeface="Calibri"/>
               </a:defRPr>
             </a:lvl5pPr>
-            <a:lvl6pPr indent="0" lvl="5" marL="0" marR="0" algn="r">
+            <a:lvl6pPr marL="0" marR="0" lvl="5" indent="0" algn="r">
               <a:lnSpc>
                 <a:spcPct val="100000"/>
               </a:lnSpc>
@@ -4013,7 +4085,7 @@
               <a:buSzPts val="1200"/>
               <a:buFont typeface="Arial"/>
               <a:buNone/>
-              <a:defRPr b="0" i="0" sz="1200" u="none" cap="none" strike="noStrike">
+              <a:defRPr sz="1200" b="0" i="0" u="none" strike="noStrike" cap="none">
                 <a:solidFill>
                   <a:srgbClr val="888888"/>
                 </a:solidFill>
@@ -4023,7 +4095,7 @@
                 <a:sym typeface="Calibri"/>
               </a:defRPr>
             </a:lvl6pPr>
-            <a:lvl7pPr indent="0" lvl="6" marL="0" marR="0" algn="r">
+            <a:lvl7pPr marL="0" marR="0" lvl="6" indent="0" algn="r">
               <a:lnSpc>
                 <a:spcPct val="100000"/>
               </a:lnSpc>
@@ -4039,7 +4111,7 @@
               <a:buSzPts val="1200"/>
               <a:buFont typeface="Arial"/>
               <a:buNone/>
-              <a:defRPr b="0" i="0" sz="1200" u="none" cap="none" strike="noStrike">
+              <a:defRPr sz="1200" b="0" i="0" u="none" strike="noStrike" cap="none">
                 <a:solidFill>
                   <a:srgbClr val="888888"/>
                 </a:solidFill>
@@ -4049,7 +4121,7 @@
                 <a:sym typeface="Calibri"/>
               </a:defRPr>
             </a:lvl7pPr>
-            <a:lvl8pPr indent="0" lvl="7" marL="0" marR="0" algn="r">
+            <a:lvl8pPr marL="0" marR="0" lvl="7" indent="0" algn="r">
               <a:lnSpc>
                 <a:spcPct val="100000"/>
               </a:lnSpc>
@@ -4065,7 +4137,7 @@
               <a:buSzPts val="1200"/>
               <a:buFont typeface="Arial"/>
               <a:buNone/>
-              <a:defRPr b="0" i="0" sz="1200" u="none" cap="none" strike="noStrike">
+              <a:defRPr sz="1200" b="0" i="0" u="none" strike="noStrike" cap="none">
                 <a:solidFill>
                   <a:srgbClr val="888888"/>
                 </a:solidFill>
@@ -4075,7 +4147,7 @@
                 <a:sym typeface="Calibri"/>
               </a:defRPr>
             </a:lvl8pPr>
-            <a:lvl9pPr indent="0" lvl="8" marL="0" marR="0" algn="r">
+            <a:lvl9pPr marL="0" marR="0" lvl="8" indent="0" algn="r">
               <a:lnSpc>
                 <a:spcPct val="100000"/>
               </a:lnSpc>
@@ -4091,7 +4163,7 @@
               <a:buSzPts val="1200"/>
               <a:buFont typeface="Arial"/>
               <a:buNone/>
-              <a:defRPr b="0" i="0" sz="1200" u="none" cap="none" strike="noStrike">
+              <a:defRPr sz="1200" b="0" i="0" u="none" strike="noStrike" cap="none">
                 <a:solidFill>
                   <a:srgbClr val="888888"/>
                 </a:solidFill>
@@ -4103,7 +4175,7 @@
             </a:lvl9pPr>
           </a:lstStyle>
           <a:p>
-            <a:pPr indent="0" lvl="0" marL="0" rtl="0" algn="r">
+            <a:pPr marL="0" lvl="0" indent="0" algn="r" rtl="0">
               <a:spcBef>
                 <a:spcPts val="0"/>
               </a:spcBef>
@@ -4129,11 +4201,11 @@
 </file>
 
 <file path=ppt/slideLayouts/slideLayout11.xml><?xml version="1.0" encoding="utf-8"?>
-<p:sldLayout xmlns:a="http://schemas.openxmlformats.org/drawingml/2006/main" xmlns:r="http://schemas.openxmlformats.org/officeDocument/2006/relationships" xmlns:mc="http://schemas.openxmlformats.org/markup-compatibility/2006" xmlns:mv="urn:schemas-microsoft-com:mac:vml" xmlns:p="http://schemas.openxmlformats.org/presentationml/2006/main" xmlns:c="http://schemas.openxmlformats.org/drawingml/2006/chart" xmlns:dgm="http://schemas.openxmlformats.org/drawingml/2006/diagram" xmlns:o="urn:schemas-microsoft-com:office:office" xmlns:v="urn:schemas-microsoft-com:vml" xmlns:pvml="urn:schemas-microsoft-com:office:powerpoint" xmlns:com="http://schemas.openxmlformats.org/drawingml/2006/compatibility" xmlns:p14="http://schemas.microsoft.com/office/powerpoint/2010/main" xmlns:p15="http://schemas.microsoft.com/office/powerpoint/2012/main" xmlns:ahyp="http://schemas.microsoft.com/office/drawing/2018/hyperlinkcolor" matchingName="Vertical Title and Text" type="vertTitleAndTx">
+<p:sldLayout xmlns:a="http://schemas.openxmlformats.org/drawingml/2006/main" xmlns:r="http://schemas.openxmlformats.org/officeDocument/2006/relationships" xmlns:p="http://schemas.openxmlformats.org/presentationml/2006/main" matchingName="Vertical Title and Text" type="vertTitleAndTx">
   <p:cSld name="VERTICAL_TITLE_AND_VERTICAL_TEXT">
     <p:spTree>
       <p:nvGrpSpPr>
-        <p:cNvPr id="74" name="Shape 74"/>
+        <p:cNvPr id="1" name="Shape 74"/>
         <p:cNvGrpSpPr/>
         <p:nvPr/>
       </p:nvGrpSpPr>
@@ -4148,7 +4220,9 @@
       <p:sp>
         <p:nvSpPr>
           <p:cNvPr id="75" name="Google Shape;75;p18"/>
-          <p:cNvSpPr txBox="1"/>
+          <p:cNvSpPr txBox="1">
+            <a:spLocks noGrp="1"/>
+          </p:cNvSpPr>
           <p:nvPr>
             <p:ph type="title"/>
           </p:nvPr>
@@ -4167,7 +4241,7 @@
           </a:ln>
         </p:spPr>
         <p:txBody>
-          <a:bodyPr anchorCtr="0" anchor="ctr" bIns="45700" lIns="91425" spcFirstLastPara="1" rIns="91425" wrap="square" tIns="45700">
+          <a:bodyPr spcFirstLastPara="1" wrap="square" lIns="91425" tIns="45700" rIns="91425" bIns="45700" anchor="ctr" anchorCtr="0">
             <a:normAutofit/>
           </a:bodyPr>
           <a:lstStyle>
@@ -4301,15 +4375,19 @@
               <a:defRPr/>
             </a:lvl9pPr>
           </a:lstStyle>
-          <a:p/>
+          <a:p>
+            <a:endParaRPr/>
+          </a:p>
         </p:txBody>
       </p:sp>
       <p:sp>
         <p:nvSpPr>
           <p:cNvPr id="76" name="Google Shape;76;p18"/>
-          <p:cNvSpPr txBox="1"/>
+          <p:cNvSpPr txBox="1">
+            <a:spLocks noGrp="1"/>
+          </p:cNvSpPr>
           <p:nvPr>
-            <p:ph idx="1" type="body"/>
+            <p:ph type="body" idx="1"/>
           </p:nvPr>
         </p:nvSpPr>
         <p:spPr>
@@ -4326,11 +4404,11 @@
           </a:ln>
         </p:spPr>
         <p:txBody>
-          <a:bodyPr anchorCtr="0" anchor="t" bIns="45700" lIns="91425" spcFirstLastPara="1" rIns="91425" wrap="square" tIns="45700">
+          <a:bodyPr spcFirstLastPara="1" wrap="square" lIns="91425" tIns="45700" rIns="91425" bIns="45700" anchor="t" anchorCtr="0">
             <a:normAutofit/>
           </a:bodyPr>
           <a:lstStyle>
-            <a:lvl1pPr indent="-342900" lvl="0" marL="457200" algn="l">
+            <a:lvl1pPr marL="457200" lvl="0" indent="-342900" algn="l">
               <a:lnSpc>
                 <a:spcPct val="100000"/>
               </a:lnSpc>
@@ -4347,7 +4425,7 @@
               <a:buChar char="•"/>
               <a:defRPr/>
             </a:lvl1pPr>
-            <a:lvl2pPr indent="-342900" lvl="1" marL="914400" algn="l">
+            <a:lvl2pPr marL="914400" lvl="1" indent="-342900" algn="l">
               <a:lnSpc>
                 <a:spcPct val="100000"/>
               </a:lnSpc>
@@ -4364,7 +4442,7 @@
               <a:buChar char="–"/>
               <a:defRPr/>
             </a:lvl2pPr>
-            <a:lvl3pPr indent="-342900" lvl="2" marL="1371600" algn="l">
+            <a:lvl3pPr marL="1371600" lvl="2" indent="-342900" algn="l">
               <a:lnSpc>
                 <a:spcPct val="100000"/>
               </a:lnSpc>
@@ -4381,7 +4459,7 @@
               <a:buChar char="•"/>
               <a:defRPr/>
             </a:lvl3pPr>
-            <a:lvl4pPr indent="-342900" lvl="3" marL="1828800" algn="l">
+            <a:lvl4pPr marL="1828800" lvl="3" indent="-342900" algn="l">
               <a:lnSpc>
                 <a:spcPct val="100000"/>
               </a:lnSpc>
@@ -4398,7 +4476,7 @@
               <a:buChar char="–"/>
               <a:defRPr/>
             </a:lvl4pPr>
-            <a:lvl5pPr indent="-342900" lvl="4" marL="2286000" algn="l">
+            <a:lvl5pPr marL="2286000" lvl="4" indent="-342900" algn="l">
               <a:lnSpc>
                 <a:spcPct val="100000"/>
               </a:lnSpc>
@@ -4415,7 +4493,7 @@
               <a:buChar char="»"/>
               <a:defRPr/>
             </a:lvl5pPr>
-            <a:lvl6pPr indent="-342900" lvl="5" marL="2743200" algn="l">
+            <a:lvl6pPr marL="2743200" lvl="5" indent="-342900" algn="l">
               <a:lnSpc>
                 <a:spcPct val="100000"/>
               </a:lnSpc>
@@ -4432,7 +4510,7 @@
               <a:buChar char="•"/>
               <a:defRPr/>
             </a:lvl6pPr>
-            <a:lvl7pPr indent="-342900" lvl="6" marL="3200400" algn="l">
+            <a:lvl7pPr marL="3200400" lvl="6" indent="-342900" algn="l">
               <a:lnSpc>
                 <a:spcPct val="100000"/>
               </a:lnSpc>
@@ -4449,7 +4527,7 @@
               <a:buChar char="•"/>
               <a:defRPr/>
             </a:lvl7pPr>
-            <a:lvl8pPr indent="-342900" lvl="7" marL="3657600" algn="l">
+            <a:lvl8pPr marL="3657600" lvl="7" indent="-342900" algn="l">
               <a:lnSpc>
                 <a:spcPct val="100000"/>
               </a:lnSpc>
@@ -4466,7 +4544,7 @@
               <a:buChar char="•"/>
               <a:defRPr/>
             </a:lvl8pPr>
-            <a:lvl9pPr indent="-342900" lvl="8" marL="4114800" algn="l">
+            <a:lvl9pPr marL="4114800" lvl="8" indent="-342900" algn="l">
               <a:lnSpc>
                 <a:spcPct val="100000"/>
               </a:lnSpc>
@@ -4484,15 +4562,19 @@
               <a:defRPr/>
             </a:lvl9pPr>
           </a:lstStyle>
-          <a:p/>
+          <a:p>
+            <a:endParaRPr/>
+          </a:p>
         </p:txBody>
       </p:sp>
       <p:sp>
         <p:nvSpPr>
           <p:cNvPr id="77" name="Google Shape;77;p18"/>
-          <p:cNvSpPr txBox="1"/>
+          <p:cNvSpPr txBox="1">
+            <a:spLocks noGrp="1"/>
+          </p:cNvSpPr>
           <p:nvPr>
-            <p:ph idx="10" type="dt"/>
+            <p:ph type="dt" idx="10"/>
           </p:nvPr>
         </p:nvSpPr>
         <p:spPr>
@@ -4509,7 +4591,7 @@
           </a:ln>
         </p:spPr>
         <p:txBody>
-          <a:bodyPr anchorCtr="0" anchor="ctr" bIns="45700" lIns="91425" spcFirstLastPara="1" rIns="91425" wrap="square" tIns="45700">
+          <a:bodyPr spcFirstLastPara="1" wrap="square" lIns="91425" tIns="45700" rIns="91425" bIns="45700" anchor="ctr" anchorCtr="0">
             <a:noAutofit/>
           </a:bodyPr>
           <a:lstStyle>
@@ -4640,15 +4722,19 @@
               <a:defRPr/>
             </a:lvl9pPr>
           </a:lstStyle>
-          <a:p/>
+          <a:p>
+            <a:endParaRPr/>
+          </a:p>
         </p:txBody>
       </p:sp>
       <p:sp>
         <p:nvSpPr>
           <p:cNvPr id="78" name="Google Shape;78;p18"/>
-          <p:cNvSpPr txBox="1"/>
+          <p:cNvSpPr txBox="1">
+            <a:spLocks noGrp="1"/>
+          </p:cNvSpPr>
           <p:nvPr>
-            <p:ph idx="11" type="ftr"/>
+            <p:ph type="ftr" idx="11"/>
           </p:nvPr>
         </p:nvSpPr>
         <p:spPr>
@@ -4665,7 +4751,7 @@
           </a:ln>
         </p:spPr>
         <p:txBody>
-          <a:bodyPr anchorCtr="0" anchor="ctr" bIns="45700" lIns="91425" spcFirstLastPara="1" rIns="91425" wrap="square" tIns="45700">
+          <a:bodyPr spcFirstLastPara="1" wrap="square" lIns="91425" tIns="45700" rIns="91425" bIns="45700" anchor="ctr" anchorCtr="0">
             <a:noAutofit/>
           </a:bodyPr>
           <a:lstStyle>
@@ -4796,15 +4882,19 @@
               <a:defRPr/>
             </a:lvl9pPr>
           </a:lstStyle>
-          <a:p/>
+          <a:p>
+            <a:endParaRPr/>
+          </a:p>
         </p:txBody>
       </p:sp>
       <p:sp>
         <p:nvSpPr>
           <p:cNvPr id="79" name="Google Shape;79;p18"/>
-          <p:cNvSpPr txBox="1"/>
+          <p:cNvSpPr txBox="1">
+            <a:spLocks noGrp="1"/>
+          </p:cNvSpPr>
           <p:nvPr>
-            <p:ph idx="12" type="sldNum"/>
+            <p:ph type="sldNum" idx="12"/>
           </p:nvPr>
         </p:nvSpPr>
         <p:spPr>
@@ -4821,11 +4911,11 @@
           </a:ln>
         </p:spPr>
         <p:txBody>
-          <a:bodyPr anchorCtr="0" anchor="ctr" bIns="45700" lIns="91425" spcFirstLastPara="1" rIns="91425" wrap="square" tIns="45700">
+          <a:bodyPr spcFirstLastPara="1" wrap="square" lIns="91425" tIns="45700" rIns="91425" bIns="45700" anchor="ctr" anchorCtr="0">
             <a:noAutofit/>
           </a:bodyPr>
           <a:lstStyle>
-            <a:lvl1pPr indent="0" lvl="0" marL="0" marR="0" algn="r">
+            <a:lvl1pPr marL="0" marR="0" lvl="0" indent="0" algn="r">
               <a:lnSpc>
                 <a:spcPct val="100000"/>
               </a:lnSpc>
@@ -4841,7 +4931,7 @@
               <a:buSzPts val="1200"/>
               <a:buFont typeface="Arial"/>
               <a:buNone/>
-              <a:defRPr b="0" i="0" sz="1200" u="none" cap="none" strike="noStrike">
+              <a:defRPr sz="1200" b="0" i="0" u="none" strike="noStrike" cap="none">
                 <a:solidFill>
                   <a:srgbClr val="888888"/>
                 </a:solidFill>
@@ -4851,7 +4941,7 @@
                 <a:sym typeface="Calibri"/>
               </a:defRPr>
             </a:lvl1pPr>
-            <a:lvl2pPr indent="0" lvl="1" marL="0" marR="0" algn="r">
+            <a:lvl2pPr marL="0" marR="0" lvl="1" indent="0" algn="r">
               <a:lnSpc>
                 <a:spcPct val="100000"/>
               </a:lnSpc>
@@ -4867,7 +4957,7 @@
               <a:buSzPts val="1200"/>
               <a:buFont typeface="Arial"/>
               <a:buNone/>
-              <a:defRPr b="0" i="0" sz="1200" u="none" cap="none" strike="noStrike">
+              <a:defRPr sz="1200" b="0" i="0" u="none" strike="noStrike" cap="none">
                 <a:solidFill>
                   <a:srgbClr val="888888"/>
                 </a:solidFill>
@@ -4877,7 +4967,7 @@
                 <a:sym typeface="Calibri"/>
               </a:defRPr>
             </a:lvl2pPr>
-            <a:lvl3pPr indent="0" lvl="2" marL="0" marR="0" algn="r">
+            <a:lvl3pPr marL="0" marR="0" lvl="2" indent="0" algn="r">
               <a:lnSpc>
                 <a:spcPct val="100000"/>
               </a:lnSpc>
@@ -4893,7 +4983,7 @@
               <a:buSzPts val="1200"/>
               <a:buFont typeface="Arial"/>
               <a:buNone/>
-              <a:defRPr b="0" i="0" sz="1200" u="none" cap="none" strike="noStrike">
+              <a:defRPr sz="1200" b="0" i="0" u="none" strike="noStrike" cap="none">
                 <a:solidFill>
                   <a:srgbClr val="888888"/>
                 </a:solidFill>
@@ -4903,7 +4993,7 @@
                 <a:sym typeface="Calibri"/>
               </a:defRPr>
             </a:lvl3pPr>
-            <a:lvl4pPr indent="0" lvl="3" marL="0" marR="0" algn="r">
+            <a:lvl4pPr marL="0" marR="0" lvl="3" indent="0" algn="r">
               <a:lnSpc>
                 <a:spcPct val="100000"/>
               </a:lnSpc>
@@ -4919,7 +5009,7 @@
               <a:buSzPts val="1200"/>
               <a:buFont typeface="Arial"/>
               <a:buNone/>
-              <a:defRPr b="0" i="0" sz="1200" u="none" cap="none" strike="noStrike">
+              <a:defRPr sz="1200" b="0" i="0" u="none" strike="noStrike" cap="none">
                 <a:solidFill>
                   <a:srgbClr val="888888"/>
                 </a:solidFill>
@@ -4929,7 +5019,7 @@
                 <a:sym typeface="Calibri"/>
               </a:defRPr>
             </a:lvl4pPr>
-            <a:lvl5pPr indent="0" lvl="4" marL="0" marR="0" algn="r">
+            <a:lvl5pPr marL="0" marR="0" lvl="4" indent="0" algn="r">
               <a:lnSpc>
                 <a:spcPct val="100000"/>
               </a:lnSpc>
@@ -4945,7 +5035,7 @@
               <a:buSzPts val="1200"/>
               <a:buFont typeface="Arial"/>
               <a:buNone/>
-              <a:defRPr b="0" i="0" sz="1200" u="none" cap="none" strike="noStrike">
+              <a:defRPr sz="1200" b="0" i="0" u="none" strike="noStrike" cap="none">
                 <a:solidFill>
                   <a:srgbClr val="888888"/>
                 </a:solidFill>
@@ -4955,7 +5045,7 @@
                 <a:sym typeface="Calibri"/>
               </a:defRPr>
             </a:lvl5pPr>
-            <a:lvl6pPr indent="0" lvl="5" marL="0" marR="0" algn="r">
+            <a:lvl6pPr marL="0" marR="0" lvl="5" indent="0" algn="r">
               <a:lnSpc>
                 <a:spcPct val="100000"/>
               </a:lnSpc>
@@ -4971,7 +5061,7 @@
               <a:buSzPts val="1200"/>
               <a:buFont typeface="Arial"/>
               <a:buNone/>
-              <a:defRPr b="0" i="0" sz="1200" u="none" cap="none" strike="noStrike">
+              <a:defRPr sz="1200" b="0" i="0" u="none" strike="noStrike" cap="none">
                 <a:solidFill>
                   <a:srgbClr val="888888"/>
                 </a:solidFill>
@@ -4981,7 +5071,7 @@
                 <a:sym typeface="Calibri"/>
               </a:defRPr>
             </a:lvl6pPr>
-            <a:lvl7pPr indent="0" lvl="6" marL="0" marR="0" algn="r">
+            <a:lvl7pPr marL="0" marR="0" lvl="6" indent="0" algn="r">
               <a:lnSpc>
                 <a:spcPct val="100000"/>
               </a:lnSpc>
@@ -4997,7 +5087,7 @@
               <a:buSzPts val="1200"/>
               <a:buFont typeface="Arial"/>
               <a:buNone/>
-              <a:defRPr b="0" i="0" sz="1200" u="none" cap="none" strike="noStrike">
+              <a:defRPr sz="1200" b="0" i="0" u="none" strike="noStrike" cap="none">
                 <a:solidFill>
                   <a:srgbClr val="888888"/>
                 </a:solidFill>
@@ -5007,7 +5097,7 @@
                 <a:sym typeface="Calibri"/>
               </a:defRPr>
             </a:lvl7pPr>
-            <a:lvl8pPr indent="0" lvl="7" marL="0" marR="0" algn="r">
+            <a:lvl8pPr marL="0" marR="0" lvl="7" indent="0" algn="r">
               <a:lnSpc>
                 <a:spcPct val="100000"/>
               </a:lnSpc>
@@ -5023,7 +5113,7 @@
               <a:buSzPts val="1200"/>
               <a:buFont typeface="Arial"/>
               <a:buNone/>
-              <a:defRPr b="0" i="0" sz="1200" u="none" cap="none" strike="noStrike">
+              <a:defRPr sz="1200" b="0" i="0" u="none" strike="noStrike" cap="none">
                 <a:solidFill>
                   <a:srgbClr val="888888"/>
                 </a:solidFill>
@@ -5033,7 +5123,7 @@
                 <a:sym typeface="Calibri"/>
               </a:defRPr>
             </a:lvl8pPr>
-            <a:lvl9pPr indent="0" lvl="8" marL="0" marR="0" algn="r">
+            <a:lvl9pPr marL="0" marR="0" lvl="8" indent="0" algn="r">
               <a:lnSpc>
                 <a:spcPct val="100000"/>
               </a:lnSpc>
@@ -5049,7 +5139,7 @@
               <a:buSzPts val="1200"/>
               <a:buFont typeface="Arial"/>
               <a:buNone/>
-              <a:defRPr b="0" i="0" sz="1200" u="none" cap="none" strike="noStrike">
+              <a:defRPr sz="1200" b="0" i="0" u="none" strike="noStrike" cap="none">
                 <a:solidFill>
                   <a:srgbClr val="888888"/>
                 </a:solidFill>
@@ -5061,7 +5151,7 @@
             </a:lvl9pPr>
           </a:lstStyle>
           <a:p>
-            <a:pPr indent="0" lvl="0" marL="0" rtl="0" algn="r">
+            <a:pPr marL="0" lvl="0" indent="0" algn="r" rtl="0">
               <a:spcBef>
                 <a:spcPts val="0"/>
               </a:spcBef>
@@ -5087,11 +5177,11 @@
 </file>
 
 <file path=ppt/slideLayouts/slideLayout2.xml><?xml version="1.0" encoding="utf-8"?>
-<p:sldLayout xmlns:a="http://schemas.openxmlformats.org/drawingml/2006/main" xmlns:r="http://schemas.openxmlformats.org/officeDocument/2006/relationships" xmlns:mc="http://schemas.openxmlformats.org/markup-compatibility/2006" xmlns:mv="urn:schemas-microsoft-com:mac:vml" xmlns:p="http://schemas.openxmlformats.org/presentationml/2006/main" xmlns:c="http://schemas.openxmlformats.org/drawingml/2006/chart" xmlns:dgm="http://schemas.openxmlformats.org/drawingml/2006/diagram" xmlns:o="urn:schemas-microsoft-com:office:office" xmlns:v="urn:schemas-microsoft-com:vml" xmlns:pvml="urn:schemas-microsoft-com:office:powerpoint" xmlns:com="http://schemas.openxmlformats.org/drawingml/2006/compatibility" xmlns:p14="http://schemas.microsoft.com/office/powerpoint/2010/main" xmlns:p15="http://schemas.microsoft.com/office/powerpoint/2012/main" xmlns:ahyp="http://schemas.microsoft.com/office/drawing/2018/hyperlinkcolor" matchingName="Title Slide" type="title">
+<p:sldLayout xmlns:a="http://schemas.openxmlformats.org/drawingml/2006/main" xmlns:r="http://schemas.openxmlformats.org/officeDocument/2006/relationships" xmlns:p="http://schemas.openxmlformats.org/presentationml/2006/main" matchingName="Title Slide" type="title">
   <p:cSld name="TITLE">
     <p:spTree>
       <p:nvGrpSpPr>
-        <p:cNvPr id="17" name="Shape 17"/>
+        <p:cNvPr id="1" name="Shape 17"/>
         <p:cNvGrpSpPr/>
         <p:nvPr/>
       </p:nvGrpSpPr>
@@ -5106,7 +5196,9 @@
       <p:sp>
         <p:nvSpPr>
           <p:cNvPr id="18" name="Google Shape;18;p9"/>
-          <p:cNvSpPr txBox="1"/>
+          <p:cNvSpPr txBox="1">
+            <a:spLocks noGrp="1"/>
+          </p:cNvSpPr>
           <p:nvPr>
             <p:ph type="ctrTitle"/>
           </p:nvPr>
@@ -5125,7 +5217,7 @@
           </a:ln>
         </p:spPr>
         <p:txBody>
-          <a:bodyPr anchorCtr="0" anchor="ctr" bIns="45700" lIns="91425" spcFirstLastPara="1" rIns="91425" wrap="square" tIns="45700">
+          <a:bodyPr spcFirstLastPara="1" wrap="square" lIns="91425" tIns="45700" rIns="91425" bIns="45700" anchor="ctr" anchorCtr="0">
             <a:normAutofit/>
           </a:bodyPr>
           <a:lstStyle>
@@ -5259,15 +5351,19 @@
               <a:defRPr/>
             </a:lvl9pPr>
           </a:lstStyle>
-          <a:p/>
+          <a:p>
+            <a:endParaRPr/>
+          </a:p>
         </p:txBody>
       </p:sp>
       <p:sp>
         <p:nvSpPr>
           <p:cNvPr id="19" name="Google Shape;19;p9"/>
-          <p:cNvSpPr txBox="1"/>
+          <p:cNvSpPr txBox="1">
+            <a:spLocks noGrp="1"/>
+          </p:cNvSpPr>
           <p:nvPr>
-            <p:ph idx="1" type="subTitle"/>
+            <p:ph type="subTitle" idx="1"/>
           </p:nvPr>
         </p:nvSpPr>
         <p:spPr>
@@ -5284,7 +5380,7 @@
           </a:ln>
         </p:spPr>
         <p:txBody>
-          <a:bodyPr anchorCtr="0" anchor="t" bIns="45700" lIns="91425" spcFirstLastPara="1" rIns="91425" wrap="square" tIns="45700">
+          <a:bodyPr spcFirstLastPara="1" wrap="square" lIns="91425" tIns="45700" rIns="91425" bIns="45700" anchor="t" anchorCtr="0">
             <a:normAutofit/>
           </a:bodyPr>
           <a:lstStyle>
@@ -5478,15 +5574,19 @@
               </a:defRPr>
             </a:lvl9pPr>
           </a:lstStyle>
-          <a:p/>
+          <a:p>
+            <a:endParaRPr/>
+          </a:p>
         </p:txBody>
       </p:sp>
       <p:sp>
         <p:nvSpPr>
           <p:cNvPr id="20" name="Google Shape;20;p9"/>
-          <p:cNvSpPr txBox="1"/>
+          <p:cNvSpPr txBox="1">
+            <a:spLocks noGrp="1"/>
+          </p:cNvSpPr>
           <p:nvPr>
-            <p:ph idx="10" type="dt"/>
+            <p:ph type="dt" idx="10"/>
           </p:nvPr>
         </p:nvSpPr>
         <p:spPr>
@@ -5503,7 +5603,7 @@
           </a:ln>
         </p:spPr>
         <p:txBody>
-          <a:bodyPr anchorCtr="0" anchor="ctr" bIns="45700" lIns="91425" spcFirstLastPara="1" rIns="91425" wrap="square" tIns="45700">
+          <a:bodyPr spcFirstLastPara="1" wrap="square" lIns="91425" tIns="45700" rIns="91425" bIns="45700" anchor="ctr" anchorCtr="0">
             <a:noAutofit/>
           </a:bodyPr>
           <a:lstStyle>
@@ -5634,15 +5734,19 @@
               <a:defRPr/>
             </a:lvl9pPr>
           </a:lstStyle>
-          <a:p/>
+          <a:p>
+            <a:endParaRPr/>
+          </a:p>
         </p:txBody>
       </p:sp>
       <p:sp>
         <p:nvSpPr>
           <p:cNvPr id="21" name="Google Shape;21;p9"/>
-          <p:cNvSpPr txBox="1"/>
+          <p:cNvSpPr txBox="1">
+            <a:spLocks noGrp="1"/>
+          </p:cNvSpPr>
           <p:nvPr>
-            <p:ph idx="11" type="ftr"/>
+            <p:ph type="ftr" idx="11"/>
           </p:nvPr>
         </p:nvSpPr>
         <p:spPr>
@@ -5659,7 +5763,7 @@
           </a:ln>
         </p:spPr>
         <p:txBody>
-          <a:bodyPr anchorCtr="0" anchor="ctr" bIns="45700" lIns="91425" spcFirstLastPara="1" rIns="91425" wrap="square" tIns="45700">
+          <a:bodyPr spcFirstLastPara="1" wrap="square" lIns="91425" tIns="45700" rIns="91425" bIns="45700" anchor="ctr" anchorCtr="0">
             <a:noAutofit/>
           </a:bodyPr>
           <a:lstStyle>
@@ -5790,15 +5894,19 @@
               <a:defRPr/>
             </a:lvl9pPr>
           </a:lstStyle>
-          <a:p/>
+          <a:p>
+            <a:endParaRPr/>
+          </a:p>
         </p:txBody>
       </p:sp>
       <p:sp>
         <p:nvSpPr>
           <p:cNvPr id="22" name="Google Shape;22;p9"/>
-          <p:cNvSpPr txBox="1"/>
+          <p:cNvSpPr txBox="1">
+            <a:spLocks noGrp="1"/>
+          </p:cNvSpPr>
           <p:nvPr>
-            <p:ph idx="12" type="sldNum"/>
+            <p:ph type="sldNum" idx="12"/>
           </p:nvPr>
         </p:nvSpPr>
         <p:spPr>
@@ -5815,11 +5923,11 @@
           </a:ln>
         </p:spPr>
         <p:txBody>
-          <a:bodyPr anchorCtr="0" anchor="ctr" bIns="45700" lIns="91425" spcFirstLastPara="1" rIns="91425" wrap="square" tIns="45700">
+          <a:bodyPr spcFirstLastPara="1" wrap="square" lIns="91425" tIns="45700" rIns="91425" bIns="45700" anchor="ctr" anchorCtr="0">
             <a:noAutofit/>
           </a:bodyPr>
           <a:lstStyle>
-            <a:lvl1pPr indent="0" lvl="0" marL="0" marR="0" algn="r">
+            <a:lvl1pPr marL="0" marR="0" lvl="0" indent="0" algn="r">
               <a:lnSpc>
                 <a:spcPct val="100000"/>
               </a:lnSpc>
@@ -5835,7 +5943,7 @@
               <a:buSzPts val="1200"/>
               <a:buFont typeface="Arial"/>
               <a:buNone/>
-              <a:defRPr b="0" i="0" sz="1200" u="none" cap="none" strike="noStrike">
+              <a:defRPr sz="1200" b="0" i="0" u="none" strike="noStrike" cap="none">
                 <a:solidFill>
                   <a:srgbClr val="888888"/>
                 </a:solidFill>
@@ -5845,7 +5953,7 @@
                 <a:sym typeface="Calibri"/>
               </a:defRPr>
             </a:lvl1pPr>
-            <a:lvl2pPr indent="0" lvl="1" marL="0" marR="0" algn="r">
+            <a:lvl2pPr marL="0" marR="0" lvl="1" indent="0" algn="r">
               <a:lnSpc>
                 <a:spcPct val="100000"/>
               </a:lnSpc>
@@ -5861,7 +5969,7 @@
               <a:buSzPts val="1200"/>
               <a:buFont typeface="Arial"/>
               <a:buNone/>
-              <a:defRPr b="0" i="0" sz="1200" u="none" cap="none" strike="noStrike">
+              <a:defRPr sz="1200" b="0" i="0" u="none" strike="noStrike" cap="none">
                 <a:solidFill>
                   <a:srgbClr val="888888"/>
                 </a:solidFill>
@@ -5871,7 +5979,7 @@
                 <a:sym typeface="Calibri"/>
               </a:defRPr>
             </a:lvl2pPr>
-            <a:lvl3pPr indent="0" lvl="2" marL="0" marR="0" algn="r">
+            <a:lvl3pPr marL="0" marR="0" lvl="2" indent="0" algn="r">
               <a:lnSpc>
                 <a:spcPct val="100000"/>
               </a:lnSpc>
@@ -5887,7 +5995,7 @@
               <a:buSzPts val="1200"/>
               <a:buFont typeface="Arial"/>
               <a:buNone/>
-              <a:defRPr b="0" i="0" sz="1200" u="none" cap="none" strike="noStrike">
+              <a:defRPr sz="1200" b="0" i="0" u="none" strike="noStrike" cap="none">
                 <a:solidFill>
                   <a:srgbClr val="888888"/>
                 </a:solidFill>
@@ -5897,7 +6005,7 @@
                 <a:sym typeface="Calibri"/>
               </a:defRPr>
             </a:lvl3pPr>
-            <a:lvl4pPr indent="0" lvl="3" marL="0" marR="0" algn="r">
+            <a:lvl4pPr marL="0" marR="0" lvl="3" indent="0" algn="r">
               <a:lnSpc>
                 <a:spcPct val="100000"/>
               </a:lnSpc>
@@ -5913,7 +6021,7 @@
               <a:buSzPts val="1200"/>
               <a:buFont typeface="Arial"/>
               <a:buNone/>
-              <a:defRPr b="0" i="0" sz="1200" u="none" cap="none" strike="noStrike">
+              <a:defRPr sz="1200" b="0" i="0" u="none" strike="noStrike" cap="none">
                 <a:solidFill>
                   <a:srgbClr val="888888"/>
                 </a:solidFill>
@@ -5923,7 +6031,7 @@
                 <a:sym typeface="Calibri"/>
               </a:defRPr>
             </a:lvl4pPr>
-            <a:lvl5pPr indent="0" lvl="4" marL="0" marR="0" algn="r">
+            <a:lvl5pPr marL="0" marR="0" lvl="4" indent="0" algn="r">
               <a:lnSpc>
                 <a:spcPct val="100000"/>
               </a:lnSpc>
@@ -5939,7 +6047,7 @@
               <a:buSzPts val="1200"/>
               <a:buFont typeface="Arial"/>
               <a:buNone/>
-              <a:defRPr b="0" i="0" sz="1200" u="none" cap="none" strike="noStrike">
+              <a:defRPr sz="1200" b="0" i="0" u="none" strike="noStrike" cap="none">
                 <a:solidFill>
                   <a:srgbClr val="888888"/>
                 </a:solidFill>
@@ -5949,7 +6057,7 @@
                 <a:sym typeface="Calibri"/>
               </a:defRPr>
             </a:lvl5pPr>
-            <a:lvl6pPr indent="0" lvl="5" marL="0" marR="0" algn="r">
+            <a:lvl6pPr marL="0" marR="0" lvl="5" indent="0" algn="r">
               <a:lnSpc>
                 <a:spcPct val="100000"/>
               </a:lnSpc>
@@ -5965,7 +6073,7 @@
               <a:buSzPts val="1200"/>
               <a:buFont typeface="Arial"/>
               <a:buNone/>
-              <a:defRPr b="0" i="0" sz="1200" u="none" cap="none" strike="noStrike">
+              <a:defRPr sz="1200" b="0" i="0" u="none" strike="noStrike" cap="none">
                 <a:solidFill>
                   <a:srgbClr val="888888"/>
                 </a:solidFill>
@@ -5975,7 +6083,7 @@
                 <a:sym typeface="Calibri"/>
               </a:defRPr>
             </a:lvl6pPr>
-            <a:lvl7pPr indent="0" lvl="6" marL="0" marR="0" algn="r">
+            <a:lvl7pPr marL="0" marR="0" lvl="6" indent="0" algn="r">
               <a:lnSpc>
                 <a:spcPct val="100000"/>
               </a:lnSpc>
@@ -5991,7 +6099,7 @@
               <a:buSzPts val="1200"/>
               <a:buFont typeface="Arial"/>
               <a:buNone/>
-              <a:defRPr b="0" i="0" sz="1200" u="none" cap="none" strike="noStrike">
+              <a:defRPr sz="1200" b="0" i="0" u="none" strike="noStrike" cap="none">
                 <a:solidFill>
                   <a:srgbClr val="888888"/>
                 </a:solidFill>
@@ -6001,7 +6109,7 @@
                 <a:sym typeface="Calibri"/>
               </a:defRPr>
             </a:lvl7pPr>
-            <a:lvl8pPr indent="0" lvl="7" marL="0" marR="0" algn="r">
+            <a:lvl8pPr marL="0" marR="0" lvl="7" indent="0" algn="r">
               <a:lnSpc>
                 <a:spcPct val="100000"/>
               </a:lnSpc>
@@ -6017,7 +6125,7 @@
               <a:buSzPts val="1200"/>
               <a:buFont typeface="Arial"/>
               <a:buNone/>
-              <a:defRPr b="0" i="0" sz="1200" u="none" cap="none" strike="noStrike">
+              <a:defRPr sz="1200" b="0" i="0" u="none" strike="noStrike" cap="none">
                 <a:solidFill>
                   <a:srgbClr val="888888"/>
                 </a:solidFill>
@@ -6027,7 +6135,7 @@
                 <a:sym typeface="Calibri"/>
               </a:defRPr>
             </a:lvl8pPr>
-            <a:lvl9pPr indent="0" lvl="8" marL="0" marR="0" algn="r">
+            <a:lvl9pPr marL="0" marR="0" lvl="8" indent="0" algn="r">
               <a:lnSpc>
                 <a:spcPct val="100000"/>
               </a:lnSpc>
@@ -6043,7 +6151,7 @@
               <a:buSzPts val="1200"/>
               <a:buFont typeface="Arial"/>
               <a:buNone/>
-              <a:defRPr b="0" i="0" sz="1200" u="none" cap="none" strike="noStrike">
+              <a:defRPr sz="1200" b="0" i="0" u="none" strike="noStrike" cap="none">
                 <a:solidFill>
                   <a:srgbClr val="888888"/>
                 </a:solidFill>
@@ -6055,7 +6163,7 @@
             </a:lvl9pPr>
           </a:lstStyle>
           <a:p>
-            <a:pPr indent="0" lvl="0" marL="0" rtl="0" algn="r">
+            <a:pPr marL="0" lvl="0" indent="0" algn="r" rtl="0">
               <a:spcBef>
                 <a:spcPts val="0"/>
               </a:spcBef>
@@ -6081,11 +6189,11 @@
 </file>
 
 <file path=ppt/slideLayouts/slideLayout3.xml><?xml version="1.0" encoding="utf-8"?>
-<p:sldLayout xmlns:a="http://schemas.openxmlformats.org/drawingml/2006/main" xmlns:r="http://schemas.openxmlformats.org/officeDocument/2006/relationships" xmlns:mc="http://schemas.openxmlformats.org/markup-compatibility/2006" xmlns:mv="urn:schemas-microsoft-com:mac:vml" xmlns:p="http://schemas.openxmlformats.org/presentationml/2006/main" xmlns:c="http://schemas.openxmlformats.org/drawingml/2006/chart" xmlns:dgm="http://schemas.openxmlformats.org/drawingml/2006/diagram" xmlns:o="urn:schemas-microsoft-com:office:office" xmlns:v="urn:schemas-microsoft-com:vml" xmlns:pvml="urn:schemas-microsoft-com:office:powerpoint" xmlns:com="http://schemas.openxmlformats.org/drawingml/2006/compatibility" xmlns:p14="http://schemas.microsoft.com/office/powerpoint/2010/main" xmlns:p15="http://schemas.microsoft.com/office/powerpoint/2012/main" xmlns:ahyp="http://schemas.microsoft.com/office/drawing/2018/hyperlinkcolor" matchingName="Section Header" type="secHead">
+<p:sldLayout xmlns:a="http://schemas.openxmlformats.org/drawingml/2006/main" xmlns:r="http://schemas.openxmlformats.org/officeDocument/2006/relationships" xmlns:p="http://schemas.openxmlformats.org/presentationml/2006/main" matchingName="Section Header" type="secHead">
   <p:cSld name="SECTION_HEADER">
     <p:spTree>
       <p:nvGrpSpPr>
-        <p:cNvPr id="23" name="Shape 23"/>
+        <p:cNvPr id="1" name="Shape 23"/>
         <p:cNvGrpSpPr/>
         <p:nvPr/>
       </p:nvGrpSpPr>
@@ -6100,7 +6208,9 @@
       <p:sp>
         <p:nvSpPr>
           <p:cNvPr id="24" name="Google Shape;24;p10"/>
-          <p:cNvSpPr txBox="1"/>
+          <p:cNvSpPr txBox="1">
+            <a:spLocks noGrp="1"/>
+          </p:cNvSpPr>
           <p:nvPr>
             <p:ph type="title"/>
           </p:nvPr>
@@ -6119,7 +6229,7 @@
           </a:ln>
         </p:spPr>
         <p:txBody>
-          <a:bodyPr anchorCtr="0" anchor="t" bIns="45700" lIns="91425" spcFirstLastPara="1" rIns="91425" wrap="square" tIns="45700">
+          <a:bodyPr spcFirstLastPara="1" wrap="square" lIns="91425" tIns="45700" rIns="91425" bIns="45700" anchor="t" anchorCtr="0">
             <a:normAutofit/>
           </a:bodyPr>
           <a:lstStyle>
@@ -6139,7 +6249,7 @@
               <a:buSzPts val="4000"/>
               <a:buFont typeface="Calibri"/>
               <a:buNone/>
-              <a:defRPr b="1" sz="4000" cap="none"/>
+              <a:defRPr sz="4000" b="1" cap="none"/>
             </a:lvl1pPr>
             <a:lvl2pPr lvl="1" algn="l">
               <a:lnSpc>
@@ -6254,15 +6364,19 @@
               <a:defRPr/>
             </a:lvl9pPr>
           </a:lstStyle>
-          <a:p/>
+          <a:p>
+            <a:endParaRPr/>
+          </a:p>
         </p:txBody>
       </p:sp>
       <p:sp>
         <p:nvSpPr>
           <p:cNvPr id="25" name="Google Shape;25;p10"/>
-          <p:cNvSpPr txBox="1"/>
+          <p:cNvSpPr txBox="1">
+            <a:spLocks noGrp="1"/>
+          </p:cNvSpPr>
           <p:nvPr>
-            <p:ph idx="1" type="body"/>
+            <p:ph type="body" idx="1"/>
           </p:nvPr>
         </p:nvSpPr>
         <p:spPr>
@@ -6279,11 +6393,11 @@
           </a:ln>
         </p:spPr>
         <p:txBody>
-          <a:bodyPr anchorCtr="0" anchor="b" bIns="45700" lIns="91425" spcFirstLastPara="1" rIns="91425" wrap="square" tIns="45700">
+          <a:bodyPr spcFirstLastPara="1" wrap="square" lIns="91425" tIns="45700" rIns="91425" bIns="45700" anchor="b" anchorCtr="0">
             <a:normAutofit/>
           </a:bodyPr>
           <a:lstStyle>
-            <a:lvl1pPr indent="-228600" lvl="0" marL="457200" algn="l">
+            <a:lvl1pPr marL="457200" lvl="0" indent="-228600" algn="l">
               <a:lnSpc>
                 <a:spcPct val="100000"/>
               </a:lnSpc>
@@ -6304,7 +6418,7 @@
                 </a:solidFill>
               </a:defRPr>
             </a:lvl1pPr>
-            <a:lvl2pPr indent="-228600" lvl="1" marL="914400" algn="l">
+            <a:lvl2pPr marL="914400" lvl="1" indent="-228600" algn="l">
               <a:lnSpc>
                 <a:spcPct val="100000"/>
               </a:lnSpc>
@@ -6325,7 +6439,7 @@
                 </a:solidFill>
               </a:defRPr>
             </a:lvl2pPr>
-            <a:lvl3pPr indent="-228600" lvl="2" marL="1371600" algn="l">
+            <a:lvl3pPr marL="1371600" lvl="2" indent="-228600" algn="l">
               <a:lnSpc>
                 <a:spcPct val="100000"/>
               </a:lnSpc>
@@ -6346,7 +6460,7 @@
                 </a:solidFill>
               </a:defRPr>
             </a:lvl3pPr>
-            <a:lvl4pPr indent="-228600" lvl="3" marL="1828800" algn="l">
+            <a:lvl4pPr marL="1828800" lvl="3" indent="-228600" algn="l">
               <a:lnSpc>
                 <a:spcPct val="100000"/>
               </a:lnSpc>
@@ -6367,7 +6481,7 @@
                 </a:solidFill>
               </a:defRPr>
             </a:lvl4pPr>
-            <a:lvl5pPr indent="-228600" lvl="4" marL="2286000" algn="l">
+            <a:lvl5pPr marL="2286000" lvl="4" indent="-228600" algn="l">
               <a:lnSpc>
                 <a:spcPct val="100000"/>
               </a:lnSpc>
@@ -6388,7 +6502,7 @@
                 </a:solidFill>
               </a:defRPr>
             </a:lvl5pPr>
-            <a:lvl6pPr indent="-228600" lvl="5" marL="2743200" algn="l">
+            <a:lvl6pPr marL="2743200" lvl="5" indent="-228600" algn="l">
               <a:lnSpc>
                 <a:spcPct val="100000"/>
               </a:lnSpc>
@@ -6409,7 +6523,7 @@
                 </a:solidFill>
               </a:defRPr>
             </a:lvl6pPr>
-            <a:lvl7pPr indent="-228600" lvl="6" marL="3200400" algn="l">
+            <a:lvl7pPr marL="3200400" lvl="6" indent="-228600" algn="l">
               <a:lnSpc>
                 <a:spcPct val="100000"/>
               </a:lnSpc>
@@ -6430,7 +6544,7 @@
                 </a:solidFill>
               </a:defRPr>
             </a:lvl7pPr>
-            <a:lvl8pPr indent="-228600" lvl="7" marL="3657600" algn="l">
+            <a:lvl8pPr marL="3657600" lvl="7" indent="-228600" algn="l">
               <a:lnSpc>
                 <a:spcPct val="100000"/>
               </a:lnSpc>
@@ -6451,7 +6565,7 @@
                 </a:solidFill>
               </a:defRPr>
             </a:lvl8pPr>
-            <a:lvl9pPr indent="-228600" lvl="8" marL="4114800" algn="l">
+            <a:lvl9pPr marL="4114800" lvl="8" indent="-228600" algn="l">
               <a:lnSpc>
                 <a:spcPct val="100000"/>
               </a:lnSpc>
@@ -6473,15 +6587,19 @@
               </a:defRPr>
             </a:lvl9pPr>
           </a:lstStyle>
-          <a:p/>
+          <a:p>
+            <a:endParaRPr/>
+          </a:p>
         </p:txBody>
       </p:sp>
       <p:sp>
         <p:nvSpPr>
           <p:cNvPr id="26" name="Google Shape;26;p10"/>
-          <p:cNvSpPr txBox="1"/>
+          <p:cNvSpPr txBox="1">
+            <a:spLocks noGrp="1"/>
+          </p:cNvSpPr>
           <p:nvPr>
-            <p:ph idx="10" type="dt"/>
+            <p:ph type="dt" idx="10"/>
           </p:nvPr>
         </p:nvSpPr>
         <p:spPr>
@@ -6498,7 +6616,7 @@
           </a:ln>
         </p:spPr>
         <p:txBody>
-          <a:bodyPr anchorCtr="0" anchor="ctr" bIns="45700" lIns="91425" spcFirstLastPara="1" rIns="91425" wrap="square" tIns="45700">
+          <a:bodyPr spcFirstLastPara="1" wrap="square" lIns="91425" tIns="45700" rIns="91425" bIns="45700" anchor="ctr" anchorCtr="0">
             <a:noAutofit/>
           </a:bodyPr>
           <a:lstStyle>
@@ -6629,15 +6747,19 @@
               <a:defRPr/>
             </a:lvl9pPr>
           </a:lstStyle>
-          <a:p/>
+          <a:p>
+            <a:endParaRPr/>
+          </a:p>
         </p:txBody>
       </p:sp>
       <p:sp>
         <p:nvSpPr>
           <p:cNvPr id="27" name="Google Shape;27;p10"/>
-          <p:cNvSpPr txBox="1"/>
+          <p:cNvSpPr txBox="1">
+            <a:spLocks noGrp="1"/>
+          </p:cNvSpPr>
           <p:nvPr>
-            <p:ph idx="11" type="ftr"/>
+            <p:ph type="ftr" idx="11"/>
           </p:nvPr>
         </p:nvSpPr>
         <p:spPr>
@@ -6654,7 +6776,7 @@
           </a:ln>
         </p:spPr>
         <p:txBody>
-          <a:bodyPr anchorCtr="0" anchor="ctr" bIns="45700" lIns="91425" spcFirstLastPara="1" rIns="91425" wrap="square" tIns="45700">
+          <a:bodyPr spcFirstLastPara="1" wrap="square" lIns="91425" tIns="45700" rIns="91425" bIns="45700" anchor="ctr" anchorCtr="0">
             <a:noAutofit/>
           </a:bodyPr>
           <a:lstStyle>
@@ -6785,15 +6907,19 @@
               <a:defRPr/>
             </a:lvl9pPr>
           </a:lstStyle>
-          <a:p/>
+          <a:p>
+            <a:endParaRPr/>
+          </a:p>
         </p:txBody>
       </p:sp>
       <p:sp>
         <p:nvSpPr>
           <p:cNvPr id="28" name="Google Shape;28;p10"/>
-          <p:cNvSpPr txBox="1"/>
+          <p:cNvSpPr txBox="1">
+            <a:spLocks noGrp="1"/>
+          </p:cNvSpPr>
           <p:nvPr>
-            <p:ph idx="12" type="sldNum"/>
+            <p:ph type="sldNum" idx="12"/>
           </p:nvPr>
         </p:nvSpPr>
         <p:spPr>
@@ -6810,11 +6936,11 @@
           </a:ln>
         </p:spPr>
         <p:txBody>
-          <a:bodyPr anchorCtr="0" anchor="ctr" bIns="45700" lIns="91425" spcFirstLastPara="1" rIns="91425" wrap="square" tIns="45700">
+          <a:bodyPr spcFirstLastPara="1" wrap="square" lIns="91425" tIns="45700" rIns="91425" bIns="45700" anchor="ctr" anchorCtr="0">
             <a:noAutofit/>
           </a:bodyPr>
           <a:lstStyle>
-            <a:lvl1pPr indent="0" lvl="0" marL="0" marR="0" algn="r">
+            <a:lvl1pPr marL="0" marR="0" lvl="0" indent="0" algn="r">
               <a:lnSpc>
                 <a:spcPct val="100000"/>
               </a:lnSpc>
@@ -6830,7 +6956,7 @@
               <a:buSzPts val="1200"/>
               <a:buFont typeface="Arial"/>
               <a:buNone/>
-              <a:defRPr b="0" i="0" sz="1200" u="none" cap="none" strike="noStrike">
+              <a:defRPr sz="1200" b="0" i="0" u="none" strike="noStrike" cap="none">
                 <a:solidFill>
                   <a:srgbClr val="888888"/>
                 </a:solidFill>
@@ -6840,7 +6966,7 @@
                 <a:sym typeface="Calibri"/>
               </a:defRPr>
             </a:lvl1pPr>
-            <a:lvl2pPr indent="0" lvl="1" marL="0" marR="0" algn="r">
+            <a:lvl2pPr marL="0" marR="0" lvl="1" indent="0" algn="r">
               <a:lnSpc>
                 <a:spcPct val="100000"/>
               </a:lnSpc>
@@ -6856,7 +6982,7 @@
               <a:buSzPts val="1200"/>
               <a:buFont typeface="Arial"/>
               <a:buNone/>
-              <a:defRPr b="0" i="0" sz="1200" u="none" cap="none" strike="noStrike">
+              <a:defRPr sz="1200" b="0" i="0" u="none" strike="noStrike" cap="none">
                 <a:solidFill>
                   <a:srgbClr val="888888"/>
                 </a:solidFill>
@@ -6866,7 +6992,7 @@
                 <a:sym typeface="Calibri"/>
               </a:defRPr>
             </a:lvl2pPr>
-            <a:lvl3pPr indent="0" lvl="2" marL="0" marR="0" algn="r">
+            <a:lvl3pPr marL="0" marR="0" lvl="2" indent="0" algn="r">
               <a:lnSpc>
                 <a:spcPct val="100000"/>
               </a:lnSpc>
@@ -6882,7 +7008,7 @@
               <a:buSzPts val="1200"/>
               <a:buFont typeface="Arial"/>
               <a:buNone/>
-              <a:defRPr b="0" i="0" sz="1200" u="none" cap="none" strike="noStrike">
+              <a:defRPr sz="1200" b="0" i="0" u="none" strike="noStrike" cap="none">
                 <a:solidFill>
                   <a:srgbClr val="888888"/>
                 </a:solidFill>
@@ -6892,7 +7018,7 @@
                 <a:sym typeface="Calibri"/>
               </a:defRPr>
             </a:lvl3pPr>
-            <a:lvl4pPr indent="0" lvl="3" marL="0" marR="0" algn="r">
+            <a:lvl4pPr marL="0" marR="0" lvl="3" indent="0" algn="r">
               <a:lnSpc>
                 <a:spcPct val="100000"/>
               </a:lnSpc>
@@ -6908,7 +7034,7 @@
               <a:buSzPts val="1200"/>
               <a:buFont typeface="Arial"/>
               <a:buNone/>
-              <a:defRPr b="0" i="0" sz="1200" u="none" cap="none" strike="noStrike">
+              <a:defRPr sz="1200" b="0" i="0" u="none" strike="noStrike" cap="none">
                 <a:solidFill>
                   <a:srgbClr val="888888"/>
                 </a:solidFill>
@@ -6918,7 +7044,7 @@
                 <a:sym typeface="Calibri"/>
               </a:defRPr>
             </a:lvl4pPr>
-            <a:lvl5pPr indent="0" lvl="4" marL="0" marR="0" algn="r">
+            <a:lvl5pPr marL="0" marR="0" lvl="4" indent="0" algn="r">
               <a:lnSpc>
                 <a:spcPct val="100000"/>
               </a:lnSpc>
@@ -6934,7 +7060,7 @@
               <a:buSzPts val="1200"/>
               <a:buFont typeface="Arial"/>
               <a:buNone/>
-              <a:defRPr b="0" i="0" sz="1200" u="none" cap="none" strike="noStrike">
+              <a:defRPr sz="1200" b="0" i="0" u="none" strike="noStrike" cap="none">
                 <a:solidFill>
                   <a:srgbClr val="888888"/>
                 </a:solidFill>
@@ -6944,7 +7070,7 @@
                 <a:sym typeface="Calibri"/>
               </a:defRPr>
             </a:lvl5pPr>
-            <a:lvl6pPr indent="0" lvl="5" marL="0" marR="0" algn="r">
+            <a:lvl6pPr marL="0" marR="0" lvl="5" indent="0" algn="r">
               <a:lnSpc>
                 <a:spcPct val="100000"/>
               </a:lnSpc>
@@ -6960,7 +7086,7 @@
               <a:buSzPts val="1200"/>
               <a:buFont typeface="Arial"/>
               <a:buNone/>
-              <a:defRPr b="0" i="0" sz="1200" u="none" cap="none" strike="noStrike">
+              <a:defRPr sz="1200" b="0" i="0" u="none" strike="noStrike" cap="none">
                 <a:solidFill>
                   <a:srgbClr val="888888"/>
                 </a:solidFill>
@@ -6970,7 +7096,7 @@
                 <a:sym typeface="Calibri"/>
               </a:defRPr>
             </a:lvl6pPr>
-            <a:lvl7pPr indent="0" lvl="6" marL="0" marR="0" algn="r">
+            <a:lvl7pPr marL="0" marR="0" lvl="6" indent="0" algn="r">
               <a:lnSpc>
                 <a:spcPct val="100000"/>
               </a:lnSpc>
@@ -6986,7 +7112,7 @@
               <a:buSzPts val="1200"/>
               <a:buFont typeface="Arial"/>
               <a:buNone/>
-              <a:defRPr b="0" i="0" sz="1200" u="none" cap="none" strike="noStrike">
+              <a:defRPr sz="1200" b="0" i="0" u="none" strike="noStrike" cap="none">
                 <a:solidFill>
                   <a:srgbClr val="888888"/>
                 </a:solidFill>
@@ -6996,7 +7122,7 @@
                 <a:sym typeface="Calibri"/>
               </a:defRPr>
             </a:lvl7pPr>
-            <a:lvl8pPr indent="0" lvl="7" marL="0" marR="0" algn="r">
+            <a:lvl8pPr marL="0" marR="0" lvl="7" indent="0" algn="r">
               <a:lnSpc>
                 <a:spcPct val="100000"/>
               </a:lnSpc>
@@ -7012,7 +7138,7 @@
               <a:buSzPts val="1200"/>
               <a:buFont typeface="Arial"/>
               <a:buNone/>
-              <a:defRPr b="0" i="0" sz="1200" u="none" cap="none" strike="noStrike">
+              <a:defRPr sz="1200" b="0" i="0" u="none" strike="noStrike" cap="none">
                 <a:solidFill>
                   <a:srgbClr val="888888"/>
                 </a:solidFill>
@@ -7022,7 +7148,7 @@
                 <a:sym typeface="Calibri"/>
               </a:defRPr>
             </a:lvl8pPr>
-            <a:lvl9pPr indent="0" lvl="8" marL="0" marR="0" algn="r">
+            <a:lvl9pPr marL="0" marR="0" lvl="8" indent="0" algn="r">
               <a:lnSpc>
                 <a:spcPct val="100000"/>
               </a:lnSpc>
@@ -7038,7 +7164,7 @@
               <a:buSzPts val="1200"/>
               <a:buFont typeface="Arial"/>
               <a:buNone/>
-              <a:defRPr b="0" i="0" sz="1200" u="none" cap="none" strike="noStrike">
+              <a:defRPr sz="1200" b="0" i="0" u="none" strike="noStrike" cap="none">
                 <a:solidFill>
                   <a:srgbClr val="888888"/>
                 </a:solidFill>
@@ -7050,7 +7176,7 @@
             </a:lvl9pPr>
           </a:lstStyle>
           <a:p>
-            <a:pPr indent="0" lvl="0" marL="0" rtl="0" algn="r">
+            <a:pPr marL="0" lvl="0" indent="0" algn="r" rtl="0">
               <a:spcBef>
                 <a:spcPts val="0"/>
               </a:spcBef>
@@ -7076,11 +7202,11 @@
 </file>
 
 <file path=ppt/slideLayouts/slideLayout4.xml><?xml version="1.0" encoding="utf-8"?>
-<p:sldLayout xmlns:a="http://schemas.openxmlformats.org/drawingml/2006/main" xmlns:r="http://schemas.openxmlformats.org/officeDocument/2006/relationships" xmlns:mc="http://schemas.openxmlformats.org/markup-compatibility/2006" xmlns:mv="urn:schemas-microsoft-com:mac:vml" xmlns:p="http://schemas.openxmlformats.org/presentationml/2006/main" xmlns:c="http://schemas.openxmlformats.org/drawingml/2006/chart" xmlns:dgm="http://schemas.openxmlformats.org/drawingml/2006/diagram" xmlns:o="urn:schemas-microsoft-com:office:office" xmlns:v="urn:schemas-microsoft-com:vml" xmlns:pvml="urn:schemas-microsoft-com:office:powerpoint" xmlns:com="http://schemas.openxmlformats.org/drawingml/2006/compatibility" xmlns:p14="http://schemas.microsoft.com/office/powerpoint/2010/main" xmlns:p15="http://schemas.microsoft.com/office/powerpoint/2012/main" xmlns:ahyp="http://schemas.microsoft.com/office/drawing/2018/hyperlinkcolor" matchingName="Two Content" type="twoObj">
+<p:sldLayout xmlns:a="http://schemas.openxmlformats.org/drawingml/2006/main" xmlns:r="http://schemas.openxmlformats.org/officeDocument/2006/relationships" xmlns:p="http://schemas.openxmlformats.org/presentationml/2006/main" matchingName="Two Content" type="twoObj">
   <p:cSld name="TWO_OBJECTS">
     <p:spTree>
       <p:nvGrpSpPr>
-        <p:cNvPr id="29" name="Shape 29"/>
+        <p:cNvPr id="1" name="Shape 29"/>
         <p:cNvGrpSpPr/>
         <p:nvPr/>
       </p:nvGrpSpPr>
@@ -7095,7 +7221,9 @@
       <p:sp>
         <p:nvSpPr>
           <p:cNvPr id="30" name="Google Shape;30;p11"/>
-          <p:cNvSpPr txBox="1"/>
+          <p:cNvSpPr txBox="1">
+            <a:spLocks noGrp="1"/>
+          </p:cNvSpPr>
           <p:nvPr>
             <p:ph type="title"/>
           </p:nvPr>
@@ -7114,7 +7242,7 @@
           </a:ln>
         </p:spPr>
         <p:txBody>
-          <a:bodyPr anchorCtr="0" anchor="ctr" bIns="45700" lIns="91425" spcFirstLastPara="1" rIns="91425" wrap="square" tIns="45700">
+          <a:bodyPr spcFirstLastPara="1" wrap="square" lIns="91425" tIns="45700" rIns="91425" bIns="45700" anchor="ctr" anchorCtr="0">
             <a:normAutofit/>
           </a:bodyPr>
           <a:lstStyle>
@@ -7248,15 +7376,19 @@
               <a:defRPr/>
             </a:lvl9pPr>
           </a:lstStyle>
-          <a:p/>
+          <a:p>
+            <a:endParaRPr/>
+          </a:p>
         </p:txBody>
       </p:sp>
       <p:sp>
         <p:nvSpPr>
           <p:cNvPr id="31" name="Google Shape;31;p11"/>
-          <p:cNvSpPr txBox="1"/>
+          <p:cNvSpPr txBox="1">
+            <a:spLocks noGrp="1"/>
+          </p:cNvSpPr>
           <p:nvPr>
-            <p:ph idx="1" type="body"/>
+            <p:ph type="body" idx="1"/>
           </p:nvPr>
         </p:nvSpPr>
         <p:spPr>
@@ -7273,11 +7405,11 @@
           </a:ln>
         </p:spPr>
         <p:txBody>
-          <a:bodyPr anchorCtr="0" anchor="t" bIns="45700" lIns="91425" spcFirstLastPara="1" rIns="91425" wrap="square" tIns="45700">
+          <a:bodyPr spcFirstLastPara="1" wrap="square" lIns="91425" tIns="45700" rIns="91425" bIns="45700" anchor="t" anchorCtr="0">
             <a:normAutofit/>
           </a:bodyPr>
           <a:lstStyle>
-            <a:lvl1pPr indent="-406400" lvl="0" marL="457200" algn="l">
+            <a:lvl1pPr marL="457200" lvl="0" indent="-406400" algn="l">
               <a:lnSpc>
                 <a:spcPct val="100000"/>
               </a:lnSpc>
@@ -7294,7 +7426,7 @@
               <a:buChar char="•"/>
               <a:defRPr sz="2800"/>
             </a:lvl1pPr>
-            <a:lvl2pPr indent="-381000" lvl="1" marL="914400" algn="l">
+            <a:lvl2pPr marL="914400" lvl="1" indent="-381000" algn="l">
               <a:lnSpc>
                 <a:spcPct val="100000"/>
               </a:lnSpc>
@@ -7311,7 +7443,7 @@
               <a:buChar char="–"/>
               <a:defRPr sz="2400"/>
             </a:lvl2pPr>
-            <a:lvl3pPr indent="-355600" lvl="2" marL="1371600" algn="l">
+            <a:lvl3pPr marL="1371600" lvl="2" indent="-355600" algn="l">
               <a:lnSpc>
                 <a:spcPct val="100000"/>
               </a:lnSpc>
@@ -7328,7 +7460,7 @@
               <a:buChar char="•"/>
               <a:defRPr sz="2000"/>
             </a:lvl3pPr>
-            <a:lvl4pPr indent="-342900" lvl="3" marL="1828800" algn="l">
+            <a:lvl4pPr marL="1828800" lvl="3" indent="-342900" algn="l">
               <a:lnSpc>
                 <a:spcPct val="100000"/>
               </a:lnSpc>
@@ -7345,7 +7477,7 @@
               <a:buChar char="–"/>
               <a:defRPr sz="1800"/>
             </a:lvl4pPr>
-            <a:lvl5pPr indent="-342900" lvl="4" marL="2286000" algn="l">
+            <a:lvl5pPr marL="2286000" lvl="4" indent="-342900" algn="l">
               <a:lnSpc>
                 <a:spcPct val="100000"/>
               </a:lnSpc>
@@ -7362,7 +7494,7 @@
               <a:buChar char="»"/>
               <a:defRPr sz="1800"/>
             </a:lvl5pPr>
-            <a:lvl6pPr indent="-342900" lvl="5" marL="2743200" algn="l">
+            <a:lvl6pPr marL="2743200" lvl="5" indent="-342900" algn="l">
               <a:lnSpc>
                 <a:spcPct val="100000"/>
               </a:lnSpc>
@@ -7379,7 +7511,7 @@
               <a:buChar char="•"/>
               <a:defRPr sz="1800"/>
             </a:lvl6pPr>
-            <a:lvl7pPr indent="-342900" lvl="6" marL="3200400" algn="l">
+            <a:lvl7pPr marL="3200400" lvl="6" indent="-342900" algn="l">
               <a:lnSpc>
                 <a:spcPct val="100000"/>
               </a:lnSpc>
@@ -7396,7 +7528,7 @@
               <a:buChar char="•"/>
               <a:defRPr sz="1800"/>
             </a:lvl7pPr>
-            <a:lvl8pPr indent="-342900" lvl="7" marL="3657600" algn="l">
+            <a:lvl8pPr marL="3657600" lvl="7" indent="-342900" algn="l">
               <a:lnSpc>
                 <a:spcPct val="100000"/>
               </a:lnSpc>
@@ -7413,7 +7545,7 @@
               <a:buChar char="•"/>
               <a:defRPr sz="1800"/>
             </a:lvl8pPr>
-            <a:lvl9pPr indent="-342900" lvl="8" marL="4114800" algn="l">
+            <a:lvl9pPr marL="4114800" lvl="8" indent="-342900" algn="l">
               <a:lnSpc>
                 <a:spcPct val="100000"/>
               </a:lnSpc>
@@ -7431,15 +7563,19 @@
               <a:defRPr sz="1800"/>
             </a:lvl9pPr>
           </a:lstStyle>
-          <a:p/>
+          <a:p>
+            <a:endParaRPr/>
+          </a:p>
         </p:txBody>
       </p:sp>
       <p:sp>
         <p:nvSpPr>
           <p:cNvPr id="32" name="Google Shape;32;p11"/>
-          <p:cNvSpPr txBox="1"/>
+          <p:cNvSpPr txBox="1">
+            <a:spLocks noGrp="1"/>
+          </p:cNvSpPr>
           <p:nvPr>
-            <p:ph idx="2" type="body"/>
+            <p:ph type="body" idx="2"/>
           </p:nvPr>
         </p:nvSpPr>
         <p:spPr>
@@ -7456,11 +7592,11 @@
           </a:ln>
         </p:spPr>
         <p:txBody>
-          <a:bodyPr anchorCtr="0" anchor="t" bIns="45700" lIns="91425" spcFirstLastPara="1" rIns="91425" wrap="square" tIns="45700">
+          <a:bodyPr spcFirstLastPara="1" wrap="square" lIns="91425" tIns="45700" rIns="91425" bIns="45700" anchor="t" anchorCtr="0">
             <a:normAutofit/>
           </a:bodyPr>
           <a:lstStyle>
-            <a:lvl1pPr indent="-406400" lvl="0" marL="457200" algn="l">
+            <a:lvl1pPr marL="457200" lvl="0" indent="-406400" algn="l">
               <a:lnSpc>
                 <a:spcPct val="100000"/>
               </a:lnSpc>
@@ -7477,7 +7613,7 @@
               <a:buChar char="•"/>
               <a:defRPr sz="2800"/>
             </a:lvl1pPr>
-            <a:lvl2pPr indent="-381000" lvl="1" marL="914400" algn="l">
+            <a:lvl2pPr marL="914400" lvl="1" indent="-381000" algn="l">
               <a:lnSpc>
                 <a:spcPct val="100000"/>
               </a:lnSpc>
@@ -7494,7 +7630,7 @@
               <a:buChar char="–"/>
               <a:defRPr sz="2400"/>
             </a:lvl2pPr>
-            <a:lvl3pPr indent="-355600" lvl="2" marL="1371600" algn="l">
+            <a:lvl3pPr marL="1371600" lvl="2" indent="-355600" algn="l">
               <a:lnSpc>
                 <a:spcPct val="100000"/>
               </a:lnSpc>
@@ -7511,7 +7647,7 @@
               <a:buChar char="•"/>
               <a:defRPr sz="2000"/>
             </a:lvl3pPr>
-            <a:lvl4pPr indent="-342900" lvl="3" marL="1828800" algn="l">
+            <a:lvl4pPr marL="1828800" lvl="3" indent="-342900" algn="l">
               <a:lnSpc>
                 <a:spcPct val="100000"/>
               </a:lnSpc>
@@ -7528,7 +7664,7 @@
               <a:buChar char="–"/>
               <a:defRPr sz="1800"/>
             </a:lvl4pPr>
-            <a:lvl5pPr indent="-342900" lvl="4" marL="2286000" algn="l">
+            <a:lvl5pPr marL="2286000" lvl="4" indent="-342900" algn="l">
               <a:lnSpc>
                 <a:spcPct val="100000"/>
               </a:lnSpc>
@@ -7545,7 +7681,7 @@
               <a:buChar char="»"/>
               <a:defRPr sz="1800"/>
             </a:lvl5pPr>
-            <a:lvl6pPr indent="-342900" lvl="5" marL="2743200" algn="l">
+            <a:lvl6pPr marL="2743200" lvl="5" indent="-342900" algn="l">
               <a:lnSpc>
                 <a:spcPct val="100000"/>
               </a:lnSpc>
@@ -7562,7 +7698,7 @@
               <a:buChar char="•"/>
               <a:defRPr sz="1800"/>
             </a:lvl6pPr>
-            <a:lvl7pPr indent="-342900" lvl="6" marL="3200400" algn="l">
+            <a:lvl7pPr marL="3200400" lvl="6" indent="-342900" algn="l">
               <a:lnSpc>
                 <a:spcPct val="100000"/>
               </a:lnSpc>
@@ -7579,7 +7715,7 @@
               <a:buChar char="•"/>
               <a:defRPr sz="1800"/>
             </a:lvl7pPr>
-            <a:lvl8pPr indent="-342900" lvl="7" marL="3657600" algn="l">
+            <a:lvl8pPr marL="3657600" lvl="7" indent="-342900" algn="l">
               <a:lnSpc>
                 <a:spcPct val="100000"/>
               </a:lnSpc>
@@ -7596,7 +7732,7 @@
               <a:buChar char="•"/>
               <a:defRPr sz="1800"/>
             </a:lvl8pPr>
-            <a:lvl9pPr indent="-342900" lvl="8" marL="4114800" algn="l">
+            <a:lvl9pPr marL="4114800" lvl="8" indent="-342900" algn="l">
               <a:lnSpc>
                 <a:spcPct val="100000"/>
               </a:lnSpc>
@@ -7614,15 +7750,19 @@
               <a:defRPr sz="1800"/>
             </a:lvl9pPr>
           </a:lstStyle>
-          <a:p/>
+          <a:p>
+            <a:endParaRPr/>
+          </a:p>
         </p:txBody>
       </p:sp>
       <p:sp>
         <p:nvSpPr>
           <p:cNvPr id="33" name="Google Shape;33;p11"/>
-          <p:cNvSpPr txBox="1"/>
+          <p:cNvSpPr txBox="1">
+            <a:spLocks noGrp="1"/>
+          </p:cNvSpPr>
           <p:nvPr>
-            <p:ph idx="10" type="dt"/>
+            <p:ph type="dt" idx="10"/>
           </p:nvPr>
         </p:nvSpPr>
         <p:spPr>
@@ -7639,7 +7779,7 @@
           </a:ln>
         </p:spPr>
         <p:txBody>
-          <a:bodyPr anchorCtr="0" anchor="ctr" bIns="45700" lIns="91425" spcFirstLastPara="1" rIns="91425" wrap="square" tIns="45700">
+          <a:bodyPr spcFirstLastPara="1" wrap="square" lIns="91425" tIns="45700" rIns="91425" bIns="45700" anchor="ctr" anchorCtr="0">
             <a:noAutofit/>
           </a:bodyPr>
           <a:lstStyle>
@@ -7770,15 +7910,19 @@
               <a:defRPr/>
             </a:lvl9pPr>
           </a:lstStyle>
-          <a:p/>
+          <a:p>
+            <a:endParaRPr/>
+          </a:p>
         </p:txBody>
       </p:sp>
       <p:sp>
         <p:nvSpPr>
           <p:cNvPr id="34" name="Google Shape;34;p11"/>
-          <p:cNvSpPr txBox="1"/>
+          <p:cNvSpPr txBox="1">
+            <a:spLocks noGrp="1"/>
+          </p:cNvSpPr>
           <p:nvPr>
-            <p:ph idx="11" type="ftr"/>
+            <p:ph type="ftr" idx="11"/>
           </p:nvPr>
         </p:nvSpPr>
         <p:spPr>
@@ -7795,7 +7939,7 @@
           </a:ln>
         </p:spPr>
         <p:txBody>
-          <a:bodyPr anchorCtr="0" anchor="ctr" bIns="45700" lIns="91425" spcFirstLastPara="1" rIns="91425" wrap="square" tIns="45700">
+          <a:bodyPr spcFirstLastPara="1" wrap="square" lIns="91425" tIns="45700" rIns="91425" bIns="45700" anchor="ctr" anchorCtr="0">
             <a:noAutofit/>
           </a:bodyPr>
           <a:lstStyle>
@@ -7926,15 +8070,19 @@
               <a:defRPr/>
             </a:lvl9pPr>
           </a:lstStyle>
-          <a:p/>
+          <a:p>
+            <a:endParaRPr/>
+          </a:p>
         </p:txBody>
       </p:sp>
       <p:sp>
         <p:nvSpPr>
           <p:cNvPr id="35" name="Google Shape;35;p11"/>
-          <p:cNvSpPr txBox="1"/>
+          <p:cNvSpPr txBox="1">
+            <a:spLocks noGrp="1"/>
+          </p:cNvSpPr>
           <p:nvPr>
-            <p:ph idx="12" type="sldNum"/>
+            <p:ph type="sldNum" idx="12"/>
           </p:nvPr>
         </p:nvSpPr>
         <p:spPr>
@@ -7951,11 +8099,11 @@
           </a:ln>
         </p:spPr>
         <p:txBody>
-          <a:bodyPr anchorCtr="0" anchor="ctr" bIns="45700" lIns="91425" spcFirstLastPara="1" rIns="91425" wrap="square" tIns="45700">
+          <a:bodyPr spcFirstLastPara="1" wrap="square" lIns="91425" tIns="45700" rIns="91425" bIns="45700" anchor="ctr" anchorCtr="0">
             <a:noAutofit/>
           </a:bodyPr>
           <a:lstStyle>
-            <a:lvl1pPr indent="0" lvl="0" marL="0" marR="0" algn="r">
+            <a:lvl1pPr marL="0" marR="0" lvl="0" indent="0" algn="r">
               <a:lnSpc>
                 <a:spcPct val="100000"/>
               </a:lnSpc>
@@ -7971,7 +8119,7 @@
               <a:buSzPts val="1200"/>
               <a:buFont typeface="Arial"/>
               <a:buNone/>
-              <a:defRPr b="0" i="0" sz="1200" u="none" cap="none" strike="noStrike">
+              <a:defRPr sz="1200" b="0" i="0" u="none" strike="noStrike" cap="none">
                 <a:solidFill>
                   <a:srgbClr val="888888"/>
                 </a:solidFill>
@@ -7981,7 +8129,7 @@
                 <a:sym typeface="Calibri"/>
               </a:defRPr>
             </a:lvl1pPr>
-            <a:lvl2pPr indent="0" lvl="1" marL="0" marR="0" algn="r">
+            <a:lvl2pPr marL="0" marR="0" lvl="1" indent="0" algn="r">
               <a:lnSpc>
                 <a:spcPct val="100000"/>
               </a:lnSpc>
@@ -7997,7 +8145,7 @@
               <a:buSzPts val="1200"/>
               <a:buFont typeface="Arial"/>
               <a:buNone/>
-              <a:defRPr b="0" i="0" sz="1200" u="none" cap="none" strike="noStrike">
+              <a:defRPr sz="1200" b="0" i="0" u="none" strike="noStrike" cap="none">
                 <a:solidFill>
                   <a:srgbClr val="888888"/>
                 </a:solidFill>
@@ -8007,7 +8155,7 @@
                 <a:sym typeface="Calibri"/>
               </a:defRPr>
             </a:lvl2pPr>
-            <a:lvl3pPr indent="0" lvl="2" marL="0" marR="0" algn="r">
+            <a:lvl3pPr marL="0" marR="0" lvl="2" indent="0" algn="r">
               <a:lnSpc>
                 <a:spcPct val="100000"/>
               </a:lnSpc>
@@ -8023,7 +8171,7 @@
               <a:buSzPts val="1200"/>
               <a:buFont typeface="Arial"/>
               <a:buNone/>
-              <a:defRPr b="0" i="0" sz="1200" u="none" cap="none" strike="noStrike">
+              <a:defRPr sz="1200" b="0" i="0" u="none" strike="noStrike" cap="none">
                 <a:solidFill>
                   <a:srgbClr val="888888"/>
                 </a:solidFill>
@@ -8033,7 +8181,7 @@
                 <a:sym typeface="Calibri"/>
               </a:defRPr>
             </a:lvl3pPr>
-            <a:lvl4pPr indent="0" lvl="3" marL="0" marR="0" algn="r">
+            <a:lvl4pPr marL="0" marR="0" lvl="3" indent="0" algn="r">
               <a:lnSpc>
                 <a:spcPct val="100000"/>
               </a:lnSpc>
@@ -8049,7 +8197,7 @@
               <a:buSzPts val="1200"/>
               <a:buFont typeface="Arial"/>
               <a:buNone/>
-              <a:defRPr b="0" i="0" sz="1200" u="none" cap="none" strike="noStrike">
+              <a:defRPr sz="1200" b="0" i="0" u="none" strike="noStrike" cap="none">
                 <a:solidFill>
                   <a:srgbClr val="888888"/>
                 </a:solidFill>
@@ -8059,7 +8207,7 @@
                 <a:sym typeface="Calibri"/>
               </a:defRPr>
             </a:lvl4pPr>
-            <a:lvl5pPr indent="0" lvl="4" marL="0" marR="0" algn="r">
+            <a:lvl5pPr marL="0" marR="0" lvl="4" indent="0" algn="r">
               <a:lnSpc>
                 <a:spcPct val="100000"/>
               </a:lnSpc>
@@ -8075,7 +8223,7 @@
               <a:buSzPts val="1200"/>
               <a:buFont typeface="Arial"/>
               <a:buNone/>
-              <a:defRPr b="0" i="0" sz="1200" u="none" cap="none" strike="noStrike">
+              <a:defRPr sz="1200" b="0" i="0" u="none" strike="noStrike" cap="none">
                 <a:solidFill>
                   <a:srgbClr val="888888"/>
                 </a:solidFill>
@@ -8085,7 +8233,7 @@
                 <a:sym typeface="Calibri"/>
               </a:defRPr>
             </a:lvl5pPr>
-            <a:lvl6pPr indent="0" lvl="5" marL="0" marR="0" algn="r">
+            <a:lvl6pPr marL="0" marR="0" lvl="5" indent="0" algn="r">
               <a:lnSpc>
                 <a:spcPct val="100000"/>
               </a:lnSpc>
@@ -8101,7 +8249,7 @@
               <a:buSzPts val="1200"/>
               <a:buFont typeface="Arial"/>
               <a:buNone/>
-              <a:defRPr b="0" i="0" sz="1200" u="none" cap="none" strike="noStrike">
+              <a:defRPr sz="1200" b="0" i="0" u="none" strike="noStrike" cap="none">
                 <a:solidFill>
                   <a:srgbClr val="888888"/>
                 </a:solidFill>
@@ -8111,7 +8259,7 @@
                 <a:sym typeface="Calibri"/>
               </a:defRPr>
             </a:lvl6pPr>
-            <a:lvl7pPr indent="0" lvl="6" marL="0" marR="0" algn="r">
+            <a:lvl7pPr marL="0" marR="0" lvl="6" indent="0" algn="r">
               <a:lnSpc>
                 <a:spcPct val="100000"/>
               </a:lnSpc>
@@ -8127,7 +8275,7 @@
               <a:buSzPts val="1200"/>
               <a:buFont typeface="Arial"/>
               <a:buNone/>
-              <a:defRPr b="0" i="0" sz="1200" u="none" cap="none" strike="noStrike">
+              <a:defRPr sz="1200" b="0" i="0" u="none" strike="noStrike" cap="none">
                 <a:solidFill>
                   <a:srgbClr val="888888"/>
                 </a:solidFill>
@@ -8137,7 +8285,7 @@
                 <a:sym typeface="Calibri"/>
               </a:defRPr>
             </a:lvl7pPr>
-            <a:lvl8pPr indent="0" lvl="7" marL="0" marR="0" algn="r">
+            <a:lvl8pPr marL="0" marR="0" lvl="7" indent="0" algn="r">
               <a:lnSpc>
                 <a:spcPct val="100000"/>
               </a:lnSpc>
@@ -8153,7 +8301,7 @@
               <a:buSzPts val="1200"/>
               <a:buFont typeface="Arial"/>
               <a:buNone/>
-              <a:defRPr b="0" i="0" sz="1200" u="none" cap="none" strike="noStrike">
+              <a:defRPr sz="1200" b="0" i="0" u="none" strike="noStrike" cap="none">
                 <a:solidFill>
                   <a:srgbClr val="888888"/>
                 </a:solidFill>
@@ -8163,7 +8311,7 @@
                 <a:sym typeface="Calibri"/>
               </a:defRPr>
             </a:lvl8pPr>
-            <a:lvl9pPr indent="0" lvl="8" marL="0" marR="0" algn="r">
+            <a:lvl9pPr marL="0" marR="0" lvl="8" indent="0" algn="r">
               <a:lnSpc>
                 <a:spcPct val="100000"/>
               </a:lnSpc>
@@ -8179,7 +8327,7 @@
               <a:buSzPts val="1200"/>
               <a:buFont typeface="Arial"/>
               <a:buNone/>
-              <a:defRPr b="0" i="0" sz="1200" u="none" cap="none" strike="noStrike">
+              <a:defRPr sz="1200" b="0" i="0" u="none" strike="noStrike" cap="none">
                 <a:solidFill>
                   <a:srgbClr val="888888"/>
                 </a:solidFill>
@@ -8191,7 +8339,7 @@
             </a:lvl9pPr>
           </a:lstStyle>
           <a:p>
-            <a:pPr indent="0" lvl="0" marL="0" rtl="0" algn="r">
+            <a:pPr marL="0" lvl="0" indent="0" algn="r" rtl="0">
               <a:spcBef>
                 <a:spcPts val="0"/>
               </a:spcBef>
@@ -8217,11 +8365,11 @@
 </file>
 
 <file path=ppt/slideLayouts/slideLayout5.xml><?xml version="1.0" encoding="utf-8"?>
-<p:sldLayout xmlns:a="http://schemas.openxmlformats.org/drawingml/2006/main" xmlns:r="http://schemas.openxmlformats.org/officeDocument/2006/relationships" xmlns:mc="http://schemas.openxmlformats.org/markup-compatibility/2006" xmlns:mv="urn:schemas-microsoft-com:mac:vml" xmlns:p="http://schemas.openxmlformats.org/presentationml/2006/main" xmlns:c="http://schemas.openxmlformats.org/drawingml/2006/chart" xmlns:dgm="http://schemas.openxmlformats.org/drawingml/2006/diagram" xmlns:o="urn:schemas-microsoft-com:office:office" xmlns:v="urn:schemas-microsoft-com:vml" xmlns:pvml="urn:schemas-microsoft-com:office:powerpoint" xmlns:com="http://schemas.openxmlformats.org/drawingml/2006/compatibility" xmlns:p14="http://schemas.microsoft.com/office/powerpoint/2010/main" xmlns:p15="http://schemas.microsoft.com/office/powerpoint/2012/main" xmlns:ahyp="http://schemas.microsoft.com/office/drawing/2018/hyperlinkcolor" matchingName="Comparison" type="twoTxTwoObj">
+<p:sldLayout xmlns:a="http://schemas.openxmlformats.org/drawingml/2006/main" xmlns:r="http://schemas.openxmlformats.org/officeDocument/2006/relationships" xmlns:p="http://schemas.openxmlformats.org/presentationml/2006/main" matchingName="Comparison" type="twoTxTwoObj">
   <p:cSld name="TWO_OBJECTS_WITH_TEXT">
     <p:spTree>
       <p:nvGrpSpPr>
-        <p:cNvPr id="36" name="Shape 36"/>
+        <p:cNvPr id="1" name="Shape 36"/>
         <p:cNvGrpSpPr/>
         <p:nvPr/>
       </p:nvGrpSpPr>
@@ -8236,7 +8384,9 @@
       <p:sp>
         <p:nvSpPr>
           <p:cNvPr id="37" name="Google Shape;37;p12"/>
-          <p:cNvSpPr txBox="1"/>
+          <p:cNvSpPr txBox="1">
+            <a:spLocks noGrp="1"/>
+          </p:cNvSpPr>
           <p:nvPr>
             <p:ph type="title"/>
           </p:nvPr>
@@ -8255,7 +8405,7 @@
           </a:ln>
         </p:spPr>
         <p:txBody>
-          <a:bodyPr anchorCtr="0" anchor="ctr" bIns="45700" lIns="91425" spcFirstLastPara="1" rIns="91425" wrap="square" tIns="45700">
+          <a:bodyPr spcFirstLastPara="1" wrap="square" lIns="91425" tIns="45700" rIns="91425" bIns="45700" anchor="ctr" anchorCtr="0">
             <a:normAutofit/>
           </a:bodyPr>
           <a:lstStyle>
@@ -8390,15 +8540,19 @@
               <a:defRPr/>
             </a:lvl9pPr>
           </a:lstStyle>
-          <a:p/>
+          <a:p>
+            <a:endParaRPr/>
+          </a:p>
         </p:txBody>
       </p:sp>
       <p:sp>
         <p:nvSpPr>
           <p:cNvPr id="38" name="Google Shape;38;p12"/>
-          <p:cNvSpPr txBox="1"/>
+          <p:cNvSpPr txBox="1">
+            <a:spLocks noGrp="1"/>
+          </p:cNvSpPr>
           <p:nvPr>
-            <p:ph idx="1" type="body"/>
+            <p:ph type="body" idx="1"/>
           </p:nvPr>
         </p:nvSpPr>
         <p:spPr>
@@ -8415,11 +8569,11 @@
           </a:ln>
         </p:spPr>
         <p:txBody>
-          <a:bodyPr anchorCtr="0" anchor="b" bIns="45700" lIns="91425" spcFirstLastPara="1" rIns="91425" wrap="square" tIns="45700">
+          <a:bodyPr spcFirstLastPara="1" wrap="square" lIns="91425" tIns="45700" rIns="91425" bIns="45700" anchor="b" anchorCtr="0">
             <a:normAutofit/>
           </a:bodyPr>
           <a:lstStyle>
-            <a:lvl1pPr indent="-228600" lvl="0" marL="457200" algn="l">
+            <a:lvl1pPr marL="457200" lvl="0" indent="-228600" algn="l">
               <a:lnSpc>
                 <a:spcPct val="100000"/>
               </a:lnSpc>
@@ -8434,9 +8588,9 @@
               </a:buClr>
               <a:buSzPts val="2400"/>
               <a:buNone/>
-              <a:defRPr b="1" sz="2400"/>
+              <a:defRPr sz="2400" b="1"/>
             </a:lvl1pPr>
-            <a:lvl2pPr indent="-228600" lvl="1" marL="914400" algn="l">
+            <a:lvl2pPr marL="914400" lvl="1" indent="-228600" algn="l">
               <a:lnSpc>
                 <a:spcPct val="100000"/>
               </a:lnSpc>
@@ -8451,9 +8605,9 @@
               </a:buClr>
               <a:buSzPts val="2000"/>
               <a:buNone/>
-              <a:defRPr b="1" sz="2000"/>
+              <a:defRPr sz="2000" b="1"/>
             </a:lvl2pPr>
-            <a:lvl3pPr indent="-228600" lvl="2" marL="1371600" algn="l">
+            <a:lvl3pPr marL="1371600" lvl="2" indent="-228600" algn="l">
               <a:lnSpc>
                 <a:spcPct val="100000"/>
               </a:lnSpc>
@@ -8468,9 +8622,9 @@
               </a:buClr>
               <a:buSzPts val="1800"/>
               <a:buNone/>
-              <a:defRPr b="1" sz="1800"/>
+              <a:defRPr sz="1800" b="1"/>
             </a:lvl3pPr>
-            <a:lvl4pPr indent="-228600" lvl="3" marL="1828800" algn="l">
+            <a:lvl4pPr marL="1828800" lvl="3" indent="-228600" algn="l">
               <a:lnSpc>
                 <a:spcPct val="100000"/>
               </a:lnSpc>
@@ -8485,9 +8639,9 @@
               </a:buClr>
               <a:buSzPts val="1600"/>
               <a:buNone/>
-              <a:defRPr b="1" sz="1600"/>
+              <a:defRPr sz="1600" b="1"/>
             </a:lvl4pPr>
-            <a:lvl5pPr indent="-228600" lvl="4" marL="2286000" algn="l">
+            <a:lvl5pPr marL="2286000" lvl="4" indent="-228600" algn="l">
               <a:lnSpc>
                 <a:spcPct val="100000"/>
               </a:lnSpc>
@@ -8502,9 +8656,9 @@
               </a:buClr>
               <a:buSzPts val="1600"/>
               <a:buNone/>
-              <a:defRPr b="1" sz="1600"/>
+              <a:defRPr sz="1600" b="1"/>
             </a:lvl5pPr>
-            <a:lvl6pPr indent="-228600" lvl="5" marL="2743200" algn="l">
+            <a:lvl6pPr marL="2743200" lvl="5" indent="-228600" algn="l">
               <a:lnSpc>
                 <a:spcPct val="100000"/>
               </a:lnSpc>
@@ -8519,9 +8673,9 @@
               </a:buClr>
               <a:buSzPts val="1600"/>
               <a:buNone/>
-              <a:defRPr b="1" sz="1600"/>
+              <a:defRPr sz="1600" b="1"/>
             </a:lvl6pPr>
-            <a:lvl7pPr indent="-228600" lvl="6" marL="3200400" algn="l">
+            <a:lvl7pPr marL="3200400" lvl="6" indent="-228600" algn="l">
               <a:lnSpc>
                 <a:spcPct val="100000"/>
               </a:lnSpc>
@@ -8536,9 +8690,9 @@
               </a:buClr>
               <a:buSzPts val="1600"/>
               <a:buNone/>
-              <a:defRPr b="1" sz="1600"/>
+              <a:defRPr sz="1600" b="1"/>
             </a:lvl7pPr>
-            <a:lvl8pPr indent="-228600" lvl="7" marL="3657600" algn="l">
+            <a:lvl8pPr marL="3657600" lvl="7" indent="-228600" algn="l">
               <a:lnSpc>
                 <a:spcPct val="100000"/>
               </a:lnSpc>
@@ -8553,9 +8707,9 @@
               </a:buClr>
               <a:buSzPts val="1600"/>
               <a:buNone/>
-              <a:defRPr b="1" sz="1600"/>
+              <a:defRPr sz="1600" b="1"/>
             </a:lvl8pPr>
-            <a:lvl9pPr indent="-228600" lvl="8" marL="4114800" algn="l">
+            <a:lvl9pPr marL="4114800" lvl="8" indent="-228600" algn="l">
               <a:lnSpc>
                 <a:spcPct val="100000"/>
               </a:lnSpc>
@@ -8570,18 +8724,22 @@
               </a:buClr>
               <a:buSzPts val="1600"/>
               <a:buNone/>
-              <a:defRPr b="1" sz="1600"/>
+              <a:defRPr sz="1600" b="1"/>
             </a:lvl9pPr>
           </a:lstStyle>
-          <a:p/>
+          <a:p>
+            <a:endParaRPr/>
+          </a:p>
         </p:txBody>
       </p:sp>
       <p:sp>
         <p:nvSpPr>
           <p:cNvPr id="39" name="Google Shape;39;p12"/>
-          <p:cNvSpPr txBox="1"/>
+          <p:cNvSpPr txBox="1">
+            <a:spLocks noGrp="1"/>
+          </p:cNvSpPr>
           <p:nvPr>
-            <p:ph idx="2" type="body"/>
+            <p:ph type="body" idx="2"/>
           </p:nvPr>
         </p:nvSpPr>
         <p:spPr>
@@ -8598,11 +8756,11 @@
           </a:ln>
         </p:spPr>
         <p:txBody>
-          <a:bodyPr anchorCtr="0" anchor="t" bIns="45700" lIns="91425" spcFirstLastPara="1" rIns="91425" wrap="square" tIns="45700">
+          <a:bodyPr spcFirstLastPara="1" wrap="square" lIns="91425" tIns="45700" rIns="91425" bIns="45700" anchor="t" anchorCtr="0">
             <a:normAutofit/>
           </a:bodyPr>
           <a:lstStyle>
-            <a:lvl1pPr indent="-381000" lvl="0" marL="457200" algn="l">
+            <a:lvl1pPr marL="457200" lvl="0" indent="-381000" algn="l">
               <a:lnSpc>
                 <a:spcPct val="100000"/>
               </a:lnSpc>
@@ -8619,7 +8777,7 @@
               <a:buChar char="•"/>
               <a:defRPr sz="2400"/>
             </a:lvl1pPr>
-            <a:lvl2pPr indent="-355600" lvl="1" marL="914400" algn="l">
+            <a:lvl2pPr marL="914400" lvl="1" indent="-355600" algn="l">
               <a:lnSpc>
                 <a:spcPct val="100000"/>
               </a:lnSpc>
@@ -8636,7 +8794,7 @@
               <a:buChar char="–"/>
               <a:defRPr sz="2000"/>
             </a:lvl2pPr>
-            <a:lvl3pPr indent="-342900" lvl="2" marL="1371600" algn="l">
+            <a:lvl3pPr marL="1371600" lvl="2" indent="-342900" algn="l">
               <a:lnSpc>
                 <a:spcPct val="100000"/>
               </a:lnSpc>
@@ -8653,7 +8811,7 @@
               <a:buChar char="•"/>
               <a:defRPr sz="1800"/>
             </a:lvl3pPr>
-            <a:lvl4pPr indent="-330200" lvl="3" marL="1828800" algn="l">
+            <a:lvl4pPr marL="1828800" lvl="3" indent="-330200" algn="l">
               <a:lnSpc>
                 <a:spcPct val="100000"/>
               </a:lnSpc>
@@ -8670,7 +8828,7 @@
               <a:buChar char="–"/>
               <a:defRPr sz="1600"/>
             </a:lvl4pPr>
-            <a:lvl5pPr indent="-330200" lvl="4" marL="2286000" algn="l">
+            <a:lvl5pPr marL="2286000" lvl="4" indent="-330200" algn="l">
               <a:lnSpc>
                 <a:spcPct val="100000"/>
               </a:lnSpc>
@@ -8687,7 +8845,7 @@
               <a:buChar char="»"/>
               <a:defRPr sz="1600"/>
             </a:lvl5pPr>
-            <a:lvl6pPr indent="-330200" lvl="5" marL="2743200" algn="l">
+            <a:lvl6pPr marL="2743200" lvl="5" indent="-330200" algn="l">
               <a:lnSpc>
                 <a:spcPct val="100000"/>
               </a:lnSpc>
@@ -8704,7 +8862,7 @@
               <a:buChar char="•"/>
               <a:defRPr sz="1600"/>
             </a:lvl6pPr>
-            <a:lvl7pPr indent="-330200" lvl="6" marL="3200400" algn="l">
+            <a:lvl7pPr marL="3200400" lvl="6" indent="-330200" algn="l">
               <a:lnSpc>
                 <a:spcPct val="100000"/>
               </a:lnSpc>
@@ -8721,7 +8879,7 @@
               <a:buChar char="•"/>
               <a:defRPr sz="1600"/>
             </a:lvl7pPr>
-            <a:lvl8pPr indent="-330200" lvl="7" marL="3657600" algn="l">
+            <a:lvl8pPr marL="3657600" lvl="7" indent="-330200" algn="l">
               <a:lnSpc>
                 <a:spcPct val="100000"/>
               </a:lnSpc>
@@ -8738,7 +8896,7 @@
               <a:buChar char="•"/>
               <a:defRPr sz="1600"/>
             </a:lvl8pPr>
-            <a:lvl9pPr indent="-330200" lvl="8" marL="4114800" algn="l">
+            <a:lvl9pPr marL="4114800" lvl="8" indent="-330200" algn="l">
               <a:lnSpc>
                 <a:spcPct val="100000"/>
               </a:lnSpc>
@@ -8756,15 +8914,19 @@
               <a:defRPr sz="1600"/>
             </a:lvl9pPr>
           </a:lstStyle>
-          <a:p/>
+          <a:p>
+            <a:endParaRPr/>
+          </a:p>
         </p:txBody>
       </p:sp>
       <p:sp>
         <p:nvSpPr>
           <p:cNvPr id="40" name="Google Shape;40;p12"/>
-          <p:cNvSpPr txBox="1"/>
+          <p:cNvSpPr txBox="1">
+            <a:spLocks noGrp="1"/>
+          </p:cNvSpPr>
           <p:nvPr>
-            <p:ph idx="3" type="body"/>
+            <p:ph type="body" idx="3"/>
           </p:nvPr>
         </p:nvSpPr>
         <p:spPr>
@@ -8781,11 +8943,11 @@
           </a:ln>
         </p:spPr>
         <p:txBody>
-          <a:bodyPr anchorCtr="0" anchor="b" bIns="45700" lIns="91425" spcFirstLastPara="1" rIns="91425" wrap="square" tIns="45700">
+          <a:bodyPr spcFirstLastPara="1" wrap="square" lIns="91425" tIns="45700" rIns="91425" bIns="45700" anchor="b" anchorCtr="0">
             <a:normAutofit/>
           </a:bodyPr>
           <a:lstStyle>
-            <a:lvl1pPr indent="-228600" lvl="0" marL="457200" algn="l">
+            <a:lvl1pPr marL="457200" lvl="0" indent="-228600" algn="l">
               <a:lnSpc>
                 <a:spcPct val="100000"/>
               </a:lnSpc>
@@ -8800,9 +8962,9 @@
               </a:buClr>
               <a:buSzPts val="2400"/>
               <a:buNone/>
-              <a:defRPr b="1" sz="2400"/>
+              <a:defRPr sz="2400" b="1"/>
             </a:lvl1pPr>
-            <a:lvl2pPr indent="-228600" lvl="1" marL="914400" algn="l">
+            <a:lvl2pPr marL="914400" lvl="1" indent="-228600" algn="l">
               <a:lnSpc>
                 <a:spcPct val="100000"/>
               </a:lnSpc>
@@ -8817,9 +8979,9 @@
               </a:buClr>
               <a:buSzPts val="2000"/>
               <a:buNone/>
-              <a:defRPr b="1" sz="2000"/>
+              <a:defRPr sz="2000" b="1"/>
             </a:lvl2pPr>
-            <a:lvl3pPr indent="-228600" lvl="2" marL="1371600" algn="l">
+            <a:lvl3pPr marL="1371600" lvl="2" indent="-228600" algn="l">
               <a:lnSpc>
                 <a:spcPct val="100000"/>
               </a:lnSpc>
@@ -8834,9 +8996,9 @@
               </a:buClr>
               <a:buSzPts val="1800"/>
               <a:buNone/>
-              <a:defRPr b="1" sz="1800"/>
+              <a:defRPr sz="1800" b="1"/>
             </a:lvl3pPr>
-            <a:lvl4pPr indent="-228600" lvl="3" marL="1828800" algn="l">
+            <a:lvl4pPr marL="1828800" lvl="3" indent="-228600" algn="l">
               <a:lnSpc>
                 <a:spcPct val="100000"/>
               </a:lnSpc>
@@ -8851,9 +9013,9 @@
               </a:buClr>
               <a:buSzPts val="1600"/>
               <a:buNone/>
-              <a:defRPr b="1" sz="1600"/>
+              <a:defRPr sz="1600" b="1"/>
             </a:lvl4pPr>
-            <a:lvl5pPr indent="-228600" lvl="4" marL="2286000" algn="l">
+            <a:lvl5pPr marL="2286000" lvl="4" indent="-228600" algn="l">
               <a:lnSpc>
                 <a:spcPct val="100000"/>
               </a:lnSpc>
@@ -8868,9 +9030,9 @@
               </a:buClr>
               <a:buSzPts val="1600"/>
               <a:buNone/>
-              <a:defRPr b="1" sz="1600"/>
+              <a:defRPr sz="1600" b="1"/>
             </a:lvl5pPr>
-            <a:lvl6pPr indent="-228600" lvl="5" marL="2743200" algn="l">
+            <a:lvl6pPr marL="2743200" lvl="5" indent="-228600" algn="l">
               <a:lnSpc>
                 <a:spcPct val="100000"/>
               </a:lnSpc>
@@ -8885,9 +9047,9 @@
               </a:buClr>
               <a:buSzPts val="1600"/>
               <a:buNone/>
-              <a:defRPr b="1" sz="1600"/>
+              <a:defRPr sz="1600" b="1"/>
             </a:lvl6pPr>
-            <a:lvl7pPr indent="-228600" lvl="6" marL="3200400" algn="l">
+            <a:lvl7pPr marL="3200400" lvl="6" indent="-228600" algn="l">
               <a:lnSpc>
                 <a:spcPct val="100000"/>
               </a:lnSpc>
@@ -8902,9 +9064,9 @@
               </a:buClr>
               <a:buSzPts val="1600"/>
               <a:buNone/>
-              <a:defRPr b="1" sz="1600"/>
+              <a:defRPr sz="1600" b="1"/>
             </a:lvl7pPr>
-            <a:lvl8pPr indent="-228600" lvl="7" marL="3657600" algn="l">
+            <a:lvl8pPr marL="3657600" lvl="7" indent="-228600" algn="l">
               <a:lnSpc>
                 <a:spcPct val="100000"/>
               </a:lnSpc>
@@ -8919,9 +9081,9 @@
               </a:buClr>
               <a:buSzPts val="1600"/>
               <a:buNone/>
-              <a:defRPr b="1" sz="1600"/>
+              <a:defRPr sz="1600" b="1"/>
             </a:lvl8pPr>
-            <a:lvl9pPr indent="-228600" lvl="8" marL="4114800" algn="l">
+            <a:lvl9pPr marL="4114800" lvl="8" indent="-228600" algn="l">
               <a:lnSpc>
                 <a:spcPct val="100000"/>
               </a:lnSpc>
@@ -8936,18 +9098,22 @@
               </a:buClr>
               <a:buSzPts val="1600"/>
               <a:buNone/>
-              <a:defRPr b="1" sz="1600"/>
+              <a:defRPr sz="1600" b="1"/>
             </a:lvl9pPr>
           </a:lstStyle>
-          <a:p/>
+          <a:p>
+            <a:endParaRPr/>
+          </a:p>
         </p:txBody>
       </p:sp>
       <p:sp>
         <p:nvSpPr>
           <p:cNvPr id="41" name="Google Shape;41;p12"/>
-          <p:cNvSpPr txBox="1"/>
+          <p:cNvSpPr txBox="1">
+            <a:spLocks noGrp="1"/>
+          </p:cNvSpPr>
           <p:nvPr>
-            <p:ph idx="4" type="body"/>
+            <p:ph type="body" idx="4"/>
           </p:nvPr>
         </p:nvSpPr>
         <p:spPr>
@@ -8964,11 +9130,11 @@
           </a:ln>
         </p:spPr>
         <p:txBody>
-          <a:bodyPr anchorCtr="0" anchor="t" bIns="45700" lIns="91425" spcFirstLastPara="1" rIns="91425" wrap="square" tIns="45700">
+          <a:bodyPr spcFirstLastPara="1" wrap="square" lIns="91425" tIns="45700" rIns="91425" bIns="45700" anchor="t" anchorCtr="0">
             <a:normAutofit/>
           </a:bodyPr>
           <a:lstStyle>
-            <a:lvl1pPr indent="-381000" lvl="0" marL="457200" algn="l">
+            <a:lvl1pPr marL="457200" lvl="0" indent="-381000" algn="l">
               <a:lnSpc>
                 <a:spcPct val="100000"/>
               </a:lnSpc>
@@ -8985,7 +9151,7 @@
               <a:buChar char="•"/>
               <a:defRPr sz="2400"/>
             </a:lvl1pPr>
-            <a:lvl2pPr indent="-355600" lvl="1" marL="914400" algn="l">
+            <a:lvl2pPr marL="914400" lvl="1" indent="-355600" algn="l">
               <a:lnSpc>
                 <a:spcPct val="100000"/>
               </a:lnSpc>
@@ -9002,7 +9168,7 @@
               <a:buChar char="–"/>
               <a:defRPr sz="2000"/>
             </a:lvl2pPr>
-            <a:lvl3pPr indent="-342900" lvl="2" marL="1371600" algn="l">
+            <a:lvl3pPr marL="1371600" lvl="2" indent="-342900" algn="l">
               <a:lnSpc>
                 <a:spcPct val="100000"/>
               </a:lnSpc>
@@ -9019,7 +9185,7 @@
               <a:buChar char="•"/>
               <a:defRPr sz="1800"/>
             </a:lvl3pPr>
-            <a:lvl4pPr indent="-330200" lvl="3" marL="1828800" algn="l">
+            <a:lvl4pPr marL="1828800" lvl="3" indent="-330200" algn="l">
               <a:lnSpc>
                 <a:spcPct val="100000"/>
               </a:lnSpc>
@@ -9036,7 +9202,7 @@
               <a:buChar char="–"/>
               <a:defRPr sz="1600"/>
             </a:lvl4pPr>
-            <a:lvl5pPr indent="-330200" lvl="4" marL="2286000" algn="l">
+            <a:lvl5pPr marL="2286000" lvl="4" indent="-330200" algn="l">
               <a:lnSpc>
                 <a:spcPct val="100000"/>
               </a:lnSpc>
@@ -9053,7 +9219,7 @@
               <a:buChar char="»"/>
               <a:defRPr sz="1600"/>
             </a:lvl5pPr>
-            <a:lvl6pPr indent="-330200" lvl="5" marL="2743200" algn="l">
+            <a:lvl6pPr marL="2743200" lvl="5" indent="-330200" algn="l">
               <a:lnSpc>
                 <a:spcPct val="100000"/>
               </a:lnSpc>
@@ -9070,7 +9236,7 @@
               <a:buChar char="•"/>
               <a:defRPr sz="1600"/>
             </a:lvl6pPr>
-            <a:lvl7pPr indent="-330200" lvl="6" marL="3200400" algn="l">
+            <a:lvl7pPr marL="3200400" lvl="6" indent="-330200" algn="l">
               <a:lnSpc>
                 <a:spcPct val="100000"/>
               </a:lnSpc>
@@ -9087,7 +9253,7 @@
               <a:buChar char="•"/>
               <a:defRPr sz="1600"/>
             </a:lvl7pPr>
-            <a:lvl8pPr indent="-330200" lvl="7" marL="3657600" algn="l">
+            <a:lvl8pPr marL="3657600" lvl="7" indent="-330200" algn="l">
               <a:lnSpc>
                 <a:spcPct val="100000"/>
               </a:lnSpc>
@@ -9104,7 +9270,7 @@
               <a:buChar char="•"/>
               <a:defRPr sz="1600"/>
             </a:lvl8pPr>
-            <a:lvl9pPr indent="-330200" lvl="8" marL="4114800" algn="l">
+            <a:lvl9pPr marL="4114800" lvl="8" indent="-330200" algn="l">
               <a:lnSpc>
                 <a:spcPct val="100000"/>
               </a:lnSpc>
@@ -9122,15 +9288,19 @@
               <a:defRPr sz="1600"/>
             </a:lvl9pPr>
           </a:lstStyle>
-          <a:p/>
+          <a:p>
+            <a:endParaRPr/>
+          </a:p>
         </p:txBody>
       </p:sp>
       <p:sp>
         <p:nvSpPr>
           <p:cNvPr id="42" name="Google Shape;42;p12"/>
-          <p:cNvSpPr txBox="1"/>
+          <p:cNvSpPr txBox="1">
+            <a:spLocks noGrp="1"/>
+          </p:cNvSpPr>
           <p:nvPr>
-            <p:ph idx="10" type="dt"/>
+            <p:ph type="dt" idx="10"/>
           </p:nvPr>
         </p:nvSpPr>
         <p:spPr>
@@ -9147,7 +9317,7 @@
           </a:ln>
         </p:spPr>
         <p:txBody>
-          <a:bodyPr anchorCtr="0" anchor="ctr" bIns="45700" lIns="91425" spcFirstLastPara="1" rIns="91425" wrap="square" tIns="45700">
+          <a:bodyPr spcFirstLastPara="1" wrap="square" lIns="91425" tIns="45700" rIns="91425" bIns="45700" anchor="ctr" anchorCtr="0">
             <a:noAutofit/>
           </a:bodyPr>
           <a:lstStyle>
@@ -9278,15 +9448,19 @@
               <a:defRPr/>
             </a:lvl9pPr>
           </a:lstStyle>
-          <a:p/>
+          <a:p>
+            <a:endParaRPr/>
+          </a:p>
         </p:txBody>
       </p:sp>
       <p:sp>
         <p:nvSpPr>
           <p:cNvPr id="43" name="Google Shape;43;p12"/>
-          <p:cNvSpPr txBox="1"/>
+          <p:cNvSpPr txBox="1">
+            <a:spLocks noGrp="1"/>
+          </p:cNvSpPr>
           <p:nvPr>
-            <p:ph idx="11" type="ftr"/>
+            <p:ph type="ftr" idx="11"/>
           </p:nvPr>
         </p:nvSpPr>
         <p:spPr>
@@ -9303,7 +9477,7 @@
           </a:ln>
         </p:spPr>
         <p:txBody>
-          <a:bodyPr anchorCtr="0" anchor="ctr" bIns="45700" lIns="91425" spcFirstLastPara="1" rIns="91425" wrap="square" tIns="45700">
+          <a:bodyPr spcFirstLastPara="1" wrap="square" lIns="91425" tIns="45700" rIns="91425" bIns="45700" anchor="ctr" anchorCtr="0">
             <a:noAutofit/>
           </a:bodyPr>
           <a:lstStyle>
@@ -9434,15 +9608,19 @@
               <a:defRPr/>
             </a:lvl9pPr>
           </a:lstStyle>
-          <a:p/>
+          <a:p>
+            <a:endParaRPr/>
+          </a:p>
         </p:txBody>
       </p:sp>
       <p:sp>
         <p:nvSpPr>
           <p:cNvPr id="44" name="Google Shape;44;p12"/>
-          <p:cNvSpPr txBox="1"/>
+          <p:cNvSpPr txBox="1">
+            <a:spLocks noGrp="1"/>
+          </p:cNvSpPr>
           <p:nvPr>
-            <p:ph idx="12" type="sldNum"/>
+            <p:ph type="sldNum" idx="12"/>
           </p:nvPr>
         </p:nvSpPr>
         <p:spPr>
@@ -9459,11 +9637,11 @@
           </a:ln>
         </p:spPr>
         <p:txBody>
-          <a:bodyPr anchorCtr="0" anchor="ctr" bIns="45700" lIns="91425" spcFirstLastPara="1" rIns="91425" wrap="square" tIns="45700">
+          <a:bodyPr spcFirstLastPara="1" wrap="square" lIns="91425" tIns="45700" rIns="91425" bIns="45700" anchor="ctr" anchorCtr="0">
             <a:noAutofit/>
           </a:bodyPr>
           <a:lstStyle>
-            <a:lvl1pPr indent="0" lvl="0" marL="0" marR="0" algn="r">
+            <a:lvl1pPr marL="0" marR="0" lvl="0" indent="0" algn="r">
               <a:lnSpc>
                 <a:spcPct val="100000"/>
               </a:lnSpc>
@@ -9479,7 +9657,7 @@
               <a:buSzPts val="1200"/>
               <a:buFont typeface="Arial"/>
               <a:buNone/>
-              <a:defRPr b="0" i="0" sz="1200" u="none" cap="none" strike="noStrike">
+              <a:defRPr sz="1200" b="0" i="0" u="none" strike="noStrike" cap="none">
                 <a:solidFill>
                   <a:srgbClr val="888888"/>
                 </a:solidFill>
@@ -9489,7 +9667,7 @@
                 <a:sym typeface="Calibri"/>
               </a:defRPr>
             </a:lvl1pPr>
-            <a:lvl2pPr indent="0" lvl="1" marL="0" marR="0" algn="r">
+            <a:lvl2pPr marL="0" marR="0" lvl="1" indent="0" algn="r">
               <a:lnSpc>
                 <a:spcPct val="100000"/>
               </a:lnSpc>
@@ -9505,7 +9683,7 @@
               <a:buSzPts val="1200"/>
               <a:buFont typeface="Arial"/>
               <a:buNone/>
-              <a:defRPr b="0" i="0" sz="1200" u="none" cap="none" strike="noStrike">
+              <a:defRPr sz="1200" b="0" i="0" u="none" strike="noStrike" cap="none">
                 <a:solidFill>
                   <a:srgbClr val="888888"/>
                 </a:solidFill>
@@ -9515,7 +9693,7 @@
                 <a:sym typeface="Calibri"/>
               </a:defRPr>
             </a:lvl2pPr>
-            <a:lvl3pPr indent="0" lvl="2" marL="0" marR="0" algn="r">
+            <a:lvl3pPr marL="0" marR="0" lvl="2" indent="0" algn="r">
               <a:lnSpc>
                 <a:spcPct val="100000"/>
               </a:lnSpc>
@@ -9531,7 +9709,7 @@
               <a:buSzPts val="1200"/>
               <a:buFont typeface="Arial"/>
               <a:buNone/>
-              <a:defRPr b="0" i="0" sz="1200" u="none" cap="none" strike="noStrike">
+              <a:defRPr sz="1200" b="0" i="0" u="none" strike="noStrike" cap="none">
                 <a:solidFill>
                   <a:srgbClr val="888888"/>
                 </a:solidFill>
@@ -9541,7 +9719,7 @@
                 <a:sym typeface="Calibri"/>
               </a:defRPr>
             </a:lvl3pPr>
-            <a:lvl4pPr indent="0" lvl="3" marL="0" marR="0" algn="r">
+            <a:lvl4pPr marL="0" marR="0" lvl="3" indent="0" algn="r">
               <a:lnSpc>
                 <a:spcPct val="100000"/>
               </a:lnSpc>
@@ -9557,7 +9735,7 @@
               <a:buSzPts val="1200"/>
               <a:buFont typeface="Arial"/>
               <a:buNone/>
-              <a:defRPr b="0" i="0" sz="1200" u="none" cap="none" strike="noStrike">
+              <a:defRPr sz="1200" b="0" i="0" u="none" strike="noStrike" cap="none">
                 <a:solidFill>
                   <a:srgbClr val="888888"/>
                 </a:solidFill>
@@ -9567,7 +9745,7 @@
                 <a:sym typeface="Calibri"/>
               </a:defRPr>
             </a:lvl4pPr>
-            <a:lvl5pPr indent="0" lvl="4" marL="0" marR="0" algn="r">
+            <a:lvl5pPr marL="0" marR="0" lvl="4" indent="0" algn="r">
               <a:lnSpc>
                 <a:spcPct val="100000"/>
               </a:lnSpc>
@@ -9583,7 +9761,7 @@
               <a:buSzPts val="1200"/>
               <a:buFont typeface="Arial"/>
               <a:buNone/>
-              <a:defRPr b="0" i="0" sz="1200" u="none" cap="none" strike="noStrike">
+              <a:defRPr sz="1200" b="0" i="0" u="none" strike="noStrike" cap="none">
                 <a:solidFill>
                   <a:srgbClr val="888888"/>
                 </a:solidFill>
@@ -9593,7 +9771,7 @@
                 <a:sym typeface="Calibri"/>
               </a:defRPr>
             </a:lvl5pPr>
-            <a:lvl6pPr indent="0" lvl="5" marL="0" marR="0" algn="r">
+            <a:lvl6pPr marL="0" marR="0" lvl="5" indent="0" algn="r">
               <a:lnSpc>
                 <a:spcPct val="100000"/>
               </a:lnSpc>
@@ -9609,7 +9787,7 @@
               <a:buSzPts val="1200"/>
               <a:buFont typeface="Arial"/>
               <a:buNone/>
-              <a:defRPr b="0" i="0" sz="1200" u="none" cap="none" strike="noStrike">
+              <a:defRPr sz="1200" b="0" i="0" u="none" strike="noStrike" cap="none">
                 <a:solidFill>
                   <a:srgbClr val="888888"/>
                 </a:solidFill>
@@ -9619,7 +9797,7 @@
                 <a:sym typeface="Calibri"/>
               </a:defRPr>
             </a:lvl6pPr>
-            <a:lvl7pPr indent="0" lvl="6" marL="0" marR="0" algn="r">
+            <a:lvl7pPr marL="0" marR="0" lvl="6" indent="0" algn="r">
               <a:lnSpc>
                 <a:spcPct val="100000"/>
               </a:lnSpc>
@@ -9635,7 +9813,7 @@
               <a:buSzPts val="1200"/>
               <a:buFont typeface="Arial"/>
               <a:buNone/>
-              <a:defRPr b="0" i="0" sz="1200" u="none" cap="none" strike="noStrike">
+              <a:defRPr sz="1200" b="0" i="0" u="none" strike="noStrike" cap="none">
                 <a:solidFill>
                   <a:srgbClr val="888888"/>
                 </a:solidFill>
@@ -9645,7 +9823,7 @@
                 <a:sym typeface="Calibri"/>
               </a:defRPr>
             </a:lvl7pPr>
-            <a:lvl8pPr indent="0" lvl="7" marL="0" marR="0" algn="r">
+            <a:lvl8pPr marL="0" marR="0" lvl="7" indent="0" algn="r">
               <a:lnSpc>
                 <a:spcPct val="100000"/>
               </a:lnSpc>
@@ -9661,7 +9839,7 @@
               <a:buSzPts val="1200"/>
               <a:buFont typeface="Arial"/>
               <a:buNone/>
-              <a:defRPr b="0" i="0" sz="1200" u="none" cap="none" strike="noStrike">
+              <a:defRPr sz="1200" b="0" i="0" u="none" strike="noStrike" cap="none">
                 <a:solidFill>
                   <a:srgbClr val="888888"/>
                 </a:solidFill>
@@ -9671,7 +9849,7 @@
                 <a:sym typeface="Calibri"/>
               </a:defRPr>
             </a:lvl8pPr>
-            <a:lvl9pPr indent="0" lvl="8" marL="0" marR="0" algn="r">
+            <a:lvl9pPr marL="0" marR="0" lvl="8" indent="0" algn="r">
               <a:lnSpc>
                 <a:spcPct val="100000"/>
               </a:lnSpc>
@@ -9687,7 +9865,7 @@
               <a:buSzPts val="1200"/>
               <a:buFont typeface="Arial"/>
               <a:buNone/>
-              <a:defRPr b="0" i="0" sz="1200" u="none" cap="none" strike="noStrike">
+              <a:defRPr sz="1200" b="0" i="0" u="none" strike="noStrike" cap="none">
                 <a:solidFill>
                   <a:srgbClr val="888888"/>
                 </a:solidFill>
@@ -9699,7 +9877,7 @@
             </a:lvl9pPr>
           </a:lstStyle>
           <a:p>
-            <a:pPr indent="0" lvl="0" marL="0" rtl="0" algn="r">
+            <a:pPr marL="0" lvl="0" indent="0" algn="r" rtl="0">
               <a:spcBef>
                 <a:spcPts val="0"/>
               </a:spcBef>
@@ -9725,11 +9903,11 @@
 </file>
 
 <file path=ppt/slideLayouts/slideLayout6.xml><?xml version="1.0" encoding="utf-8"?>
-<p:sldLayout xmlns:a="http://schemas.openxmlformats.org/drawingml/2006/main" xmlns:r="http://schemas.openxmlformats.org/officeDocument/2006/relationships" xmlns:mc="http://schemas.openxmlformats.org/markup-compatibility/2006" xmlns:mv="urn:schemas-microsoft-com:mac:vml" xmlns:p="http://schemas.openxmlformats.org/presentationml/2006/main" xmlns:c="http://schemas.openxmlformats.org/drawingml/2006/chart" xmlns:dgm="http://schemas.openxmlformats.org/drawingml/2006/diagram" xmlns:o="urn:schemas-microsoft-com:office:office" xmlns:v="urn:schemas-microsoft-com:vml" xmlns:pvml="urn:schemas-microsoft-com:office:powerpoint" xmlns:com="http://schemas.openxmlformats.org/drawingml/2006/compatibility" xmlns:p14="http://schemas.microsoft.com/office/powerpoint/2010/main" xmlns:p15="http://schemas.microsoft.com/office/powerpoint/2012/main" xmlns:ahyp="http://schemas.microsoft.com/office/drawing/2018/hyperlinkcolor" matchingName="Title Only" type="titleOnly">
+<p:sldLayout xmlns:a="http://schemas.openxmlformats.org/drawingml/2006/main" xmlns:r="http://schemas.openxmlformats.org/officeDocument/2006/relationships" xmlns:p="http://schemas.openxmlformats.org/presentationml/2006/main" matchingName="Title Only" type="titleOnly">
   <p:cSld name="TITLE_ONLY">
     <p:spTree>
       <p:nvGrpSpPr>
-        <p:cNvPr id="45" name="Shape 45"/>
+        <p:cNvPr id="1" name="Shape 45"/>
         <p:cNvGrpSpPr/>
         <p:nvPr/>
       </p:nvGrpSpPr>
@@ -9744,7 +9922,9 @@
       <p:sp>
         <p:nvSpPr>
           <p:cNvPr id="46" name="Google Shape;46;p13"/>
-          <p:cNvSpPr txBox="1"/>
+          <p:cNvSpPr txBox="1">
+            <a:spLocks noGrp="1"/>
+          </p:cNvSpPr>
           <p:nvPr>
             <p:ph type="title"/>
           </p:nvPr>
@@ -9763,7 +9943,7 @@
           </a:ln>
         </p:spPr>
         <p:txBody>
-          <a:bodyPr anchorCtr="0" anchor="ctr" bIns="45700" lIns="91425" spcFirstLastPara="1" rIns="91425" wrap="square" tIns="45700">
+          <a:bodyPr spcFirstLastPara="1" wrap="square" lIns="91425" tIns="45700" rIns="91425" bIns="45700" anchor="ctr" anchorCtr="0">
             <a:normAutofit/>
           </a:bodyPr>
           <a:lstStyle>
@@ -9897,15 +10077,19 @@
               <a:defRPr/>
             </a:lvl9pPr>
           </a:lstStyle>
-          <a:p/>
+          <a:p>
+            <a:endParaRPr/>
+          </a:p>
         </p:txBody>
       </p:sp>
       <p:sp>
         <p:nvSpPr>
           <p:cNvPr id="47" name="Google Shape;47;p13"/>
-          <p:cNvSpPr txBox="1"/>
+          <p:cNvSpPr txBox="1">
+            <a:spLocks noGrp="1"/>
+          </p:cNvSpPr>
           <p:nvPr>
-            <p:ph idx="10" type="dt"/>
+            <p:ph type="dt" idx="10"/>
           </p:nvPr>
         </p:nvSpPr>
         <p:spPr>
@@ -9922,7 +10106,7 @@
           </a:ln>
         </p:spPr>
         <p:txBody>
-          <a:bodyPr anchorCtr="0" anchor="ctr" bIns="45700" lIns="91425" spcFirstLastPara="1" rIns="91425" wrap="square" tIns="45700">
+          <a:bodyPr spcFirstLastPara="1" wrap="square" lIns="91425" tIns="45700" rIns="91425" bIns="45700" anchor="ctr" anchorCtr="0">
             <a:noAutofit/>
           </a:bodyPr>
           <a:lstStyle>
@@ -10053,15 +10237,19 @@
               <a:defRPr/>
             </a:lvl9pPr>
           </a:lstStyle>
-          <a:p/>
+          <a:p>
+            <a:endParaRPr/>
+          </a:p>
         </p:txBody>
       </p:sp>
       <p:sp>
         <p:nvSpPr>
           <p:cNvPr id="48" name="Google Shape;48;p13"/>
-          <p:cNvSpPr txBox="1"/>
+          <p:cNvSpPr txBox="1">
+            <a:spLocks noGrp="1"/>
+          </p:cNvSpPr>
           <p:nvPr>
-            <p:ph idx="11" type="ftr"/>
+            <p:ph type="ftr" idx="11"/>
           </p:nvPr>
         </p:nvSpPr>
         <p:spPr>
@@ -10078,7 +10266,7 @@
           </a:ln>
         </p:spPr>
         <p:txBody>
-          <a:bodyPr anchorCtr="0" anchor="ctr" bIns="45700" lIns="91425" spcFirstLastPara="1" rIns="91425" wrap="square" tIns="45700">
+          <a:bodyPr spcFirstLastPara="1" wrap="square" lIns="91425" tIns="45700" rIns="91425" bIns="45700" anchor="ctr" anchorCtr="0">
             <a:noAutofit/>
           </a:bodyPr>
           <a:lstStyle>
@@ -10209,15 +10397,19 @@
               <a:defRPr/>
             </a:lvl9pPr>
           </a:lstStyle>
-          <a:p/>
+          <a:p>
+            <a:endParaRPr/>
+          </a:p>
         </p:txBody>
       </p:sp>
       <p:sp>
         <p:nvSpPr>
           <p:cNvPr id="49" name="Google Shape;49;p13"/>
-          <p:cNvSpPr txBox="1"/>
+          <p:cNvSpPr txBox="1">
+            <a:spLocks noGrp="1"/>
+          </p:cNvSpPr>
           <p:nvPr>
-            <p:ph idx="12" type="sldNum"/>
+            <p:ph type="sldNum" idx="12"/>
           </p:nvPr>
         </p:nvSpPr>
         <p:spPr>
@@ -10234,11 +10426,11 @@
           </a:ln>
         </p:spPr>
         <p:txBody>
-          <a:bodyPr anchorCtr="0" anchor="ctr" bIns="45700" lIns="91425" spcFirstLastPara="1" rIns="91425" wrap="square" tIns="45700">
+          <a:bodyPr spcFirstLastPara="1" wrap="square" lIns="91425" tIns="45700" rIns="91425" bIns="45700" anchor="ctr" anchorCtr="0">
             <a:noAutofit/>
           </a:bodyPr>
           <a:lstStyle>
-            <a:lvl1pPr indent="0" lvl="0" marL="0" marR="0" algn="r">
+            <a:lvl1pPr marL="0" marR="0" lvl="0" indent="0" algn="r">
               <a:lnSpc>
                 <a:spcPct val="100000"/>
               </a:lnSpc>
@@ -10254,7 +10446,7 @@
               <a:buSzPts val="1200"/>
               <a:buFont typeface="Arial"/>
               <a:buNone/>
-              <a:defRPr b="0" i="0" sz="1200" u="none" cap="none" strike="noStrike">
+              <a:defRPr sz="1200" b="0" i="0" u="none" strike="noStrike" cap="none">
                 <a:solidFill>
                   <a:srgbClr val="888888"/>
                 </a:solidFill>
@@ -10264,7 +10456,7 @@
                 <a:sym typeface="Calibri"/>
               </a:defRPr>
             </a:lvl1pPr>
-            <a:lvl2pPr indent="0" lvl="1" marL="0" marR="0" algn="r">
+            <a:lvl2pPr marL="0" marR="0" lvl="1" indent="0" algn="r">
               <a:lnSpc>
                 <a:spcPct val="100000"/>
               </a:lnSpc>
@@ -10280,7 +10472,7 @@
               <a:buSzPts val="1200"/>
               <a:buFont typeface="Arial"/>
               <a:buNone/>
-              <a:defRPr b="0" i="0" sz="1200" u="none" cap="none" strike="noStrike">
+              <a:defRPr sz="1200" b="0" i="0" u="none" strike="noStrike" cap="none">
                 <a:solidFill>
                   <a:srgbClr val="888888"/>
                 </a:solidFill>
@@ -10290,7 +10482,7 @@
                 <a:sym typeface="Calibri"/>
               </a:defRPr>
             </a:lvl2pPr>
-            <a:lvl3pPr indent="0" lvl="2" marL="0" marR="0" algn="r">
+            <a:lvl3pPr marL="0" marR="0" lvl="2" indent="0" algn="r">
               <a:lnSpc>
                 <a:spcPct val="100000"/>
               </a:lnSpc>
@@ -10306,7 +10498,7 @@
               <a:buSzPts val="1200"/>
               <a:buFont typeface="Arial"/>
               <a:buNone/>
-              <a:defRPr b="0" i="0" sz="1200" u="none" cap="none" strike="noStrike">
+              <a:defRPr sz="1200" b="0" i="0" u="none" strike="noStrike" cap="none">
                 <a:solidFill>
                   <a:srgbClr val="888888"/>
                 </a:solidFill>
@@ -10316,7 +10508,7 @@
                 <a:sym typeface="Calibri"/>
               </a:defRPr>
             </a:lvl3pPr>
-            <a:lvl4pPr indent="0" lvl="3" marL="0" marR="0" algn="r">
+            <a:lvl4pPr marL="0" marR="0" lvl="3" indent="0" algn="r">
               <a:lnSpc>
                 <a:spcPct val="100000"/>
               </a:lnSpc>
@@ -10332,7 +10524,7 @@
               <a:buSzPts val="1200"/>
               <a:buFont typeface="Arial"/>
               <a:buNone/>
-              <a:defRPr b="0" i="0" sz="1200" u="none" cap="none" strike="noStrike">
+              <a:defRPr sz="1200" b="0" i="0" u="none" strike="noStrike" cap="none">
                 <a:solidFill>
                   <a:srgbClr val="888888"/>
                 </a:solidFill>
@@ -10342,7 +10534,7 @@
                 <a:sym typeface="Calibri"/>
               </a:defRPr>
             </a:lvl4pPr>
-            <a:lvl5pPr indent="0" lvl="4" marL="0" marR="0" algn="r">
+            <a:lvl5pPr marL="0" marR="0" lvl="4" indent="0" algn="r">
               <a:lnSpc>
                 <a:spcPct val="100000"/>
               </a:lnSpc>
@@ -10358,7 +10550,7 @@
               <a:buSzPts val="1200"/>
               <a:buFont typeface="Arial"/>
               <a:buNone/>
-              <a:defRPr b="0" i="0" sz="1200" u="none" cap="none" strike="noStrike">
+              <a:defRPr sz="1200" b="0" i="0" u="none" strike="noStrike" cap="none">
                 <a:solidFill>
                   <a:srgbClr val="888888"/>
                 </a:solidFill>
@@ -10368,7 +10560,7 @@
                 <a:sym typeface="Calibri"/>
               </a:defRPr>
             </a:lvl5pPr>
-            <a:lvl6pPr indent="0" lvl="5" marL="0" marR="0" algn="r">
+            <a:lvl6pPr marL="0" marR="0" lvl="5" indent="0" algn="r">
               <a:lnSpc>
                 <a:spcPct val="100000"/>
               </a:lnSpc>
@@ -10384,7 +10576,7 @@
               <a:buSzPts val="1200"/>
               <a:buFont typeface="Arial"/>
               <a:buNone/>
-              <a:defRPr b="0" i="0" sz="1200" u="none" cap="none" strike="noStrike">
+              <a:defRPr sz="1200" b="0" i="0" u="none" strike="noStrike" cap="none">
                 <a:solidFill>
                   <a:srgbClr val="888888"/>
                 </a:solidFill>
@@ -10394,7 +10586,7 @@
                 <a:sym typeface="Calibri"/>
               </a:defRPr>
             </a:lvl6pPr>
-            <a:lvl7pPr indent="0" lvl="6" marL="0" marR="0" algn="r">
+            <a:lvl7pPr marL="0" marR="0" lvl="6" indent="0" algn="r">
               <a:lnSpc>
                 <a:spcPct val="100000"/>
               </a:lnSpc>
@@ -10410,7 +10602,7 @@
               <a:buSzPts val="1200"/>
               <a:buFont typeface="Arial"/>
               <a:buNone/>
-              <a:defRPr b="0" i="0" sz="1200" u="none" cap="none" strike="noStrike">
+              <a:defRPr sz="1200" b="0" i="0" u="none" strike="noStrike" cap="none">
                 <a:solidFill>
                   <a:srgbClr val="888888"/>
                 </a:solidFill>
@@ -10420,7 +10612,7 @@
                 <a:sym typeface="Calibri"/>
               </a:defRPr>
             </a:lvl7pPr>
-            <a:lvl8pPr indent="0" lvl="7" marL="0" marR="0" algn="r">
+            <a:lvl8pPr marL="0" marR="0" lvl="7" indent="0" algn="r">
               <a:lnSpc>
                 <a:spcPct val="100000"/>
               </a:lnSpc>
@@ -10436,7 +10628,7 @@
               <a:buSzPts val="1200"/>
               <a:buFont typeface="Arial"/>
               <a:buNone/>
-              <a:defRPr b="0" i="0" sz="1200" u="none" cap="none" strike="noStrike">
+              <a:defRPr sz="1200" b="0" i="0" u="none" strike="noStrike" cap="none">
                 <a:solidFill>
                   <a:srgbClr val="888888"/>
                 </a:solidFill>
@@ -10446,7 +10638,7 @@
                 <a:sym typeface="Calibri"/>
               </a:defRPr>
             </a:lvl8pPr>
-            <a:lvl9pPr indent="0" lvl="8" marL="0" marR="0" algn="r">
+            <a:lvl9pPr marL="0" marR="0" lvl="8" indent="0" algn="r">
               <a:lnSpc>
                 <a:spcPct val="100000"/>
               </a:lnSpc>
@@ -10462,7 +10654,7 @@
               <a:buSzPts val="1200"/>
               <a:buFont typeface="Arial"/>
               <a:buNone/>
-              <a:defRPr b="0" i="0" sz="1200" u="none" cap="none" strike="noStrike">
+              <a:defRPr sz="1200" b="0" i="0" u="none" strike="noStrike" cap="none">
                 <a:solidFill>
                   <a:srgbClr val="888888"/>
                 </a:solidFill>
@@ -10474,7 +10666,7 @@
             </a:lvl9pPr>
           </a:lstStyle>
           <a:p>
-            <a:pPr indent="0" lvl="0" marL="0" rtl="0" algn="r">
+            <a:pPr marL="0" lvl="0" indent="0" algn="r" rtl="0">
               <a:spcBef>
                 <a:spcPts val="0"/>
               </a:spcBef>
@@ -10500,11 +10692,11 @@
 </file>
 
 <file path=ppt/slideLayouts/slideLayout7.xml><?xml version="1.0" encoding="utf-8"?>
-<p:sldLayout xmlns:a="http://schemas.openxmlformats.org/drawingml/2006/main" xmlns:r="http://schemas.openxmlformats.org/officeDocument/2006/relationships" xmlns:mc="http://schemas.openxmlformats.org/markup-compatibility/2006" xmlns:mv="urn:schemas-microsoft-com:mac:vml" xmlns:p="http://schemas.openxmlformats.org/presentationml/2006/main" xmlns:c="http://schemas.openxmlformats.org/drawingml/2006/chart" xmlns:dgm="http://schemas.openxmlformats.org/drawingml/2006/diagram" xmlns:o="urn:schemas-microsoft-com:office:office" xmlns:v="urn:schemas-microsoft-com:vml" xmlns:pvml="urn:schemas-microsoft-com:office:powerpoint" xmlns:com="http://schemas.openxmlformats.org/drawingml/2006/compatibility" xmlns:p14="http://schemas.microsoft.com/office/powerpoint/2010/main" xmlns:p15="http://schemas.microsoft.com/office/powerpoint/2012/main" xmlns:ahyp="http://schemas.microsoft.com/office/drawing/2018/hyperlinkcolor" matchingName="Blank" type="blank">
+<p:sldLayout xmlns:a="http://schemas.openxmlformats.org/drawingml/2006/main" xmlns:r="http://schemas.openxmlformats.org/officeDocument/2006/relationships" xmlns:p="http://schemas.openxmlformats.org/presentationml/2006/main" matchingName="Blank" type="blank">
   <p:cSld name="BLANK">
     <p:spTree>
       <p:nvGrpSpPr>
-        <p:cNvPr id="50" name="Shape 50"/>
+        <p:cNvPr id="1" name="Shape 50"/>
         <p:cNvGrpSpPr/>
         <p:nvPr/>
       </p:nvGrpSpPr>
@@ -10519,9 +10711,11 @@
       <p:sp>
         <p:nvSpPr>
           <p:cNvPr id="51" name="Google Shape;51;p14"/>
-          <p:cNvSpPr txBox="1"/>
+          <p:cNvSpPr txBox="1">
+            <a:spLocks noGrp="1"/>
+          </p:cNvSpPr>
           <p:nvPr>
-            <p:ph idx="10" type="dt"/>
+            <p:ph type="dt" idx="10"/>
           </p:nvPr>
         </p:nvSpPr>
         <p:spPr>
@@ -10538,7 +10732,7 @@
           </a:ln>
         </p:spPr>
         <p:txBody>
-          <a:bodyPr anchorCtr="0" anchor="ctr" bIns="45700" lIns="91425" spcFirstLastPara="1" rIns="91425" wrap="square" tIns="45700">
+          <a:bodyPr spcFirstLastPara="1" wrap="square" lIns="91425" tIns="45700" rIns="91425" bIns="45700" anchor="ctr" anchorCtr="0">
             <a:noAutofit/>
           </a:bodyPr>
           <a:lstStyle>
@@ -10669,15 +10863,19 @@
               <a:defRPr/>
             </a:lvl9pPr>
           </a:lstStyle>
-          <a:p/>
+          <a:p>
+            <a:endParaRPr/>
+          </a:p>
         </p:txBody>
       </p:sp>
       <p:sp>
         <p:nvSpPr>
           <p:cNvPr id="52" name="Google Shape;52;p14"/>
-          <p:cNvSpPr txBox="1"/>
+          <p:cNvSpPr txBox="1">
+            <a:spLocks noGrp="1"/>
+          </p:cNvSpPr>
           <p:nvPr>
-            <p:ph idx="11" type="ftr"/>
+            <p:ph type="ftr" idx="11"/>
           </p:nvPr>
         </p:nvSpPr>
         <p:spPr>
@@ -10694,7 +10892,7 @@
           </a:ln>
         </p:spPr>
         <p:txBody>
-          <a:bodyPr anchorCtr="0" anchor="ctr" bIns="45700" lIns="91425" spcFirstLastPara="1" rIns="91425" wrap="square" tIns="45700">
+          <a:bodyPr spcFirstLastPara="1" wrap="square" lIns="91425" tIns="45700" rIns="91425" bIns="45700" anchor="ctr" anchorCtr="0">
             <a:noAutofit/>
           </a:bodyPr>
           <a:lstStyle>
@@ -10825,15 +11023,19 @@
               <a:defRPr/>
             </a:lvl9pPr>
           </a:lstStyle>
-          <a:p/>
+          <a:p>
+            <a:endParaRPr/>
+          </a:p>
         </p:txBody>
       </p:sp>
       <p:sp>
         <p:nvSpPr>
           <p:cNvPr id="53" name="Google Shape;53;p14"/>
-          <p:cNvSpPr txBox="1"/>
+          <p:cNvSpPr txBox="1">
+            <a:spLocks noGrp="1"/>
+          </p:cNvSpPr>
           <p:nvPr>
-            <p:ph idx="12" type="sldNum"/>
+            <p:ph type="sldNum" idx="12"/>
           </p:nvPr>
         </p:nvSpPr>
         <p:spPr>
@@ -10850,11 +11052,11 @@
           </a:ln>
         </p:spPr>
         <p:txBody>
-          <a:bodyPr anchorCtr="0" anchor="ctr" bIns="45700" lIns="91425" spcFirstLastPara="1" rIns="91425" wrap="square" tIns="45700">
+          <a:bodyPr spcFirstLastPara="1" wrap="square" lIns="91425" tIns="45700" rIns="91425" bIns="45700" anchor="ctr" anchorCtr="0">
             <a:noAutofit/>
           </a:bodyPr>
           <a:lstStyle>
-            <a:lvl1pPr indent="0" lvl="0" marL="0" marR="0" algn="r">
+            <a:lvl1pPr marL="0" marR="0" lvl="0" indent="0" algn="r">
               <a:lnSpc>
                 <a:spcPct val="100000"/>
               </a:lnSpc>
@@ -10870,7 +11072,7 @@
               <a:buSzPts val="1200"/>
               <a:buFont typeface="Arial"/>
               <a:buNone/>
-              <a:defRPr b="0" i="0" sz="1200" u="none" cap="none" strike="noStrike">
+              <a:defRPr sz="1200" b="0" i="0" u="none" strike="noStrike" cap="none">
                 <a:solidFill>
                   <a:srgbClr val="888888"/>
                 </a:solidFill>
@@ -10880,7 +11082,7 @@
                 <a:sym typeface="Calibri"/>
               </a:defRPr>
             </a:lvl1pPr>
-            <a:lvl2pPr indent="0" lvl="1" marL="0" marR="0" algn="r">
+            <a:lvl2pPr marL="0" marR="0" lvl="1" indent="0" algn="r">
               <a:lnSpc>
                 <a:spcPct val="100000"/>
               </a:lnSpc>
@@ -10896,7 +11098,7 @@
               <a:buSzPts val="1200"/>
               <a:buFont typeface="Arial"/>
               <a:buNone/>
-              <a:defRPr b="0" i="0" sz="1200" u="none" cap="none" strike="noStrike">
+              <a:defRPr sz="1200" b="0" i="0" u="none" strike="noStrike" cap="none">
                 <a:solidFill>
                   <a:srgbClr val="888888"/>
                 </a:solidFill>
@@ -10906,7 +11108,7 @@
                 <a:sym typeface="Calibri"/>
               </a:defRPr>
             </a:lvl2pPr>
-            <a:lvl3pPr indent="0" lvl="2" marL="0" marR="0" algn="r">
+            <a:lvl3pPr marL="0" marR="0" lvl="2" indent="0" algn="r">
               <a:lnSpc>
                 <a:spcPct val="100000"/>
               </a:lnSpc>
@@ -10922,7 +11124,7 @@
               <a:buSzPts val="1200"/>
               <a:buFont typeface="Arial"/>
               <a:buNone/>
-              <a:defRPr b="0" i="0" sz="1200" u="none" cap="none" strike="noStrike">
+              <a:defRPr sz="1200" b="0" i="0" u="none" strike="noStrike" cap="none">
                 <a:solidFill>
                   <a:srgbClr val="888888"/>
                 </a:solidFill>
@@ -10932,7 +11134,7 @@
                 <a:sym typeface="Calibri"/>
               </a:defRPr>
             </a:lvl3pPr>
-            <a:lvl4pPr indent="0" lvl="3" marL="0" marR="0" algn="r">
+            <a:lvl4pPr marL="0" marR="0" lvl="3" indent="0" algn="r">
               <a:lnSpc>
                 <a:spcPct val="100000"/>
               </a:lnSpc>
@@ -10948,7 +11150,7 @@
               <a:buSzPts val="1200"/>
               <a:buFont typeface="Arial"/>
               <a:buNone/>
-              <a:defRPr b="0" i="0" sz="1200" u="none" cap="none" strike="noStrike">
+              <a:defRPr sz="1200" b="0" i="0" u="none" strike="noStrike" cap="none">
                 <a:solidFill>
                   <a:srgbClr val="888888"/>
                 </a:solidFill>
@@ -10958,7 +11160,7 @@
                 <a:sym typeface="Calibri"/>
               </a:defRPr>
             </a:lvl4pPr>
-            <a:lvl5pPr indent="0" lvl="4" marL="0" marR="0" algn="r">
+            <a:lvl5pPr marL="0" marR="0" lvl="4" indent="0" algn="r">
               <a:lnSpc>
                 <a:spcPct val="100000"/>
               </a:lnSpc>
@@ -10974,7 +11176,7 @@
               <a:buSzPts val="1200"/>
               <a:buFont typeface="Arial"/>
               <a:buNone/>
-              <a:defRPr b="0" i="0" sz="1200" u="none" cap="none" strike="noStrike">
+              <a:defRPr sz="1200" b="0" i="0" u="none" strike="noStrike" cap="none">
                 <a:solidFill>
                   <a:srgbClr val="888888"/>
                 </a:solidFill>
@@ -10984,7 +11186,7 @@
                 <a:sym typeface="Calibri"/>
               </a:defRPr>
             </a:lvl5pPr>
-            <a:lvl6pPr indent="0" lvl="5" marL="0" marR="0" algn="r">
+            <a:lvl6pPr marL="0" marR="0" lvl="5" indent="0" algn="r">
               <a:lnSpc>
                 <a:spcPct val="100000"/>
               </a:lnSpc>
@@ -11000,7 +11202,7 @@
               <a:buSzPts val="1200"/>
               <a:buFont typeface="Arial"/>
               <a:buNone/>
-              <a:defRPr b="0" i="0" sz="1200" u="none" cap="none" strike="noStrike">
+              <a:defRPr sz="1200" b="0" i="0" u="none" strike="noStrike" cap="none">
                 <a:solidFill>
                   <a:srgbClr val="888888"/>
                 </a:solidFill>
@@ -11010,7 +11212,7 @@
                 <a:sym typeface="Calibri"/>
               </a:defRPr>
             </a:lvl6pPr>
-            <a:lvl7pPr indent="0" lvl="6" marL="0" marR="0" algn="r">
+            <a:lvl7pPr marL="0" marR="0" lvl="6" indent="0" algn="r">
               <a:lnSpc>
                 <a:spcPct val="100000"/>
               </a:lnSpc>
@@ -11026,7 +11228,7 @@
               <a:buSzPts val="1200"/>
               <a:buFont typeface="Arial"/>
               <a:buNone/>
-              <a:defRPr b="0" i="0" sz="1200" u="none" cap="none" strike="noStrike">
+              <a:defRPr sz="1200" b="0" i="0" u="none" strike="noStrike" cap="none">
                 <a:solidFill>
                   <a:srgbClr val="888888"/>
                 </a:solidFill>
@@ -11036,7 +11238,7 @@
                 <a:sym typeface="Calibri"/>
               </a:defRPr>
             </a:lvl7pPr>
-            <a:lvl8pPr indent="0" lvl="7" marL="0" marR="0" algn="r">
+            <a:lvl8pPr marL="0" marR="0" lvl="7" indent="0" algn="r">
               <a:lnSpc>
                 <a:spcPct val="100000"/>
               </a:lnSpc>
@@ -11052,7 +11254,7 @@
               <a:buSzPts val="1200"/>
               <a:buFont typeface="Arial"/>
               <a:buNone/>
-              <a:defRPr b="0" i="0" sz="1200" u="none" cap="none" strike="noStrike">
+              <a:defRPr sz="1200" b="0" i="0" u="none" strike="noStrike" cap="none">
                 <a:solidFill>
                   <a:srgbClr val="888888"/>
                 </a:solidFill>
@@ -11062,7 +11264,7 @@
                 <a:sym typeface="Calibri"/>
               </a:defRPr>
             </a:lvl8pPr>
-            <a:lvl9pPr indent="0" lvl="8" marL="0" marR="0" algn="r">
+            <a:lvl9pPr marL="0" marR="0" lvl="8" indent="0" algn="r">
               <a:lnSpc>
                 <a:spcPct val="100000"/>
               </a:lnSpc>
@@ -11078,7 +11280,7 @@
               <a:buSzPts val="1200"/>
               <a:buFont typeface="Arial"/>
               <a:buNone/>
-              <a:defRPr b="0" i="0" sz="1200" u="none" cap="none" strike="noStrike">
+              <a:defRPr sz="1200" b="0" i="0" u="none" strike="noStrike" cap="none">
                 <a:solidFill>
                   <a:srgbClr val="888888"/>
                 </a:solidFill>
@@ -11090,7 +11292,7 @@
             </a:lvl9pPr>
           </a:lstStyle>
           <a:p>
-            <a:pPr indent="0" lvl="0" marL="0" rtl="0" algn="r">
+            <a:pPr marL="0" lvl="0" indent="0" algn="r" rtl="0">
               <a:spcBef>
                 <a:spcPts val="0"/>
               </a:spcBef>
@@ -11116,11 +11318,11 @@
 </file>
 
 <file path=ppt/slideLayouts/slideLayout8.xml><?xml version="1.0" encoding="utf-8"?>
-<p:sldLayout xmlns:a="http://schemas.openxmlformats.org/drawingml/2006/main" xmlns:r="http://schemas.openxmlformats.org/officeDocument/2006/relationships" xmlns:mc="http://schemas.openxmlformats.org/markup-compatibility/2006" xmlns:mv="urn:schemas-microsoft-com:mac:vml" xmlns:p="http://schemas.openxmlformats.org/presentationml/2006/main" xmlns:c="http://schemas.openxmlformats.org/drawingml/2006/chart" xmlns:dgm="http://schemas.openxmlformats.org/drawingml/2006/diagram" xmlns:o="urn:schemas-microsoft-com:office:office" xmlns:v="urn:schemas-microsoft-com:vml" xmlns:pvml="urn:schemas-microsoft-com:office:powerpoint" xmlns:com="http://schemas.openxmlformats.org/drawingml/2006/compatibility" xmlns:p14="http://schemas.microsoft.com/office/powerpoint/2010/main" xmlns:p15="http://schemas.microsoft.com/office/powerpoint/2012/main" xmlns:ahyp="http://schemas.microsoft.com/office/drawing/2018/hyperlinkcolor" matchingName="Content with Caption" type="objTx">
+<p:sldLayout xmlns:a="http://schemas.openxmlformats.org/drawingml/2006/main" xmlns:r="http://schemas.openxmlformats.org/officeDocument/2006/relationships" xmlns:p="http://schemas.openxmlformats.org/presentationml/2006/main" matchingName="Content with Caption" type="objTx">
   <p:cSld name="OBJECT_WITH_CAPTION_TEXT">
     <p:spTree>
       <p:nvGrpSpPr>
-        <p:cNvPr id="54" name="Shape 54"/>
+        <p:cNvPr id="1" name="Shape 54"/>
         <p:cNvGrpSpPr/>
         <p:nvPr/>
       </p:nvGrpSpPr>
@@ -11135,7 +11337,9 @@
       <p:sp>
         <p:nvSpPr>
           <p:cNvPr id="55" name="Google Shape;55;p15"/>
-          <p:cNvSpPr txBox="1"/>
+          <p:cNvSpPr txBox="1">
+            <a:spLocks noGrp="1"/>
+          </p:cNvSpPr>
           <p:nvPr>
             <p:ph type="title"/>
           </p:nvPr>
@@ -11154,7 +11358,7 @@
           </a:ln>
         </p:spPr>
         <p:txBody>
-          <a:bodyPr anchorCtr="0" anchor="b" bIns="45700" lIns="91425" spcFirstLastPara="1" rIns="91425" wrap="square" tIns="45700">
+          <a:bodyPr spcFirstLastPara="1" wrap="square" lIns="91425" tIns="45700" rIns="91425" bIns="45700" anchor="b" anchorCtr="0">
             <a:normAutofit/>
           </a:bodyPr>
           <a:lstStyle>
@@ -11174,7 +11378,7 @@
               <a:buSzPts val="2000"/>
               <a:buFont typeface="Calibri"/>
               <a:buNone/>
-              <a:defRPr b="1" sz="2000"/>
+              <a:defRPr sz="2000" b="1"/>
             </a:lvl1pPr>
             <a:lvl2pPr lvl="1" algn="l">
               <a:lnSpc>
@@ -11289,15 +11493,19 @@
               <a:defRPr/>
             </a:lvl9pPr>
           </a:lstStyle>
-          <a:p/>
+          <a:p>
+            <a:endParaRPr/>
+          </a:p>
         </p:txBody>
       </p:sp>
       <p:sp>
         <p:nvSpPr>
           <p:cNvPr id="56" name="Google Shape;56;p15"/>
-          <p:cNvSpPr txBox="1"/>
+          <p:cNvSpPr txBox="1">
+            <a:spLocks noGrp="1"/>
+          </p:cNvSpPr>
           <p:nvPr>
-            <p:ph idx="1" type="body"/>
+            <p:ph type="body" idx="1"/>
           </p:nvPr>
         </p:nvSpPr>
         <p:spPr>
@@ -11314,11 +11522,11 @@
           </a:ln>
         </p:spPr>
         <p:txBody>
-          <a:bodyPr anchorCtr="0" anchor="t" bIns="45700" lIns="91425" spcFirstLastPara="1" rIns="91425" wrap="square" tIns="45700">
+          <a:bodyPr spcFirstLastPara="1" wrap="square" lIns="91425" tIns="45700" rIns="91425" bIns="45700" anchor="t" anchorCtr="0">
             <a:normAutofit/>
           </a:bodyPr>
           <a:lstStyle>
-            <a:lvl1pPr indent="-431800" lvl="0" marL="457200" algn="l">
+            <a:lvl1pPr marL="457200" lvl="0" indent="-431800" algn="l">
               <a:lnSpc>
                 <a:spcPct val="100000"/>
               </a:lnSpc>
@@ -11335,7 +11543,7 @@
               <a:buChar char="•"/>
               <a:defRPr sz="3200"/>
             </a:lvl1pPr>
-            <a:lvl2pPr indent="-406400" lvl="1" marL="914400" algn="l">
+            <a:lvl2pPr marL="914400" lvl="1" indent="-406400" algn="l">
               <a:lnSpc>
                 <a:spcPct val="100000"/>
               </a:lnSpc>
@@ -11352,7 +11560,7 @@
               <a:buChar char="–"/>
               <a:defRPr sz="2800"/>
             </a:lvl2pPr>
-            <a:lvl3pPr indent="-381000" lvl="2" marL="1371600" algn="l">
+            <a:lvl3pPr marL="1371600" lvl="2" indent="-381000" algn="l">
               <a:lnSpc>
                 <a:spcPct val="100000"/>
               </a:lnSpc>
@@ -11369,7 +11577,7 @@
               <a:buChar char="•"/>
               <a:defRPr sz="2400"/>
             </a:lvl3pPr>
-            <a:lvl4pPr indent="-355600" lvl="3" marL="1828800" algn="l">
+            <a:lvl4pPr marL="1828800" lvl="3" indent="-355600" algn="l">
               <a:lnSpc>
                 <a:spcPct val="100000"/>
               </a:lnSpc>
@@ -11386,7 +11594,7 @@
               <a:buChar char="–"/>
               <a:defRPr sz="2000"/>
             </a:lvl4pPr>
-            <a:lvl5pPr indent="-355600" lvl="4" marL="2286000" algn="l">
+            <a:lvl5pPr marL="2286000" lvl="4" indent="-355600" algn="l">
               <a:lnSpc>
                 <a:spcPct val="100000"/>
               </a:lnSpc>
@@ -11403,7 +11611,7 @@
               <a:buChar char="»"/>
               <a:defRPr sz="2000"/>
             </a:lvl5pPr>
-            <a:lvl6pPr indent="-355600" lvl="5" marL="2743200" algn="l">
+            <a:lvl6pPr marL="2743200" lvl="5" indent="-355600" algn="l">
               <a:lnSpc>
                 <a:spcPct val="100000"/>
               </a:lnSpc>
@@ -11420,7 +11628,7 @@
               <a:buChar char="•"/>
               <a:defRPr sz="2000"/>
             </a:lvl6pPr>
-            <a:lvl7pPr indent="-355600" lvl="6" marL="3200400" algn="l">
+            <a:lvl7pPr marL="3200400" lvl="6" indent="-355600" algn="l">
               <a:lnSpc>
                 <a:spcPct val="100000"/>
               </a:lnSpc>
@@ -11437,7 +11645,7 @@
               <a:buChar char="•"/>
               <a:defRPr sz="2000"/>
             </a:lvl7pPr>
-            <a:lvl8pPr indent="-355600" lvl="7" marL="3657600" algn="l">
+            <a:lvl8pPr marL="3657600" lvl="7" indent="-355600" algn="l">
               <a:lnSpc>
                 <a:spcPct val="100000"/>
               </a:lnSpc>
@@ -11454,7 +11662,7 @@
               <a:buChar char="•"/>
               <a:defRPr sz="2000"/>
             </a:lvl8pPr>
-            <a:lvl9pPr indent="-355600" lvl="8" marL="4114800" algn="l">
+            <a:lvl9pPr marL="4114800" lvl="8" indent="-355600" algn="l">
               <a:lnSpc>
                 <a:spcPct val="100000"/>
               </a:lnSpc>
@@ -11472,15 +11680,19 @@
               <a:defRPr sz="2000"/>
             </a:lvl9pPr>
           </a:lstStyle>
-          <a:p/>
+          <a:p>
+            <a:endParaRPr/>
+          </a:p>
         </p:txBody>
       </p:sp>
       <p:sp>
         <p:nvSpPr>
           <p:cNvPr id="57" name="Google Shape;57;p15"/>
-          <p:cNvSpPr txBox="1"/>
+          <p:cNvSpPr txBox="1">
+            <a:spLocks noGrp="1"/>
+          </p:cNvSpPr>
           <p:nvPr>
-            <p:ph idx="2" type="body"/>
+            <p:ph type="body" idx="2"/>
           </p:nvPr>
         </p:nvSpPr>
         <p:spPr>
@@ -11497,11 +11709,11 @@
           </a:ln>
         </p:spPr>
         <p:txBody>
-          <a:bodyPr anchorCtr="0" anchor="t" bIns="45700" lIns="91425" spcFirstLastPara="1" rIns="91425" wrap="square" tIns="45700">
+          <a:bodyPr spcFirstLastPara="1" wrap="square" lIns="91425" tIns="45700" rIns="91425" bIns="45700" anchor="t" anchorCtr="0">
             <a:normAutofit/>
           </a:bodyPr>
           <a:lstStyle>
-            <a:lvl1pPr indent="-228600" lvl="0" marL="457200" algn="l">
+            <a:lvl1pPr marL="457200" lvl="0" indent="-228600" algn="l">
               <a:lnSpc>
                 <a:spcPct val="100000"/>
               </a:lnSpc>
@@ -11518,7 +11730,7 @@
               <a:buNone/>
               <a:defRPr sz="1400"/>
             </a:lvl1pPr>
-            <a:lvl2pPr indent="-228600" lvl="1" marL="914400" algn="l">
+            <a:lvl2pPr marL="914400" lvl="1" indent="-228600" algn="l">
               <a:lnSpc>
                 <a:spcPct val="100000"/>
               </a:lnSpc>
@@ -11535,7 +11747,7 @@
               <a:buNone/>
               <a:defRPr sz="1200"/>
             </a:lvl2pPr>
-            <a:lvl3pPr indent="-228600" lvl="2" marL="1371600" algn="l">
+            <a:lvl3pPr marL="1371600" lvl="2" indent="-228600" algn="l">
               <a:lnSpc>
                 <a:spcPct val="100000"/>
               </a:lnSpc>
@@ -11552,7 +11764,7 @@
               <a:buNone/>
               <a:defRPr sz="1000"/>
             </a:lvl3pPr>
-            <a:lvl4pPr indent="-228600" lvl="3" marL="1828800" algn="l">
+            <a:lvl4pPr marL="1828800" lvl="3" indent="-228600" algn="l">
               <a:lnSpc>
                 <a:spcPct val="100000"/>
               </a:lnSpc>
@@ -11569,7 +11781,7 @@
               <a:buNone/>
               <a:defRPr sz="900"/>
             </a:lvl4pPr>
-            <a:lvl5pPr indent="-228600" lvl="4" marL="2286000" algn="l">
+            <a:lvl5pPr marL="2286000" lvl="4" indent="-228600" algn="l">
               <a:lnSpc>
                 <a:spcPct val="100000"/>
               </a:lnSpc>
@@ -11586,7 +11798,7 @@
               <a:buNone/>
               <a:defRPr sz="900"/>
             </a:lvl5pPr>
-            <a:lvl6pPr indent="-228600" lvl="5" marL="2743200" algn="l">
+            <a:lvl6pPr marL="2743200" lvl="5" indent="-228600" algn="l">
               <a:lnSpc>
                 <a:spcPct val="100000"/>
               </a:lnSpc>
@@ -11603,7 +11815,7 @@
               <a:buNone/>
               <a:defRPr sz="900"/>
             </a:lvl6pPr>
-            <a:lvl7pPr indent="-228600" lvl="6" marL="3200400" algn="l">
+            <a:lvl7pPr marL="3200400" lvl="6" indent="-228600" algn="l">
               <a:lnSpc>
                 <a:spcPct val="100000"/>
               </a:lnSpc>
@@ -11620,7 +11832,7 @@
               <a:buNone/>
               <a:defRPr sz="900"/>
             </a:lvl7pPr>
-            <a:lvl8pPr indent="-228600" lvl="7" marL="3657600" algn="l">
+            <a:lvl8pPr marL="3657600" lvl="7" indent="-228600" algn="l">
               <a:lnSpc>
                 <a:spcPct val="100000"/>
               </a:lnSpc>
@@ -11637,7 +11849,7 @@
               <a:buNone/>
               <a:defRPr sz="900"/>
             </a:lvl8pPr>
-            <a:lvl9pPr indent="-228600" lvl="8" marL="4114800" algn="l">
+            <a:lvl9pPr marL="4114800" lvl="8" indent="-228600" algn="l">
               <a:lnSpc>
                 <a:spcPct val="100000"/>
               </a:lnSpc>
@@ -11655,15 +11867,19 @@
               <a:defRPr sz="900"/>
             </a:lvl9pPr>
           </a:lstStyle>
-          <a:p/>
+          <a:p>
+            <a:endParaRPr/>
+          </a:p>
         </p:txBody>
       </p:sp>
       <p:sp>
         <p:nvSpPr>
           <p:cNvPr id="58" name="Google Shape;58;p15"/>
-          <p:cNvSpPr txBox="1"/>
+          <p:cNvSpPr txBox="1">
+            <a:spLocks noGrp="1"/>
+          </p:cNvSpPr>
           <p:nvPr>
-            <p:ph idx="10" type="dt"/>
+            <p:ph type="dt" idx="10"/>
           </p:nvPr>
         </p:nvSpPr>
         <p:spPr>
@@ -11680,7 +11896,7 @@
           </a:ln>
         </p:spPr>
         <p:txBody>
-          <a:bodyPr anchorCtr="0" anchor="ctr" bIns="45700" lIns="91425" spcFirstLastPara="1" rIns="91425" wrap="square" tIns="45700">
+          <a:bodyPr spcFirstLastPara="1" wrap="square" lIns="91425" tIns="45700" rIns="91425" bIns="45700" anchor="ctr" anchorCtr="0">
             <a:noAutofit/>
           </a:bodyPr>
           <a:lstStyle>
@@ -11811,15 +12027,19 @@
               <a:defRPr/>
             </a:lvl9pPr>
           </a:lstStyle>
-          <a:p/>
+          <a:p>
+            <a:endParaRPr/>
+          </a:p>
         </p:txBody>
       </p:sp>
       <p:sp>
         <p:nvSpPr>
           <p:cNvPr id="59" name="Google Shape;59;p15"/>
-          <p:cNvSpPr txBox="1"/>
+          <p:cNvSpPr txBox="1">
+            <a:spLocks noGrp="1"/>
+          </p:cNvSpPr>
           <p:nvPr>
-            <p:ph idx="11" type="ftr"/>
+            <p:ph type="ftr" idx="11"/>
           </p:nvPr>
         </p:nvSpPr>
         <p:spPr>
@@ -11836,7 +12056,7 @@
           </a:ln>
         </p:spPr>
         <p:txBody>
-          <a:bodyPr anchorCtr="0" anchor="ctr" bIns="45700" lIns="91425" spcFirstLastPara="1" rIns="91425" wrap="square" tIns="45700">
+          <a:bodyPr spcFirstLastPara="1" wrap="square" lIns="91425" tIns="45700" rIns="91425" bIns="45700" anchor="ctr" anchorCtr="0">
             <a:noAutofit/>
           </a:bodyPr>
           <a:lstStyle>
@@ -11967,15 +12187,19 @@
               <a:defRPr/>
             </a:lvl9pPr>
           </a:lstStyle>
-          <a:p/>
+          <a:p>
+            <a:endParaRPr/>
+          </a:p>
         </p:txBody>
       </p:sp>
       <p:sp>
         <p:nvSpPr>
           <p:cNvPr id="60" name="Google Shape;60;p15"/>
-          <p:cNvSpPr txBox="1"/>
+          <p:cNvSpPr txBox="1">
+            <a:spLocks noGrp="1"/>
+          </p:cNvSpPr>
           <p:nvPr>
-            <p:ph idx="12" type="sldNum"/>
+            <p:ph type="sldNum" idx="12"/>
           </p:nvPr>
         </p:nvSpPr>
         <p:spPr>
@@ -11992,11 +12216,11 @@
           </a:ln>
         </p:spPr>
         <p:txBody>
-          <a:bodyPr anchorCtr="0" anchor="ctr" bIns="45700" lIns="91425" spcFirstLastPara="1" rIns="91425" wrap="square" tIns="45700">
+          <a:bodyPr spcFirstLastPara="1" wrap="square" lIns="91425" tIns="45700" rIns="91425" bIns="45700" anchor="ctr" anchorCtr="0">
             <a:noAutofit/>
           </a:bodyPr>
           <a:lstStyle>
-            <a:lvl1pPr indent="0" lvl="0" marL="0" marR="0" algn="r">
+            <a:lvl1pPr marL="0" marR="0" lvl="0" indent="0" algn="r">
               <a:lnSpc>
                 <a:spcPct val="100000"/>
               </a:lnSpc>
@@ -12012,7 +12236,7 @@
               <a:buSzPts val="1200"/>
               <a:buFont typeface="Arial"/>
               <a:buNone/>
-              <a:defRPr b="0" i="0" sz="1200" u="none" cap="none" strike="noStrike">
+              <a:defRPr sz="1200" b="0" i="0" u="none" strike="noStrike" cap="none">
                 <a:solidFill>
                   <a:srgbClr val="888888"/>
                 </a:solidFill>
@@ -12022,7 +12246,7 @@
                 <a:sym typeface="Calibri"/>
               </a:defRPr>
             </a:lvl1pPr>
-            <a:lvl2pPr indent="0" lvl="1" marL="0" marR="0" algn="r">
+            <a:lvl2pPr marL="0" marR="0" lvl="1" indent="0" algn="r">
               <a:lnSpc>
                 <a:spcPct val="100000"/>
               </a:lnSpc>
@@ -12038,7 +12262,7 @@
               <a:buSzPts val="1200"/>
               <a:buFont typeface="Arial"/>
               <a:buNone/>
-              <a:defRPr b="0" i="0" sz="1200" u="none" cap="none" strike="noStrike">
+              <a:defRPr sz="1200" b="0" i="0" u="none" strike="noStrike" cap="none">
                 <a:solidFill>
                   <a:srgbClr val="888888"/>
                 </a:solidFill>
@@ -12048,7 +12272,7 @@
                 <a:sym typeface="Calibri"/>
               </a:defRPr>
             </a:lvl2pPr>
-            <a:lvl3pPr indent="0" lvl="2" marL="0" marR="0" algn="r">
+            <a:lvl3pPr marL="0" marR="0" lvl="2" indent="0" algn="r">
               <a:lnSpc>
                 <a:spcPct val="100000"/>
               </a:lnSpc>
@@ -12064,7 +12288,7 @@
               <a:buSzPts val="1200"/>
               <a:buFont typeface="Arial"/>
               <a:buNone/>
-              <a:defRPr b="0" i="0" sz="1200" u="none" cap="none" strike="noStrike">
+              <a:defRPr sz="1200" b="0" i="0" u="none" strike="noStrike" cap="none">
                 <a:solidFill>
                   <a:srgbClr val="888888"/>
                 </a:solidFill>
@@ -12074,7 +12298,7 @@
                 <a:sym typeface="Calibri"/>
               </a:defRPr>
             </a:lvl3pPr>
-            <a:lvl4pPr indent="0" lvl="3" marL="0" marR="0" algn="r">
+            <a:lvl4pPr marL="0" marR="0" lvl="3" indent="0" algn="r">
               <a:lnSpc>
                 <a:spcPct val="100000"/>
               </a:lnSpc>
@@ -12090,7 +12314,7 @@
               <a:buSzPts val="1200"/>
               <a:buFont typeface="Arial"/>
               <a:buNone/>
-              <a:defRPr b="0" i="0" sz="1200" u="none" cap="none" strike="noStrike">
+              <a:defRPr sz="1200" b="0" i="0" u="none" strike="noStrike" cap="none">
                 <a:solidFill>
                   <a:srgbClr val="888888"/>
                 </a:solidFill>
@@ -12100,7 +12324,7 @@
                 <a:sym typeface="Calibri"/>
               </a:defRPr>
             </a:lvl4pPr>
-            <a:lvl5pPr indent="0" lvl="4" marL="0" marR="0" algn="r">
+            <a:lvl5pPr marL="0" marR="0" lvl="4" indent="0" algn="r">
               <a:lnSpc>
                 <a:spcPct val="100000"/>
               </a:lnSpc>
@@ -12116,7 +12340,7 @@
               <a:buSzPts val="1200"/>
               <a:buFont typeface="Arial"/>
               <a:buNone/>
-              <a:defRPr b="0" i="0" sz="1200" u="none" cap="none" strike="noStrike">
+              <a:defRPr sz="1200" b="0" i="0" u="none" strike="noStrike" cap="none">
                 <a:solidFill>
                   <a:srgbClr val="888888"/>
                 </a:solidFill>
@@ -12126,7 +12350,7 @@
                 <a:sym typeface="Calibri"/>
               </a:defRPr>
             </a:lvl5pPr>
-            <a:lvl6pPr indent="0" lvl="5" marL="0" marR="0" algn="r">
+            <a:lvl6pPr marL="0" marR="0" lvl="5" indent="0" algn="r">
               <a:lnSpc>
                 <a:spcPct val="100000"/>
               </a:lnSpc>
@@ -12142,7 +12366,7 @@
               <a:buSzPts val="1200"/>
               <a:buFont typeface="Arial"/>
               <a:buNone/>
-              <a:defRPr b="0" i="0" sz="1200" u="none" cap="none" strike="noStrike">
+              <a:defRPr sz="1200" b="0" i="0" u="none" strike="noStrike" cap="none">
                 <a:solidFill>
                   <a:srgbClr val="888888"/>
                 </a:solidFill>
@@ -12152,7 +12376,7 @@
                 <a:sym typeface="Calibri"/>
               </a:defRPr>
             </a:lvl6pPr>
-            <a:lvl7pPr indent="0" lvl="6" marL="0" marR="0" algn="r">
+            <a:lvl7pPr marL="0" marR="0" lvl="6" indent="0" algn="r">
               <a:lnSpc>
                 <a:spcPct val="100000"/>
               </a:lnSpc>
@@ -12168,7 +12392,7 @@
               <a:buSzPts val="1200"/>
               <a:buFont typeface="Arial"/>
               <a:buNone/>
-              <a:defRPr b="0" i="0" sz="1200" u="none" cap="none" strike="noStrike">
+              <a:defRPr sz="1200" b="0" i="0" u="none" strike="noStrike" cap="none">
                 <a:solidFill>
                   <a:srgbClr val="888888"/>
                 </a:solidFill>
@@ -12178,7 +12402,7 @@
                 <a:sym typeface="Calibri"/>
               </a:defRPr>
             </a:lvl7pPr>
-            <a:lvl8pPr indent="0" lvl="7" marL="0" marR="0" algn="r">
+            <a:lvl8pPr marL="0" marR="0" lvl="7" indent="0" algn="r">
               <a:lnSpc>
                 <a:spcPct val="100000"/>
               </a:lnSpc>
@@ -12194,7 +12418,7 @@
               <a:buSzPts val="1200"/>
               <a:buFont typeface="Arial"/>
               <a:buNone/>
-              <a:defRPr b="0" i="0" sz="1200" u="none" cap="none" strike="noStrike">
+              <a:defRPr sz="1200" b="0" i="0" u="none" strike="noStrike" cap="none">
                 <a:solidFill>
                   <a:srgbClr val="888888"/>
                 </a:solidFill>
@@ -12204,7 +12428,7 @@
                 <a:sym typeface="Calibri"/>
               </a:defRPr>
             </a:lvl8pPr>
-            <a:lvl9pPr indent="0" lvl="8" marL="0" marR="0" algn="r">
+            <a:lvl9pPr marL="0" marR="0" lvl="8" indent="0" algn="r">
               <a:lnSpc>
                 <a:spcPct val="100000"/>
               </a:lnSpc>
@@ -12220,7 +12444,7 @@
               <a:buSzPts val="1200"/>
               <a:buFont typeface="Arial"/>
               <a:buNone/>
-              <a:defRPr b="0" i="0" sz="1200" u="none" cap="none" strike="noStrike">
+              <a:defRPr sz="1200" b="0" i="0" u="none" strike="noStrike" cap="none">
                 <a:solidFill>
                   <a:srgbClr val="888888"/>
                 </a:solidFill>
@@ -12232,7 +12456,7 @@
             </a:lvl9pPr>
           </a:lstStyle>
           <a:p>
-            <a:pPr indent="0" lvl="0" marL="0" rtl="0" algn="r">
+            <a:pPr marL="0" lvl="0" indent="0" algn="r" rtl="0">
               <a:spcBef>
                 <a:spcPts val="0"/>
               </a:spcBef>
@@ -12258,11 +12482,11 @@
 </file>
 
 <file path=ppt/slideLayouts/slideLayout9.xml><?xml version="1.0" encoding="utf-8"?>
-<p:sldLayout xmlns:a="http://schemas.openxmlformats.org/drawingml/2006/main" xmlns:r="http://schemas.openxmlformats.org/officeDocument/2006/relationships" xmlns:mc="http://schemas.openxmlformats.org/markup-compatibility/2006" xmlns:mv="urn:schemas-microsoft-com:mac:vml" xmlns:p="http://schemas.openxmlformats.org/presentationml/2006/main" xmlns:c="http://schemas.openxmlformats.org/drawingml/2006/chart" xmlns:dgm="http://schemas.openxmlformats.org/drawingml/2006/diagram" xmlns:o="urn:schemas-microsoft-com:office:office" xmlns:v="urn:schemas-microsoft-com:vml" xmlns:pvml="urn:schemas-microsoft-com:office:powerpoint" xmlns:com="http://schemas.openxmlformats.org/drawingml/2006/compatibility" xmlns:p14="http://schemas.microsoft.com/office/powerpoint/2010/main" xmlns:p15="http://schemas.microsoft.com/office/powerpoint/2012/main" xmlns:ahyp="http://schemas.microsoft.com/office/drawing/2018/hyperlinkcolor" matchingName="Picture with Caption" type="picTx">
+<p:sldLayout xmlns:a="http://schemas.openxmlformats.org/drawingml/2006/main" xmlns:r="http://schemas.openxmlformats.org/officeDocument/2006/relationships" xmlns:p="http://schemas.openxmlformats.org/presentationml/2006/main" matchingName="Picture with Caption" type="picTx">
   <p:cSld name="PICTURE_WITH_CAPTION_TEXT">
     <p:spTree>
       <p:nvGrpSpPr>
-        <p:cNvPr id="61" name="Shape 61"/>
+        <p:cNvPr id="1" name="Shape 61"/>
         <p:cNvGrpSpPr/>
         <p:nvPr/>
       </p:nvGrpSpPr>
@@ -12277,7 +12501,9 @@
       <p:sp>
         <p:nvSpPr>
           <p:cNvPr id="62" name="Google Shape;62;p16"/>
-          <p:cNvSpPr txBox="1"/>
+          <p:cNvSpPr txBox="1">
+            <a:spLocks noGrp="1"/>
+          </p:cNvSpPr>
           <p:nvPr>
             <p:ph type="title"/>
           </p:nvPr>
@@ -12296,7 +12522,7 @@
           </a:ln>
         </p:spPr>
         <p:txBody>
-          <a:bodyPr anchorCtr="0" anchor="b" bIns="45700" lIns="91425" spcFirstLastPara="1" rIns="91425" wrap="square" tIns="45700">
+          <a:bodyPr spcFirstLastPara="1" wrap="square" lIns="91425" tIns="45700" rIns="91425" bIns="45700" anchor="b" anchorCtr="0">
             <a:normAutofit/>
           </a:bodyPr>
           <a:lstStyle>
@@ -12316,7 +12542,7 @@
               <a:buSzPts val="2000"/>
               <a:buFont typeface="Calibri"/>
               <a:buNone/>
-              <a:defRPr b="1" sz="2000"/>
+              <a:defRPr sz="2000" b="1"/>
             </a:lvl1pPr>
             <a:lvl2pPr lvl="1" algn="l">
               <a:lnSpc>
@@ -12431,15 +12657,19 @@
               <a:defRPr/>
             </a:lvl9pPr>
           </a:lstStyle>
-          <a:p/>
+          <a:p>
+            <a:endParaRPr/>
+          </a:p>
         </p:txBody>
       </p:sp>
       <p:sp>
         <p:nvSpPr>
           <p:cNvPr id="63" name="Google Shape;63;p16"/>
-          <p:cNvSpPr/>
+          <p:cNvSpPr>
+            <a:spLocks noGrp="1"/>
+          </p:cNvSpPr>
           <p:nvPr>
-            <p:ph idx="2" type="pic"/>
+            <p:ph type="pic" idx="2"/>
           </p:nvPr>
         </p:nvSpPr>
         <p:spPr>
@@ -12459,9 +12689,11 @@
       <p:sp>
         <p:nvSpPr>
           <p:cNvPr id="64" name="Google Shape;64;p16"/>
-          <p:cNvSpPr txBox="1"/>
+          <p:cNvSpPr txBox="1">
+            <a:spLocks noGrp="1"/>
+          </p:cNvSpPr>
           <p:nvPr>
-            <p:ph idx="1" type="body"/>
+            <p:ph type="body" idx="1"/>
           </p:nvPr>
         </p:nvSpPr>
         <p:spPr>
@@ -12478,11 +12710,11 @@
           </a:ln>
         </p:spPr>
         <p:txBody>
-          <a:bodyPr anchorCtr="0" anchor="t" bIns="45700" lIns="91425" spcFirstLastPara="1" rIns="91425" wrap="square" tIns="45700">
+          <a:bodyPr spcFirstLastPara="1" wrap="square" lIns="91425" tIns="45700" rIns="91425" bIns="45700" anchor="t" anchorCtr="0">
             <a:normAutofit/>
           </a:bodyPr>
           <a:lstStyle>
-            <a:lvl1pPr indent="-228600" lvl="0" marL="457200" algn="l">
+            <a:lvl1pPr marL="457200" lvl="0" indent="-228600" algn="l">
               <a:lnSpc>
                 <a:spcPct val="100000"/>
               </a:lnSpc>
@@ -12499,7 +12731,7 @@
               <a:buNone/>
               <a:defRPr sz="1400"/>
             </a:lvl1pPr>
-            <a:lvl2pPr indent="-228600" lvl="1" marL="914400" algn="l">
+            <a:lvl2pPr marL="914400" lvl="1" indent="-228600" algn="l">
               <a:lnSpc>
                 <a:spcPct val="100000"/>
               </a:lnSpc>
@@ -12516,7 +12748,7 @@
               <a:buNone/>
               <a:defRPr sz="1200"/>
             </a:lvl2pPr>
-            <a:lvl3pPr indent="-228600" lvl="2" marL="1371600" algn="l">
+            <a:lvl3pPr marL="1371600" lvl="2" indent="-228600" algn="l">
               <a:lnSpc>
                 <a:spcPct val="100000"/>
               </a:lnSpc>
@@ -12533,7 +12765,7 @@
               <a:buNone/>
               <a:defRPr sz="1000"/>
             </a:lvl3pPr>
-            <a:lvl4pPr indent="-228600" lvl="3" marL="1828800" algn="l">
+            <a:lvl4pPr marL="1828800" lvl="3" indent="-228600" algn="l">
               <a:lnSpc>
                 <a:spcPct val="100000"/>
               </a:lnSpc>
@@ -12550,7 +12782,7 @@
               <a:buNone/>
               <a:defRPr sz="900"/>
             </a:lvl4pPr>
-            <a:lvl5pPr indent="-228600" lvl="4" marL="2286000" algn="l">
+            <a:lvl5pPr marL="2286000" lvl="4" indent="-228600" algn="l">
               <a:lnSpc>
                 <a:spcPct val="100000"/>
               </a:lnSpc>
@@ -12567,7 +12799,7 @@
               <a:buNone/>
               <a:defRPr sz="900"/>
             </a:lvl5pPr>
-            <a:lvl6pPr indent="-228600" lvl="5" marL="2743200" algn="l">
+            <a:lvl6pPr marL="2743200" lvl="5" indent="-228600" algn="l">
               <a:lnSpc>
                 <a:spcPct val="100000"/>
               </a:lnSpc>
@@ -12584,7 +12816,7 @@
               <a:buNone/>
               <a:defRPr sz="900"/>
             </a:lvl6pPr>
-            <a:lvl7pPr indent="-228600" lvl="6" marL="3200400" algn="l">
+            <a:lvl7pPr marL="3200400" lvl="6" indent="-228600" algn="l">
               <a:lnSpc>
                 <a:spcPct val="100000"/>
               </a:lnSpc>
@@ -12601,7 +12833,7 @@
               <a:buNone/>
               <a:defRPr sz="900"/>
             </a:lvl7pPr>
-            <a:lvl8pPr indent="-228600" lvl="7" marL="3657600" algn="l">
+            <a:lvl8pPr marL="3657600" lvl="7" indent="-228600" algn="l">
               <a:lnSpc>
                 <a:spcPct val="100000"/>
               </a:lnSpc>
@@ -12618,7 +12850,7 @@
               <a:buNone/>
               <a:defRPr sz="900"/>
             </a:lvl8pPr>
-            <a:lvl9pPr indent="-228600" lvl="8" marL="4114800" algn="l">
+            <a:lvl9pPr marL="4114800" lvl="8" indent="-228600" algn="l">
               <a:lnSpc>
                 <a:spcPct val="100000"/>
               </a:lnSpc>
@@ -12636,15 +12868,19 @@
               <a:defRPr sz="900"/>
             </a:lvl9pPr>
           </a:lstStyle>
-          <a:p/>
+          <a:p>
+            <a:endParaRPr/>
+          </a:p>
         </p:txBody>
       </p:sp>
       <p:sp>
         <p:nvSpPr>
           <p:cNvPr id="65" name="Google Shape;65;p16"/>
-          <p:cNvSpPr txBox="1"/>
+          <p:cNvSpPr txBox="1">
+            <a:spLocks noGrp="1"/>
+          </p:cNvSpPr>
           <p:nvPr>
-            <p:ph idx="10" type="dt"/>
+            <p:ph type="dt" idx="10"/>
           </p:nvPr>
         </p:nvSpPr>
         <p:spPr>
@@ -12661,7 +12897,7 @@
           </a:ln>
         </p:spPr>
         <p:txBody>
-          <a:bodyPr anchorCtr="0" anchor="ctr" bIns="45700" lIns="91425" spcFirstLastPara="1" rIns="91425" wrap="square" tIns="45700">
+          <a:bodyPr spcFirstLastPara="1" wrap="square" lIns="91425" tIns="45700" rIns="91425" bIns="45700" anchor="ctr" anchorCtr="0">
             <a:noAutofit/>
           </a:bodyPr>
           <a:lstStyle>
@@ -12792,15 +13028,19 @@
               <a:defRPr/>
             </a:lvl9pPr>
           </a:lstStyle>
-          <a:p/>
+          <a:p>
+            <a:endParaRPr/>
+          </a:p>
         </p:txBody>
       </p:sp>
       <p:sp>
         <p:nvSpPr>
           <p:cNvPr id="66" name="Google Shape;66;p16"/>
-          <p:cNvSpPr txBox="1"/>
+          <p:cNvSpPr txBox="1">
+            <a:spLocks noGrp="1"/>
+          </p:cNvSpPr>
           <p:nvPr>
-            <p:ph idx="11" type="ftr"/>
+            <p:ph type="ftr" idx="11"/>
           </p:nvPr>
         </p:nvSpPr>
         <p:spPr>
@@ -12817,7 +13057,7 @@
           </a:ln>
         </p:spPr>
         <p:txBody>
-          <a:bodyPr anchorCtr="0" anchor="ctr" bIns="45700" lIns="91425" spcFirstLastPara="1" rIns="91425" wrap="square" tIns="45700">
+          <a:bodyPr spcFirstLastPara="1" wrap="square" lIns="91425" tIns="45700" rIns="91425" bIns="45700" anchor="ctr" anchorCtr="0">
             <a:noAutofit/>
           </a:bodyPr>
           <a:lstStyle>
@@ -12948,15 +13188,19 @@
               <a:defRPr/>
             </a:lvl9pPr>
           </a:lstStyle>
-          <a:p/>
+          <a:p>
+            <a:endParaRPr/>
+          </a:p>
         </p:txBody>
       </p:sp>
       <p:sp>
         <p:nvSpPr>
           <p:cNvPr id="67" name="Google Shape;67;p16"/>
-          <p:cNvSpPr txBox="1"/>
+          <p:cNvSpPr txBox="1">
+            <a:spLocks noGrp="1"/>
+          </p:cNvSpPr>
           <p:nvPr>
-            <p:ph idx="12" type="sldNum"/>
+            <p:ph type="sldNum" idx="12"/>
           </p:nvPr>
         </p:nvSpPr>
         <p:spPr>
@@ -12973,11 +13217,11 @@
           </a:ln>
         </p:spPr>
         <p:txBody>
-          <a:bodyPr anchorCtr="0" anchor="ctr" bIns="45700" lIns="91425" spcFirstLastPara="1" rIns="91425" wrap="square" tIns="45700">
+          <a:bodyPr spcFirstLastPara="1" wrap="square" lIns="91425" tIns="45700" rIns="91425" bIns="45700" anchor="ctr" anchorCtr="0">
             <a:noAutofit/>
           </a:bodyPr>
           <a:lstStyle>
-            <a:lvl1pPr indent="0" lvl="0" marL="0" marR="0" algn="r">
+            <a:lvl1pPr marL="0" marR="0" lvl="0" indent="0" algn="r">
               <a:lnSpc>
                 <a:spcPct val="100000"/>
               </a:lnSpc>
@@ -12993,7 +13237,7 @@
               <a:buSzPts val="1200"/>
               <a:buFont typeface="Arial"/>
               <a:buNone/>
-              <a:defRPr b="0" i="0" sz="1200" u="none" cap="none" strike="noStrike">
+              <a:defRPr sz="1200" b="0" i="0" u="none" strike="noStrike" cap="none">
                 <a:solidFill>
                   <a:srgbClr val="888888"/>
                 </a:solidFill>
@@ -13003,7 +13247,7 @@
                 <a:sym typeface="Calibri"/>
               </a:defRPr>
             </a:lvl1pPr>
-            <a:lvl2pPr indent="0" lvl="1" marL="0" marR="0" algn="r">
+            <a:lvl2pPr marL="0" marR="0" lvl="1" indent="0" algn="r">
               <a:lnSpc>
                 <a:spcPct val="100000"/>
               </a:lnSpc>
@@ -13019,7 +13263,7 @@
               <a:buSzPts val="1200"/>
               <a:buFont typeface="Arial"/>
               <a:buNone/>
-              <a:defRPr b="0" i="0" sz="1200" u="none" cap="none" strike="noStrike">
+              <a:defRPr sz="1200" b="0" i="0" u="none" strike="noStrike" cap="none">
                 <a:solidFill>
                   <a:srgbClr val="888888"/>
                 </a:solidFill>
@@ -13029,7 +13273,7 @@
                 <a:sym typeface="Calibri"/>
               </a:defRPr>
             </a:lvl2pPr>
-            <a:lvl3pPr indent="0" lvl="2" marL="0" marR="0" algn="r">
+            <a:lvl3pPr marL="0" marR="0" lvl="2" indent="0" algn="r">
               <a:lnSpc>
                 <a:spcPct val="100000"/>
               </a:lnSpc>
@@ -13045,7 +13289,7 @@
               <a:buSzPts val="1200"/>
               <a:buFont typeface="Arial"/>
               <a:buNone/>
-              <a:defRPr b="0" i="0" sz="1200" u="none" cap="none" strike="noStrike">
+              <a:defRPr sz="1200" b="0" i="0" u="none" strike="noStrike" cap="none">
                 <a:solidFill>
                   <a:srgbClr val="888888"/>
                 </a:solidFill>
@@ -13055,7 +13299,7 @@
                 <a:sym typeface="Calibri"/>
               </a:defRPr>
             </a:lvl3pPr>
-            <a:lvl4pPr indent="0" lvl="3" marL="0" marR="0" algn="r">
+            <a:lvl4pPr marL="0" marR="0" lvl="3" indent="0" algn="r">
               <a:lnSpc>
                 <a:spcPct val="100000"/>
               </a:lnSpc>
@@ -13071,7 +13315,7 @@
               <a:buSzPts val="1200"/>
               <a:buFont typeface="Arial"/>
               <a:buNone/>
-              <a:defRPr b="0" i="0" sz="1200" u="none" cap="none" strike="noStrike">
+              <a:defRPr sz="1200" b="0" i="0" u="none" strike="noStrike" cap="none">
                 <a:solidFill>
                   <a:srgbClr val="888888"/>
                 </a:solidFill>
@@ -13081,7 +13325,7 @@
                 <a:sym typeface="Calibri"/>
               </a:defRPr>
             </a:lvl4pPr>
-            <a:lvl5pPr indent="0" lvl="4" marL="0" marR="0" algn="r">
+            <a:lvl5pPr marL="0" marR="0" lvl="4" indent="0" algn="r">
               <a:lnSpc>
                 <a:spcPct val="100000"/>
               </a:lnSpc>
@@ -13097,7 +13341,7 @@
               <a:buSzPts val="1200"/>
               <a:buFont typeface="Arial"/>
               <a:buNone/>
-              <a:defRPr b="0" i="0" sz="1200" u="none" cap="none" strike="noStrike">
+              <a:defRPr sz="1200" b="0" i="0" u="none" strike="noStrike" cap="none">
                 <a:solidFill>
                   <a:srgbClr val="888888"/>
                 </a:solidFill>
@@ -13107,7 +13351,7 @@
                 <a:sym typeface="Calibri"/>
               </a:defRPr>
             </a:lvl5pPr>
-            <a:lvl6pPr indent="0" lvl="5" marL="0" marR="0" algn="r">
+            <a:lvl6pPr marL="0" marR="0" lvl="5" indent="0" algn="r">
               <a:lnSpc>
                 <a:spcPct val="100000"/>
               </a:lnSpc>
@@ -13123,7 +13367,7 @@
               <a:buSzPts val="1200"/>
               <a:buFont typeface="Arial"/>
               <a:buNone/>
-              <a:defRPr b="0" i="0" sz="1200" u="none" cap="none" strike="noStrike">
+              <a:defRPr sz="1200" b="0" i="0" u="none" strike="noStrike" cap="none">
                 <a:solidFill>
                   <a:srgbClr val="888888"/>
                 </a:solidFill>
@@ -13133,7 +13377,7 @@
                 <a:sym typeface="Calibri"/>
               </a:defRPr>
             </a:lvl6pPr>
-            <a:lvl7pPr indent="0" lvl="6" marL="0" marR="0" algn="r">
+            <a:lvl7pPr marL="0" marR="0" lvl="6" indent="0" algn="r">
               <a:lnSpc>
                 <a:spcPct val="100000"/>
               </a:lnSpc>
@@ -13149,7 +13393,7 @@
               <a:buSzPts val="1200"/>
               <a:buFont typeface="Arial"/>
               <a:buNone/>
-              <a:defRPr b="0" i="0" sz="1200" u="none" cap="none" strike="noStrike">
+              <a:defRPr sz="1200" b="0" i="0" u="none" strike="noStrike" cap="none">
                 <a:solidFill>
                   <a:srgbClr val="888888"/>
                 </a:solidFill>
@@ -13159,7 +13403,7 @@
                 <a:sym typeface="Calibri"/>
               </a:defRPr>
             </a:lvl7pPr>
-            <a:lvl8pPr indent="0" lvl="7" marL="0" marR="0" algn="r">
+            <a:lvl8pPr marL="0" marR="0" lvl="7" indent="0" algn="r">
               <a:lnSpc>
                 <a:spcPct val="100000"/>
               </a:lnSpc>
@@ -13175,7 +13419,7 @@
               <a:buSzPts val="1200"/>
               <a:buFont typeface="Arial"/>
               <a:buNone/>
-              <a:defRPr b="0" i="0" sz="1200" u="none" cap="none" strike="noStrike">
+              <a:defRPr sz="1200" b="0" i="0" u="none" strike="noStrike" cap="none">
                 <a:solidFill>
                   <a:srgbClr val="888888"/>
                 </a:solidFill>
@@ -13185,7 +13429,7 @@
                 <a:sym typeface="Calibri"/>
               </a:defRPr>
             </a:lvl8pPr>
-            <a:lvl9pPr indent="0" lvl="8" marL="0" marR="0" algn="r">
+            <a:lvl9pPr marL="0" marR="0" lvl="8" indent="0" algn="r">
               <a:lnSpc>
                 <a:spcPct val="100000"/>
               </a:lnSpc>
@@ -13201,7 +13445,7 @@
               <a:buSzPts val="1200"/>
               <a:buFont typeface="Arial"/>
               <a:buNone/>
-              <a:defRPr b="0" i="0" sz="1200" u="none" cap="none" strike="noStrike">
+              <a:defRPr sz="1200" b="0" i="0" u="none" strike="noStrike" cap="none">
                 <a:solidFill>
                   <a:srgbClr val="888888"/>
                 </a:solidFill>
@@ -13213,7 +13457,7 @@
             </a:lvl9pPr>
           </a:lstStyle>
           <a:p>
-            <a:pPr indent="0" lvl="0" marL="0" rtl="0" algn="r">
+            <a:pPr marL="0" lvl="0" indent="0" algn="r" rtl="0">
               <a:spcBef>
                 <a:spcPts val="0"/>
               </a:spcBef>
@@ -13239,18 +13483,19 @@
 </file>
 
 <file path=ppt/slideMasters/slideMaster1.xml><?xml version="1.0" encoding="utf-8"?>
-<p:sldMaster xmlns:a="http://schemas.openxmlformats.org/drawingml/2006/main" xmlns:r="http://schemas.openxmlformats.org/officeDocument/2006/relationships" xmlns:mc="http://schemas.openxmlformats.org/markup-compatibility/2006" xmlns:mv="urn:schemas-microsoft-com:mac:vml" xmlns:p="http://schemas.openxmlformats.org/presentationml/2006/main" xmlns:c="http://schemas.openxmlformats.org/drawingml/2006/chart" xmlns:dgm="http://schemas.openxmlformats.org/drawingml/2006/diagram" xmlns:o="urn:schemas-microsoft-com:office:office" xmlns:v="urn:schemas-microsoft-com:vml" xmlns:pvml="urn:schemas-microsoft-com:office:powerpoint" xmlns:com="http://schemas.openxmlformats.org/drawingml/2006/compatibility" xmlns:p14="http://schemas.microsoft.com/office/powerpoint/2010/main" xmlns:p15="http://schemas.microsoft.com/office/powerpoint/2012/main" xmlns:ahyp="http://schemas.microsoft.com/office/drawing/2018/hyperlinkcolor">
+<p:sldMaster xmlns:a="http://schemas.openxmlformats.org/drawingml/2006/main" xmlns:r="http://schemas.openxmlformats.org/officeDocument/2006/relationships" xmlns:p="http://schemas.openxmlformats.org/presentationml/2006/main">
   <p:cSld>
     <p:bg>
       <p:bgPr>
         <a:solidFill>
           <a:schemeClr val="lt1"/>
         </a:solidFill>
+        <a:effectLst/>
       </p:bgPr>
     </p:bg>
     <p:spTree>
       <p:nvGrpSpPr>
-        <p:cNvPr id="5" name="Shape 5"/>
+        <p:cNvPr id="1" name="Shape 5"/>
         <p:cNvGrpSpPr/>
         <p:nvPr/>
       </p:nvGrpSpPr>
@@ -13265,7 +13510,9 @@
       <p:sp>
         <p:nvSpPr>
           <p:cNvPr id="6" name="Google Shape;6;p7"/>
-          <p:cNvSpPr txBox="1"/>
+          <p:cNvSpPr txBox="1">
+            <a:spLocks noGrp="1"/>
+          </p:cNvSpPr>
           <p:nvPr>
             <p:ph type="title"/>
           </p:nvPr>
@@ -13284,11 +13531,11 @@
           </a:ln>
         </p:spPr>
         <p:txBody>
-          <a:bodyPr anchorCtr="0" anchor="ctr" bIns="45700" lIns="91425" spcFirstLastPara="1" rIns="91425" wrap="square" tIns="45700">
+          <a:bodyPr spcFirstLastPara="1" wrap="square" lIns="91425" tIns="45700" rIns="91425" bIns="45700" anchor="ctr" anchorCtr="0">
             <a:normAutofit/>
           </a:bodyPr>
           <a:lstStyle>
-            <a:lvl1pPr lvl="0" marR="0" rtl="0" algn="ctr">
+            <a:lvl1pPr marR="0" lvl="0" algn="ctr" rtl="0">
               <a:lnSpc>
                 <a:spcPct val="100000"/>
               </a:lnSpc>
@@ -13304,7 +13551,7 @@
               <a:buSzPts val="4400"/>
               <a:buFont typeface="Syne"/>
               <a:buNone/>
-              <a:defRPr b="0" i="0" sz="4400" u="none" cap="none" strike="noStrike">
+              <a:defRPr sz="4400" b="0" i="0" u="none" strike="noStrike" cap="none">
                 <a:solidFill>
                   <a:schemeClr val="dk1"/>
                 </a:solidFill>
@@ -13314,7 +13561,7 @@
                 <a:sym typeface="Syne"/>
               </a:defRPr>
             </a:lvl1pPr>
-            <a:lvl2pPr lvl="1" marR="0" rtl="0" algn="l">
+            <a:lvl2pPr marR="0" lvl="1" algn="l" rtl="0">
               <a:lnSpc>
                 <a:spcPct val="100000"/>
               </a:lnSpc>
@@ -13330,7 +13577,7 @@
               <a:buSzPts val="1400"/>
               <a:buFont typeface="Arial"/>
               <a:buNone/>
-              <a:defRPr b="0" i="0" sz="1800" u="none" cap="none" strike="noStrike">
+              <a:defRPr sz="1800" b="0" i="0" u="none" strike="noStrike" cap="none">
                 <a:solidFill>
                   <a:srgbClr val="000000"/>
                 </a:solidFill>
@@ -13340,7 +13587,7 @@
                 <a:sym typeface="Arial"/>
               </a:defRPr>
             </a:lvl2pPr>
-            <a:lvl3pPr lvl="2" marR="0" rtl="0" algn="l">
+            <a:lvl3pPr marR="0" lvl="2" algn="l" rtl="0">
               <a:lnSpc>
                 <a:spcPct val="100000"/>
               </a:lnSpc>
@@ -13356,7 +13603,7 @@
               <a:buSzPts val="1400"/>
               <a:buFont typeface="Arial"/>
               <a:buNone/>
-              <a:defRPr b="0" i="0" sz="1800" u="none" cap="none" strike="noStrike">
+              <a:defRPr sz="1800" b="0" i="0" u="none" strike="noStrike" cap="none">
                 <a:solidFill>
                   <a:srgbClr val="000000"/>
                 </a:solidFill>
@@ -13366,7 +13613,7 @@
                 <a:sym typeface="Arial"/>
               </a:defRPr>
             </a:lvl3pPr>
-            <a:lvl4pPr lvl="3" marR="0" rtl="0" algn="l">
+            <a:lvl4pPr marR="0" lvl="3" algn="l" rtl="0">
               <a:lnSpc>
                 <a:spcPct val="100000"/>
               </a:lnSpc>
@@ -13382,7 +13629,7 @@
               <a:buSzPts val="1400"/>
               <a:buFont typeface="Arial"/>
               <a:buNone/>
-              <a:defRPr b="0" i="0" sz="1800" u="none" cap="none" strike="noStrike">
+              <a:defRPr sz="1800" b="0" i="0" u="none" strike="noStrike" cap="none">
                 <a:solidFill>
                   <a:srgbClr val="000000"/>
                 </a:solidFill>
@@ -13392,7 +13639,7 @@
                 <a:sym typeface="Arial"/>
               </a:defRPr>
             </a:lvl4pPr>
-            <a:lvl5pPr lvl="4" marR="0" rtl="0" algn="l">
+            <a:lvl5pPr marR="0" lvl="4" algn="l" rtl="0">
               <a:lnSpc>
                 <a:spcPct val="100000"/>
               </a:lnSpc>
@@ -13408,7 +13655,7 @@
               <a:buSzPts val="1400"/>
               <a:buFont typeface="Arial"/>
               <a:buNone/>
-              <a:defRPr b="0" i="0" sz="1800" u="none" cap="none" strike="noStrike">
+              <a:defRPr sz="1800" b="0" i="0" u="none" strike="noStrike" cap="none">
                 <a:solidFill>
                   <a:srgbClr val="000000"/>
                 </a:solidFill>
@@ -13418,7 +13665,7 @@
                 <a:sym typeface="Arial"/>
               </a:defRPr>
             </a:lvl5pPr>
-            <a:lvl6pPr lvl="5" marR="0" rtl="0" algn="l">
+            <a:lvl6pPr marR="0" lvl="5" algn="l" rtl="0">
               <a:lnSpc>
                 <a:spcPct val="100000"/>
               </a:lnSpc>
@@ -13434,7 +13681,7 @@
               <a:buSzPts val="1400"/>
               <a:buFont typeface="Arial"/>
               <a:buNone/>
-              <a:defRPr b="0" i="0" sz="1800" u="none" cap="none" strike="noStrike">
+              <a:defRPr sz="1800" b="0" i="0" u="none" strike="noStrike" cap="none">
                 <a:solidFill>
                   <a:srgbClr val="000000"/>
                 </a:solidFill>
@@ -13444,7 +13691,7 @@
                 <a:sym typeface="Arial"/>
               </a:defRPr>
             </a:lvl6pPr>
-            <a:lvl7pPr lvl="6" marR="0" rtl="0" algn="l">
+            <a:lvl7pPr marR="0" lvl="6" algn="l" rtl="0">
               <a:lnSpc>
                 <a:spcPct val="100000"/>
               </a:lnSpc>
@@ -13460,7 +13707,7 @@
               <a:buSzPts val="1400"/>
               <a:buFont typeface="Arial"/>
               <a:buNone/>
-              <a:defRPr b="0" i="0" sz="1800" u="none" cap="none" strike="noStrike">
+              <a:defRPr sz="1800" b="0" i="0" u="none" strike="noStrike" cap="none">
                 <a:solidFill>
                   <a:srgbClr val="000000"/>
                 </a:solidFill>
@@ -13470,7 +13717,7 @@
                 <a:sym typeface="Arial"/>
               </a:defRPr>
             </a:lvl7pPr>
-            <a:lvl8pPr lvl="7" marR="0" rtl="0" algn="l">
+            <a:lvl8pPr marR="0" lvl="7" algn="l" rtl="0">
               <a:lnSpc>
                 <a:spcPct val="100000"/>
               </a:lnSpc>
@@ -13486,7 +13733,7 @@
               <a:buSzPts val="1400"/>
               <a:buFont typeface="Arial"/>
               <a:buNone/>
-              <a:defRPr b="0" i="0" sz="1800" u="none" cap="none" strike="noStrike">
+              <a:defRPr sz="1800" b="0" i="0" u="none" strike="noStrike" cap="none">
                 <a:solidFill>
                   <a:srgbClr val="000000"/>
                 </a:solidFill>
@@ -13496,7 +13743,7 @@
                 <a:sym typeface="Arial"/>
               </a:defRPr>
             </a:lvl8pPr>
-            <a:lvl9pPr lvl="8" marR="0" rtl="0" algn="l">
+            <a:lvl9pPr marR="0" lvl="8" algn="l" rtl="0">
               <a:lnSpc>
                 <a:spcPct val="100000"/>
               </a:lnSpc>
@@ -13512,7 +13759,7 @@
               <a:buSzPts val="1400"/>
               <a:buFont typeface="Arial"/>
               <a:buNone/>
-              <a:defRPr b="0" i="0" sz="1800" u="none" cap="none" strike="noStrike">
+              <a:defRPr sz="1800" b="0" i="0" u="none" strike="noStrike" cap="none">
                 <a:solidFill>
                   <a:srgbClr val="000000"/>
                 </a:solidFill>
@@ -13523,15 +13770,19 @@
               </a:defRPr>
             </a:lvl9pPr>
           </a:lstStyle>
-          <a:p/>
+          <a:p>
+            <a:endParaRPr/>
+          </a:p>
         </p:txBody>
       </p:sp>
       <p:sp>
         <p:nvSpPr>
           <p:cNvPr id="7" name="Google Shape;7;p7"/>
-          <p:cNvSpPr txBox="1"/>
+          <p:cNvSpPr txBox="1">
+            <a:spLocks noGrp="1"/>
+          </p:cNvSpPr>
           <p:nvPr>
-            <p:ph idx="1" type="body"/>
+            <p:ph type="body" idx="1"/>
           </p:nvPr>
         </p:nvSpPr>
         <p:spPr>
@@ -13548,11 +13799,11 @@
           </a:ln>
         </p:spPr>
         <p:txBody>
-          <a:bodyPr anchorCtr="0" anchor="t" bIns="45700" lIns="91425" spcFirstLastPara="1" rIns="91425" wrap="square" tIns="45700">
+          <a:bodyPr spcFirstLastPara="1" wrap="square" lIns="91425" tIns="45700" rIns="91425" bIns="45700" anchor="t" anchorCtr="0">
             <a:normAutofit/>
           </a:bodyPr>
           <a:lstStyle>
-            <a:lvl1pPr indent="-431800" lvl="0" marL="457200" marR="0" rtl="0" algn="l">
+            <a:lvl1pPr marL="457200" marR="0" lvl="0" indent="-431800" algn="l" rtl="0">
               <a:lnSpc>
                 <a:spcPct val="100000"/>
               </a:lnSpc>
@@ -13568,7 +13819,7 @@
               <a:buSzPts val="3200"/>
               <a:buFont typeface="Syne"/>
               <a:buChar char="•"/>
-              <a:defRPr b="0" i="0" sz="3200" u="none" cap="none" strike="noStrike">
+              <a:defRPr sz="3200" b="0" i="0" u="none" strike="noStrike" cap="none">
                 <a:solidFill>
                   <a:schemeClr val="dk1"/>
                 </a:solidFill>
@@ -13578,7 +13829,7 @@
                 <a:sym typeface="Syne"/>
               </a:defRPr>
             </a:lvl1pPr>
-            <a:lvl2pPr indent="-406400" lvl="1" marL="914400" marR="0" rtl="0" algn="l">
+            <a:lvl2pPr marL="914400" marR="0" lvl="1" indent="-406400" algn="l" rtl="0">
               <a:lnSpc>
                 <a:spcPct val="100000"/>
               </a:lnSpc>
@@ -13594,7 +13845,7 @@
               <a:buSzPts val="2800"/>
               <a:buFont typeface="Syne"/>
               <a:buChar char="–"/>
-              <a:defRPr b="0" i="0" sz="2800" u="none" cap="none" strike="noStrike">
+              <a:defRPr sz="2800" b="0" i="0" u="none" strike="noStrike" cap="none">
                 <a:solidFill>
                   <a:schemeClr val="dk1"/>
                 </a:solidFill>
@@ -13604,7 +13855,7 @@
                 <a:sym typeface="Syne"/>
               </a:defRPr>
             </a:lvl2pPr>
-            <a:lvl3pPr indent="-381000" lvl="2" marL="1371600" marR="0" rtl="0" algn="l">
+            <a:lvl3pPr marL="1371600" marR="0" lvl="2" indent="-381000" algn="l" rtl="0">
               <a:lnSpc>
                 <a:spcPct val="100000"/>
               </a:lnSpc>
@@ -13620,7 +13871,7 @@
               <a:buSzPts val="2400"/>
               <a:buFont typeface="Syne"/>
               <a:buChar char="•"/>
-              <a:defRPr b="0" i="0" sz="2400" u="none" cap="none" strike="noStrike">
+              <a:defRPr sz="2400" b="0" i="0" u="none" strike="noStrike" cap="none">
                 <a:solidFill>
                   <a:schemeClr val="dk1"/>
                 </a:solidFill>
@@ -13630,7 +13881,7 @@
                 <a:sym typeface="Syne"/>
               </a:defRPr>
             </a:lvl3pPr>
-            <a:lvl4pPr indent="-355600" lvl="3" marL="1828800" marR="0" rtl="0" algn="l">
+            <a:lvl4pPr marL="1828800" marR="0" lvl="3" indent="-355600" algn="l" rtl="0">
               <a:lnSpc>
                 <a:spcPct val="100000"/>
               </a:lnSpc>
@@ -13646,7 +13897,7 @@
               <a:buSzPts val="2000"/>
               <a:buFont typeface="Syne"/>
               <a:buChar char="–"/>
-              <a:defRPr b="0" i="0" sz="2000" u="none" cap="none" strike="noStrike">
+              <a:defRPr sz="2000" b="0" i="0" u="none" strike="noStrike" cap="none">
                 <a:solidFill>
                   <a:schemeClr val="dk1"/>
                 </a:solidFill>
@@ -13656,7 +13907,7 @@
                 <a:sym typeface="Syne"/>
               </a:defRPr>
             </a:lvl4pPr>
-            <a:lvl5pPr indent="-355600" lvl="4" marL="2286000" marR="0" rtl="0" algn="l">
+            <a:lvl5pPr marL="2286000" marR="0" lvl="4" indent="-355600" algn="l" rtl="0">
               <a:lnSpc>
                 <a:spcPct val="100000"/>
               </a:lnSpc>
@@ -13672,7 +13923,7 @@
               <a:buSzPts val="2000"/>
               <a:buFont typeface="Syne"/>
               <a:buChar char="»"/>
-              <a:defRPr b="0" i="0" sz="2000" u="none" cap="none" strike="noStrike">
+              <a:defRPr sz="2000" b="0" i="0" u="none" strike="noStrike" cap="none">
                 <a:solidFill>
                   <a:schemeClr val="dk1"/>
                 </a:solidFill>
@@ -13682,7 +13933,7 @@
                 <a:sym typeface="Syne"/>
               </a:defRPr>
             </a:lvl5pPr>
-            <a:lvl6pPr indent="-355600" lvl="5" marL="2743200" marR="0" rtl="0" algn="l">
+            <a:lvl6pPr marL="2743200" marR="0" lvl="5" indent="-355600" algn="l" rtl="0">
               <a:lnSpc>
                 <a:spcPct val="100000"/>
               </a:lnSpc>
@@ -13698,7 +13949,7 @@
               <a:buSzPts val="2000"/>
               <a:buFont typeface="Syne"/>
               <a:buChar char="•"/>
-              <a:defRPr b="0" i="0" sz="2000" u="none" cap="none" strike="noStrike">
+              <a:defRPr sz="2000" b="0" i="0" u="none" strike="noStrike" cap="none">
                 <a:solidFill>
                   <a:schemeClr val="dk1"/>
                 </a:solidFill>
@@ -13708,7 +13959,7 @@
                 <a:sym typeface="Syne"/>
               </a:defRPr>
             </a:lvl6pPr>
-            <a:lvl7pPr indent="-355600" lvl="6" marL="3200400" marR="0" rtl="0" algn="l">
+            <a:lvl7pPr marL="3200400" marR="0" lvl="6" indent="-355600" algn="l" rtl="0">
               <a:lnSpc>
                 <a:spcPct val="100000"/>
               </a:lnSpc>
@@ -13724,7 +13975,7 @@
               <a:buSzPts val="2000"/>
               <a:buFont typeface="Syne"/>
               <a:buChar char="•"/>
-              <a:defRPr b="0" i="0" sz="2000" u="none" cap="none" strike="noStrike">
+              <a:defRPr sz="2000" b="0" i="0" u="none" strike="noStrike" cap="none">
                 <a:solidFill>
                   <a:schemeClr val="dk1"/>
                 </a:solidFill>
@@ -13734,7 +13985,7 @@
                 <a:sym typeface="Syne"/>
               </a:defRPr>
             </a:lvl7pPr>
-            <a:lvl8pPr indent="-355600" lvl="7" marL="3657600" marR="0" rtl="0" algn="l">
+            <a:lvl8pPr marL="3657600" marR="0" lvl="7" indent="-355600" algn="l" rtl="0">
               <a:lnSpc>
                 <a:spcPct val="100000"/>
               </a:lnSpc>
@@ -13750,7 +14001,7 @@
               <a:buSzPts val="2000"/>
               <a:buFont typeface="Syne"/>
               <a:buChar char="•"/>
-              <a:defRPr b="0" i="0" sz="2000" u="none" cap="none" strike="noStrike">
+              <a:defRPr sz="2000" b="0" i="0" u="none" strike="noStrike" cap="none">
                 <a:solidFill>
                   <a:schemeClr val="dk1"/>
                 </a:solidFill>
@@ -13760,7 +14011,7 @@
                 <a:sym typeface="Syne"/>
               </a:defRPr>
             </a:lvl8pPr>
-            <a:lvl9pPr indent="-355600" lvl="8" marL="4114800" marR="0" rtl="0" algn="l">
+            <a:lvl9pPr marL="4114800" marR="0" lvl="8" indent="-355600" algn="l" rtl="0">
               <a:lnSpc>
                 <a:spcPct val="100000"/>
               </a:lnSpc>
@@ -13776,7 +14027,7 @@
               <a:buSzPts val="2000"/>
               <a:buFont typeface="Syne"/>
               <a:buChar char="•"/>
-              <a:defRPr b="0" i="0" sz="2000" u="none" cap="none" strike="noStrike">
+              <a:defRPr sz="2000" b="0" i="0" u="none" strike="noStrike" cap="none">
                 <a:solidFill>
                   <a:schemeClr val="dk1"/>
                 </a:solidFill>
@@ -13787,15 +14038,19 @@
               </a:defRPr>
             </a:lvl9pPr>
           </a:lstStyle>
-          <a:p/>
+          <a:p>
+            <a:endParaRPr/>
+          </a:p>
         </p:txBody>
       </p:sp>
       <p:sp>
         <p:nvSpPr>
           <p:cNvPr id="8" name="Google Shape;8;p7"/>
-          <p:cNvSpPr txBox="1"/>
+          <p:cNvSpPr txBox="1">
+            <a:spLocks noGrp="1"/>
+          </p:cNvSpPr>
           <p:nvPr>
-            <p:ph idx="10" type="dt"/>
+            <p:ph type="dt" idx="10"/>
           </p:nvPr>
         </p:nvSpPr>
         <p:spPr>
@@ -13812,11 +14067,11 @@
           </a:ln>
         </p:spPr>
         <p:txBody>
-          <a:bodyPr anchorCtr="0" anchor="ctr" bIns="45700" lIns="91425" spcFirstLastPara="1" rIns="91425" wrap="square" tIns="45700">
+          <a:bodyPr spcFirstLastPara="1" wrap="square" lIns="91425" tIns="45700" rIns="91425" bIns="45700" anchor="ctr" anchorCtr="0">
             <a:noAutofit/>
           </a:bodyPr>
           <a:lstStyle>
-            <a:lvl1pPr lvl="0" marR="0" rtl="0" algn="l">
+            <a:lvl1pPr marR="0" lvl="0" algn="l" rtl="0">
               <a:lnSpc>
                 <a:spcPct val="100000"/>
               </a:lnSpc>
@@ -13832,7 +14087,7 @@
               <a:buSzPts val="1400"/>
               <a:buFont typeface="Arial"/>
               <a:buNone/>
-              <a:defRPr b="0" i="0" sz="1200" u="none" cap="none" strike="noStrike">
+              <a:defRPr sz="1200" b="0" i="0" u="none" strike="noStrike" cap="none">
                 <a:solidFill>
                   <a:srgbClr val="888888"/>
                 </a:solidFill>
@@ -13842,7 +14097,7 @@
                 <a:sym typeface="Calibri"/>
               </a:defRPr>
             </a:lvl1pPr>
-            <a:lvl2pPr lvl="1" marR="0" rtl="0" algn="l">
+            <a:lvl2pPr marR="0" lvl="1" algn="l" rtl="0">
               <a:lnSpc>
                 <a:spcPct val="100000"/>
               </a:lnSpc>
@@ -13858,7 +14113,7 @@
               <a:buSzPts val="1400"/>
               <a:buFont typeface="Arial"/>
               <a:buNone/>
-              <a:defRPr b="0" i="0" sz="1800" u="none" cap="none" strike="noStrike">
+              <a:defRPr sz="1800" b="0" i="0" u="none" strike="noStrike" cap="none">
                 <a:solidFill>
                   <a:schemeClr val="dk1"/>
                 </a:solidFill>
@@ -13868,7 +14123,7 @@
                 <a:sym typeface="Calibri"/>
               </a:defRPr>
             </a:lvl2pPr>
-            <a:lvl3pPr lvl="2" marR="0" rtl="0" algn="l">
+            <a:lvl3pPr marR="0" lvl="2" algn="l" rtl="0">
               <a:lnSpc>
                 <a:spcPct val="100000"/>
               </a:lnSpc>
@@ -13884,7 +14139,7 @@
               <a:buSzPts val="1400"/>
               <a:buFont typeface="Arial"/>
               <a:buNone/>
-              <a:defRPr b="0" i="0" sz="1800" u="none" cap="none" strike="noStrike">
+              <a:defRPr sz="1800" b="0" i="0" u="none" strike="noStrike" cap="none">
                 <a:solidFill>
                   <a:schemeClr val="dk1"/>
                 </a:solidFill>
@@ -13894,7 +14149,7 @@
                 <a:sym typeface="Calibri"/>
               </a:defRPr>
             </a:lvl3pPr>
-            <a:lvl4pPr lvl="3" marR="0" rtl="0" algn="l">
+            <a:lvl4pPr marR="0" lvl="3" algn="l" rtl="0">
               <a:lnSpc>
                 <a:spcPct val="100000"/>
               </a:lnSpc>
@@ -13910,7 +14165,7 @@
               <a:buSzPts val="1400"/>
               <a:buFont typeface="Arial"/>
               <a:buNone/>
-              <a:defRPr b="0" i="0" sz="1800" u="none" cap="none" strike="noStrike">
+              <a:defRPr sz="1800" b="0" i="0" u="none" strike="noStrike" cap="none">
                 <a:solidFill>
                   <a:schemeClr val="dk1"/>
                 </a:solidFill>
@@ -13920,7 +14175,7 @@
                 <a:sym typeface="Calibri"/>
               </a:defRPr>
             </a:lvl4pPr>
-            <a:lvl5pPr lvl="4" marR="0" rtl="0" algn="l">
+            <a:lvl5pPr marR="0" lvl="4" algn="l" rtl="0">
               <a:lnSpc>
                 <a:spcPct val="100000"/>
               </a:lnSpc>
@@ -13936,7 +14191,7 @@
               <a:buSzPts val="1400"/>
               <a:buFont typeface="Arial"/>
               <a:buNone/>
-              <a:defRPr b="0" i="0" sz="1800" u="none" cap="none" strike="noStrike">
+              <a:defRPr sz="1800" b="0" i="0" u="none" strike="noStrike" cap="none">
                 <a:solidFill>
                   <a:schemeClr val="dk1"/>
                 </a:solidFill>
@@ -13946,7 +14201,7 @@
                 <a:sym typeface="Calibri"/>
               </a:defRPr>
             </a:lvl5pPr>
-            <a:lvl6pPr lvl="5" marR="0" rtl="0" algn="l">
+            <a:lvl6pPr marR="0" lvl="5" algn="l" rtl="0">
               <a:lnSpc>
                 <a:spcPct val="100000"/>
               </a:lnSpc>
@@ -13962,7 +14217,7 @@
               <a:buSzPts val="1400"/>
               <a:buFont typeface="Arial"/>
               <a:buNone/>
-              <a:defRPr b="0" i="0" sz="1800" u="none" cap="none" strike="noStrike">
+              <a:defRPr sz="1800" b="0" i="0" u="none" strike="noStrike" cap="none">
                 <a:solidFill>
                   <a:schemeClr val="dk1"/>
                 </a:solidFill>
@@ -13972,7 +14227,7 @@
                 <a:sym typeface="Calibri"/>
               </a:defRPr>
             </a:lvl6pPr>
-            <a:lvl7pPr lvl="6" marR="0" rtl="0" algn="l">
+            <a:lvl7pPr marR="0" lvl="6" algn="l" rtl="0">
               <a:lnSpc>
                 <a:spcPct val="100000"/>
               </a:lnSpc>
@@ -13988,7 +14243,7 @@
               <a:buSzPts val="1400"/>
               <a:buFont typeface="Arial"/>
               <a:buNone/>
-              <a:defRPr b="0" i="0" sz="1800" u="none" cap="none" strike="noStrike">
+              <a:defRPr sz="1800" b="0" i="0" u="none" strike="noStrike" cap="none">
                 <a:solidFill>
                   <a:schemeClr val="dk1"/>
                 </a:solidFill>
@@ -13998,7 +14253,7 @@
                 <a:sym typeface="Calibri"/>
               </a:defRPr>
             </a:lvl7pPr>
-            <a:lvl8pPr lvl="7" marR="0" rtl="0" algn="l">
+            <a:lvl8pPr marR="0" lvl="7" algn="l" rtl="0">
               <a:lnSpc>
                 <a:spcPct val="100000"/>
               </a:lnSpc>
@@ -14014,7 +14269,7 @@
               <a:buSzPts val="1400"/>
               <a:buFont typeface="Arial"/>
               <a:buNone/>
-              <a:defRPr b="0" i="0" sz="1800" u="none" cap="none" strike="noStrike">
+              <a:defRPr sz="1800" b="0" i="0" u="none" strike="noStrike" cap="none">
                 <a:solidFill>
                   <a:schemeClr val="dk1"/>
                 </a:solidFill>
@@ -14024,7 +14279,7 @@
                 <a:sym typeface="Calibri"/>
               </a:defRPr>
             </a:lvl8pPr>
-            <a:lvl9pPr lvl="8" marR="0" rtl="0" algn="l">
+            <a:lvl9pPr marR="0" lvl="8" algn="l" rtl="0">
               <a:lnSpc>
                 <a:spcPct val="100000"/>
               </a:lnSpc>
@@ -14040,7 +14295,7 @@
               <a:buSzPts val="1400"/>
               <a:buFont typeface="Arial"/>
               <a:buNone/>
-              <a:defRPr b="0" i="0" sz="1800" u="none" cap="none" strike="noStrike">
+              <a:defRPr sz="1800" b="0" i="0" u="none" strike="noStrike" cap="none">
                 <a:solidFill>
                   <a:schemeClr val="dk1"/>
                 </a:solidFill>
@@ -14051,15 +14306,19 @@
               </a:defRPr>
             </a:lvl9pPr>
           </a:lstStyle>
-          <a:p/>
+          <a:p>
+            <a:endParaRPr/>
+          </a:p>
         </p:txBody>
       </p:sp>
       <p:sp>
         <p:nvSpPr>
           <p:cNvPr id="9" name="Google Shape;9;p7"/>
-          <p:cNvSpPr txBox="1"/>
+          <p:cNvSpPr txBox="1">
+            <a:spLocks noGrp="1"/>
+          </p:cNvSpPr>
           <p:nvPr>
-            <p:ph idx="11" type="ftr"/>
+            <p:ph type="ftr" idx="11"/>
           </p:nvPr>
         </p:nvSpPr>
         <p:spPr>
@@ -14076,11 +14335,11 @@
           </a:ln>
         </p:spPr>
         <p:txBody>
-          <a:bodyPr anchorCtr="0" anchor="ctr" bIns="45700" lIns="91425" spcFirstLastPara="1" rIns="91425" wrap="square" tIns="45700">
+          <a:bodyPr spcFirstLastPara="1" wrap="square" lIns="91425" tIns="45700" rIns="91425" bIns="45700" anchor="ctr" anchorCtr="0">
             <a:noAutofit/>
           </a:bodyPr>
           <a:lstStyle>
-            <a:lvl1pPr lvl="0" marR="0" rtl="0" algn="ctr">
+            <a:lvl1pPr marR="0" lvl="0" algn="ctr" rtl="0">
               <a:lnSpc>
                 <a:spcPct val="100000"/>
               </a:lnSpc>
@@ -14096,7 +14355,7 @@
               <a:buSzPts val="1400"/>
               <a:buFont typeface="Arial"/>
               <a:buNone/>
-              <a:defRPr b="0" i="0" sz="1200" u="none" cap="none" strike="noStrike">
+              <a:defRPr sz="1200" b="0" i="0" u="none" strike="noStrike" cap="none">
                 <a:solidFill>
                   <a:srgbClr val="888888"/>
                 </a:solidFill>
@@ -14106,7 +14365,7 @@
                 <a:sym typeface="Calibri"/>
               </a:defRPr>
             </a:lvl1pPr>
-            <a:lvl2pPr lvl="1" marR="0" rtl="0" algn="l">
+            <a:lvl2pPr marR="0" lvl="1" algn="l" rtl="0">
               <a:lnSpc>
                 <a:spcPct val="100000"/>
               </a:lnSpc>
@@ -14122,7 +14381,7 @@
               <a:buSzPts val="1400"/>
               <a:buFont typeface="Arial"/>
               <a:buNone/>
-              <a:defRPr b="0" i="0" sz="1800" u="none" cap="none" strike="noStrike">
+              <a:defRPr sz="1800" b="0" i="0" u="none" strike="noStrike" cap="none">
                 <a:solidFill>
                   <a:schemeClr val="dk1"/>
                 </a:solidFill>
@@ -14132,7 +14391,7 @@
                 <a:sym typeface="Calibri"/>
               </a:defRPr>
             </a:lvl2pPr>
-            <a:lvl3pPr lvl="2" marR="0" rtl="0" algn="l">
+            <a:lvl3pPr marR="0" lvl="2" algn="l" rtl="0">
               <a:lnSpc>
                 <a:spcPct val="100000"/>
               </a:lnSpc>
@@ -14148,7 +14407,7 @@
               <a:buSzPts val="1400"/>
               <a:buFont typeface="Arial"/>
               <a:buNone/>
-              <a:defRPr b="0" i="0" sz="1800" u="none" cap="none" strike="noStrike">
+              <a:defRPr sz="1800" b="0" i="0" u="none" strike="noStrike" cap="none">
                 <a:solidFill>
                   <a:schemeClr val="dk1"/>
                 </a:solidFill>
@@ -14158,7 +14417,7 @@
                 <a:sym typeface="Calibri"/>
               </a:defRPr>
             </a:lvl3pPr>
-            <a:lvl4pPr lvl="3" marR="0" rtl="0" algn="l">
+            <a:lvl4pPr marR="0" lvl="3" algn="l" rtl="0">
               <a:lnSpc>
                 <a:spcPct val="100000"/>
               </a:lnSpc>
@@ -14174,7 +14433,7 @@
               <a:buSzPts val="1400"/>
               <a:buFont typeface="Arial"/>
               <a:buNone/>
-              <a:defRPr b="0" i="0" sz="1800" u="none" cap="none" strike="noStrike">
+              <a:defRPr sz="1800" b="0" i="0" u="none" strike="noStrike" cap="none">
                 <a:solidFill>
                   <a:schemeClr val="dk1"/>
                 </a:solidFill>
@@ -14184,7 +14443,7 @@
                 <a:sym typeface="Calibri"/>
               </a:defRPr>
             </a:lvl4pPr>
-            <a:lvl5pPr lvl="4" marR="0" rtl="0" algn="l">
+            <a:lvl5pPr marR="0" lvl="4" algn="l" rtl="0">
               <a:lnSpc>
                 <a:spcPct val="100000"/>
               </a:lnSpc>
@@ -14200,7 +14459,7 @@
               <a:buSzPts val="1400"/>
               <a:buFont typeface="Arial"/>
               <a:buNone/>
-              <a:defRPr b="0" i="0" sz="1800" u="none" cap="none" strike="noStrike">
+              <a:defRPr sz="1800" b="0" i="0" u="none" strike="noStrike" cap="none">
                 <a:solidFill>
                   <a:schemeClr val="dk1"/>
                 </a:solidFill>
@@ -14210,7 +14469,7 @@
                 <a:sym typeface="Calibri"/>
               </a:defRPr>
             </a:lvl5pPr>
-            <a:lvl6pPr lvl="5" marR="0" rtl="0" algn="l">
+            <a:lvl6pPr marR="0" lvl="5" algn="l" rtl="0">
               <a:lnSpc>
                 <a:spcPct val="100000"/>
               </a:lnSpc>
@@ -14226,7 +14485,7 @@
               <a:buSzPts val="1400"/>
               <a:buFont typeface="Arial"/>
               <a:buNone/>
-              <a:defRPr b="0" i="0" sz="1800" u="none" cap="none" strike="noStrike">
+              <a:defRPr sz="1800" b="0" i="0" u="none" strike="noStrike" cap="none">
                 <a:solidFill>
                   <a:schemeClr val="dk1"/>
                 </a:solidFill>
@@ -14236,7 +14495,7 @@
                 <a:sym typeface="Calibri"/>
               </a:defRPr>
             </a:lvl6pPr>
-            <a:lvl7pPr lvl="6" marR="0" rtl="0" algn="l">
+            <a:lvl7pPr marR="0" lvl="6" algn="l" rtl="0">
               <a:lnSpc>
                 <a:spcPct val="100000"/>
               </a:lnSpc>
@@ -14252,7 +14511,7 @@
               <a:buSzPts val="1400"/>
               <a:buFont typeface="Arial"/>
               <a:buNone/>
-              <a:defRPr b="0" i="0" sz="1800" u="none" cap="none" strike="noStrike">
+              <a:defRPr sz="1800" b="0" i="0" u="none" strike="noStrike" cap="none">
                 <a:solidFill>
                   <a:schemeClr val="dk1"/>
                 </a:solidFill>
@@ -14262,7 +14521,7 @@
                 <a:sym typeface="Calibri"/>
               </a:defRPr>
             </a:lvl7pPr>
-            <a:lvl8pPr lvl="7" marR="0" rtl="0" algn="l">
+            <a:lvl8pPr marR="0" lvl="7" algn="l" rtl="0">
               <a:lnSpc>
                 <a:spcPct val="100000"/>
               </a:lnSpc>
@@ -14278,7 +14537,7 @@
               <a:buSzPts val="1400"/>
               <a:buFont typeface="Arial"/>
               <a:buNone/>
-              <a:defRPr b="0" i="0" sz="1800" u="none" cap="none" strike="noStrike">
+              <a:defRPr sz="1800" b="0" i="0" u="none" strike="noStrike" cap="none">
                 <a:solidFill>
                   <a:schemeClr val="dk1"/>
                 </a:solidFill>
@@ -14288,7 +14547,7 @@
                 <a:sym typeface="Calibri"/>
               </a:defRPr>
             </a:lvl8pPr>
-            <a:lvl9pPr lvl="8" marR="0" rtl="0" algn="l">
+            <a:lvl9pPr marR="0" lvl="8" algn="l" rtl="0">
               <a:lnSpc>
                 <a:spcPct val="100000"/>
               </a:lnSpc>
@@ -14304,7 +14563,7 @@
               <a:buSzPts val="1400"/>
               <a:buFont typeface="Arial"/>
               <a:buNone/>
-              <a:defRPr b="0" i="0" sz="1800" u="none" cap="none" strike="noStrike">
+              <a:defRPr sz="1800" b="0" i="0" u="none" strike="noStrike" cap="none">
                 <a:solidFill>
                   <a:schemeClr val="dk1"/>
                 </a:solidFill>
@@ -14315,15 +14574,19 @@
               </a:defRPr>
             </a:lvl9pPr>
           </a:lstStyle>
-          <a:p/>
+          <a:p>
+            <a:endParaRPr/>
+          </a:p>
         </p:txBody>
       </p:sp>
       <p:sp>
         <p:nvSpPr>
           <p:cNvPr id="10" name="Google Shape;10;p7"/>
-          <p:cNvSpPr txBox="1"/>
+          <p:cNvSpPr txBox="1">
+            <a:spLocks noGrp="1"/>
+          </p:cNvSpPr>
           <p:nvPr>
-            <p:ph idx="12" type="sldNum"/>
+            <p:ph type="sldNum" idx="12"/>
           </p:nvPr>
         </p:nvSpPr>
         <p:spPr>
@@ -14340,11 +14603,11 @@
           </a:ln>
         </p:spPr>
         <p:txBody>
-          <a:bodyPr anchorCtr="0" anchor="ctr" bIns="45700" lIns="91425" spcFirstLastPara="1" rIns="91425" wrap="square" tIns="45700">
+          <a:bodyPr spcFirstLastPara="1" wrap="square" lIns="91425" tIns="45700" rIns="91425" bIns="45700" anchor="ctr" anchorCtr="0">
             <a:noAutofit/>
           </a:bodyPr>
           <a:lstStyle>
-            <a:lvl1pPr indent="0" lvl="0" marL="0" marR="0" rtl="0" algn="r">
+            <a:lvl1pPr marL="0" marR="0" lvl="0" indent="0" algn="r" rtl="0">
               <a:lnSpc>
                 <a:spcPct val="100000"/>
               </a:lnSpc>
@@ -14360,7 +14623,7 @@
               <a:buSzPts val="1200"/>
               <a:buFont typeface="Arial"/>
               <a:buNone/>
-              <a:defRPr b="0" i="0" sz="1200" u="none" cap="none" strike="noStrike">
+              <a:defRPr sz="1200" b="0" i="0" u="none" strike="noStrike" cap="none">
                 <a:solidFill>
                   <a:srgbClr val="888888"/>
                 </a:solidFill>
@@ -14370,7 +14633,7 @@
                 <a:sym typeface="Calibri"/>
               </a:defRPr>
             </a:lvl1pPr>
-            <a:lvl2pPr indent="0" lvl="1" marL="0" marR="0" rtl="0" algn="r">
+            <a:lvl2pPr marL="0" marR="0" lvl="1" indent="0" algn="r" rtl="0">
               <a:lnSpc>
                 <a:spcPct val="100000"/>
               </a:lnSpc>
@@ -14386,7 +14649,7 @@
               <a:buSzPts val="1200"/>
               <a:buFont typeface="Arial"/>
               <a:buNone/>
-              <a:defRPr b="0" i="0" sz="1200" u="none" cap="none" strike="noStrike">
+              <a:defRPr sz="1200" b="0" i="0" u="none" strike="noStrike" cap="none">
                 <a:solidFill>
                   <a:srgbClr val="888888"/>
                 </a:solidFill>
@@ -14396,7 +14659,7 @@
                 <a:sym typeface="Calibri"/>
               </a:defRPr>
             </a:lvl2pPr>
-            <a:lvl3pPr indent="0" lvl="2" marL="0" marR="0" rtl="0" algn="r">
+            <a:lvl3pPr marL="0" marR="0" lvl="2" indent="0" algn="r" rtl="0">
               <a:lnSpc>
                 <a:spcPct val="100000"/>
               </a:lnSpc>
@@ -14412,7 +14675,7 @@
               <a:buSzPts val="1200"/>
               <a:buFont typeface="Arial"/>
               <a:buNone/>
-              <a:defRPr b="0" i="0" sz="1200" u="none" cap="none" strike="noStrike">
+              <a:defRPr sz="1200" b="0" i="0" u="none" strike="noStrike" cap="none">
                 <a:solidFill>
                   <a:srgbClr val="888888"/>
                 </a:solidFill>
@@ -14422,7 +14685,7 @@
                 <a:sym typeface="Calibri"/>
               </a:defRPr>
             </a:lvl3pPr>
-            <a:lvl4pPr indent="0" lvl="3" marL="0" marR="0" rtl="0" algn="r">
+            <a:lvl4pPr marL="0" marR="0" lvl="3" indent="0" algn="r" rtl="0">
               <a:lnSpc>
                 <a:spcPct val="100000"/>
               </a:lnSpc>
@@ -14438,7 +14701,7 @@
               <a:buSzPts val="1200"/>
               <a:buFont typeface="Arial"/>
               <a:buNone/>
-              <a:defRPr b="0" i="0" sz="1200" u="none" cap="none" strike="noStrike">
+              <a:defRPr sz="1200" b="0" i="0" u="none" strike="noStrike" cap="none">
                 <a:solidFill>
                   <a:srgbClr val="888888"/>
                 </a:solidFill>
@@ -14448,7 +14711,7 @@
                 <a:sym typeface="Calibri"/>
               </a:defRPr>
             </a:lvl4pPr>
-            <a:lvl5pPr indent="0" lvl="4" marL="0" marR="0" rtl="0" algn="r">
+            <a:lvl5pPr marL="0" marR="0" lvl="4" indent="0" algn="r" rtl="0">
               <a:lnSpc>
                 <a:spcPct val="100000"/>
               </a:lnSpc>
@@ -14464,7 +14727,7 @@
               <a:buSzPts val="1200"/>
               <a:buFont typeface="Arial"/>
               <a:buNone/>
-              <a:defRPr b="0" i="0" sz="1200" u="none" cap="none" strike="noStrike">
+              <a:defRPr sz="1200" b="0" i="0" u="none" strike="noStrike" cap="none">
                 <a:solidFill>
                   <a:srgbClr val="888888"/>
                 </a:solidFill>
@@ -14474,7 +14737,7 @@
                 <a:sym typeface="Calibri"/>
               </a:defRPr>
             </a:lvl5pPr>
-            <a:lvl6pPr indent="0" lvl="5" marL="0" marR="0" rtl="0" algn="r">
+            <a:lvl6pPr marL="0" marR="0" lvl="5" indent="0" algn="r" rtl="0">
               <a:lnSpc>
                 <a:spcPct val="100000"/>
               </a:lnSpc>
@@ -14490,7 +14753,7 @@
               <a:buSzPts val="1200"/>
               <a:buFont typeface="Arial"/>
               <a:buNone/>
-              <a:defRPr b="0" i="0" sz="1200" u="none" cap="none" strike="noStrike">
+              <a:defRPr sz="1200" b="0" i="0" u="none" strike="noStrike" cap="none">
                 <a:solidFill>
                   <a:srgbClr val="888888"/>
                 </a:solidFill>
@@ -14500,7 +14763,7 @@
                 <a:sym typeface="Calibri"/>
               </a:defRPr>
             </a:lvl6pPr>
-            <a:lvl7pPr indent="0" lvl="6" marL="0" marR="0" rtl="0" algn="r">
+            <a:lvl7pPr marL="0" marR="0" lvl="6" indent="0" algn="r" rtl="0">
               <a:lnSpc>
                 <a:spcPct val="100000"/>
               </a:lnSpc>
@@ -14516,7 +14779,7 @@
               <a:buSzPts val="1200"/>
               <a:buFont typeface="Arial"/>
               <a:buNone/>
-              <a:defRPr b="0" i="0" sz="1200" u="none" cap="none" strike="noStrike">
+              <a:defRPr sz="1200" b="0" i="0" u="none" strike="noStrike" cap="none">
                 <a:solidFill>
                   <a:srgbClr val="888888"/>
                 </a:solidFill>
@@ -14526,7 +14789,7 @@
                 <a:sym typeface="Calibri"/>
               </a:defRPr>
             </a:lvl7pPr>
-            <a:lvl8pPr indent="0" lvl="7" marL="0" marR="0" rtl="0" algn="r">
+            <a:lvl8pPr marL="0" marR="0" lvl="7" indent="0" algn="r" rtl="0">
               <a:lnSpc>
                 <a:spcPct val="100000"/>
               </a:lnSpc>
@@ -14542,7 +14805,7 @@
               <a:buSzPts val="1200"/>
               <a:buFont typeface="Arial"/>
               <a:buNone/>
-              <a:defRPr b="0" i="0" sz="1200" u="none" cap="none" strike="noStrike">
+              <a:defRPr sz="1200" b="0" i="0" u="none" strike="noStrike" cap="none">
                 <a:solidFill>
                   <a:srgbClr val="888888"/>
                 </a:solidFill>
@@ -14552,7 +14815,7 @@
                 <a:sym typeface="Calibri"/>
               </a:defRPr>
             </a:lvl8pPr>
-            <a:lvl9pPr indent="0" lvl="8" marL="0" marR="0" rtl="0" algn="r">
+            <a:lvl9pPr marL="0" marR="0" lvl="8" indent="0" algn="r" rtl="0">
               <a:lnSpc>
                 <a:spcPct val="100000"/>
               </a:lnSpc>
@@ -14568,7 +14831,7 @@
               <a:buSzPts val="1200"/>
               <a:buFont typeface="Arial"/>
               <a:buNone/>
-              <a:defRPr b="0" i="0" sz="1200" u="none" cap="none" strike="noStrike">
+              <a:defRPr sz="1200" b="0" i="0" u="none" strike="noStrike" cap="none">
                 <a:solidFill>
                   <a:srgbClr val="888888"/>
                 </a:solidFill>
@@ -14580,7 +14843,7 @@
             </a:lvl9pPr>
           </a:lstStyle>
           <a:p>
-            <a:pPr indent="0" lvl="0" marL="0" rtl="0" algn="r">
+            <a:pPr marL="0" lvl="0" indent="0" algn="r" rtl="0">
               <a:spcBef>
                 <a:spcPts val="0"/>
               </a:spcBef>
@@ -14599,7 +14862,7 @@
       </p:sp>
     </p:spTree>
   </p:cSld>
-  <p:clrMap accent1="accent1" accent2="accent2" accent3="accent3" accent4="accent4" accent5="accent5" accent6="accent6" bg1="lt1" bg2="dk2" tx1="dk1" tx2="lt2" folHlink="folHlink" hlink="hlink"/>
+  <p:clrMap bg1="lt1" tx1="dk1" bg2="dk2" tx2="lt2" accent1="accent1" accent2="accent2" accent3="accent3" accent4="accent4" accent5="accent5" accent6="accent6" hlink="hlink" folHlink="folHlink"/>
   <p:sldLayoutIdLst>
     <p:sldLayoutId id="2147483649" r:id="rId1"/>
     <p:sldLayoutId id="2147483650" r:id="rId2"/>
@@ -14613,10 +14876,10 @@
     <p:sldLayoutId id="2147483658" r:id="rId10"/>
     <p:sldLayoutId id="2147483659" r:id="rId11"/>
   </p:sldLayoutIdLst>
-  <p:hf dt="0" ftr="0" hdr="0" sldNum="0"/>
+  <p:hf sldNum="0" hdr="0" ftr="0" dt="0"/>
   <p:txStyles>
     <p:titleStyle>
-      <a:defPPr lvl="0" marR="0" rtl="0" algn="l">
+      <a:defPPr marR="0" lvl="0" algn="l" rtl="0">
         <a:lnSpc>
           <a:spcPct val="100000"/>
         </a:lnSpc>
@@ -14627,7 +14890,7 @@
           <a:spcPts val="0"/>
         </a:spcAft>
       </a:defPPr>
-      <a:lvl1pPr lvl="0" marR="0" rtl="0" algn="l">
+      <a:lvl1pPr marR="0" lvl="0" algn="l" rtl="0">
         <a:lnSpc>
           <a:spcPct val="100000"/>
         </a:lnSpc>
@@ -14641,7 +14904,7 @@
           <a:srgbClr val="000000"/>
         </a:buClr>
         <a:buFont typeface="Arial"/>
-        <a:defRPr b="0" i="0" sz="1400" u="none" cap="none" strike="noStrike">
+        <a:defRPr sz="1400" b="0" i="0" u="none" strike="noStrike" cap="none">
           <a:solidFill>
             <a:srgbClr val="000000"/>
           </a:solidFill>
@@ -14651,7 +14914,7 @@
           <a:sym typeface="Arial"/>
         </a:defRPr>
       </a:lvl1pPr>
-      <a:lvl2pPr lvl="1" marR="0" rtl="0" algn="l">
+      <a:lvl2pPr marR="0" lvl="1" algn="l" rtl="0">
         <a:lnSpc>
           <a:spcPct val="100000"/>
         </a:lnSpc>
@@ -14665,7 +14928,7 @@
           <a:srgbClr val="000000"/>
         </a:buClr>
         <a:buFont typeface="Arial"/>
-        <a:defRPr b="0" i="0" sz="1400" u="none" cap="none" strike="noStrike">
+        <a:defRPr sz="1400" b="0" i="0" u="none" strike="noStrike" cap="none">
           <a:solidFill>
             <a:srgbClr val="000000"/>
           </a:solidFill>
@@ -14675,7 +14938,7 @@
           <a:sym typeface="Arial"/>
         </a:defRPr>
       </a:lvl2pPr>
-      <a:lvl3pPr lvl="2" marR="0" rtl="0" algn="l">
+      <a:lvl3pPr marR="0" lvl="2" algn="l" rtl="0">
         <a:lnSpc>
           <a:spcPct val="100000"/>
         </a:lnSpc>
@@ -14689,7 +14952,7 @@
           <a:srgbClr val="000000"/>
         </a:buClr>
         <a:buFont typeface="Arial"/>
-        <a:defRPr b="0" i="0" sz="1400" u="none" cap="none" strike="noStrike">
+        <a:defRPr sz="1400" b="0" i="0" u="none" strike="noStrike" cap="none">
           <a:solidFill>
             <a:srgbClr val="000000"/>
           </a:solidFill>
@@ -14699,7 +14962,7 @@
           <a:sym typeface="Arial"/>
         </a:defRPr>
       </a:lvl3pPr>
-      <a:lvl4pPr lvl="3" marR="0" rtl="0" algn="l">
+      <a:lvl4pPr marR="0" lvl="3" algn="l" rtl="0">
         <a:lnSpc>
           <a:spcPct val="100000"/>
         </a:lnSpc>
@@ -14713,7 +14976,7 @@
           <a:srgbClr val="000000"/>
         </a:buClr>
         <a:buFont typeface="Arial"/>
-        <a:defRPr b="0" i="0" sz="1400" u="none" cap="none" strike="noStrike">
+        <a:defRPr sz="1400" b="0" i="0" u="none" strike="noStrike" cap="none">
           <a:solidFill>
             <a:srgbClr val="000000"/>
           </a:solidFill>
@@ -14723,7 +14986,7 @@
           <a:sym typeface="Arial"/>
         </a:defRPr>
       </a:lvl4pPr>
-      <a:lvl5pPr lvl="4" marR="0" rtl="0" algn="l">
+      <a:lvl5pPr marR="0" lvl="4" algn="l" rtl="0">
         <a:lnSpc>
           <a:spcPct val="100000"/>
         </a:lnSpc>
@@ -14737,7 +15000,7 @@
           <a:srgbClr val="000000"/>
         </a:buClr>
         <a:buFont typeface="Arial"/>
-        <a:defRPr b="0" i="0" sz="1400" u="none" cap="none" strike="noStrike">
+        <a:defRPr sz="1400" b="0" i="0" u="none" strike="noStrike" cap="none">
           <a:solidFill>
             <a:srgbClr val="000000"/>
           </a:solidFill>
@@ -14747,7 +15010,7 @@
           <a:sym typeface="Arial"/>
         </a:defRPr>
       </a:lvl5pPr>
-      <a:lvl6pPr lvl="5" marR="0" rtl="0" algn="l">
+      <a:lvl6pPr marR="0" lvl="5" algn="l" rtl="0">
         <a:lnSpc>
           <a:spcPct val="100000"/>
         </a:lnSpc>
@@ -14761,7 +15024,7 @@
           <a:srgbClr val="000000"/>
         </a:buClr>
         <a:buFont typeface="Arial"/>
-        <a:defRPr b="0" i="0" sz="1400" u="none" cap="none" strike="noStrike">
+        <a:defRPr sz="1400" b="0" i="0" u="none" strike="noStrike" cap="none">
           <a:solidFill>
             <a:srgbClr val="000000"/>
           </a:solidFill>
@@ -14771,7 +15034,7 @@
           <a:sym typeface="Arial"/>
         </a:defRPr>
       </a:lvl6pPr>
-      <a:lvl7pPr lvl="6" marR="0" rtl="0" algn="l">
+      <a:lvl7pPr marR="0" lvl="6" algn="l" rtl="0">
         <a:lnSpc>
           <a:spcPct val="100000"/>
         </a:lnSpc>
@@ -14785,7 +15048,7 @@
           <a:srgbClr val="000000"/>
         </a:buClr>
         <a:buFont typeface="Arial"/>
-        <a:defRPr b="0" i="0" sz="1400" u="none" cap="none" strike="noStrike">
+        <a:defRPr sz="1400" b="0" i="0" u="none" strike="noStrike" cap="none">
           <a:solidFill>
             <a:srgbClr val="000000"/>
           </a:solidFill>
@@ -14795,7 +15058,7 @@
           <a:sym typeface="Arial"/>
         </a:defRPr>
       </a:lvl7pPr>
-      <a:lvl8pPr lvl="7" marR="0" rtl="0" algn="l">
+      <a:lvl8pPr marR="0" lvl="7" algn="l" rtl="0">
         <a:lnSpc>
           <a:spcPct val="100000"/>
         </a:lnSpc>
@@ -14809,7 +15072,7 @@
           <a:srgbClr val="000000"/>
         </a:buClr>
         <a:buFont typeface="Arial"/>
-        <a:defRPr b="0" i="0" sz="1400" u="none" cap="none" strike="noStrike">
+        <a:defRPr sz="1400" b="0" i="0" u="none" strike="noStrike" cap="none">
           <a:solidFill>
             <a:srgbClr val="000000"/>
           </a:solidFill>
@@ -14819,7 +15082,7 @@
           <a:sym typeface="Arial"/>
         </a:defRPr>
       </a:lvl8pPr>
-      <a:lvl9pPr lvl="8" marR="0" rtl="0" algn="l">
+      <a:lvl9pPr marR="0" lvl="8" algn="l" rtl="0">
         <a:lnSpc>
           <a:spcPct val="100000"/>
         </a:lnSpc>
@@ -14833,7 +15096,7 @@
           <a:srgbClr val="000000"/>
         </a:buClr>
         <a:buFont typeface="Arial"/>
-        <a:defRPr b="0" i="0" sz="1400" u="none" cap="none" strike="noStrike">
+        <a:defRPr sz="1400" b="0" i="0" u="none" strike="noStrike" cap="none">
           <a:solidFill>
             <a:srgbClr val="000000"/>
           </a:solidFill>
@@ -14845,7 +15108,7 @@
       </a:lvl9pPr>
     </p:titleStyle>
     <p:bodyStyle>
-      <a:defPPr lvl="0" marR="0" rtl="0" algn="l">
+      <a:defPPr marR="0" lvl="0" algn="l" rtl="0">
         <a:lnSpc>
           <a:spcPct val="100000"/>
         </a:lnSpc>
@@ -14856,7 +15119,7 @@
           <a:spcPts val="0"/>
         </a:spcAft>
       </a:defPPr>
-      <a:lvl1pPr lvl="0" marR="0" rtl="0" algn="l">
+      <a:lvl1pPr marR="0" lvl="0" algn="l" rtl="0">
         <a:lnSpc>
           <a:spcPct val="100000"/>
         </a:lnSpc>
@@ -14870,7 +15133,7 @@
           <a:srgbClr val="000000"/>
         </a:buClr>
         <a:buFont typeface="Arial"/>
-        <a:defRPr b="0" i="0" sz="1400" u="none" cap="none" strike="noStrike">
+        <a:defRPr sz="1400" b="0" i="0" u="none" strike="noStrike" cap="none">
           <a:solidFill>
             <a:srgbClr val="000000"/>
           </a:solidFill>
@@ -14880,7 +15143,7 @@
           <a:sym typeface="Arial"/>
         </a:defRPr>
       </a:lvl1pPr>
-      <a:lvl2pPr lvl="1" marR="0" rtl="0" algn="l">
+      <a:lvl2pPr marR="0" lvl="1" algn="l" rtl="0">
         <a:lnSpc>
           <a:spcPct val="100000"/>
         </a:lnSpc>
@@ -14894,7 +15157,7 @@
           <a:srgbClr val="000000"/>
         </a:buClr>
         <a:buFont typeface="Arial"/>
-        <a:defRPr b="0" i="0" sz="1400" u="none" cap="none" strike="noStrike">
+        <a:defRPr sz="1400" b="0" i="0" u="none" strike="noStrike" cap="none">
           <a:solidFill>
             <a:srgbClr val="000000"/>
           </a:solidFill>
@@ -14904,7 +15167,7 @@
           <a:sym typeface="Arial"/>
         </a:defRPr>
       </a:lvl2pPr>
-      <a:lvl3pPr lvl="2" marR="0" rtl="0" algn="l">
+      <a:lvl3pPr marR="0" lvl="2" algn="l" rtl="0">
         <a:lnSpc>
           <a:spcPct val="100000"/>
         </a:lnSpc>
@@ -14918,7 +15181,7 @@
           <a:srgbClr val="000000"/>
         </a:buClr>
         <a:buFont typeface="Arial"/>
-        <a:defRPr b="0" i="0" sz="1400" u="none" cap="none" strike="noStrike">
+        <a:defRPr sz="1400" b="0" i="0" u="none" strike="noStrike" cap="none">
           <a:solidFill>
             <a:srgbClr val="000000"/>
           </a:solidFill>
@@ -14928,7 +15191,7 @@
           <a:sym typeface="Arial"/>
         </a:defRPr>
       </a:lvl3pPr>
-      <a:lvl4pPr lvl="3" marR="0" rtl="0" algn="l">
+      <a:lvl4pPr marR="0" lvl="3" algn="l" rtl="0">
         <a:lnSpc>
           <a:spcPct val="100000"/>
         </a:lnSpc>
@@ -14942,7 +15205,7 @@
           <a:srgbClr val="000000"/>
         </a:buClr>
         <a:buFont typeface="Arial"/>
-        <a:defRPr b="0" i="0" sz="1400" u="none" cap="none" strike="noStrike">
+        <a:defRPr sz="1400" b="0" i="0" u="none" strike="noStrike" cap="none">
           <a:solidFill>
             <a:srgbClr val="000000"/>
           </a:solidFill>
@@ -14952,7 +15215,7 @@
           <a:sym typeface="Arial"/>
         </a:defRPr>
       </a:lvl4pPr>
-      <a:lvl5pPr lvl="4" marR="0" rtl="0" algn="l">
+      <a:lvl5pPr marR="0" lvl="4" algn="l" rtl="0">
         <a:lnSpc>
           <a:spcPct val="100000"/>
         </a:lnSpc>
@@ -14966,7 +15229,7 @@
           <a:srgbClr val="000000"/>
         </a:buClr>
         <a:buFont typeface="Arial"/>
-        <a:defRPr b="0" i="0" sz="1400" u="none" cap="none" strike="noStrike">
+        <a:defRPr sz="1400" b="0" i="0" u="none" strike="noStrike" cap="none">
           <a:solidFill>
             <a:srgbClr val="000000"/>
           </a:solidFill>
@@ -14976,7 +15239,7 @@
           <a:sym typeface="Arial"/>
         </a:defRPr>
       </a:lvl5pPr>
-      <a:lvl6pPr lvl="5" marR="0" rtl="0" algn="l">
+      <a:lvl6pPr marR="0" lvl="5" algn="l" rtl="0">
         <a:lnSpc>
           <a:spcPct val="100000"/>
         </a:lnSpc>
@@ -14990,7 +15253,7 @@
           <a:srgbClr val="000000"/>
         </a:buClr>
         <a:buFont typeface="Arial"/>
-        <a:defRPr b="0" i="0" sz="1400" u="none" cap="none" strike="noStrike">
+        <a:defRPr sz="1400" b="0" i="0" u="none" strike="noStrike" cap="none">
           <a:solidFill>
             <a:srgbClr val="000000"/>
           </a:solidFill>
@@ -15000,7 +15263,7 @@
           <a:sym typeface="Arial"/>
         </a:defRPr>
       </a:lvl6pPr>
-      <a:lvl7pPr lvl="6" marR="0" rtl="0" algn="l">
+      <a:lvl7pPr marR="0" lvl="6" algn="l" rtl="0">
         <a:lnSpc>
           <a:spcPct val="100000"/>
         </a:lnSpc>
@@ -15014,7 +15277,7 @@
           <a:srgbClr val="000000"/>
         </a:buClr>
         <a:buFont typeface="Arial"/>
-        <a:defRPr b="0" i="0" sz="1400" u="none" cap="none" strike="noStrike">
+        <a:defRPr sz="1400" b="0" i="0" u="none" strike="noStrike" cap="none">
           <a:solidFill>
             <a:srgbClr val="000000"/>
           </a:solidFill>
@@ -15024,7 +15287,7 @@
           <a:sym typeface="Arial"/>
         </a:defRPr>
       </a:lvl7pPr>
-      <a:lvl8pPr lvl="7" marR="0" rtl="0" algn="l">
+      <a:lvl8pPr marR="0" lvl="7" algn="l" rtl="0">
         <a:lnSpc>
           <a:spcPct val="100000"/>
         </a:lnSpc>
@@ -15038,7 +15301,7 @@
           <a:srgbClr val="000000"/>
         </a:buClr>
         <a:buFont typeface="Arial"/>
-        <a:defRPr b="0" i="0" sz="1400" u="none" cap="none" strike="noStrike">
+        <a:defRPr sz="1400" b="0" i="0" u="none" strike="noStrike" cap="none">
           <a:solidFill>
             <a:srgbClr val="000000"/>
           </a:solidFill>
@@ -15048,7 +15311,7 @@
           <a:sym typeface="Arial"/>
         </a:defRPr>
       </a:lvl8pPr>
-      <a:lvl9pPr lvl="8" marR="0" rtl="0" algn="l">
+      <a:lvl9pPr marR="0" lvl="8" algn="l" rtl="0">
         <a:lnSpc>
           <a:spcPct val="100000"/>
         </a:lnSpc>
@@ -15062,7 +15325,7 @@
           <a:srgbClr val="000000"/>
         </a:buClr>
         <a:buFont typeface="Arial"/>
-        <a:defRPr b="0" i="0" sz="1400" u="none" cap="none" strike="noStrike">
+        <a:defRPr sz="1400" b="0" i="0" u="none" strike="noStrike" cap="none">
           <a:solidFill>
             <a:srgbClr val="000000"/>
           </a:solidFill>
@@ -15074,7 +15337,7 @@
       </a:lvl9pPr>
     </p:bodyStyle>
     <p:otherStyle>
-      <a:defPPr lvl="0" marR="0" rtl="0" algn="l">
+      <a:defPPr marR="0" lvl="0" algn="l" rtl="0">
         <a:lnSpc>
           <a:spcPct val="100000"/>
         </a:lnSpc>
@@ -15085,7 +15348,7 @@
           <a:spcPts val="0"/>
         </a:spcAft>
       </a:defPPr>
-      <a:lvl1pPr lvl="0" marR="0" rtl="0" algn="l">
+      <a:lvl1pPr marR="0" lvl="0" algn="l" rtl="0">
         <a:lnSpc>
           <a:spcPct val="100000"/>
         </a:lnSpc>
@@ -15099,7 +15362,7 @@
           <a:srgbClr val="000000"/>
         </a:buClr>
         <a:buFont typeface="Arial"/>
-        <a:defRPr b="0" i="0" sz="1400" u="none" cap="none" strike="noStrike">
+        <a:defRPr sz="1400" b="0" i="0" u="none" strike="noStrike" cap="none">
           <a:solidFill>
             <a:srgbClr val="000000"/>
           </a:solidFill>
@@ -15109,7 +15372,7 @@
           <a:sym typeface="Arial"/>
         </a:defRPr>
       </a:lvl1pPr>
-      <a:lvl2pPr lvl="1" marR="0" rtl="0" algn="l">
+      <a:lvl2pPr marR="0" lvl="1" algn="l" rtl="0">
         <a:lnSpc>
           <a:spcPct val="100000"/>
         </a:lnSpc>
@@ -15123,7 +15386,7 @@
           <a:srgbClr val="000000"/>
         </a:buClr>
         <a:buFont typeface="Arial"/>
-        <a:defRPr b="0" i="0" sz="1400" u="none" cap="none" strike="noStrike">
+        <a:defRPr sz="1400" b="0" i="0" u="none" strike="noStrike" cap="none">
           <a:solidFill>
             <a:srgbClr val="000000"/>
           </a:solidFill>
@@ -15133,7 +15396,7 @@
           <a:sym typeface="Arial"/>
         </a:defRPr>
       </a:lvl2pPr>
-      <a:lvl3pPr lvl="2" marR="0" rtl="0" algn="l">
+      <a:lvl3pPr marR="0" lvl="2" algn="l" rtl="0">
         <a:lnSpc>
           <a:spcPct val="100000"/>
         </a:lnSpc>
@@ -15147,7 +15410,7 @@
           <a:srgbClr val="000000"/>
         </a:buClr>
         <a:buFont typeface="Arial"/>
-        <a:defRPr b="0" i="0" sz="1400" u="none" cap="none" strike="noStrike">
+        <a:defRPr sz="1400" b="0" i="0" u="none" strike="noStrike" cap="none">
           <a:solidFill>
             <a:srgbClr val="000000"/>
           </a:solidFill>
@@ -15157,7 +15420,7 @@
           <a:sym typeface="Arial"/>
         </a:defRPr>
       </a:lvl3pPr>
-      <a:lvl4pPr lvl="3" marR="0" rtl="0" algn="l">
+      <a:lvl4pPr marR="0" lvl="3" algn="l" rtl="0">
         <a:lnSpc>
           <a:spcPct val="100000"/>
         </a:lnSpc>
@@ -15171,7 +15434,7 @@
           <a:srgbClr val="000000"/>
         </a:buClr>
         <a:buFont typeface="Arial"/>
-        <a:defRPr b="0" i="0" sz="1400" u="none" cap="none" strike="noStrike">
+        <a:defRPr sz="1400" b="0" i="0" u="none" strike="noStrike" cap="none">
           <a:solidFill>
             <a:srgbClr val="000000"/>
           </a:solidFill>
@@ -15181,7 +15444,7 @@
           <a:sym typeface="Arial"/>
         </a:defRPr>
       </a:lvl4pPr>
-      <a:lvl5pPr lvl="4" marR="0" rtl="0" algn="l">
+      <a:lvl5pPr marR="0" lvl="4" algn="l" rtl="0">
         <a:lnSpc>
           <a:spcPct val="100000"/>
         </a:lnSpc>
@@ -15195,7 +15458,7 @@
           <a:srgbClr val="000000"/>
         </a:buClr>
         <a:buFont typeface="Arial"/>
-        <a:defRPr b="0" i="0" sz="1400" u="none" cap="none" strike="noStrike">
+        <a:defRPr sz="1400" b="0" i="0" u="none" strike="noStrike" cap="none">
           <a:solidFill>
             <a:srgbClr val="000000"/>
           </a:solidFill>
@@ -15205,7 +15468,7 @@
           <a:sym typeface="Arial"/>
         </a:defRPr>
       </a:lvl5pPr>
-      <a:lvl6pPr lvl="5" marR="0" rtl="0" algn="l">
+      <a:lvl6pPr marR="0" lvl="5" algn="l" rtl="0">
         <a:lnSpc>
           <a:spcPct val="100000"/>
         </a:lnSpc>
@@ -15219,7 +15482,7 @@
           <a:srgbClr val="000000"/>
         </a:buClr>
         <a:buFont typeface="Arial"/>
-        <a:defRPr b="0" i="0" sz="1400" u="none" cap="none" strike="noStrike">
+        <a:defRPr sz="1400" b="0" i="0" u="none" strike="noStrike" cap="none">
           <a:solidFill>
             <a:srgbClr val="000000"/>
           </a:solidFill>
@@ -15229,7 +15492,7 @@
           <a:sym typeface="Arial"/>
         </a:defRPr>
       </a:lvl6pPr>
-      <a:lvl7pPr lvl="6" marR="0" rtl="0" algn="l">
+      <a:lvl7pPr marR="0" lvl="6" algn="l" rtl="0">
         <a:lnSpc>
           <a:spcPct val="100000"/>
         </a:lnSpc>
@@ -15243,7 +15506,7 @@
           <a:srgbClr val="000000"/>
         </a:buClr>
         <a:buFont typeface="Arial"/>
-        <a:defRPr b="0" i="0" sz="1400" u="none" cap="none" strike="noStrike">
+        <a:defRPr sz="1400" b="0" i="0" u="none" strike="noStrike" cap="none">
           <a:solidFill>
             <a:srgbClr val="000000"/>
           </a:solidFill>
@@ -15253,7 +15516,7 @@
           <a:sym typeface="Arial"/>
         </a:defRPr>
       </a:lvl7pPr>
-      <a:lvl8pPr lvl="7" marR="0" rtl="0" algn="l">
+      <a:lvl8pPr marR="0" lvl="7" algn="l" rtl="0">
         <a:lnSpc>
           <a:spcPct val="100000"/>
         </a:lnSpc>
@@ -15267,7 +15530,7 @@
           <a:srgbClr val="000000"/>
         </a:buClr>
         <a:buFont typeface="Arial"/>
-        <a:defRPr b="0" i="0" sz="1400" u="none" cap="none" strike="noStrike">
+        <a:defRPr sz="1400" b="0" i="0" u="none" strike="noStrike" cap="none">
           <a:solidFill>
             <a:srgbClr val="000000"/>
           </a:solidFill>
@@ -15277,7 +15540,7 @@
           <a:sym typeface="Arial"/>
         </a:defRPr>
       </a:lvl8pPr>
-      <a:lvl9pPr lvl="8" marR="0" rtl="0" algn="l">
+      <a:lvl9pPr marR="0" lvl="8" algn="l" rtl="0">
         <a:lnSpc>
           <a:spcPct val="100000"/>
         </a:lnSpc>
@@ -15291,7 +15554,7 @@
           <a:srgbClr val="000000"/>
         </a:buClr>
         <a:buFont typeface="Arial"/>
-        <a:defRPr b="0" i="0" sz="1400" u="none" cap="none" strike="noStrike">
+        <a:defRPr sz="1400" b="0" i="0" u="none" strike="noStrike" cap="none">
           <a:solidFill>
             <a:srgbClr val="000000"/>
           </a:solidFill>
@@ -15307,11 +15570,11 @@
 </file>
 
 <file path=ppt/slides/slide1.xml><?xml version="1.0" encoding="utf-8"?>
-<p:sld xmlns:a="http://schemas.openxmlformats.org/drawingml/2006/main" xmlns:r="http://schemas.openxmlformats.org/officeDocument/2006/relationships" xmlns:mc="http://schemas.openxmlformats.org/markup-compatibility/2006" xmlns:mv="urn:schemas-microsoft-com:mac:vml" xmlns:p="http://schemas.openxmlformats.org/presentationml/2006/main" xmlns:c="http://schemas.openxmlformats.org/drawingml/2006/chart" xmlns:dgm="http://schemas.openxmlformats.org/drawingml/2006/diagram" xmlns:o="urn:schemas-microsoft-com:office:office" xmlns:v="urn:schemas-microsoft-com:vml" xmlns:pvml="urn:schemas-microsoft-com:office:powerpoint" xmlns:com="http://schemas.openxmlformats.org/drawingml/2006/compatibility" xmlns:p14="http://schemas.microsoft.com/office/powerpoint/2010/main" xmlns:p15="http://schemas.microsoft.com/office/powerpoint/2012/main" xmlns:ahyp="http://schemas.microsoft.com/office/drawing/2018/hyperlinkcolor">
+<p:sld xmlns:a="http://schemas.openxmlformats.org/drawingml/2006/main" xmlns:r="http://schemas.openxmlformats.org/officeDocument/2006/relationships" xmlns:p="http://schemas.openxmlformats.org/presentationml/2006/main">
   <p:cSld>
     <p:spTree>
       <p:nvGrpSpPr>
-        <p:cNvPr id="83" name="Shape 83"/>
+        <p:cNvPr id="1" name="Shape 83"/>
         <p:cNvGrpSpPr/>
         <p:nvPr/>
       </p:nvGrpSpPr>
@@ -15325,7 +15588,7 @@
       </p:grpSpPr>
       <p:pic>
         <p:nvPicPr>
-          <p:cNvPr descr="DocuSign logo in transparent PNG and vectorized SVG formats" id="84" name="Google Shape;84;p1"/>
+          <p:cNvPr id="84" name="Google Shape;84;p1" descr="DocuSign logo in transparent PNG and vectorized SVG formats"/>
           <p:cNvPicPr preferRelativeResize="0"/>
           <p:nvPr/>
         </p:nvPicPr>
@@ -15333,7 +15596,7 @@
           <a:blip r:embed="rId3">
             <a:alphaModFix/>
           </a:blip>
-          <a:srcRect b="0" l="0" r="0" t="0"/>
+          <a:srcRect/>
           <a:stretch/>
         </p:blipFill>
         <p:spPr>
@@ -15353,7 +15616,9 @@
       <p:sp>
         <p:nvSpPr>
           <p:cNvPr id="85" name="Google Shape;85;p1"/>
-          <p:cNvSpPr txBox="1"/>
+          <p:cNvSpPr txBox="1">
+            <a:spLocks noGrp="1"/>
+          </p:cNvSpPr>
           <p:nvPr>
             <p:ph type="title"/>
           </p:nvPr>
@@ -15372,12 +15637,12 @@
           </a:ln>
         </p:spPr>
         <p:txBody>
-          <a:bodyPr anchorCtr="0" anchor="ctr" bIns="45700" lIns="91425" spcFirstLastPara="1" rIns="91425" wrap="square" tIns="45700">
+          <a:bodyPr spcFirstLastPara="1" wrap="square" lIns="91425" tIns="45700" rIns="91425" bIns="45700" anchor="ctr" anchorCtr="0">
             <a:noAutofit/>
           </a:bodyPr>
           <a:lstStyle/>
           <a:p>
-            <a:pPr indent="0" lvl="0" marL="0" rtl="0" algn="l">
+            <a:pPr marL="0" lvl="0" indent="0" algn="l" rtl="0">
               <a:lnSpc>
                 <a:spcPct val="100000"/>
               </a:lnSpc>
@@ -15417,7 +15682,7 @@
             </a:endParaRPr>
           </a:p>
           <a:p>
-            <a:pPr indent="0" lvl="0" marL="0" rtl="0" algn="l">
+            <a:pPr marL="0" lvl="0" indent="0" algn="l" rtl="0">
               <a:lnSpc>
                 <a:spcPct val="100000"/>
               </a:lnSpc>
@@ -15458,9 +15723,11 @@
       <p:sp>
         <p:nvSpPr>
           <p:cNvPr id="86" name="Google Shape;86;p1"/>
-          <p:cNvSpPr txBox="1"/>
+          <p:cNvSpPr txBox="1">
+            <a:spLocks noGrp="1"/>
+          </p:cNvSpPr>
           <p:nvPr>
-            <p:ph idx="1" type="body"/>
+            <p:ph type="body" idx="1"/>
           </p:nvPr>
         </p:nvSpPr>
         <p:spPr>
@@ -15477,12 +15744,12 @@
           </a:ln>
         </p:spPr>
         <p:txBody>
-          <a:bodyPr anchorCtr="0" anchor="t" bIns="45700" lIns="91425" spcFirstLastPara="1" rIns="91425" wrap="square" tIns="45700">
+          <a:bodyPr spcFirstLastPara="1" wrap="square" lIns="91425" tIns="45700" rIns="91425" bIns="45700" anchor="t" anchorCtr="0">
             <a:normAutofit lnSpcReduction="10000"/>
           </a:bodyPr>
           <a:lstStyle/>
           <a:p>
-            <a:pPr indent="0" lvl="0" marL="0" rtl="0" algn="ctr">
+            <a:pPr marL="0" lvl="0" indent="0" algn="ctr" rtl="0">
               <a:lnSpc>
                 <a:spcPct val="100000"/>
               </a:lnSpc>
@@ -15502,7 +15769,7 @@
             <a:endParaRPr sz="1600"/>
           </a:p>
           <a:p>
-            <a:pPr indent="0" lvl="0" marL="0" rtl="0" algn="ctr">
+            <a:pPr marL="0" lvl="0" indent="0" algn="ctr" rtl="0">
               <a:lnSpc>
                 <a:spcPct val="100000"/>
               </a:lnSpc>
@@ -15532,18 +15799,19 @@
 </file>
 
 <file path=ppt/slides/slide2.xml><?xml version="1.0" encoding="utf-8"?>
-<p:sld xmlns:a="http://schemas.openxmlformats.org/drawingml/2006/main" xmlns:r="http://schemas.openxmlformats.org/officeDocument/2006/relationships" xmlns:mc="http://schemas.openxmlformats.org/markup-compatibility/2006" xmlns:mv="urn:schemas-microsoft-com:mac:vml" xmlns:p="http://schemas.openxmlformats.org/presentationml/2006/main" xmlns:c="http://schemas.openxmlformats.org/drawingml/2006/chart" xmlns:dgm="http://schemas.openxmlformats.org/drawingml/2006/diagram" xmlns:o="urn:schemas-microsoft-com:office:office" xmlns:v="urn:schemas-microsoft-com:vml" xmlns:pvml="urn:schemas-microsoft-com:office:powerpoint" xmlns:com="http://schemas.openxmlformats.org/drawingml/2006/compatibility" xmlns:p14="http://schemas.microsoft.com/office/powerpoint/2010/main" xmlns:p15="http://schemas.microsoft.com/office/powerpoint/2012/main" xmlns:ahyp="http://schemas.microsoft.com/office/drawing/2018/hyperlinkcolor">
+<p:sld xmlns:a="http://schemas.openxmlformats.org/drawingml/2006/main" xmlns:r="http://schemas.openxmlformats.org/officeDocument/2006/relationships" xmlns:p="http://schemas.openxmlformats.org/presentationml/2006/main">
   <p:cSld>
     <p:bg>
       <p:bgPr>
         <a:solidFill>
           <a:schemeClr val="lt1"/>
         </a:solidFill>
+        <a:effectLst/>
       </p:bgPr>
     </p:bg>
     <p:spTree>
       <p:nvGrpSpPr>
-        <p:cNvPr id="90" name="Shape 90"/>
+        <p:cNvPr id="1" name="Shape 90"/>
         <p:cNvGrpSpPr/>
         <p:nvPr/>
       </p:nvGrpSpPr>
@@ -15558,7 +15826,9 @@
       <p:sp>
         <p:nvSpPr>
           <p:cNvPr id="91" name="Google Shape;91;g3c549f4c286_1_0"/>
-          <p:cNvSpPr txBox="1"/>
+          <p:cNvSpPr txBox="1">
+            <a:spLocks noGrp="1"/>
+          </p:cNvSpPr>
           <p:nvPr>
             <p:ph type="title"/>
           </p:nvPr>
@@ -15577,12 +15847,12 @@
           </a:ln>
         </p:spPr>
         <p:txBody>
-          <a:bodyPr anchorCtr="0" anchor="ctr" bIns="45700" lIns="91425" spcFirstLastPara="1" rIns="91425" wrap="square" tIns="45700">
+          <a:bodyPr spcFirstLastPara="1" wrap="square" lIns="91425" tIns="45700" rIns="91425" bIns="45700" anchor="ctr" anchorCtr="0">
             <a:normAutofit/>
           </a:bodyPr>
           <a:lstStyle/>
           <a:p>
-            <a:pPr indent="0" lvl="0" marL="0" rtl="0" algn="ctr">
+            <a:pPr marL="0" lvl="0" indent="0" algn="ctr" rtl="0">
               <a:lnSpc>
                 <a:spcPct val="100000"/>
               </a:lnSpc>
@@ -15614,9 +15884,11 @@
       <p:sp>
         <p:nvSpPr>
           <p:cNvPr id="92" name="Google Shape;92;g3c549f4c286_1_0"/>
-          <p:cNvSpPr txBox="1"/>
+          <p:cNvSpPr txBox="1">
+            <a:spLocks noGrp="1"/>
+          </p:cNvSpPr>
           <p:nvPr>
-            <p:ph idx="1" type="body"/>
+            <p:ph type="body" idx="1"/>
           </p:nvPr>
         </p:nvSpPr>
         <p:spPr>
@@ -15633,12 +15905,12 @@
           </a:ln>
         </p:spPr>
         <p:txBody>
-          <a:bodyPr anchorCtr="0" anchor="t" bIns="45700" lIns="91425" spcFirstLastPara="1" rIns="91425" wrap="square" tIns="45700">
+          <a:bodyPr spcFirstLastPara="1" wrap="square" lIns="91425" tIns="45700" rIns="91425" bIns="45700" anchor="t" anchorCtr="0">
             <a:noAutofit/>
           </a:bodyPr>
           <a:lstStyle/>
           <a:p>
-            <a:pPr indent="0" lvl="0" marL="0" rtl="0" algn="l">
+            <a:pPr marL="0" lvl="0" indent="0" algn="l" rtl="0">
               <a:lnSpc>
                 <a:spcPct val="100000"/>
               </a:lnSpc>
@@ -15651,7 +15923,7 @@
               <a:buNone/>
             </a:pPr>
             <a:r>
-              <a:rPr lang="en-US" sz="2000">
+              <a:rPr lang="en-US" sz="2000" dirty="0">
                 <a:latin typeface="Syne Medium"/>
                 <a:ea typeface="Syne Medium"/>
                 <a:cs typeface="Syne Medium"/>
@@ -15660,17 +15932,17 @@
               <a:t>Objective:</a:t>
             </a:r>
             <a:r>
-              <a:rPr lang="en-US" sz="2000">
+              <a:rPr lang="en-US" sz="2000" dirty="0">
                 <a:solidFill>
                   <a:schemeClr val="dk1"/>
                 </a:solidFill>
               </a:rPr>
               <a:t> Identify and size the top opportunities to improve self-serve customer retention.</a:t>
             </a:r>
-            <a:endParaRPr sz="2000"/>
+            <a:endParaRPr sz="2000" dirty="0"/>
           </a:p>
           <a:p>
-            <a:pPr indent="-228600" lvl="0" marL="457200" rtl="0" algn="l">
+            <a:pPr marL="457200" lvl="0" indent="-228600" algn="l" rtl="0">
               <a:lnSpc>
                 <a:spcPct val="100000"/>
               </a:lnSpc>
@@ -15687,17 +15959,14 @@
               <a:buFont typeface="Arial"/>
               <a:buNone/>
             </a:pPr>
-            <a:r>
-              <a:t/>
-            </a:r>
-            <a:endParaRPr sz="2000">
+            <a:endParaRPr sz="2000" dirty="0">
               <a:solidFill>
                 <a:schemeClr val="dk1"/>
               </a:solidFill>
             </a:endParaRPr>
           </a:p>
           <a:p>
-            <a:pPr indent="-342900" lvl="0" marL="685800" rtl="0" algn="l">
+            <a:pPr marL="685800" lvl="0" indent="-342900" algn="l" rtl="0">
               <a:lnSpc>
                 <a:spcPct val="100000"/>
               </a:lnSpc>
@@ -15715,17 +15984,17 @@
               <a:buChar char="•"/>
             </a:pPr>
             <a:r>
-              <a:rPr lang="en-US" sz="1800">
+              <a:rPr lang="en-US" sz="1800" dirty="0">
                 <a:solidFill>
                   <a:schemeClr val="dk1"/>
                 </a:solidFill>
               </a:rPr>
               <a:t>Data Snapshot: 		Jan 31, 2017</a:t>
             </a:r>
-            <a:endParaRPr sz="1800"/>
+            <a:endParaRPr sz="1800" dirty="0"/>
           </a:p>
           <a:p>
-            <a:pPr indent="-342900" lvl="0" marL="685800" rtl="0" algn="l">
+            <a:pPr marL="685800" lvl="0" indent="-342900" algn="l" rtl="0">
               <a:lnSpc>
                 <a:spcPct val="100000"/>
               </a:lnSpc>
@@ -15743,17 +16012,17 @@
               <a:buChar char="•"/>
             </a:pPr>
             <a:r>
-              <a:rPr lang="en-US" sz="1800">
+              <a:rPr lang="en-US" sz="1800" dirty="0">
                 <a:solidFill>
                   <a:schemeClr val="dk1"/>
                 </a:solidFill>
               </a:rPr>
               <a:t>Accounts analyzed: 		56,062</a:t>
             </a:r>
-            <a:endParaRPr sz="1800"/>
+            <a:endParaRPr sz="1800" dirty="0"/>
           </a:p>
           <a:p>
-            <a:pPr indent="-342900" lvl="0" marL="685800" rtl="0" algn="l">
+            <a:pPr marL="685800" lvl="0" indent="-342900" algn="l" rtl="0">
               <a:lnSpc>
                 <a:spcPct val="100000"/>
               </a:lnSpc>
@@ -15771,17 +16040,17 @@
               <a:buChar char="•"/>
             </a:pPr>
             <a:r>
-              <a:rPr lang="en-US" sz="1800">
+              <a:rPr lang="en-US" sz="1800" dirty="0">
                 <a:solidFill>
                   <a:schemeClr val="dk1"/>
                 </a:solidFill>
               </a:rPr>
-              <a:t>Total ARR: 				$16.1M</a:t>
+              <a:t>Total ARR: 			$16.1M</a:t>
             </a:r>
-            <a:endParaRPr sz="1800"/>
+            <a:endParaRPr sz="1800" dirty="0"/>
           </a:p>
           <a:p>
-            <a:pPr indent="-342900" lvl="0" marL="685800" rtl="0" algn="l">
+            <a:pPr marL="685800" lvl="0" indent="-342900" algn="l" rtl="0">
               <a:lnSpc>
                 <a:spcPct val="100000"/>
               </a:lnSpc>
@@ -15799,17 +16068,17 @@
               <a:buChar char="•"/>
             </a:pPr>
             <a:r>
-              <a:rPr lang="en-US" sz="1800">
+              <a:rPr lang="en-US" sz="1800" dirty="0">
                 <a:solidFill>
                   <a:schemeClr val="dk1"/>
                 </a:solidFill>
               </a:rPr>
               <a:t>Churned accounts: 		15,174 (27%)</a:t>
             </a:r>
-            <a:endParaRPr sz="1800"/>
+            <a:endParaRPr sz="1800" dirty="0"/>
           </a:p>
           <a:p>
-            <a:pPr indent="-342900" lvl="0" marL="685800" rtl="0" algn="l">
+            <a:pPr marL="685800" lvl="0" indent="-342900" algn="l" rtl="0">
               <a:lnSpc>
                 <a:spcPct val="100000"/>
               </a:lnSpc>
@@ -15827,17 +16096,17 @@
               <a:buChar char="•"/>
             </a:pPr>
             <a:r>
-              <a:rPr lang="en-US" sz="1800">
+              <a:rPr lang="en-US" sz="1800" dirty="0">
                 <a:solidFill>
                   <a:schemeClr val="dk1"/>
                 </a:solidFill>
               </a:rPr>
-              <a:t>Churn ARR: 			$4.06M</a:t>
+              <a:t>Churn ARR: 		$4.06M</a:t>
             </a:r>
-            <a:endParaRPr sz="1800"/>
+            <a:endParaRPr sz="1800" dirty="0"/>
           </a:p>
           <a:p>
-            <a:pPr indent="-228600" lvl="0" marL="457200" rtl="0" algn="l">
+            <a:pPr marL="457200" lvl="0" indent="-228600" algn="l" rtl="0">
               <a:lnSpc>
                 <a:spcPct val="100000"/>
               </a:lnSpc>
@@ -15854,17 +16123,14 @@
               <a:buFont typeface="Arial"/>
               <a:buNone/>
             </a:pPr>
-            <a:r>
-              <a:t/>
-            </a:r>
-            <a:endParaRPr sz="2000">
+            <a:endParaRPr sz="2000" dirty="0">
               <a:solidFill>
                 <a:schemeClr val="dk1"/>
               </a:solidFill>
             </a:endParaRPr>
           </a:p>
           <a:p>
-            <a:pPr indent="0" lvl="0" marL="0" rtl="0" algn="l">
+            <a:pPr marL="0" lvl="0" indent="0" algn="l" rtl="0">
               <a:lnSpc>
                 <a:spcPct val="100000"/>
               </a:lnSpc>
@@ -15877,17 +16143,17 @@
               <a:buNone/>
             </a:pPr>
             <a:r>
-              <a:rPr lang="en-US" sz="1800">
+              <a:rPr lang="en-US" sz="1800" dirty="0">
                 <a:solidFill>
                   <a:schemeClr val="dk1"/>
                 </a:solidFill>
               </a:rPr>
               <a:t>Churn splits into:</a:t>
             </a:r>
-            <a:endParaRPr sz="1800"/>
+            <a:endParaRPr sz="1800" dirty="0"/>
           </a:p>
           <a:p>
-            <a:pPr indent="-342900" lvl="0" marL="685800" rtl="0" algn="l">
+            <a:pPr marL="685800" lvl="0" indent="-342900" algn="l" rtl="0">
               <a:lnSpc>
                 <a:spcPct val="100000"/>
               </a:lnSpc>
@@ -15905,7 +16171,7 @@
               <a:buChar char="•"/>
             </a:pPr>
             <a:r>
-              <a:rPr lang="en-US" sz="1800">
+              <a:rPr lang="en-US" sz="1800" dirty="0">
                 <a:solidFill>
                   <a:schemeClr val="dk1"/>
                 </a:solidFill>
@@ -15917,17 +16183,33 @@
               <a:t>Active churn:</a:t>
             </a:r>
             <a:r>
+              <a:rPr lang="en-US" sz="1800" dirty="0">
+                <a:solidFill>
+                  <a:schemeClr val="dk1"/>
+                </a:solidFill>
+              </a:rPr>
+              <a:t> 	</a:t>
+            </a:r>
+            <a:r>
               <a:rPr lang="en-US" sz="1800">
                 <a:solidFill>
                   <a:schemeClr val="dk1"/>
                 </a:solidFill>
               </a:rPr>
-              <a:t> 			$2.33M ARR</a:t>
+              <a:t>	$</a:t>
             </a:r>
-            <a:endParaRPr sz="1800"/>
+            <a:r>
+              <a:rPr lang="en-US" sz="1800" dirty="0">
+                <a:solidFill>
+                  <a:schemeClr val="dk1"/>
+                </a:solidFill>
+              </a:rPr>
+              <a:t>2.33M ARR</a:t>
+            </a:r>
+            <a:endParaRPr sz="1800" dirty="0"/>
           </a:p>
           <a:p>
-            <a:pPr indent="-342900" lvl="0" marL="685800" rtl="0" algn="l">
+            <a:pPr marL="685800" lvl="0" indent="-342900" algn="l" rtl="0">
               <a:lnSpc>
                 <a:spcPct val="100000"/>
               </a:lnSpc>
@@ -15945,7 +16227,7 @@
               <a:buChar char="•"/>
             </a:pPr>
             <a:r>
-              <a:rPr lang="en-US" sz="1800">
+              <a:rPr lang="en-US" sz="1800" dirty="0">
                 <a:solidFill>
                   <a:schemeClr val="dk1"/>
                 </a:solidFill>
@@ -15957,14 +16239,14 @@
               <a:t>Passive churn:</a:t>
             </a:r>
             <a:r>
-              <a:rPr lang="en-US" sz="1800">
+              <a:rPr lang="en-US" sz="1800" dirty="0">
                 <a:solidFill>
                   <a:schemeClr val="dk1"/>
                 </a:solidFill>
               </a:rPr>
               <a:t> 		$1.73M ARR</a:t>
             </a:r>
-            <a:endParaRPr sz="1800"/>
+            <a:endParaRPr sz="1800" dirty="0"/>
           </a:p>
         </p:txBody>
       </p:sp>
@@ -15977,11 +16259,11 @@
 </file>
 
 <file path=ppt/slides/slide3.xml><?xml version="1.0" encoding="utf-8"?>
-<p:sld xmlns:a="http://schemas.openxmlformats.org/drawingml/2006/main" xmlns:r="http://schemas.openxmlformats.org/officeDocument/2006/relationships" xmlns:mc="http://schemas.openxmlformats.org/markup-compatibility/2006" xmlns:mv="urn:schemas-microsoft-com:mac:vml" xmlns:p="http://schemas.openxmlformats.org/presentationml/2006/main" xmlns:c="http://schemas.openxmlformats.org/drawingml/2006/chart" xmlns:dgm="http://schemas.openxmlformats.org/drawingml/2006/diagram" xmlns:o="urn:schemas-microsoft-com:office:office" xmlns:v="urn:schemas-microsoft-com:vml" xmlns:pvml="urn:schemas-microsoft-com:office:powerpoint" xmlns:com="http://schemas.openxmlformats.org/drawingml/2006/compatibility" xmlns:p14="http://schemas.microsoft.com/office/powerpoint/2010/main" xmlns:p15="http://schemas.microsoft.com/office/powerpoint/2012/main" xmlns:ahyp="http://schemas.microsoft.com/office/drawing/2018/hyperlinkcolor">
+<p:sld xmlns:a="http://schemas.openxmlformats.org/drawingml/2006/main" xmlns:r="http://schemas.openxmlformats.org/officeDocument/2006/relationships" xmlns:p="http://schemas.openxmlformats.org/presentationml/2006/main">
   <p:cSld>
     <p:spTree>
       <p:nvGrpSpPr>
-        <p:cNvPr id="96" name="Shape 96"/>
+        <p:cNvPr id="1" name="Shape 96"/>
         <p:cNvGrpSpPr/>
         <p:nvPr/>
       </p:nvGrpSpPr>
@@ -15996,7 +16278,9 @@
       <p:sp>
         <p:nvSpPr>
           <p:cNvPr id="97" name="Google Shape;97;p2"/>
-          <p:cNvSpPr txBox="1"/>
+          <p:cNvSpPr txBox="1">
+            <a:spLocks noGrp="1"/>
+          </p:cNvSpPr>
           <p:nvPr>
             <p:ph type="title"/>
           </p:nvPr>
@@ -16015,12 +16299,12 @@
           </a:ln>
         </p:spPr>
         <p:txBody>
-          <a:bodyPr anchorCtr="0" anchor="ctr" bIns="45700" lIns="91425" spcFirstLastPara="1" rIns="91425" wrap="square" tIns="45700">
+          <a:bodyPr spcFirstLastPara="1" wrap="square" lIns="91425" tIns="45700" rIns="91425" bIns="45700" anchor="ctr" anchorCtr="0">
             <a:normAutofit/>
           </a:bodyPr>
           <a:lstStyle/>
           <a:p>
-            <a:pPr indent="0" lvl="0" marL="0" rtl="0" algn="ctr">
+            <a:pPr marL="0" lvl="0" indent="0" algn="ctr" rtl="0">
               <a:lnSpc>
                 <a:spcPct val="100000"/>
               </a:lnSpc>
@@ -16052,9 +16336,11 @@
       <p:sp>
         <p:nvSpPr>
           <p:cNvPr id="98" name="Google Shape;98;p2"/>
-          <p:cNvSpPr txBox="1"/>
+          <p:cNvSpPr txBox="1">
+            <a:spLocks noGrp="1"/>
+          </p:cNvSpPr>
           <p:nvPr>
-            <p:ph idx="1" type="body"/>
+            <p:ph type="body" idx="1"/>
           </p:nvPr>
         </p:nvSpPr>
         <p:spPr>
@@ -16071,12 +16357,12 @@
           </a:ln>
         </p:spPr>
         <p:txBody>
-          <a:bodyPr anchorCtr="0" anchor="t" bIns="45700" lIns="91425" spcFirstLastPara="1" rIns="91425" wrap="square" tIns="45700">
+          <a:bodyPr spcFirstLastPara="1" wrap="square" lIns="91425" tIns="45700" rIns="91425" bIns="45700" anchor="t" anchorCtr="0">
             <a:normAutofit fontScale="55000" lnSpcReduction="20000"/>
           </a:bodyPr>
           <a:lstStyle/>
           <a:p>
-            <a:pPr indent="0" lvl="0" marL="0" rtl="0" algn="l">
+            <a:pPr marL="0" lvl="0" indent="0" algn="l" rtl="0">
               <a:lnSpc>
                 <a:spcPct val="100000"/>
               </a:lnSpc>
@@ -16095,7 +16381,7 @@
             <a:endParaRPr sz="2800"/>
           </a:p>
           <a:p>
-            <a:pPr indent="-228600" lvl="0" marL="457200" rtl="0" algn="l">
+            <a:pPr marL="457200" lvl="0" indent="-228600" algn="l" rtl="0">
               <a:lnSpc>
                 <a:spcPct val="100000"/>
               </a:lnSpc>
@@ -16109,13 +16395,10 @@
               <a:buFont typeface="Arial"/>
               <a:buNone/>
             </a:pPr>
-            <a:r>
-              <a:t/>
-            </a:r>
             <a:endParaRPr/>
           </a:p>
           <a:p>
-            <a:pPr indent="0" lvl="0" marL="0" rtl="0" algn="l">
+            <a:pPr marL="0" lvl="0" indent="0" algn="l" rtl="0">
               <a:lnSpc>
                 <a:spcPct val="100000"/>
               </a:lnSpc>
@@ -16134,7 +16417,7 @@
             <a:endParaRPr/>
           </a:p>
           <a:p>
-            <a:pPr indent="-291465" lvl="0" marL="685800" rtl="0" algn="l">
+            <a:pPr marL="685800" lvl="0" indent="-291465" algn="l" rtl="0">
               <a:lnSpc>
                 <a:spcPct val="115000"/>
               </a:lnSpc>
@@ -16154,7 +16437,7 @@
             <a:endParaRPr/>
           </a:p>
           <a:p>
-            <a:pPr indent="-291465" lvl="0" marL="685800" rtl="0" algn="l">
+            <a:pPr marL="685800" lvl="0" indent="-291465" algn="l" rtl="0">
               <a:lnSpc>
                 <a:spcPct val="115000"/>
               </a:lnSpc>
@@ -16174,7 +16457,7 @@
             <a:endParaRPr/>
           </a:p>
           <a:p>
-            <a:pPr indent="-291465" lvl="0" marL="685800" rtl="0" algn="l">
+            <a:pPr marL="685800" lvl="0" indent="-291465" algn="l" rtl="0">
               <a:lnSpc>
                 <a:spcPct val="115000"/>
               </a:lnSpc>
@@ -16194,7 +16477,7 @@
             <a:endParaRPr/>
           </a:p>
           <a:p>
-            <a:pPr indent="0" lvl="0" marL="0" rtl="0" algn="l">
+            <a:pPr marL="0" lvl="0" indent="0" algn="l" rtl="0">
               <a:lnSpc>
                 <a:spcPct val="100000"/>
               </a:lnSpc>
@@ -16206,13 +16489,10 @@
               </a:spcAft>
               <a:buNone/>
             </a:pPr>
-            <a:r>
-              <a:t/>
-            </a:r>
             <a:endParaRPr/>
           </a:p>
           <a:p>
-            <a:pPr indent="0" lvl="0" marL="0" rtl="0" algn="l">
+            <a:pPr marL="0" lvl="0" indent="0" algn="l" rtl="0">
               <a:lnSpc>
                 <a:spcPct val="100000"/>
               </a:lnSpc>
@@ -16231,7 +16511,7 @@
             <a:endParaRPr/>
           </a:p>
           <a:p>
-            <a:pPr indent="-291465" lvl="0" marL="685800" rtl="0" algn="l">
+            <a:pPr marL="685800" lvl="0" indent="-291465" algn="l" rtl="0">
               <a:lnSpc>
                 <a:spcPct val="115000"/>
               </a:lnSpc>
@@ -16251,7 +16531,7 @@
             <a:endParaRPr/>
           </a:p>
           <a:p>
-            <a:pPr indent="-291465" lvl="0" marL="685800" rtl="0" algn="l">
+            <a:pPr marL="685800" lvl="0" indent="-291465" algn="l" rtl="0">
               <a:lnSpc>
                 <a:spcPct val="115000"/>
               </a:lnSpc>
@@ -16271,7 +16551,7 @@
             <a:endParaRPr/>
           </a:p>
           <a:p>
-            <a:pPr indent="0" lvl="0" marL="0" rtl="0" algn="l">
+            <a:pPr marL="0" lvl="0" indent="0" algn="l" rtl="0">
               <a:lnSpc>
                 <a:spcPct val="100000"/>
               </a:lnSpc>
@@ -16283,13 +16563,10 @@
               </a:spcAft>
               <a:buNone/>
             </a:pPr>
-            <a:r>
-              <a:t/>
-            </a:r>
             <a:endParaRPr/>
           </a:p>
           <a:p>
-            <a:pPr indent="0" lvl="0" marL="0" rtl="0" algn="l">
+            <a:pPr marL="0" lvl="0" indent="0" algn="l" rtl="0">
               <a:lnSpc>
                 <a:spcPct val="100000"/>
               </a:lnSpc>
@@ -16308,7 +16585,7 @@
             <a:endParaRPr/>
           </a:p>
           <a:p>
-            <a:pPr indent="-291465" lvl="0" marL="685800" rtl="0" algn="l">
+            <a:pPr marL="685800" lvl="0" indent="-291465" algn="l" rtl="0">
               <a:lnSpc>
                 <a:spcPct val="115000"/>
               </a:lnSpc>
@@ -16328,7 +16605,7 @@
             <a:endParaRPr/>
           </a:p>
           <a:p>
-            <a:pPr indent="-291465" lvl="0" marL="685800" rtl="0" algn="l">
+            <a:pPr marL="685800" lvl="0" indent="-291465" algn="l" rtl="0">
               <a:lnSpc>
                 <a:spcPct val="115000"/>
               </a:lnSpc>
@@ -16361,7 +16638,7 @@
         </p:xfrm>
         <a:graphic>
           <a:graphicData uri="http://schemas.openxmlformats.org/drawingml/2006/chart">
-            <c:chart r:id="rId3"/>
+            <c:chart xmlns:c="http://schemas.openxmlformats.org/drawingml/2006/chart" xmlns:r="http://schemas.openxmlformats.org/officeDocument/2006/relationships" r:id="rId3"/>
           </a:graphicData>
         </a:graphic>
       </p:graphicFrame>
@@ -16374,18 +16651,19 @@
 </file>
 
 <file path=ppt/slides/slide4.xml><?xml version="1.0" encoding="utf-8"?>
-<p:sld xmlns:a="http://schemas.openxmlformats.org/drawingml/2006/main" xmlns:r="http://schemas.openxmlformats.org/officeDocument/2006/relationships" xmlns:mc="http://schemas.openxmlformats.org/markup-compatibility/2006" xmlns:mv="urn:schemas-microsoft-com:mac:vml" xmlns:p="http://schemas.openxmlformats.org/presentationml/2006/main" xmlns:c="http://schemas.openxmlformats.org/drawingml/2006/chart" xmlns:dgm="http://schemas.openxmlformats.org/drawingml/2006/diagram" xmlns:o="urn:schemas-microsoft-com:office:office" xmlns:v="urn:schemas-microsoft-com:vml" xmlns:pvml="urn:schemas-microsoft-com:office:powerpoint" xmlns:com="http://schemas.openxmlformats.org/drawingml/2006/compatibility" xmlns:p14="http://schemas.microsoft.com/office/powerpoint/2010/main" xmlns:p15="http://schemas.microsoft.com/office/powerpoint/2012/main" xmlns:ahyp="http://schemas.microsoft.com/office/drawing/2018/hyperlinkcolor">
+<p:sld xmlns:a="http://schemas.openxmlformats.org/drawingml/2006/main" xmlns:r="http://schemas.openxmlformats.org/officeDocument/2006/relationships" xmlns:p="http://schemas.openxmlformats.org/presentationml/2006/main">
   <p:cSld>
     <p:bg>
       <p:bgPr>
         <a:solidFill>
           <a:schemeClr val="lt1"/>
         </a:solidFill>
+        <a:effectLst/>
       </p:bgPr>
     </p:bg>
     <p:spTree>
       <p:nvGrpSpPr>
-        <p:cNvPr id="103" name="Shape 103"/>
+        <p:cNvPr id="1" name="Shape 103"/>
         <p:cNvGrpSpPr/>
         <p:nvPr/>
       </p:nvGrpSpPr>
@@ -16400,7 +16678,9 @@
       <p:sp>
         <p:nvSpPr>
           <p:cNvPr id="104" name="Google Shape;104;p3"/>
-          <p:cNvSpPr txBox="1"/>
+          <p:cNvSpPr txBox="1">
+            <a:spLocks noGrp="1"/>
+          </p:cNvSpPr>
           <p:nvPr>
             <p:ph type="title"/>
           </p:nvPr>
@@ -16419,12 +16699,12 @@
           </a:ln>
         </p:spPr>
         <p:txBody>
-          <a:bodyPr anchorCtr="0" anchor="ctr" bIns="45700" lIns="91425" spcFirstLastPara="1" rIns="91425" wrap="square" tIns="45700">
+          <a:bodyPr spcFirstLastPara="1" wrap="square" lIns="91425" tIns="45700" rIns="91425" bIns="45700" anchor="ctr" anchorCtr="0">
             <a:normAutofit/>
           </a:bodyPr>
           <a:lstStyle/>
           <a:p>
-            <a:pPr indent="0" lvl="0" marL="0" rtl="0" algn="ctr">
+            <a:pPr marL="0" lvl="0" indent="0" algn="ctr" rtl="0">
               <a:lnSpc>
                 <a:spcPct val="100000"/>
               </a:lnSpc>
@@ -16456,9 +16736,11 @@
       <p:sp>
         <p:nvSpPr>
           <p:cNvPr id="105" name="Google Shape;105;p3"/>
-          <p:cNvSpPr txBox="1"/>
+          <p:cNvSpPr txBox="1">
+            <a:spLocks noGrp="1"/>
+          </p:cNvSpPr>
           <p:nvPr>
-            <p:ph idx="1" type="body"/>
+            <p:ph type="body" idx="1"/>
           </p:nvPr>
         </p:nvSpPr>
         <p:spPr>
@@ -16475,12 +16757,12 @@
           </a:ln>
         </p:spPr>
         <p:txBody>
-          <a:bodyPr anchorCtr="0" anchor="t" bIns="45700" lIns="91425" spcFirstLastPara="1" rIns="91425" wrap="square" tIns="45700">
+          <a:bodyPr spcFirstLastPara="1" wrap="square" lIns="91425" tIns="45700" rIns="91425" bIns="45700" anchor="t" anchorCtr="0">
             <a:normAutofit fontScale="47500"/>
           </a:bodyPr>
           <a:lstStyle/>
           <a:p>
-            <a:pPr indent="-282892" lvl="0" marL="685800" rtl="0" algn="l">
+            <a:pPr marL="685800" lvl="0" indent="-282892" algn="l" rtl="0">
               <a:lnSpc>
                 <a:spcPct val="100000"/>
               </a:lnSpc>
@@ -16500,7 +16782,7 @@
             <a:endParaRPr/>
           </a:p>
           <a:p>
-            <a:pPr indent="-282892" lvl="0" marL="685800" rtl="0" algn="l">
+            <a:pPr marL="685800" lvl="0" indent="-282892" algn="l" rtl="0">
               <a:lnSpc>
                 <a:spcPct val="100000"/>
               </a:lnSpc>
@@ -16520,7 +16802,7 @@
             <a:endParaRPr/>
           </a:p>
           <a:p>
-            <a:pPr indent="-282892" lvl="0" marL="685800" rtl="0" algn="l">
+            <a:pPr marL="685800" lvl="0" indent="-282892" algn="l" rtl="0">
               <a:lnSpc>
                 <a:spcPct val="100000"/>
               </a:lnSpc>
@@ -16540,7 +16822,7 @@
             <a:endParaRPr/>
           </a:p>
           <a:p>
-            <a:pPr indent="-228600" lvl="0" marL="457200" rtl="0" algn="l">
+            <a:pPr marL="457200" lvl="0" indent="-228600" algn="l" rtl="0">
               <a:lnSpc>
                 <a:spcPct val="100000"/>
               </a:lnSpc>
@@ -16554,13 +16836,10 @@
               <a:buFont typeface="Arial"/>
               <a:buNone/>
             </a:pPr>
-            <a:r>
-              <a:t/>
-            </a:r>
             <a:endParaRPr/>
           </a:p>
           <a:p>
-            <a:pPr indent="0" lvl="0" marL="0" rtl="0" algn="l">
+            <a:pPr marL="0" lvl="0" indent="0" algn="l" rtl="0">
               <a:lnSpc>
                 <a:spcPct val="100000"/>
               </a:lnSpc>
@@ -16579,7 +16858,7 @@
             <a:endParaRPr/>
           </a:p>
           <a:p>
-            <a:pPr indent="-282892" lvl="0" marL="685800" rtl="0" algn="l">
+            <a:pPr marL="685800" lvl="0" indent="-282892" algn="l" rtl="0">
               <a:lnSpc>
                 <a:spcPct val="100000"/>
               </a:lnSpc>
@@ -16599,7 +16878,7 @@
             <a:endParaRPr/>
           </a:p>
           <a:p>
-            <a:pPr indent="-282892" lvl="0" marL="685800" rtl="0" algn="l">
+            <a:pPr marL="685800" lvl="0" indent="-282892" algn="l" rtl="0">
               <a:lnSpc>
                 <a:spcPct val="100000"/>
               </a:lnSpc>
@@ -16619,7 +16898,7 @@
             <a:endParaRPr/>
           </a:p>
           <a:p>
-            <a:pPr indent="-282892" lvl="0" marL="685800" rtl="0" algn="l">
+            <a:pPr marL="685800" lvl="0" indent="-282892" algn="l" rtl="0">
               <a:lnSpc>
                 <a:spcPct val="100000"/>
               </a:lnSpc>
@@ -16639,7 +16918,7 @@
             <a:endParaRPr/>
           </a:p>
           <a:p>
-            <a:pPr indent="0" lvl="0" marL="0" rtl="0" algn="l">
+            <a:pPr marL="0" lvl="0" indent="0" algn="l" rtl="0">
               <a:lnSpc>
                 <a:spcPct val="100000"/>
               </a:lnSpc>
@@ -16651,13 +16930,10 @@
               </a:spcAft>
               <a:buNone/>
             </a:pPr>
-            <a:r>
-              <a:t/>
-            </a:r>
             <a:endParaRPr/>
           </a:p>
           <a:p>
-            <a:pPr indent="0" lvl="0" marL="0" rtl="0" algn="l">
+            <a:pPr marL="0" lvl="0" indent="0" algn="l" rtl="0">
               <a:lnSpc>
                 <a:spcPct val="100000"/>
               </a:lnSpc>
@@ -16676,7 +16952,7 @@
             <a:endParaRPr/>
           </a:p>
           <a:p>
-            <a:pPr indent="-282892" lvl="0" marL="685800" rtl="0" algn="l">
+            <a:pPr marL="685800" lvl="0" indent="-282892" algn="l" rtl="0">
               <a:lnSpc>
                 <a:spcPct val="100000"/>
               </a:lnSpc>
@@ -16696,7 +16972,7 @@
             <a:endParaRPr/>
           </a:p>
           <a:p>
-            <a:pPr indent="-282892" lvl="0" marL="685800" rtl="0" algn="l">
+            <a:pPr marL="685800" lvl="0" indent="-282892" algn="l" rtl="0">
               <a:lnSpc>
                 <a:spcPct val="100000"/>
               </a:lnSpc>
@@ -16716,7 +16992,7 @@
             <a:endParaRPr/>
           </a:p>
           <a:p>
-            <a:pPr indent="-282892" lvl="0" marL="685800" rtl="0" algn="l">
+            <a:pPr marL="685800" lvl="0" indent="-282892" algn="l" rtl="0">
               <a:lnSpc>
                 <a:spcPct val="100000"/>
               </a:lnSpc>
@@ -16736,7 +17012,7 @@
             <a:endParaRPr/>
           </a:p>
           <a:p>
-            <a:pPr indent="-282892" lvl="0" marL="685800" rtl="0" algn="l">
+            <a:pPr marL="685800" lvl="0" indent="-282892" algn="l" rtl="0">
               <a:lnSpc>
                 <a:spcPct val="100000"/>
               </a:lnSpc>
@@ -16756,7 +17032,7 @@
             <a:endParaRPr/>
           </a:p>
           <a:p>
-            <a:pPr indent="-228600" lvl="0" marL="457200" rtl="0" algn="l">
+            <a:pPr marL="457200" lvl="0" indent="-228600" algn="l" rtl="0">
               <a:lnSpc>
                 <a:spcPct val="100000"/>
               </a:lnSpc>
@@ -16770,13 +17046,10 @@
               <a:buFont typeface="Arial"/>
               <a:buNone/>
             </a:pPr>
-            <a:r>
-              <a:t/>
-            </a:r>
             <a:endParaRPr/>
           </a:p>
           <a:p>
-            <a:pPr indent="0" lvl="0" marL="0" rtl="0" algn="l">
+            <a:pPr marL="0" lvl="0" indent="0" algn="l" rtl="0">
               <a:lnSpc>
                 <a:spcPct val="100000"/>
               </a:lnSpc>
@@ -16834,11 +17107,11 @@
 </file>
 
 <file path=ppt/slides/slide5.xml><?xml version="1.0" encoding="utf-8"?>
-<p:sld xmlns:a="http://schemas.openxmlformats.org/drawingml/2006/main" xmlns:r="http://schemas.openxmlformats.org/officeDocument/2006/relationships" xmlns:mc="http://schemas.openxmlformats.org/markup-compatibility/2006" xmlns:mv="urn:schemas-microsoft-com:mac:vml" xmlns:p="http://schemas.openxmlformats.org/presentationml/2006/main" xmlns:c="http://schemas.openxmlformats.org/drawingml/2006/chart" xmlns:dgm="http://schemas.openxmlformats.org/drawingml/2006/diagram" xmlns:o="urn:schemas-microsoft-com:office:office" xmlns:v="urn:schemas-microsoft-com:vml" xmlns:pvml="urn:schemas-microsoft-com:office:powerpoint" xmlns:com="http://schemas.openxmlformats.org/drawingml/2006/compatibility" xmlns:p14="http://schemas.microsoft.com/office/powerpoint/2010/main" xmlns:p15="http://schemas.microsoft.com/office/powerpoint/2012/main" xmlns:ahyp="http://schemas.microsoft.com/office/drawing/2018/hyperlinkcolor">
+<p:sld xmlns:a="http://schemas.openxmlformats.org/drawingml/2006/main" xmlns:r="http://schemas.openxmlformats.org/officeDocument/2006/relationships" xmlns:p="http://schemas.openxmlformats.org/presentationml/2006/main">
   <p:cSld>
     <p:spTree>
       <p:nvGrpSpPr>
-        <p:cNvPr id="109" name="Shape 109"/>
+        <p:cNvPr id="1" name="Shape 109"/>
         <p:cNvGrpSpPr/>
         <p:nvPr/>
       </p:nvGrpSpPr>
@@ -16853,7 +17126,9 @@
       <p:sp>
         <p:nvSpPr>
           <p:cNvPr id="110" name="Google Shape;110;p4"/>
-          <p:cNvSpPr txBox="1"/>
+          <p:cNvSpPr txBox="1">
+            <a:spLocks noGrp="1"/>
+          </p:cNvSpPr>
           <p:nvPr>
             <p:ph type="title"/>
           </p:nvPr>
@@ -16872,12 +17147,12 @@
           </a:ln>
         </p:spPr>
         <p:txBody>
-          <a:bodyPr anchorCtr="0" anchor="ctr" bIns="45700" lIns="91425" spcFirstLastPara="1" rIns="91425" wrap="square" tIns="45700">
+          <a:bodyPr spcFirstLastPara="1" wrap="square" lIns="91425" tIns="45700" rIns="91425" bIns="45700" anchor="ctr" anchorCtr="0">
             <a:normAutofit/>
           </a:bodyPr>
           <a:lstStyle/>
           <a:p>
-            <a:pPr indent="0" lvl="0" marL="0" rtl="0" algn="ctr">
+            <a:pPr marL="0" lvl="0" indent="0" algn="ctr" rtl="0">
               <a:lnSpc>
                 <a:spcPct val="100000"/>
               </a:lnSpc>
@@ -16909,9 +17184,11 @@
       <p:sp>
         <p:nvSpPr>
           <p:cNvPr id="111" name="Google Shape;111;p4"/>
-          <p:cNvSpPr txBox="1"/>
+          <p:cNvSpPr txBox="1">
+            <a:spLocks noGrp="1"/>
+          </p:cNvSpPr>
           <p:nvPr>
-            <p:ph idx="1" type="body"/>
+            <p:ph type="body" idx="1"/>
           </p:nvPr>
         </p:nvSpPr>
         <p:spPr>
@@ -16928,12 +17205,12 @@
           </a:ln>
         </p:spPr>
         <p:txBody>
-          <a:bodyPr anchorCtr="0" anchor="t" bIns="45700" lIns="91425" spcFirstLastPara="1" rIns="91425" wrap="square" tIns="45700">
+          <a:bodyPr spcFirstLastPara="1" wrap="square" lIns="91425" tIns="45700" rIns="91425" bIns="45700" anchor="t" anchorCtr="0">
             <a:normAutofit fontScale="55000" lnSpcReduction="10000"/>
           </a:bodyPr>
           <a:lstStyle/>
           <a:p>
-            <a:pPr indent="-291465" lvl="0" marL="685800" rtl="0" algn="l">
+            <a:pPr marL="685800" lvl="0" indent="-291465" algn="l" rtl="0">
               <a:lnSpc>
                 <a:spcPct val="100000"/>
               </a:lnSpc>
@@ -16953,7 +17230,7 @@
             <a:endParaRPr/>
           </a:p>
           <a:p>
-            <a:pPr indent="-291465" lvl="0" marL="685800" rtl="0" algn="l">
+            <a:pPr marL="685800" lvl="0" indent="-291465" algn="l" rtl="0">
               <a:lnSpc>
                 <a:spcPct val="100000"/>
               </a:lnSpc>
@@ -16973,7 +17250,7 @@
             <a:endParaRPr/>
           </a:p>
           <a:p>
-            <a:pPr indent="-228600" lvl="0" marL="457200" rtl="0" algn="l">
+            <a:pPr marL="457200" lvl="0" indent="-228600" algn="l" rtl="0">
               <a:lnSpc>
                 <a:spcPct val="100000"/>
               </a:lnSpc>
@@ -16987,13 +17264,10 @@
               <a:buFont typeface="Arial"/>
               <a:buNone/>
             </a:pPr>
-            <a:r>
-              <a:t/>
-            </a:r>
             <a:endParaRPr/>
           </a:p>
           <a:p>
-            <a:pPr indent="0" lvl="0" marL="0" rtl="0" algn="l">
+            <a:pPr marL="0" lvl="0" indent="0" algn="l" rtl="0">
               <a:lnSpc>
                 <a:spcPct val="100000"/>
               </a:lnSpc>
@@ -17012,7 +17286,7 @@
             <a:endParaRPr/>
           </a:p>
           <a:p>
-            <a:pPr indent="-291465" lvl="0" marL="685800" rtl="0" algn="l">
+            <a:pPr marL="685800" lvl="0" indent="-291465" algn="l" rtl="0">
               <a:lnSpc>
                 <a:spcPct val="100000"/>
               </a:lnSpc>
@@ -17032,7 +17306,7 @@
             <a:endParaRPr/>
           </a:p>
           <a:p>
-            <a:pPr indent="-291465" lvl="0" marL="685800" rtl="0" algn="l">
+            <a:pPr marL="685800" lvl="0" indent="-291465" algn="l" rtl="0">
               <a:lnSpc>
                 <a:spcPct val="100000"/>
               </a:lnSpc>
@@ -17052,7 +17326,7 @@
             <a:endParaRPr/>
           </a:p>
           <a:p>
-            <a:pPr indent="-228600" lvl="0" marL="457200" rtl="0" algn="l">
+            <a:pPr marL="457200" lvl="0" indent="-228600" algn="l" rtl="0">
               <a:lnSpc>
                 <a:spcPct val="100000"/>
               </a:lnSpc>
@@ -17066,13 +17340,10 @@
               <a:buFont typeface="Arial"/>
               <a:buNone/>
             </a:pPr>
-            <a:r>
-              <a:t/>
-            </a:r>
             <a:endParaRPr/>
           </a:p>
           <a:p>
-            <a:pPr indent="0" lvl="0" marL="0" rtl="0" algn="l">
+            <a:pPr marL="0" lvl="0" indent="0" algn="l" rtl="0">
               <a:lnSpc>
                 <a:spcPct val="100000"/>
               </a:lnSpc>
@@ -17091,7 +17362,7 @@
             <a:endParaRPr/>
           </a:p>
           <a:p>
-            <a:pPr indent="-291465" lvl="0" marL="685800" rtl="0" algn="l">
+            <a:pPr marL="685800" lvl="0" indent="-291465" algn="l" rtl="0">
               <a:lnSpc>
                 <a:spcPct val="100000"/>
               </a:lnSpc>
@@ -17111,7 +17382,7 @@
             <a:endParaRPr/>
           </a:p>
           <a:p>
-            <a:pPr indent="-291465" lvl="0" marL="685800" rtl="0" algn="l">
+            <a:pPr marL="685800" lvl="0" indent="-291465" algn="l" rtl="0">
               <a:lnSpc>
                 <a:spcPct val="100000"/>
               </a:lnSpc>
@@ -17131,7 +17402,7 @@
             <a:endParaRPr/>
           </a:p>
           <a:p>
-            <a:pPr indent="-291465" lvl="0" marL="685800" rtl="0" algn="l">
+            <a:pPr marL="685800" lvl="0" indent="-291465" algn="l" rtl="0">
               <a:lnSpc>
                 <a:spcPct val="100000"/>
               </a:lnSpc>
@@ -17151,7 +17422,7 @@
             <a:endParaRPr/>
           </a:p>
           <a:p>
-            <a:pPr indent="-291465" lvl="0" marL="685800" rtl="0" algn="l">
+            <a:pPr marL="685800" lvl="0" indent="-291465" algn="l" rtl="0">
               <a:lnSpc>
                 <a:spcPct val="100000"/>
               </a:lnSpc>
@@ -17171,7 +17442,7 @@
             <a:endParaRPr/>
           </a:p>
           <a:p>
-            <a:pPr indent="0" lvl="0" marL="914400" rtl="0" algn="l">
+            <a:pPr marL="914400" lvl="0" indent="0" algn="l" rtl="0">
               <a:lnSpc>
                 <a:spcPct val="100000"/>
               </a:lnSpc>
@@ -17183,13 +17454,10 @@
               </a:spcAft>
               <a:buNone/>
             </a:pPr>
-            <a:r>
-              <a:t/>
-            </a:r>
             <a:endParaRPr/>
           </a:p>
           <a:p>
-            <a:pPr indent="0" lvl="0" marL="0" rtl="0" algn="l">
+            <a:pPr marL="0" lvl="0" indent="0" algn="l" rtl="0">
               <a:lnSpc>
                 <a:spcPct val="100000"/>
               </a:lnSpc>
@@ -17247,11 +17515,11 @@
 </file>
 
 <file path=ppt/slides/slide6.xml><?xml version="1.0" encoding="utf-8"?>
-<p:sld xmlns:a="http://schemas.openxmlformats.org/drawingml/2006/main" xmlns:r="http://schemas.openxmlformats.org/officeDocument/2006/relationships" xmlns:mc="http://schemas.openxmlformats.org/markup-compatibility/2006" xmlns:mv="urn:schemas-microsoft-com:mac:vml" xmlns:p="http://schemas.openxmlformats.org/presentationml/2006/main" xmlns:c="http://schemas.openxmlformats.org/drawingml/2006/chart" xmlns:dgm="http://schemas.openxmlformats.org/drawingml/2006/diagram" xmlns:o="urn:schemas-microsoft-com:office:office" xmlns:v="urn:schemas-microsoft-com:vml" xmlns:pvml="urn:schemas-microsoft-com:office:powerpoint" xmlns:com="http://schemas.openxmlformats.org/drawingml/2006/compatibility" xmlns:p14="http://schemas.microsoft.com/office/powerpoint/2010/main" xmlns:p15="http://schemas.microsoft.com/office/powerpoint/2012/main" xmlns:ahyp="http://schemas.microsoft.com/office/drawing/2018/hyperlinkcolor">
+<p:sld xmlns:a="http://schemas.openxmlformats.org/drawingml/2006/main" xmlns:r="http://schemas.openxmlformats.org/officeDocument/2006/relationships" xmlns:p="http://schemas.openxmlformats.org/presentationml/2006/main">
   <p:cSld>
     <p:spTree>
       <p:nvGrpSpPr>
-        <p:cNvPr id="115" name="Shape 115"/>
+        <p:cNvPr id="1" name="Shape 115"/>
         <p:cNvGrpSpPr/>
         <p:nvPr/>
       </p:nvGrpSpPr>
@@ -17266,7 +17534,9 @@
       <p:sp>
         <p:nvSpPr>
           <p:cNvPr id="116" name="Google Shape;116;p5"/>
-          <p:cNvSpPr txBox="1"/>
+          <p:cNvSpPr txBox="1">
+            <a:spLocks noGrp="1"/>
+          </p:cNvSpPr>
           <p:nvPr>
             <p:ph type="title"/>
           </p:nvPr>
@@ -17285,12 +17555,12 @@
           </a:ln>
         </p:spPr>
         <p:txBody>
-          <a:bodyPr anchorCtr="0" anchor="ctr" bIns="45700" lIns="91425" spcFirstLastPara="1" rIns="91425" wrap="square" tIns="45700">
+          <a:bodyPr spcFirstLastPara="1" wrap="square" lIns="91425" tIns="45700" rIns="91425" bIns="45700" anchor="ctr" anchorCtr="0">
             <a:normAutofit/>
           </a:bodyPr>
           <a:lstStyle/>
           <a:p>
-            <a:pPr indent="0" lvl="0" marL="0" rtl="0" algn="ctr">
+            <a:pPr marL="0" lvl="0" indent="0" algn="ctr" rtl="0">
               <a:lnSpc>
                 <a:spcPct val="100000"/>
               </a:lnSpc>
@@ -17322,9 +17592,11 @@
       <p:sp>
         <p:nvSpPr>
           <p:cNvPr id="117" name="Google Shape;117;p5"/>
-          <p:cNvSpPr txBox="1"/>
+          <p:cNvSpPr txBox="1">
+            <a:spLocks noGrp="1"/>
+          </p:cNvSpPr>
           <p:nvPr>
-            <p:ph idx="1" type="body"/>
+            <p:ph type="body" idx="1"/>
           </p:nvPr>
         </p:nvSpPr>
         <p:spPr>
@@ -17341,12 +17613,12 @@
           </a:ln>
         </p:spPr>
         <p:txBody>
-          <a:bodyPr anchorCtr="0" anchor="t" bIns="45700" lIns="91425" spcFirstLastPara="1" rIns="91425" wrap="square" tIns="45700">
+          <a:bodyPr spcFirstLastPara="1" wrap="square" lIns="91425" tIns="45700" rIns="91425" bIns="45700" anchor="t" anchorCtr="0">
             <a:normAutofit fontScale="47500" lnSpcReduction="20000"/>
           </a:bodyPr>
           <a:lstStyle/>
           <a:p>
-            <a:pPr indent="0" lvl="0" marL="0" rtl="0" algn="l">
+            <a:pPr marL="0" lvl="0" indent="0" algn="l" rtl="0">
               <a:lnSpc>
                 <a:spcPct val="100000"/>
               </a:lnSpc>
@@ -17365,7 +17637,7 @@
             <a:endParaRPr/>
           </a:p>
           <a:p>
-            <a:pPr indent="0" lvl="0" marL="0" rtl="0" algn="l">
+            <a:pPr marL="0" lvl="0" indent="0" algn="l" rtl="0">
               <a:lnSpc>
                 <a:spcPct val="100000"/>
               </a:lnSpc>
@@ -17377,13 +17649,10 @@
               </a:spcAft>
               <a:buNone/>
             </a:pPr>
-            <a:r>
-              <a:t/>
-            </a:r>
             <a:endParaRPr/>
           </a:p>
           <a:p>
-            <a:pPr indent="0" lvl="0" marL="0" rtl="0" algn="l">
+            <a:pPr marL="0" lvl="0" indent="0" algn="l" rtl="0">
               <a:lnSpc>
                 <a:spcPct val="100000"/>
               </a:lnSpc>
@@ -17397,15 +17666,7 @@
             </a:pPr>
             <a:r>
               <a:rPr lang="en-US"/>
-              <a:t>  </a:t>
-            </a:r>
-            <a:r>
-              <a:rPr lang="en-US"/>
-              <a:t>1.    </a:t>
-            </a:r>
-            <a:r>
-              <a:rPr lang="en-US"/>
-              <a:t>Passive churn recovery — </a:t>
+              <a:t>  1.    Passive churn recovery — </a:t>
             </a:r>
             <a:r>
               <a:rPr lang="en-US">
@@ -17422,7 +17683,7 @@
             </a:endParaRPr>
           </a:p>
           <a:p>
-            <a:pPr indent="-276542" lvl="0" marL="628650" rtl="0" algn="l">
+            <a:pPr marL="628650" lvl="0" indent="-276542" algn="l" rtl="0">
               <a:lnSpc>
                 <a:spcPct val="115000"/>
               </a:lnSpc>
@@ -17442,7 +17703,7 @@
             <a:endParaRPr sz="2989"/>
           </a:p>
           <a:p>
-            <a:pPr indent="-276542" lvl="0" marL="628650" rtl="0" algn="l">
+            <a:pPr marL="628650" lvl="0" indent="-276542" algn="l" rtl="0">
               <a:lnSpc>
                 <a:spcPct val="115000"/>
               </a:lnSpc>
@@ -17462,7 +17723,7 @@
             <a:endParaRPr sz="2989"/>
           </a:p>
           <a:p>
-            <a:pPr indent="-228600" lvl="0" marL="628650" rtl="0" algn="l">
+            <a:pPr marL="628650" lvl="0" indent="-228600" algn="l" rtl="0">
               <a:lnSpc>
                 <a:spcPct val="100000"/>
               </a:lnSpc>
@@ -17474,13 +17735,10 @@
               </a:spcAft>
               <a:buNone/>
             </a:pPr>
-            <a:r>
-              <a:t/>
-            </a:r>
             <a:endParaRPr/>
           </a:p>
           <a:p>
-            <a:pPr indent="0" lvl="0" marL="0" rtl="0" algn="l">
+            <a:pPr marL="0" lvl="0" indent="0" algn="l" rtl="0">
               <a:lnSpc>
                 <a:spcPct val="100000"/>
               </a:lnSpc>
@@ -17511,7 +17769,7 @@
             </a:endParaRPr>
           </a:p>
           <a:p>
-            <a:pPr indent="-276542" lvl="0" marL="628650" rtl="0" algn="l">
+            <a:pPr marL="628650" lvl="0" indent="-276542" algn="l" rtl="0">
               <a:lnSpc>
                 <a:spcPct val="115000"/>
               </a:lnSpc>
@@ -17531,7 +17789,7 @@
             <a:endParaRPr sz="2989"/>
           </a:p>
           <a:p>
-            <a:pPr indent="-276542" lvl="0" marL="628650" rtl="0" algn="l">
+            <a:pPr marL="628650" lvl="0" indent="-276542" algn="l" rtl="0">
               <a:lnSpc>
                 <a:spcPct val="115000"/>
               </a:lnSpc>
@@ -17551,7 +17809,7 @@
             <a:endParaRPr sz="2989"/>
           </a:p>
           <a:p>
-            <a:pPr indent="0" lvl="0" marL="0" rtl="0" algn="l">
+            <a:pPr marL="0" lvl="0" indent="0" algn="l" rtl="0">
               <a:lnSpc>
                 <a:spcPct val="100000"/>
               </a:lnSpc>
@@ -17563,13 +17821,10 @@
               </a:spcAft>
               <a:buNone/>
             </a:pPr>
-            <a:r>
-              <a:t/>
-            </a:r>
             <a:endParaRPr/>
           </a:p>
           <a:p>
-            <a:pPr indent="0" lvl="0" marL="0" rtl="0" algn="l">
+            <a:pPr marL="0" lvl="0" indent="0" algn="l" rtl="0">
               <a:lnSpc>
                 <a:spcPct val="100000"/>
               </a:lnSpc>
@@ -17600,7 +17855,7 @@
             </a:endParaRPr>
           </a:p>
           <a:p>
-            <a:pPr indent="-276542" lvl="0" marL="628650" rtl="0" algn="l">
+            <a:pPr marL="628650" lvl="0" indent="-276542" algn="l" rtl="0">
               <a:lnSpc>
                 <a:spcPct val="115000"/>
               </a:lnSpc>
@@ -17620,7 +17875,7 @@
             <a:endParaRPr sz="2989"/>
           </a:p>
           <a:p>
-            <a:pPr indent="-276542" lvl="0" marL="628650" rtl="0" algn="l">
+            <a:pPr marL="628650" lvl="0" indent="-276542" algn="l" rtl="0">
               <a:lnSpc>
                 <a:spcPct val="115000"/>
               </a:lnSpc>
@@ -17640,7 +17895,7 @@
             <a:endParaRPr sz="2989"/>
           </a:p>
           <a:p>
-            <a:pPr indent="0" lvl="0" marL="0" rtl="0" algn="l">
+            <a:pPr marL="0" lvl="0" indent="0" algn="l" rtl="0">
               <a:lnSpc>
                 <a:spcPct val="100000"/>
               </a:lnSpc>
@@ -17652,13 +17907,10 @@
               </a:spcAft>
               <a:buNone/>
             </a:pPr>
-            <a:r>
-              <a:t/>
-            </a:r>
             <a:endParaRPr/>
           </a:p>
           <a:p>
-            <a:pPr indent="0" lvl="0" marL="0" rtl="0" algn="l">
+            <a:pPr marL="0" lvl="0" indent="0" algn="l" rtl="0">
               <a:lnSpc>
                 <a:spcPct val="100000"/>
               </a:lnSpc>
@@ -17690,7 +17942,7 @@
         </p:xfrm>
         <a:graphic>
           <a:graphicData uri="http://schemas.openxmlformats.org/drawingml/2006/chart">
-            <c:chart r:id="rId3"/>
+            <c:chart xmlns:c="http://schemas.openxmlformats.org/drawingml/2006/chart" xmlns:r="http://schemas.openxmlformats.org/officeDocument/2006/relationships" r:id="rId3"/>
           </a:graphicData>
         </a:graphic>
       </p:graphicFrame>
@@ -17703,11 +17955,11 @@
 </file>
 
 <file path=ppt/slides/slide7.xml><?xml version="1.0" encoding="utf-8"?>
-<p:sld xmlns:a="http://schemas.openxmlformats.org/drawingml/2006/main" xmlns:r="http://schemas.openxmlformats.org/officeDocument/2006/relationships" xmlns:mc="http://schemas.openxmlformats.org/markup-compatibility/2006" xmlns:mv="urn:schemas-microsoft-com:mac:vml" xmlns:p="http://schemas.openxmlformats.org/presentationml/2006/main" xmlns:c="http://schemas.openxmlformats.org/drawingml/2006/chart" xmlns:dgm="http://schemas.openxmlformats.org/drawingml/2006/diagram" xmlns:o="urn:schemas-microsoft-com:office:office" xmlns:v="urn:schemas-microsoft-com:vml" xmlns:pvml="urn:schemas-microsoft-com:office:powerpoint" xmlns:com="http://schemas.openxmlformats.org/drawingml/2006/compatibility" xmlns:p14="http://schemas.microsoft.com/office/powerpoint/2010/main" xmlns:p15="http://schemas.microsoft.com/office/powerpoint/2012/main" xmlns:ahyp="http://schemas.microsoft.com/office/drawing/2018/hyperlinkcolor">
+<p:sld xmlns:a="http://schemas.openxmlformats.org/drawingml/2006/main" xmlns:r="http://schemas.openxmlformats.org/officeDocument/2006/relationships" xmlns:p="http://schemas.openxmlformats.org/presentationml/2006/main">
   <p:cSld>
     <p:spTree>
       <p:nvGrpSpPr>
-        <p:cNvPr id="122" name="Shape 122"/>
+        <p:cNvPr id="1" name="Shape 122"/>
         <p:cNvGrpSpPr/>
         <p:nvPr/>
       </p:nvGrpSpPr>
@@ -17722,7 +17974,9 @@
       <p:sp>
         <p:nvSpPr>
           <p:cNvPr id="123" name="Google Shape;123;p6"/>
-          <p:cNvSpPr txBox="1"/>
+          <p:cNvSpPr txBox="1">
+            <a:spLocks noGrp="1"/>
+          </p:cNvSpPr>
           <p:nvPr>
             <p:ph type="title"/>
           </p:nvPr>
@@ -17741,12 +17995,12 @@
           </a:ln>
         </p:spPr>
         <p:txBody>
-          <a:bodyPr anchorCtr="0" anchor="ctr" bIns="45700" lIns="91425" spcFirstLastPara="1" rIns="91425" wrap="square" tIns="45700">
+          <a:bodyPr spcFirstLastPara="1" wrap="square" lIns="91425" tIns="45700" rIns="91425" bIns="45700" anchor="ctr" anchorCtr="0">
             <a:normAutofit/>
           </a:bodyPr>
           <a:lstStyle/>
           <a:p>
-            <a:pPr indent="0" lvl="0" marL="0" rtl="0" algn="ctr">
+            <a:pPr marL="0" lvl="0" indent="0" algn="ctr" rtl="0">
               <a:lnSpc>
                 <a:spcPct val="100000"/>
               </a:lnSpc>
@@ -17774,9 +18028,11 @@
       <p:sp>
         <p:nvSpPr>
           <p:cNvPr id="124" name="Google Shape;124;p6"/>
-          <p:cNvSpPr txBox="1"/>
+          <p:cNvSpPr txBox="1">
+            <a:spLocks noGrp="1"/>
+          </p:cNvSpPr>
           <p:nvPr>
-            <p:ph idx="1" type="body"/>
+            <p:ph type="body" idx="1"/>
           </p:nvPr>
         </p:nvSpPr>
         <p:spPr>
@@ -17793,12 +18049,12 @@
           </a:ln>
         </p:spPr>
         <p:txBody>
-          <a:bodyPr anchorCtr="0" anchor="t" bIns="45700" lIns="91425" spcFirstLastPara="1" rIns="91425" wrap="square" tIns="45700">
+          <a:bodyPr spcFirstLastPara="1" wrap="square" lIns="91425" tIns="45700" rIns="91425" bIns="45700" anchor="t" anchorCtr="0">
             <a:normAutofit fontScale="47500" lnSpcReduction="10000"/>
           </a:bodyPr>
           <a:lstStyle/>
           <a:p>
-            <a:pPr indent="0" lvl="0" marL="0" rtl="0" algn="l">
+            <a:pPr marL="0" lvl="0" indent="0" algn="l" rtl="0">
               <a:lnSpc>
                 <a:spcPct val="100000"/>
               </a:lnSpc>
@@ -17817,7 +18073,7 @@
             <a:endParaRPr/>
           </a:p>
           <a:p>
-            <a:pPr indent="-282892" lvl="0" marL="685800" rtl="0" algn="l">
+            <a:pPr marL="685800" lvl="0" indent="-282892" algn="l" rtl="0">
               <a:lnSpc>
                 <a:spcPct val="100000"/>
               </a:lnSpc>
@@ -17837,7 +18093,7 @@
             <a:endParaRPr/>
           </a:p>
           <a:p>
-            <a:pPr indent="-282892" lvl="0" marL="685800" rtl="0" algn="l">
+            <a:pPr marL="685800" lvl="0" indent="-282892" algn="l" rtl="0">
               <a:lnSpc>
                 <a:spcPct val="100000"/>
               </a:lnSpc>
@@ -17857,7 +18113,7 @@
             <a:endParaRPr/>
           </a:p>
           <a:p>
-            <a:pPr indent="-228600" lvl="0" marL="457200" rtl="0" algn="l">
+            <a:pPr marL="457200" lvl="0" indent="-228600" algn="l" rtl="0">
               <a:lnSpc>
                 <a:spcPct val="100000"/>
               </a:lnSpc>
@@ -17871,13 +18127,10 @@
               <a:buFont typeface="Arial"/>
               <a:buNone/>
             </a:pPr>
-            <a:r>
-              <a:t/>
-            </a:r>
             <a:endParaRPr/>
           </a:p>
           <a:p>
-            <a:pPr indent="0" lvl="0" marL="0" rtl="0" algn="l">
+            <a:pPr marL="0" lvl="0" indent="0" algn="l" rtl="0">
               <a:lnSpc>
                 <a:spcPct val="100000"/>
               </a:lnSpc>
@@ -17896,7 +18149,7 @@
             <a:endParaRPr/>
           </a:p>
           <a:p>
-            <a:pPr indent="-282892" lvl="0" marL="685800" rtl="0" algn="l">
+            <a:pPr marL="685800" lvl="0" indent="-282892" algn="l" rtl="0">
               <a:lnSpc>
                 <a:spcPct val="100000"/>
               </a:lnSpc>
@@ -17916,7 +18169,7 @@
             <a:endParaRPr/>
           </a:p>
           <a:p>
-            <a:pPr indent="-228600" lvl="0" marL="457200" rtl="0" algn="l">
+            <a:pPr marL="457200" lvl="0" indent="-228600" algn="l" rtl="0">
               <a:lnSpc>
                 <a:spcPct val="100000"/>
               </a:lnSpc>
@@ -17930,13 +18183,10 @@
               <a:buFont typeface="Arial"/>
               <a:buNone/>
             </a:pPr>
-            <a:r>
-              <a:t/>
-            </a:r>
             <a:endParaRPr/>
           </a:p>
           <a:p>
-            <a:pPr indent="0" lvl="0" marL="0" rtl="0" algn="l">
+            <a:pPr marL="0" lvl="0" indent="0" algn="l" rtl="0">
               <a:lnSpc>
                 <a:spcPct val="100000"/>
               </a:lnSpc>
@@ -17955,7 +18205,7 @@
             <a:endParaRPr/>
           </a:p>
           <a:p>
-            <a:pPr indent="-282892" lvl="0" marL="685800" rtl="0" algn="l">
+            <a:pPr marL="685800" lvl="0" indent="-282892" algn="l" rtl="0">
               <a:lnSpc>
                 <a:spcPct val="100000"/>
               </a:lnSpc>
@@ -17975,7 +18225,7 @@
             <a:endParaRPr/>
           </a:p>
           <a:p>
-            <a:pPr indent="-282892" lvl="0" marL="685800" rtl="0" algn="l">
+            <a:pPr marL="685800" lvl="0" indent="-282892" algn="l" rtl="0">
               <a:lnSpc>
                 <a:spcPct val="100000"/>
               </a:lnSpc>
@@ -17995,7 +18245,7 @@
             <a:endParaRPr/>
           </a:p>
           <a:p>
-            <a:pPr indent="-228600" lvl="0" marL="457200" rtl="0" algn="l">
+            <a:pPr marL="457200" lvl="0" indent="-228600" algn="l" rtl="0">
               <a:lnSpc>
                 <a:spcPct val="100000"/>
               </a:lnSpc>
@@ -18009,13 +18259,10 @@
               <a:buFont typeface="Arial"/>
               <a:buNone/>
             </a:pPr>
-            <a:r>
-              <a:t/>
-            </a:r>
             <a:endParaRPr/>
           </a:p>
           <a:p>
-            <a:pPr indent="0" lvl="0" marL="0" rtl="0" algn="l">
+            <a:pPr marL="0" lvl="0" indent="0" algn="l" rtl="0">
               <a:lnSpc>
                 <a:spcPct val="100000"/>
               </a:lnSpc>
@@ -18034,7 +18281,7 @@
             <a:endParaRPr/>
           </a:p>
           <a:p>
-            <a:pPr indent="-282892" lvl="0" marL="685800" rtl="0" algn="l">
+            <a:pPr marL="685800" lvl="0" indent="-282892" algn="l" rtl="0">
               <a:lnSpc>
                 <a:spcPct val="100000"/>
               </a:lnSpc>
@@ -18054,7 +18301,7 @@
             <a:endParaRPr/>
           </a:p>
           <a:p>
-            <a:pPr indent="-282892" lvl="0" marL="685800" rtl="0" algn="l">
+            <a:pPr marL="685800" lvl="0" indent="-282892" algn="l" rtl="0">
               <a:lnSpc>
                 <a:spcPct val="100000"/>
               </a:lnSpc>
@@ -18074,7 +18321,7 @@
             <a:endParaRPr/>
           </a:p>
           <a:p>
-            <a:pPr indent="0" lvl="0" marL="0" rtl="0" algn="l">
+            <a:pPr marL="0" lvl="0" indent="0" algn="l" rtl="0">
               <a:lnSpc>
                 <a:spcPct val="100000"/>
               </a:lnSpc>
@@ -18086,13 +18333,10 @@
               </a:spcAft>
               <a:buNone/>
             </a:pPr>
-            <a:r>
-              <a:t/>
-            </a:r>
             <a:endParaRPr/>
           </a:p>
           <a:p>
-            <a:pPr indent="0" lvl="0" marL="0" rtl="0" algn="l">
+            <a:pPr marL="0" lvl="0" indent="0" algn="l" rtl="0">
               <a:lnSpc>
                 <a:spcPct val="100000"/>
               </a:lnSpc>
@@ -18111,7 +18355,7 @@
             <a:endParaRPr/>
           </a:p>
           <a:p>
-            <a:pPr indent="-282892" lvl="0" marL="685800" rtl="0" algn="l">
+            <a:pPr marL="685800" lvl="0" indent="-282892" algn="l" rtl="0">
               <a:lnSpc>
                 <a:spcPct val="100000"/>
               </a:lnSpc>
@@ -18131,7 +18375,7 @@
             <a:endParaRPr/>
           </a:p>
           <a:p>
-            <a:pPr indent="-282892" lvl="0" marL="685800" rtl="0" algn="l">
+            <a:pPr marL="685800" lvl="0" indent="-282892" algn="l" rtl="0">
               <a:lnSpc>
                 <a:spcPct val="100000"/>
               </a:lnSpc>
@@ -18161,7 +18405,288 @@
 </file>
 
 <file path=ppt/theme/theme1.xml><?xml version="1.0" encoding="utf-8"?>
-<a:theme xmlns:a="http://schemas.openxmlformats.org/drawingml/2006/main" xmlns:r="http://schemas.openxmlformats.org/officeDocument/2006/relationships">
+<a:theme xmlns:a="http://schemas.openxmlformats.org/drawingml/2006/main" name="Office Theme">
+  <a:themeElements>
+    <a:clrScheme name="Office">
+      <a:dk1>
+        <a:srgbClr val="000000"/>
+      </a:dk1>
+      <a:lt1>
+        <a:srgbClr val="FFFFFF"/>
+      </a:lt1>
+      <a:dk2>
+        <a:srgbClr val="1F497D"/>
+      </a:dk2>
+      <a:lt2>
+        <a:srgbClr val="EEECE1"/>
+      </a:lt2>
+      <a:accent1>
+        <a:srgbClr val="4F81BD"/>
+      </a:accent1>
+      <a:accent2>
+        <a:srgbClr val="C0504D"/>
+      </a:accent2>
+      <a:accent3>
+        <a:srgbClr val="9BBB59"/>
+      </a:accent3>
+      <a:accent4>
+        <a:srgbClr val="8064A2"/>
+      </a:accent4>
+      <a:accent5>
+        <a:srgbClr val="4BACC6"/>
+      </a:accent5>
+      <a:accent6>
+        <a:srgbClr val="F79646"/>
+      </a:accent6>
+      <a:hlink>
+        <a:srgbClr val="0000FF"/>
+      </a:hlink>
+      <a:folHlink>
+        <a:srgbClr val="800080"/>
+      </a:folHlink>
+    </a:clrScheme>
+    <a:fontScheme name="Office">
+      <a:majorFont>
+        <a:latin typeface="Arial"/>
+        <a:ea typeface=""/>
+        <a:cs typeface=""/>
+        <a:font script="Jpan" typeface="ＭＳ Ｐゴシック"/>
+        <a:font script="Hang" typeface="맑은 고딕"/>
+        <a:font script="Hans" typeface="宋体"/>
+        <a:font script="Hant" typeface="新細明體"/>
+        <a:font script="Arab" typeface="Times New Roman"/>
+        <a:font script="Hebr" typeface="Times New Roman"/>
+        <a:font script="Thai" typeface="Angsana New"/>
+        <a:font script="Ethi" typeface="Nyala"/>
+        <a:font script="Beng" typeface="Vrinda"/>
+        <a:font script="Gujr" typeface="Shruti"/>
+        <a:font script="Khmr" typeface="MoolBoran"/>
+        <a:font script="Knda" typeface="Tunga"/>
+        <a:font script="Guru" typeface="Raavi"/>
+        <a:font script="Cans" typeface="Euphemia"/>
+        <a:font script="Cher" typeface="Plantagenet Cherokee"/>
+        <a:font script="Yiii" typeface="Microsoft Yi Baiti"/>
+        <a:font script="Tibt" typeface="Microsoft Himalaya"/>
+        <a:font script="Thaa" typeface="MV Boli"/>
+        <a:font script="Deva" typeface="Mangal"/>
+        <a:font script="Telu" typeface="Gautami"/>
+        <a:font script="Taml" typeface="Latha"/>
+        <a:font script="Syrc" typeface="Estrangelo Edessa"/>
+        <a:font script="Orya" typeface="Kalinga"/>
+        <a:font script="Mlym" typeface="Kartika"/>
+        <a:font script="Laoo" typeface="DokChampa"/>
+        <a:font script="Sinh" typeface="Iskoola Pota"/>
+        <a:font script="Mong" typeface="Mongolian Baiti"/>
+        <a:font script="Viet" typeface="Times New Roman"/>
+        <a:font script="Uigh" typeface="Microsoft Uighur"/>
+        <a:font script="Geor" typeface="Sylfaen"/>
+      </a:majorFont>
+      <a:minorFont>
+        <a:latin typeface="Arial"/>
+        <a:ea typeface=""/>
+        <a:cs typeface=""/>
+        <a:font script="Jpan" typeface="ＭＳ Ｐゴシック"/>
+        <a:font script="Hang" typeface="맑은 고딕"/>
+        <a:font script="Hans" typeface="宋体"/>
+        <a:font script="Hant" typeface="新細明體"/>
+        <a:font script="Arab" typeface="Arial"/>
+        <a:font script="Hebr" typeface="Arial"/>
+        <a:font script="Thai" typeface="Cordia New"/>
+        <a:font script="Ethi" typeface="Nyala"/>
+        <a:font script="Beng" typeface="Vrinda"/>
+        <a:font script="Gujr" typeface="Shruti"/>
+        <a:font script="Khmr" typeface="DaunPenh"/>
+        <a:font script="Knda" typeface="Tunga"/>
+        <a:font script="Guru" typeface="Raavi"/>
+        <a:font script="Cans" typeface="Euphemia"/>
+        <a:font script="Cher" typeface="Plantagenet Cherokee"/>
+        <a:font script="Yiii" typeface="Microsoft Yi Baiti"/>
+        <a:font script="Tibt" typeface="Microsoft Himalaya"/>
+        <a:font script="Thaa" typeface="MV Boli"/>
+        <a:font script="Deva" typeface="Mangal"/>
+        <a:font script="Telu" typeface="Gautami"/>
+        <a:font script="Taml" typeface="Latha"/>
+        <a:font script="Syrc" typeface="Estrangelo Edessa"/>
+        <a:font script="Orya" typeface="Kalinga"/>
+        <a:font script="Mlym" typeface="Kartika"/>
+        <a:font script="Laoo" typeface="DokChampa"/>
+        <a:font script="Sinh" typeface="Iskoola Pota"/>
+        <a:font script="Mong" typeface="Mongolian Baiti"/>
+        <a:font script="Viet" typeface="Arial"/>
+        <a:font script="Uigh" typeface="Microsoft Uighur"/>
+        <a:font script="Geor" typeface="Sylfaen"/>
+      </a:minorFont>
+    </a:fontScheme>
+    <a:fmtScheme name="Office">
+      <a:fillStyleLst>
+        <a:solidFill>
+          <a:schemeClr val="phClr"/>
+        </a:solidFill>
+        <a:gradFill rotWithShape="1">
+          <a:gsLst>
+            <a:gs pos="0">
+              <a:schemeClr val="phClr">
+                <a:tint val="50000"/>
+                <a:satMod val="300000"/>
+              </a:schemeClr>
+            </a:gs>
+            <a:gs pos="35000">
+              <a:schemeClr val="phClr">
+                <a:tint val="37000"/>
+                <a:satMod val="300000"/>
+              </a:schemeClr>
+            </a:gs>
+            <a:gs pos="100000">
+              <a:schemeClr val="phClr">
+                <a:tint val="15000"/>
+                <a:satMod val="350000"/>
+              </a:schemeClr>
+            </a:gs>
+          </a:gsLst>
+          <a:lin ang="16200000" scaled="1"/>
+        </a:gradFill>
+        <a:gradFill rotWithShape="1">
+          <a:gsLst>
+            <a:gs pos="0">
+              <a:schemeClr val="phClr">
+                <a:tint val="100000"/>
+                <a:shade val="100000"/>
+                <a:satMod val="130000"/>
+              </a:schemeClr>
+            </a:gs>
+            <a:gs pos="100000">
+              <a:schemeClr val="phClr">
+                <a:tint val="50000"/>
+                <a:shade val="100000"/>
+                <a:satMod val="350000"/>
+              </a:schemeClr>
+            </a:gs>
+          </a:gsLst>
+          <a:lin ang="16200000" scaled="0"/>
+        </a:gradFill>
+      </a:fillStyleLst>
+      <a:lnStyleLst>
+        <a:ln w="9525" cap="flat" cmpd="sng" algn="ctr">
+          <a:solidFill>
+            <a:schemeClr val="phClr">
+              <a:shade val="95000"/>
+              <a:satMod val="105000"/>
+            </a:schemeClr>
+          </a:solidFill>
+          <a:prstDash val="solid"/>
+        </a:ln>
+        <a:ln w="25400" cap="flat" cmpd="sng" algn="ctr">
+          <a:solidFill>
+            <a:schemeClr val="phClr"/>
+          </a:solidFill>
+          <a:prstDash val="solid"/>
+        </a:ln>
+        <a:ln w="38100" cap="flat" cmpd="sng" algn="ctr">
+          <a:solidFill>
+            <a:schemeClr val="phClr"/>
+          </a:solidFill>
+          <a:prstDash val="solid"/>
+        </a:ln>
+      </a:lnStyleLst>
+      <a:effectStyleLst>
+        <a:effectStyle>
+          <a:effectLst>
+            <a:outerShdw blurRad="40000" dist="20000" dir="5400000" rotWithShape="0">
+              <a:srgbClr val="000000">
+                <a:alpha val="38000"/>
+              </a:srgbClr>
+            </a:outerShdw>
+          </a:effectLst>
+        </a:effectStyle>
+        <a:effectStyle>
+          <a:effectLst>
+            <a:outerShdw blurRad="40000" dist="23000" dir="5400000" rotWithShape="0">
+              <a:srgbClr val="000000">
+                <a:alpha val="35000"/>
+              </a:srgbClr>
+            </a:outerShdw>
+          </a:effectLst>
+        </a:effectStyle>
+        <a:effectStyle>
+          <a:effectLst>
+            <a:outerShdw blurRad="40000" dist="23000" dir="5400000" rotWithShape="0">
+              <a:srgbClr val="000000">
+                <a:alpha val="35000"/>
+              </a:srgbClr>
+            </a:outerShdw>
+          </a:effectLst>
+          <a:scene3d>
+            <a:camera prst="orthographicFront">
+              <a:rot lat="0" lon="0" rev="0"/>
+            </a:camera>
+            <a:lightRig rig="threePt" dir="t">
+              <a:rot lat="0" lon="0" rev="1200000"/>
+            </a:lightRig>
+          </a:scene3d>
+          <a:sp3d>
+            <a:bevelT w="63500" h="25400"/>
+          </a:sp3d>
+        </a:effectStyle>
+      </a:effectStyleLst>
+      <a:bgFillStyleLst>
+        <a:solidFill>
+          <a:schemeClr val="phClr"/>
+        </a:solidFill>
+        <a:gradFill rotWithShape="1">
+          <a:gsLst>
+            <a:gs pos="0">
+              <a:schemeClr val="phClr">
+                <a:tint val="40000"/>
+                <a:satMod val="350000"/>
+              </a:schemeClr>
+            </a:gs>
+            <a:gs pos="40000">
+              <a:schemeClr val="phClr">
+                <a:tint val="45000"/>
+                <a:shade val="99000"/>
+                <a:satMod val="350000"/>
+              </a:schemeClr>
+            </a:gs>
+            <a:gs pos="100000">
+              <a:schemeClr val="phClr">
+                <a:shade val="20000"/>
+                <a:satMod val="255000"/>
+              </a:schemeClr>
+            </a:gs>
+          </a:gsLst>
+          <a:path path="circle">
+            <a:fillToRect l="50000" t="-80000" r="50000" b="180000"/>
+          </a:path>
+        </a:gradFill>
+        <a:gradFill rotWithShape="1">
+          <a:gsLst>
+            <a:gs pos="0">
+              <a:schemeClr val="phClr">
+                <a:tint val="80000"/>
+                <a:satMod val="300000"/>
+              </a:schemeClr>
+            </a:gs>
+            <a:gs pos="100000">
+              <a:schemeClr val="phClr">
+                <a:shade val="30000"/>
+                <a:satMod val="200000"/>
+              </a:schemeClr>
+            </a:gs>
+          </a:gsLst>
+          <a:path path="circle">
+            <a:fillToRect l="50000" t="50000" r="50000" b="50000"/>
+          </a:path>
+        </a:gradFill>
+      </a:bgFillStyleLst>
+    </a:fmtScheme>
+  </a:themeElements>
+  <a:objectDefaults/>
+  <a:extraClrSchemeLst/>
+</a:theme>
+</file>
+
+<file path=ppt/theme/theme2.xml><?xml version="1.0" encoding="utf-8"?>
+<a:theme xmlns:a="http://schemas.openxmlformats.org/drawingml/2006/main">
   <a:themeElements>
     <a:clrScheme name="Default">
       <a:dk1>
@@ -18436,284 +18961,7 @@
       </a:bgFillStyleLst>
     </a:fmtScheme>
   </a:themeElements>
-</a:theme>
-</file>
-
-<file path=ppt/theme/theme2.xml><?xml version="1.0" encoding="utf-8"?>
-<a:theme xmlns:a="http://schemas.openxmlformats.org/drawingml/2006/main" xmlns:r="http://schemas.openxmlformats.org/officeDocument/2006/relationships" name="Office Theme">
-  <a:themeElements>
-    <a:clrScheme name="Office">
-      <a:dk1>
-        <a:srgbClr val="000000"/>
-      </a:dk1>
-      <a:lt1>
-        <a:srgbClr val="FFFFFF"/>
-      </a:lt1>
-      <a:dk2>
-        <a:srgbClr val="1F497D"/>
-      </a:dk2>
-      <a:lt2>
-        <a:srgbClr val="EEECE1"/>
-      </a:lt2>
-      <a:accent1>
-        <a:srgbClr val="4F81BD"/>
-      </a:accent1>
-      <a:accent2>
-        <a:srgbClr val="C0504D"/>
-      </a:accent2>
-      <a:accent3>
-        <a:srgbClr val="9BBB59"/>
-      </a:accent3>
-      <a:accent4>
-        <a:srgbClr val="8064A2"/>
-      </a:accent4>
-      <a:accent5>
-        <a:srgbClr val="4BACC6"/>
-      </a:accent5>
-      <a:accent6>
-        <a:srgbClr val="F79646"/>
-      </a:accent6>
-      <a:hlink>
-        <a:srgbClr val="0000FF"/>
-      </a:hlink>
-      <a:folHlink>
-        <a:srgbClr val="800080"/>
-      </a:folHlink>
-    </a:clrScheme>
-    <a:fontScheme name="Office">
-      <a:majorFont>
-        <a:latin typeface="Arial"/>
-        <a:ea typeface=""/>
-        <a:cs typeface=""/>
-        <a:font script="Jpan" typeface="ＭＳ Ｐゴシック"/>
-        <a:font script="Hang" typeface="맑은 고딕"/>
-        <a:font script="Hans" typeface="宋体"/>
-        <a:font script="Hant" typeface="新細明體"/>
-        <a:font script="Arab" typeface="Times New Roman"/>
-        <a:font script="Hebr" typeface="Times New Roman"/>
-        <a:font script="Thai" typeface="Angsana New"/>
-        <a:font script="Ethi" typeface="Nyala"/>
-        <a:font script="Beng" typeface="Vrinda"/>
-        <a:font script="Gujr" typeface="Shruti"/>
-        <a:font script="Khmr" typeface="MoolBoran"/>
-        <a:font script="Knda" typeface="Tunga"/>
-        <a:font script="Guru" typeface="Raavi"/>
-        <a:font script="Cans" typeface="Euphemia"/>
-        <a:font script="Cher" typeface="Plantagenet Cherokee"/>
-        <a:font script="Yiii" typeface="Microsoft Yi Baiti"/>
-        <a:font script="Tibt" typeface="Microsoft Himalaya"/>
-        <a:font script="Thaa" typeface="MV Boli"/>
-        <a:font script="Deva" typeface="Mangal"/>
-        <a:font script="Telu" typeface="Gautami"/>
-        <a:font script="Taml" typeface="Latha"/>
-        <a:font script="Syrc" typeface="Estrangelo Edessa"/>
-        <a:font script="Orya" typeface="Kalinga"/>
-        <a:font script="Mlym" typeface="Kartika"/>
-        <a:font script="Laoo" typeface="DokChampa"/>
-        <a:font script="Sinh" typeface="Iskoola Pota"/>
-        <a:font script="Mong" typeface="Mongolian Baiti"/>
-        <a:font script="Viet" typeface="Times New Roman"/>
-        <a:font script="Uigh" typeface="Microsoft Uighur"/>
-        <a:font script="Geor" typeface="Sylfaen"/>
-      </a:majorFont>
-      <a:minorFont>
-        <a:latin typeface="Arial"/>
-        <a:ea typeface=""/>
-        <a:cs typeface=""/>
-        <a:font script="Jpan" typeface="ＭＳ Ｐゴシック"/>
-        <a:font script="Hang" typeface="맑은 고딕"/>
-        <a:font script="Hans" typeface="宋体"/>
-        <a:font script="Hant" typeface="新細明體"/>
-        <a:font script="Arab" typeface="Arial"/>
-        <a:font script="Hebr" typeface="Arial"/>
-        <a:font script="Thai" typeface="Cordia New"/>
-        <a:font script="Ethi" typeface="Nyala"/>
-        <a:font script="Beng" typeface="Vrinda"/>
-        <a:font script="Gujr" typeface="Shruti"/>
-        <a:font script="Khmr" typeface="DaunPenh"/>
-        <a:font script="Knda" typeface="Tunga"/>
-        <a:font script="Guru" typeface="Raavi"/>
-        <a:font script="Cans" typeface="Euphemia"/>
-        <a:font script="Cher" typeface="Plantagenet Cherokee"/>
-        <a:font script="Yiii" typeface="Microsoft Yi Baiti"/>
-        <a:font script="Tibt" typeface="Microsoft Himalaya"/>
-        <a:font script="Thaa" typeface="MV Boli"/>
-        <a:font script="Deva" typeface="Mangal"/>
-        <a:font script="Telu" typeface="Gautami"/>
-        <a:font script="Taml" typeface="Latha"/>
-        <a:font script="Syrc" typeface="Estrangelo Edessa"/>
-        <a:font script="Orya" typeface="Kalinga"/>
-        <a:font script="Mlym" typeface="Kartika"/>
-        <a:font script="Laoo" typeface="DokChampa"/>
-        <a:font script="Sinh" typeface="Iskoola Pota"/>
-        <a:font script="Mong" typeface="Mongolian Baiti"/>
-        <a:font script="Viet" typeface="Arial"/>
-        <a:font script="Uigh" typeface="Microsoft Uighur"/>
-        <a:font script="Geor" typeface="Sylfaen"/>
-      </a:minorFont>
-    </a:fontScheme>
-    <a:fmtScheme name="Office">
-      <a:fillStyleLst>
-        <a:solidFill>
-          <a:schemeClr val="phClr"/>
-        </a:solidFill>
-        <a:gradFill rotWithShape="1">
-          <a:gsLst>
-            <a:gs pos="0">
-              <a:schemeClr val="phClr">
-                <a:tint val="50000"/>
-                <a:satMod val="300000"/>
-              </a:schemeClr>
-            </a:gs>
-            <a:gs pos="35000">
-              <a:schemeClr val="phClr">
-                <a:tint val="37000"/>
-                <a:satMod val="300000"/>
-              </a:schemeClr>
-            </a:gs>
-            <a:gs pos="100000">
-              <a:schemeClr val="phClr">
-                <a:tint val="15000"/>
-                <a:satMod val="350000"/>
-              </a:schemeClr>
-            </a:gs>
-          </a:gsLst>
-          <a:lin ang="16200000" scaled="1"/>
-        </a:gradFill>
-        <a:gradFill rotWithShape="1">
-          <a:gsLst>
-            <a:gs pos="0">
-              <a:schemeClr val="phClr">
-                <a:tint val="100000"/>
-                <a:shade val="100000"/>
-                <a:satMod val="130000"/>
-              </a:schemeClr>
-            </a:gs>
-            <a:gs pos="100000">
-              <a:schemeClr val="phClr">
-                <a:tint val="50000"/>
-                <a:shade val="100000"/>
-                <a:satMod val="350000"/>
-              </a:schemeClr>
-            </a:gs>
-          </a:gsLst>
-          <a:lin ang="16200000" scaled="0"/>
-        </a:gradFill>
-      </a:fillStyleLst>
-      <a:lnStyleLst>
-        <a:ln w="9525" cap="flat" cmpd="sng" algn="ctr">
-          <a:solidFill>
-            <a:schemeClr val="phClr">
-              <a:shade val="95000"/>
-              <a:satMod val="105000"/>
-            </a:schemeClr>
-          </a:solidFill>
-          <a:prstDash val="solid"/>
-        </a:ln>
-        <a:ln w="25400" cap="flat" cmpd="sng" algn="ctr">
-          <a:solidFill>
-            <a:schemeClr val="phClr"/>
-          </a:solidFill>
-          <a:prstDash val="solid"/>
-        </a:ln>
-        <a:ln w="38100" cap="flat" cmpd="sng" algn="ctr">
-          <a:solidFill>
-            <a:schemeClr val="phClr"/>
-          </a:solidFill>
-          <a:prstDash val="solid"/>
-        </a:ln>
-      </a:lnStyleLst>
-      <a:effectStyleLst>
-        <a:effectStyle>
-          <a:effectLst>
-            <a:outerShdw blurRad="40000" dist="20000" dir="5400000" rotWithShape="0">
-              <a:srgbClr val="000000">
-                <a:alpha val="38000"/>
-              </a:srgbClr>
-            </a:outerShdw>
-          </a:effectLst>
-        </a:effectStyle>
-        <a:effectStyle>
-          <a:effectLst>
-            <a:outerShdw blurRad="40000" dist="23000" dir="5400000" rotWithShape="0">
-              <a:srgbClr val="000000">
-                <a:alpha val="35000"/>
-              </a:srgbClr>
-            </a:outerShdw>
-          </a:effectLst>
-        </a:effectStyle>
-        <a:effectStyle>
-          <a:effectLst>
-            <a:outerShdw blurRad="40000" dist="23000" dir="5400000" rotWithShape="0">
-              <a:srgbClr val="000000">
-                <a:alpha val="35000"/>
-              </a:srgbClr>
-            </a:outerShdw>
-          </a:effectLst>
-          <a:scene3d>
-            <a:camera prst="orthographicFront">
-              <a:rot lat="0" lon="0" rev="0"/>
-            </a:camera>
-            <a:lightRig rig="threePt" dir="t">
-              <a:rot lat="0" lon="0" rev="1200000"/>
-            </a:lightRig>
-          </a:scene3d>
-          <a:sp3d>
-            <a:bevelT w="63500" h="25400"/>
-          </a:sp3d>
-        </a:effectStyle>
-      </a:effectStyleLst>
-      <a:bgFillStyleLst>
-        <a:solidFill>
-          <a:schemeClr val="phClr"/>
-        </a:solidFill>
-        <a:gradFill rotWithShape="1">
-          <a:gsLst>
-            <a:gs pos="0">
-              <a:schemeClr val="phClr">
-                <a:tint val="40000"/>
-                <a:satMod val="350000"/>
-              </a:schemeClr>
-            </a:gs>
-            <a:gs pos="40000">
-              <a:schemeClr val="phClr">
-                <a:tint val="45000"/>
-                <a:shade val="99000"/>
-                <a:satMod val="350000"/>
-              </a:schemeClr>
-            </a:gs>
-            <a:gs pos="100000">
-              <a:schemeClr val="phClr">
-                <a:shade val="20000"/>
-                <a:satMod val="255000"/>
-              </a:schemeClr>
-            </a:gs>
-          </a:gsLst>
-          <a:path path="circle">
-            <a:fillToRect l="50000" t="-80000" r="50000" b="180000"/>
-          </a:path>
-        </a:gradFill>
-        <a:gradFill rotWithShape="1">
-          <a:gsLst>
-            <a:gs pos="0">
-              <a:schemeClr val="phClr">
-                <a:tint val="80000"/>
-                <a:satMod val="300000"/>
-              </a:schemeClr>
-            </a:gs>
-            <a:gs pos="100000">
-              <a:schemeClr val="phClr">
-                <a:shade val="30000"/>
-                <a:satMod val="200000"/>
-              </a:schemeClr>
-            </a:gs>
-          </a:gsLst>
-          <a:path path="circle">
-            <a:fillToRect l="50000" t="50000" r="50000" b="50000"/>
-          </a:path>
-        </a:gradFill>
-      </a:bgFillStyleLst>
-    </a:fmtScheme>
-  </a:themeElements>
+  <a:objectDefaults/>
+  <a:extraClrSchemeLst/>
 </a:theme>
 </file>